--- a/Grupo7_La_Memoria_de_Pez.pptx
+++ b/Grupo7_La_Memoria_de_Pez.pptx
@@ -3092,7 +3092,7 @@
     <p:bg>
       <p:bgPr>
         <a:solidFill>
-          <a:srgbClr val="0F0C29"/>
+          <a:srgbClr val="FAFAFA"/>
         </a:solidFill>
         <a:effectLst/>
       </p:bgPr>
@@ -3112,8 +3112,8 @@
         </p:nvSpPr>
         <p:spPr>
           <a:xfrm>
-            <a:off x="914400" y="1097280"/>
-            <a:ext cx="10332720" cy="1097280"/>
+            <a:off x="1371600" y="1645920"/>
+            <a:ext cx="9418320" cy="548640"/>
           </a:xfrm>
           <a:prstGeom prst="rect">
             <a:avLst/>
@@ -3126,16 +3126,16 @@
           </a:bodyPr>
           <a:lstStyle/>
           <a:p>
-            <a:pPr algn="ctr">
-              <a:defRPr sz="2800" b="0">
-                <a:solidFill>
-                  <a:srgbClr val="888888"/>
-                </a:solidFill>
-                <a:latin typeface="Calibri"/>
-              </a:defRPr>
-            </a:pPr>
-            <a:r>
-              <a:t>Grupo 7</a:t>
+            <a:pPr algn="l">
+              <a:defRPr sz="2000" b="0">
+                <a:solidFill>
+                  <a:srgbClr val="999999"/>
+                </a:solidFill>
+                <a:latin typeface="Calibri"/>
+              </a:defRPr>
+            </a:pPr>
+            <a:r>
+              <a:t>GRUPO 7</a:t>
             </a:r>
           </a:p>
         </p:txBody>
@@ -3148,8 +3148,8 @@
         </p:nvSpPr>
         <p:spPr>
           <a:xfrm>
-            <a:off x="914400" y="1828800"/>
-            <a:ext cx="10332720" cy="1371600"/>
+            <a:off x="1371600" y="2194560"/>
+            <a:ext cx="9418320" cy="914400"/>
           </a:xfrm>
           <a:prstGeom prst="rect">
             <a:avLst/>
@@ -3162,10 +3162,10 @@
           </a:bodyPr>
           <a:lstStyle/>
           <a:p>
-            <a:pPr algn="ctr">
-              <a:defRPr sz="5400" b="1">
-                <a:solidFill>
-                  <a:srgbClr val="FFFFFF"/>
+            <a:pPr algn="l">
+              <a:defRPr sz="4800" b="1">
+                <a:solidFill>
+                  <a:srgbClr val="1A1A1A"/>
                 </a:solidFill>
                 <a:latin typeface="Calibri"/>
               </a:defRPr>
@@ -3178,14 +3178,57 @@
       </p:sp>
       <p:sp>
         <p:nvSpPr>
-          <p:cNvPr id="4" name="TextBox 3"/>
+          <p:cNvPr id="4" name="Rectangle 3"/>
+          <p:cNvSpPr/>
+          <p:nvPr/>
+        </p:nvSpPr>
+        <p:spPr>
+          <a:xfrm>
+            <a:off x="1371600" y="3200400"/>
+            <a:ext cx="2743200" cy="25400"/>
+          </a:xfrm>
+          <a:prstGeom prst="rect">
+            <a:avLst/>
+          </a:prstGeom>
+          <a:solidFill>
+            <a:srgbClr val="0066CC"/>
+          </a:solidFill>
+          <a:ln>
+            <a:noFill/>
+          </a:ln>
+        </p:spPr>
+        <p:style>
+          <a:lnRef idx="1">
+            <a:schemeClr val="accent1"/>
+          </a:lnRef>
+          <a:fillRef idx="3">
+            <a:schemeClr val="accent1"/>
+          </a:fillRef>
+          <a:effectRef idx="2">
+            <a:schemeClr val="accent1"/>
+          </a:effectRef>
+          <a:fontRef idx="minor">
+            <a:schemeClr val="lt1"/>
+          </a:fontRef>
+        </p:style>
+        <p:txBody>
+          <a:bodyPr rtlCol="0" anchor="ctr"/>
+          <a:lstStyle/>
+          <a:p>
+            <a:pPr algn="ctr"/>
+          </a:p>
+        </p:txBody>
+      </p:sp>
+      <p:sp>
+        <p:nvSpPr>
+          <p:cNvPr id="5" name="TextBox 4"/>
           <p:cNvSpPr txBox="1"/>
           <p:nvPr/>
         </p:nvSpPr>
         <p:spPr>
           <a:xfrm>
-            <a:off x="914400" y="3017520"/>
-            <a:ext cx="10332720" cy="731520"/>
+            <a:off x="1371600" y="3474720"/>
+            <a:ext cx="9418320" cy="457200"/>
           </a:xfrm>
           <a:prstGeom prst="rect">
             <a:avLst/>
@@ -3198,30 +3241,30 @@
           </a:bodyPr>
           <a:lstStyle/>
           <a:p>
-            <a:pPr algn="ctr">
-              <a:defRPr sz="2400" b="0">
-                <a:solidFill>
-                  <a:srgbClr val="88AAFF"/>
-                </a:solidFill>
-                <a:latin typeface="Calibri"/>
-              </a:defRPr>
-            </a:pPr>
-            <a:r>
-              <a:t>Deep Learning Audit  -  El Rescate de HealthTech</a:t>
-            </a:r>
-          </a:p>
-        </p:txBody>
-      </p:sp>
-      <p:sp>
-        <p:nvSpPr>
-          <p:cNvPr id="5" name="TextBox 4"/>
+            <a:pPr algn="l">
+              <a:defRPr sz="2200" b="0">
+                <a:solidFill>
+                  <a:srgbClr val="0066CC"/>
+                </a:solidFill>
+                <a:latin typeface="Calibri"/>
+              </a:defRPr>
+            </a:pPr>
+            <a:r>
+              <a:t>Deep Learning Audit: El Rescate de HealthTech</a:t>
+            </a:r>
+          </a:p>
+        </p:txBody>
+      </p:sp>
+      <p:sp>
+        <p:nvSpPr>
+          <p:cNvPr id="6" name="TextBox 5"/>
           <p:cNvSpPr txBox="1"/>
           <p:nvPr/>
         </p:nvSpPr>
         <p:spPr>
           <a:xfrm>
-            <a:off x="2743200" y="4389120"/>
-            <a:ext cx="6675120" cy="1371600"/>
+            <a:off x="1371600" y="4572000"/>
+            <a:ext cx="9418320" cy="731520"/>
           </a:xfrm>
           <a:prstGeom prst="rect">
             <a:avLst/>
@@ -3234,20 +3277,20 @@
           </a:bodyPr>
           <a:lstStyle/>
           <a:p>
-            <a:pPr algn="ctr">
-              <a:defRPr sz="1600" b="0">
-                <a:solidFill>
-                  <a:srgbClr val="888888"/>
-                </a:solidFill>
-                <a:latin typeface="Calibri"/>
-              </a:defRPr>
-            </a:pPr>
-            <a:r>
-              <a:t>Universidad Privada del Norte - Escuela de Posgrado</a:t>
+            <a:pPr algn="l">
+              <a:defRPr sz="1400" b="0">
+                <a:solidFill>
+                  <a:srgbClr val="999999"/>
+                </a:solidFill>
+                <a:latin typeface="Calibri"/>
+              </a:defRPr>
+            </a:pPr>
+            <a:r>
+              <a:t>Universidad Privada del Norte  |  Escuela de Posgrado</a:t>
             </a:r>
             <a:br/>
             <a:r>
-              <a:t>Modelos de Deep Learning - Sesion N 2</a:t>
+              <a:t>Modelos de Deep Learning  |  Sesion 2</a:t>
             </a:r>
           </a:p>
         </p:txBody>
@@ -3266,7 +3309,7 @@
     <p:bg>
       <p:bgPr>
         <a:solidFill>
-          <a:srgbClr val="1A0000"/>
+          <a:srgbClr val="FAFAFA"/>
         </a:solidFill>
         <a:effectLst/>
       </p:bgPr>
@@ -3286,8 +3329,8 @@
         </p:nvSpPr>
         <p:spPr>
           <a:xfrm>
-            <a:off x="731520" y="365760"/>
-            <a:ext cx="10698480" cy="822960"/>
+            <a:off x="1371600" y="548640"/>
+            <a:ext cx="9418320" cy="640080"/>
           </a:xfrm>
           <a:prstGeom prst="rect">
             <a:avLst/>
@@ -3303,38 +3346,36 @@
             <a:pPr algn="l">
               <a:defRPr sz="4000" b="1">
                 <a:solidFill>
-                  <a:srgbClr val="FF4444"/>
-                </a:solidFill>
-                <a:latin typeface="Calibri"/>
-              </a:defRPr>
-            </a:pPr>
-            <a:r>
-              <a:t>El Sabotaje: Sin Regularizacion</a:t>
-            </a:r>
-          </a:p>
-        </p:txBody>
-      </p:sp>
-      <p:sp>
-        <p:nvSpPr>
-          <p:cNvPr id="3" name="Rounded Rectangle 2"/>
+                  <a:srgbClr val="1A1A1A"/>
+                </a:solidFill>
+                <a:latin typeface="Calibri"/>
+              </a:defRPr>
+            </a:pPr>
+            <a:r>
+              <a:t>El Problema</a:t>
+            </a:r>
+          </a:p>
+        </p:txBody>
+      </p:sp>
+      <p:sp>
+        <p:nvSpPr>
+          <p:cNvPr id="3" name="Rectangle 2"/>
           <p:cNvSpPr/>
           <p:nvPr/>
         </p:nvSpPr>
         <p:spPr>
           <a:xfrm>
-            <a:off x="731520" y="1371600"/>
-            <a:ext cx="5212080" cy="2286000"/>
-          </a:xfrm>
-          <a:prstGeom prst="roundRect">
+            <a:off x="1371600" y="1188720"/>
+            <a:ext cx="1828800" cy="25400"/>
+          </a:xfrm>
+          <a:prstGeom prst="rect">
             <a:avLst/>
           </a:prstGeom>
           <a:solidFill>
-            <a:srgbClr val="2A0505"/>
+            <a:srgbClr val="0066CC"/>
           </a:solidFill>
-          <a:ln w="19050">
-            <a:solidFill>
-              <a:srgbClr val="FF6666"/>
-            </a:solidFill>
+          <a:ln>
+            <a:noFill/>
           </a:ln>
         </p:spPr>
         <p:style>
@@ -3367,8 +3408,8 @@
         </p:nvSpPr>
         <p:spPr>
           <a:xfrm>
-            <a:off x="1005840" y="1554480"/>
-            <a:ext cx="4663440" cy="457200"/>
+            <a:off x="1371600" y="1463040"/>
+            <a:ext cx="9418320" cy="457200"/>
           </a:xfrm>
           <a:prstGeom prst="rect">
             <a:avLst/>
@@ -3382,15 +3423,15 @@
           <a:lstStyle/>
           <a:p>
             <a:pPr algn="l">
-              <a:defRPr sz="2000" b="1">
-                <a:solidFill>
-                  <a:srgbClr val="FF6666"/>
-                </a:solidFill>
-                <a:latin typeface="Calibri"/>
-              </a:defRPr>
-            </a:pPr>
-            <a:r>
-              <a:t>Sintoma Principal</a:t>
+              <a:defRPr sz="1800" b="1">
+                <a:solidFill>
+                  <a:srgbClr val="CC3333"/>
+                </a:solidFill>
+                <a:latin typeface="Calibri"/>
+              </a:defRPr>
+            </a:pPr>
+            <a:r>
+              <a:t>Sabotaje: dataset pequeno sin regularizacion ni weight decay</a:t>
             </a:r>
           </a:p>
         </p:txBody>
@@ -3403,8 +3444,8 @@
         </p:nvSpPr>
         <p:spPr>
           <a:xfrm>
-            <a:off x="1005840" y="2103120"/>
-            <a:ext cx="4663440" cy="1371600"/>
+            <a:off x="1371600" y="2103120"/>
+            <a:ext cx="9418320" cy="4114800"/>
           </a:xfrm>
           <a:prstGeom prst="rect">
             <a:avLst/>
@@ -3417,46 +3458,291 @@
           </a:bodyPr>
           <a:lstStyle/>
           <a:p>
+            <a:pPr>
+              <a:spcBef>
+                <a:spcPts val="800"/>
+              </a:spcBef>
+              <a:spcAft>
+                <a:spcPts val="400"/>
+              </a:spcAft>
+              <a:defRPr sz="1700">
+                <a:solidFill>
+                  <a:srgbClr val="333333"/>
+                </a:solidFill>
+                <a:latin typeface="Calibri"/>
+              </a:defRPr>
+            </a:pPr>
+            <a:r>
+              <a:t>El modelo tiene ~19,000 parametros pero solo 60 muestras de entrenamiento</a:t>
+            </a:r>
+          </a:p>
+          <a:p>
+            <a:pPr>
+              <a:spcBef>
+                <a:spcPts val="800"/>
+              </a:spcBef>
+              <a:spcAft>
+                <a:spcPts val="400"/>
+              </a:spcAft>
+              <a:defRPr sz="1700">
+                <a:solidFill>
+                  <a:srgbClr val="333333"/>
+                </a:solidFill>
+                <a:latin typeface="Calibri"/>
+              </a:defRPr>
+            </a:pPr>
+            <a:r>
+              <a:t>Ratio parametros/muestras: ~300:1  (puede memorizar todo sin esfuerzo)</a:t>
+            </a:r>
+          </a:p>
+          <a:p>
+            <a:pPr>
+              <a:spcBef>
+                <a:spcPts val="800"/>
+              </a:spcBef>
+              <a:spcAft>
+                <a:spcPts val="400"/>
+              </a:spcAft>
+              <a:defRPr sz="1700">
+                <a:solidFill>
+                  <a:srgbClr val="333333"/>
+                </a:solidFill>
+                <a:latin typeface="Calibri"/>
+              </a:defRPr>
+            </a:pPr>
+          </a:p>
+          <a:p>
+            <a:pPr>
+              <a:spcBef>
+                <a:spcPts val="800"/>
+              </a:spcBef>
+              <a:spcAft>
+                <a:spcPts val="400"/>
+              </a:spcAft>
+              <a:defRPr sz="1700">
+                <a:solidFill>
+                  <a:srgbClr val="333333"/>
+                </a:solidFill>
+                <a:latin typeface="Calibri"/>
+              </a:defRPr>
+            </a:pPr>
+            <a:r>
+              <a:t>Lo que falta:</a:t>
+            </a:r>
+          </a:p>
+          <a:p>
+            <a:pPr>
+              <a:spcBef>
+                <a:spcPts val="800"/>
+              </a:spcBef>
+              <a:spcAft>
+                <a:spcPts val="400"/>
+              </a:spcAft>
+              <a:defRPr sz="1700">
+                <a:solidFill>
+                  <a:srgbClr val="333333"/>
+                </a:solidFill>
+                <a:latin typeface="Calibri"/>
+              </a:defRPr>
+            </a:pPr>
+            <a:r>
+              <a:t>    -  No hay Weight Decay (penalizacion L2)</a:t>
+            </a:r>
+          </a:p>
+          <a:p>
+            <a:pPr>
+              <a:spcBef>
+                <a:spcPts val="800"/>
+              </a:spcBef>
+              <a:spcAft>
+                <a:spcPts val="400"/>
+              </a:spcAft>
+              <a:defRPr sz="1700">
+                <a:solidFill>
+                  <a:srgbClr val="333333"/>
+                </a:solidFill>
+                <a:latin typeface="Calibri"/>
+              </a:defRPr>
+            </a:pPr>
+            <a:r>
+              <a:t>    -  No hay Dropout</a:t>
+            </a:r>
+          </a:p>
+          <a:p>
+            <a:pPr>
+              <a:spcBef>
+                <a:spcPts val="800"/>
+              </a:spcBef>
+              <a:spcAft>
+                <a:spcPts val="400"/>
+              </a:spcAft>
+              <a:defRPr sz="1700">
+                <a:solidFill>
+                  <a:srgbClr val="333333"/>
+                </a:solidFill>
+                <a:latin typeface="Calibri"/>
+              </a:defRPr>
+            </a:pPr>
+            <a:r>
+              <a:t>    -  No hay Early Stopping</a:t>
+            </a:r>
+          </a:p>
+          <a:p>
+            <a:pPr>
+              <a:spcBef>
+                <a:spcPts val="800"/>
+              </a:spcBef>
+              <a:spcAft>
+                <a:spcPts val="400"/>
+              </a:spcAft>
+              <a:defRPr sz="1700">
+                <a:solidFill>
+                  <a:srgbClr val="333333"/>
+                </a:solidFill>
+                <a:latin typeface="Calibri"/>
+              </a:defRPr>
+            </a:pPr>
+            <a:r>
+              <a:t>    -  Red sobredimensionada para tan pocos datos</a:t>
+            </a:r>
+          </a:p>
+          <a:p>
+            <a:pPr>
+              <a:spcBef>
+                <a:spcPts val="800"/>
+              </a:spcBef>
+              <a:spcAft>
+                <a:spcPts val="400"/>
+              </a:spcAft>
+              <a:defRPr sz="1700">
+                <a:solidFill>
+                  <a:srgbClr val="333333"/>
+                </a:solidFill>
+                <a:latin typeface="Calibri"/>
+              </a:defRPr>
+            </a:pPr>
+          </a:p>
+          <a:p>
+            <a:pPr>
+              <a:spcBef>
+                <a:spcPts val="800"/>
+              </a:spcBef>
+              <a:spcAft>
+                <a:spcPts val="400"/>
+              </a:spcAft>
+              <a:defRPr sz="1700">
+                <a:solidFill>
+                  <a:srgbClr val="333333"/>
+                </a:solidFill>
+                <a:latin typeface="Calibri"/>
+              </a:defRPr>
+            </a:pPr>
+            <a:r>
+              <a:t>Resultado: el modelo alcanza ~100% en train pero falla en datos nuevos.</a:t>
+            </a:r>
+          </a:p>
+          <a:p>
+            <a:pPr>
+              <a:spcBef>
+                <a:spcPts val="800"/>
+              </a:spcBef>
+              <a:spcAft>
+                <a:spcPts val="400"/>
+              </a:spcAft>
+              <a:defRPr sz="1700">
+                <a:solidFill>
+                  <a:srgbClr val="333333"/>
+                </a:solidFill>
+                <a:latin typeface="Calibri"/>
+              </a:defRPr>
+            </a:pPr>
+            <a:r>
+              <a:t>Ha memorizado cada muestra en vez de aprender patrones.</a:t>
+            </a:r>
+          </a:p>
+        </p:txBody>
+      </p:sp>
+    </p:spTree>
+  </p:cSld>
+  <p:clrMapOvr>
+    <a:masterClrMapping/>
+  </p:clrMapOvr>
+</p:sld>
+</file>
+
+<file path=ppt/slides/slide3.xml><?xml version="1.0" encoding="utf-8"?>
+<p:sld xmlns:a="http://schemas.openxmlformats.org/drawingml/2006/main" xmlns:p="http://schemas.openxmlformats.org/presentationml/2006/main" xmlns:r="http://schemas.openxmlformats.org/officeDocument/2006/relationships">
+  <p:cSld>
+    <p:bg>
+      <p:bgPr>
+        <a:solidFill>
+          <a:srgbClr val="FAFAFA"/>
+        </a:solidFill>
+        <a:effectLst/>
+      </p:bgPr>
+    </p:bg>
+    <p:spTree>
+      <p:nvGrpSpPr>
+        <p:cNvPr id="1" name=""/>
+        <p:cNvGrpSpPr/>
+        <p:nvPr/>
+      </p:nvGrpSpPr>
+      <p:grpSpPr/>
+      <p:sp>
+        <p:nvSpPr>
+          <p:cNvPr id="2" name="TextBox 1"/>
+          <p:cNvSpPr txBox="1"/>
+          <p:nvPr/>
+        </p:nvSpPr>
+        <p:spPr>
+          <a:xfrm>
+            <a:off x="1371600" y="548640"/>
+            <a:ext cx="9418320" cy="640080"/>
+          </a:xfrm>
+          <a:prstGeom prst="rect">
+            <a:avLst/>
+          </a:prstGeom>
+          <a:noFill/>
+        </p:spPr>
+        <p:txBody>
+          <a:bodyPr wrap="square">
+            <a:spAutoFit/>
+          </a:bodyPr>
+          <a:lstStyle/>
+          <a:p>
             <a:pPr algn="l">
-              <a:defRPr sz="1400" b="0">
-                <a:solidFill>
-                  <a:srgbClr val="CCCCCC"/>
-                </a:solidFill>
-                <a:latin typeface="Calibri"/>
-              </a:defRPr>
-            </a:pPr>
-            <a:r>
-              <a:t>El modelo alcanza ~100% accuracy en entrenamiento pero falla en datos nuevos. Ha MEMORIZADO cada muestra en vez de aprender patrones reales.</a:t>
-            </a:r>
-            <a:br/>
-            <a:br/>
-            <a:r>
-              <a:t>"La perdida de train baja a 0, pero la de test sube sin parar."</a:t>
-            </a:r>
-          </a:p>
-        </p:txBody>
-      </p:sp>
-      <p:sp>
-        <p:nvSpPr>
-          <p:cNvPr id="6" name="Rounded Rectangle 5"/>
+              <a:defRPr sz="4000" b="1">
+                <a:solidFill>
+                  <a:srgbClr val="1A1A1A"/>
+                </a:solidFill>
+                <a:latin typeface="Calibri"/>
+              </a:defRPr>
+            </a:pPr>
+            <a:r>
+              <a:t>Diagnostico</a:t>
+            </a:r>
+          </a:p>
+        </p:txBody>
+      </p:sp>
+      <p:sp>
+        <p:nvSpPr>
+          <p:cNvPr id="3" name="Rectangle 2"/>
           <p:cNvSpPr/>
           <p:nvPr/>
         </p:nvSpPr>
         <p:spPr>
           <a:xfrm>
-            <a:off x="6217920" y="1371600"/>
-            <a:ext cx="5212080" cy="2286000"/>
-          </a:xfrm>
-          <a:prstGeom prst="roundRect">
+            <a:off x="1371600" y="1188720"/>
+            <a:ext cx="1828800" cy="25400"/>
+          </a:xfrm>
+          <a:prstGeom prst="rect">
             <a:avLst/>
           </a:prstGeom>
           <a:solidFill>
-            <a:srgbClr val="2A0505"/>
+            <a:srgbClr val="0066CC"/>
           </a:solidFill>
-          <a:ln w="19050">
-            <a:solidFill>
-              <a:srgbClr val="FF6666"/>
-            </a:solidFill>
+          <a:ln>
+            <a:noFill/>
           </a:ln>
         </p:spPr>
         <p:style>
@@ -3483,14 +3769,14 @@
       </p:sp>
       <p:sp>
         <p:nvSpPr>
-          <p:cNvPr id="7" name="TextBox 6"/>
+          <p:cNvPr id="4" name="TextBox 3"/>
           <p:cNvSpPr txBox="1"/>
           <p:nvPr/>
         </p:nvSpPr>
         <p:spPr>
           <a:xfrm>
-            <a:off x="6492240" y="1554480"/>
-            <a:ext cx="4663440" cy="457200"/>
+            <a:off x="1371600" y="1554480"/>
+            <a:ext cx="9418320" cy="5029200"/>
           </a:xfrm>
           <a:prstGeom prst="rect">
             <a:avLst/>
@@ -3503,30 +3789,262 @@
           </a:bodyPr>
           <a:lstStyle/>
           <a:p>
-            <a:pPr algn="l">
-              <a:defRPr sz="2000" b="1">
-                <a:solidFill>
-                  <a:srgbClr val="FF6666"/>
-                </a:solidFill>
-                <a:latin typeface="Calibri"/>
-              </a:defRPr>
-            </a:pPr>
-            <a:r>
-              <a:t>Los Numeros</a:t>
-            </a:r>
-          </a:p>
-        </p:txBody>
-      </p:sp>
-      <p:sp>
-        <p:nvSpPr>
-          <p:cNvPr id="8" name="TextBox 7"/>
+            <a:pPr>
+              <a:spcBef>
+                <a:spcPts val="800"/>
+              </a:spcBef>
+              <a:spcAft>
+                <a:spcPts val="400"/>
+              </a:spcAft>
+              <a:defRPr sz="1700">
+                <a:solidFill>
+                  <a:srgbClr val="333333"/>
+                </a:solidFill>
+                <a:latin typeface="Calibri"/>
+              </a:defRPr>
+            </a:pPr>
+            <a:r>
+              <a:t>Sintoma: Train accuracy ~100%, test accuracy ~65-75%.</a:t>
+            </a:r>
+          </a:p>
+          <a:p>
+            <a:pPr>
+              <a:spcBef>
+                <a:spcPts val="800"/>
+              </a:spcBef>
+              <a:spcAft>
+                <a:spcPts val="400"/>
+              </a:spcAft>
+              <a:defRPr sz="1700">
+                <a:solidFill>
+                  <a:srgbClr val="333333"/>
+                </a:solidFill>
+                <a:latin typeface="Calibri"/>
+              </a:defRPr>
+            </a:pPr>
+            <a:r>
+              <a:t>La perdida de test diverge mientras la de train baja a cero.</a:t>
+            </a:r>
+          </a:p>
+          <a:p>
+            <a:pPr>
+              <a:spcBef>
+                <a:spcPts val="800"/>
+              </a:spcBef>
+              <a:spcAft>
+                <a:spcPts val="400"/>
+              </a:spcAft>
+              <a:defRPr sz="1700">
+                <a:solidFill>
+                  <a:srgbClr val="333333"/>
+                </a:solidFill>
+                <a:latin typeface="Calibri"/>
+              </a:defRPr>
+            </a:pPr>
+          </a:p>
+          <a:p>
+            <a:pPr>
+              <a:spcBef>
+                <a:spcPts val="800"/>
+              </a:spcBef>
+              <a:spcAft>
+                <a:spcPts val="400"/>
+              </a:spcAft>
+              <a:defRPr sz="1700">
+                <a:solidFill>
+                  <a:srgbClr val="333333"/>
+                </a:solidFill>
+                <a:latin typeface="Calibri"/>
+              </a:defRPr>
+            </a:pPr>
+            <a:r>
+              <a:t>Causa raiz: sin regularizacion, los pesos crecen sin control.</a:t>
+            </a:r>
+          </a:p>
+          <a:p>
+            <a:pPr>
+              <a:spcBef>
+                <a:spcPts val="800"/>
+              </a:spcBef>
+              <a:spcAft>
+                <a:spcPts val="400"/>
+              </a:spcAft>
+              <a:defRPr sz="1700">
+                <a:solidFill>
+                  <a:srgbClr val="333333"/>
+                </a:solidFill>
+                <a:latin typeface="Calibri"/>
+              </a:defRPr>
+            </a:pPr>
+            <a:r>
+              <a:t>Con muchos parametros y pocos datos, la red memoriza cada</a:t>
+            </a:r>
+          </a:p>
+          <a:p>
+            <a:pPr>
+              <a:spcBef>
+                <a:spcPts val="800"/>
+              </a:spcBef>
+              <a:spcAft>
+                <a:spcPts val="400"/>
+              </a:spcAft>
+              <a:defRPr sz="1700">
+                <a:solidFill>
+                  <a:srgbClr val="333333"/>
+                </a:solidFill>
+                <a:latin typeface="Calibri"/>
+              </a:defRPr>
+            </a:pPr>
+            <a:r>
+              <a:t>muestra incluyendo el ruido.</a:t>
+            </a:r>
+          </a:p>
+          <a:p>
+            <a:pPr>
+              <a:spcBef>
+                <a:spcPts val="800"/>
+              </a:spcBef>
+              <a:spcAft>
+                <a:spcPts val="400"/>
+              </a:spcAft>
+              <a:defRPr sz="1700">
+                <a:solidFill>
+                  <a:srgbClr val="333333"/>
+                </a:solidFill>
+                <a:latin typeface="Calibri"/>
+              </a:defRPr>
+            </a:pPr>
+          </a:p>
+          <a:p>
+            <a:pPr>
+              <a:spcBef>
+                <a:spcPts val="800"/>
+              </a:spcBef>
+              <a:spcAft>
+                <a:spcPts val="400"/>
+              </a:spcAft>
+              <a:defRPr sz="1700">
+                <a:solidFill>
+                  <a:srgbClr val="333333"/>
+                </a:solidFill>
+                <a:latin typeface="Calibri"/>
+              </a:defRPr>
+            </a:pPr>
+            <a:r>
+              <a:t>Evidencia: los pesos muestran valores grandes y dispersos</a:t>
+            </a:r>
+          </a:p>
+          <a:p>
+            <a:pPr>
+              <a:spcBef>
+                <a:spcPts val="800"/>
+              </a:spcBef>
+              <a:spcAft>
+                <a:spcPts val="400"/>
+              </a:spcAft>
+              <a:defRPr sz="1700">
+                <a:solidFill>
+                  <a:srgbClr val="333333"/>
+                </a:solidFill>
+                <a:latin typeface="Calibri"/>
+              </a:defRPr>
+            </a:pPr>
+            <a:r>
+              <a:t>(alta varianza), codificando ruido en vez de patrones.</a:t>
+            </a:r>
+          </a:p>
+          <a:p>
+            <a:pPr>
+              <a:spcBef>
+                <a:spcPts val="800"/>
+              </a:spcBef>
+              <a:spcAft>
+                <a:spcPts val="400"/>
+              </a:spcAft>
+              <a:defRPr sz="1700">
+                <a:solidFill>
+                  <a:srgbClr val="333333"/>
+                </a:solidFill>
+                <a:latin typeface="Calibri"/>
+              </a:defRPr>
+            </a:pPr>
+          </a:p>
+          <a:p>
+            <a:pPr>
+              <a:spcBef>
+                <a:spcPts val="800"/>
+              </a:spcBef>
+              <a:spcAft>
+                <a:spcPts val="400"/>
+              </a:spcAft>
+              <a:defRPr sz="1700">
+                <a:solidFill>
+                  <a:srgbClr val="333333"/>
+                </a:solidFill>
+                <a:latin typeface="Calibri"/>
+              </a:defRPr>
+            </a:pPr>
+            <a:r>
+              <a:t>Analogia: un estudiante que memoriza las respuestas del examen</a:t>
+            </a:r>
+          </a:p>
+          <a:p>
+            <a:pPr>
+              <a:spcBef>
+                <a:spcPts val="800"/>
+              </a:spcBef>
+              <a:spcAft>
+                <a:spcPts val="400"/>
+              </a:spcAft>
+              <a:defRPr sz="1700">
+                <a:solidFill>
+                  <a:srgbClr val="333333"/>
+                </a:solidFill>
+                <a:latin typeface="Calibri"/>
+              </a:defRPr>
+            </a:pPr>
+            <a:r>
+              <a:t>de practica en vez de aprender la materia.</a:t>
+            </a:r>
+          </a:p>
+        </p:txBody>
+      </p:sp>
+    </p:spTree>
+  </p:cSld>
+  <p:clrMapOvr>
+    <a:masterClrMapping/>
+  </p:clrMapOvr>
+</p:sld>
+</file>
+
+<file path=ppt/slides/slide4.xml><?xml version="1.0" encoding="utf-8"?>
+<p:sld xmlns:a="http://schemas.openxmlformats.org/drawingml/2006/main" xmlns:p="http://schemas.openxmlformats.org/presentationml/2006/main" xmlns:r="http://schemas.openxmlformats.org/officeDocument/2006/relationships">
+  <p:cSld>
+    <p:bg>
+      <p:bgPr>
+        <a:solidFill>
+          <a:srgbClr val="FAFAFA"/>
+        </a:solidFill>
+        <a:effectLst/>
+      </p:bgPr>
+    </p:bg>
+    <p:spTree>
+      <p:nvGrpSpPr>
+        <p:cNvPr id="1" name=""/>
+        <p:cNvGrpSpPr/>
+        <p:nvPr/>
+      </p:nvGrpSpPr>
+      <p:grpSpPr/>
+      <p:sp>
+        <p:nvSpPr>
+          <p:cNvPr id="2" name="TextBox 1"/>
           <p:cNvSpPr txBox="1"/>
           <p:nvPr/>
         </p:nvSpPr>
         <p:spPr>
           <a:xfrm>
-            <a:off x="6492240" y="2103120"/>
-            <a:ext cx="4663440" cy="1371600"/>
+            <a:off x="1371600" y="548640"/>
+            <a:ext cx="9418320" cy="640080"/>
           </a:xfrm>
           <a:prstGeom prst="rect">
             <a:avLst/>
@@ -3540,53 +4058,38 @@
           <a:lstStyle/>
           <a:p>
             <a:pPr algn="l">
-              <a:defRPr sz="1400" b="0">
-                <a:solidFill>
-                  <a:srgbClr val="CCCCCC"/>
-                </a:solidFill>
-                <a:latin typeface="Calibri"/>
-              </a:defRPr>
-            </a:pPr>
-            <a:r>
-              <a:t>~19,000 parametros en el modelo</a:t>
-            </a:r>
-            <a:br/>
-            <a:r>
-              <a:t>60 muestras de entrenamiento (de 100 totales)</a:t>
-            </a:r>
-            <a:br/>
-            <a:r>
-              <a:t>Ratio ~300:1</a:t>
-            </a:r>
-            <a:br/>
-            <a:br/>
-            <a:r>
-              <a:t>El modelo puede memorizar TODO sin esfuerzo</a:t>
-            </a:r>
-          </a:p>
-        </p:txBody>
-      </p:sp>
-      <p:sp>
-        <p:nvSpPr>
-          <p:cNvPr id="9" name="Rounded Rectangle 8"/>
+              <a:defRPr sz="4000" b="1">
+                <a:solidFill>
+                  <a:srgbClr val="1A1A1A"/>
+                </a:solidFill>
+                <a:latin typeface="Calibri"/>
+              </a:defRPr>
+            </a:pPr>
+            <a:r>
+              <a:t>La Correccion</a:t>
+            </a:r>
+          </a:p>
+        </p:txBody>
+      </p:sp>
+      <p:sp>
+        <p:nvSpPr>
+          <p:cNvPr id="3" name="Rectangle 2"/>
           <p:cNvSpPr/>
           <p:nvPr/>
         </p:nvSpPr>
         <p:spPr>
           <a:xfrm>
-            <a:off x="731520" y="3931920"/>
-            <a:ext cx="5212080" cy="2286000"/>
-          </a:xfrm>
-          <a:prstGeom prst="roundRect">
+            <a:off x="1371600" y="1188720"/>
+            <a:ext cx="1828800" cy="25400"/>
+          </a:xfrm>
+          <a:prstGeom prst="rect">
             <a:avLst/>
           </a:prstGeom>
           <a:solidFill>
-            <a:srgbClr val="2A0505"/>
+            <a:srgbClr val="0066CC"/>
           </a:solidFill>
-          <a:ln w="19050">
-            <a:solidFill>
-              <a:srgbClr val="FF6666"/>
-            </a:solidFill>
+          <a:ln>
+            <a:noFill/>
           </a:ln>
         </p:spPr>
         <p:style>
@@ -3613,14 +4116,14 @@
       </p:sp>
       <p:sp>
         <p:nvSpPr>
-          <p:cNvPr id="10" name="TextBox 9"/>
+          <p:cNvPr id="4" name="TextBox 3"/>
           <p:cNvSpPr txBox="1"/>
           <p:nvPr/>
         </p:nvSpPr>
         <p:spPr>
           <a:xfrm>
-            <a:off x="1005840" y="4114800"/>
-            <a:ext cx="4663440" cy="457200"/>
+            <a:off x="1371600" y="1554480"/>
+            <a:ext cx="9418320" cy="365760"/>
           </a:xfrm>
           <a:prstGeom prst="rect">
             <a:avLst/>
@@ -3634,29 +4137,29 @@
           <a:lstStyle/>
           <a:p>
             <a:pPr algn="l">
-              <a:defRPr sz="2000" b="1">
-                <a:solidFill>
-                  <a:srgbClr val="FF6666"/>
-                </a:solidFill>
-                <a:latin typeface="Calibri"/>
-              </a:defRPr>
-            </a:pPr>
-            <a:r>
-              <a:t>Lo que falta</a:t>
-            </a:r>
-          </a:p>
-        </p:txBody>
-      </p:sp>
-      <p:sp>
-        <p:nvSpPr>
-          <p:cNvPr id="11" name="TextBox 10"/>
+              <a:defRPr sz="2200" b="1">
+                <a:solidFill>
+                  <a:srgbClr val="0066CC"/>
+                </a:solidFill>
+                <a:latin typeface="Calibri"/>
+              </a:defRPr>
+            </a:pPr>
+            <a:r>
+              <a:t>1. Weight Decay (L2)</a:t>
+            </a:r>
+          </a:p>
+        </p:txBody>
+      </p:sp>
+      <p:sp>
+        <p:nvSpPr>
+          <p:cNvPr id="5" name="TextBox 4"/>
           <p:cNvSpPr txBox="1"/>
           <p:nvPr/>
         </p:nvSpPr>
         <p:spPr>
           <a:xfrm>
-            <a:off x="1005840" y="4663440"/>
-            <a:ext cx="4663440" cy="1371600"/>
+            <a:off x="1645920" y="2011680"/>
+            <a:ext cx="8686800" cy="822960"/>
           </a:xfrm>
           <a:prstGeom prst="rect">
             <a:avLst/>
@@ -3669,53 +4172,320 @@
           </a:bodyPr>
           <a:lstStyle/>
           <a:p>
+            <a:pPr>
+              <a:spcBef>
+                <a:spcPts val="800"/>
+              </a:spcBef>
+              <a:spcAft>
+                <a:spcPts val="400"/>
+              </a:spcAft>
+              <a:defRPr sz="1600">
+                <a:solidFill>
+                  <a:srgbClr val="333333"/>
+                </a:solidFill>
+                <a:latin typeface="Calibri"/>
+              </a:defRPr>
+            </a:pPr>
+            <a:r>
+              <a:t>Penaliza pesos grandes sumando lambda*||w||^2 a la perdida.</a:t>
+            </a:r>
+          </a:p>
+          <a:p>
+            <a:pPr>
+              <a:spcBef>
+                <a:spcPts val="800"/>
+              </a:spcBef>
+              <a:spcAft>
+                <a:spcPts val="400"/>
+              </a:spcAft>
+              <a:defRPr sz="1600">
+                <a:solidFill>
+                  <a:srgbClr val="333333"/>
+                </a:solidFill>
+                <a:latin typeface="Calibri"/>
+              </a:defRPr>
+            </a:pPr>
+            <a:r>
+              <a:t>weight_decay = 0.01 en el optimizador Adam.</a:t>
+            </a:r>
+          </a:p>
+        </p:txBody>
+      </p:sp>
+      <p:sp>
+        <p:nvSpPr>
+          <p:cNvPr id="6" name="TextBox 5"/>
+          <p:cNvSpPr txBox="1"/>
+          <p:nvPr/>
+        </p:nvSpPr>
+        <p:spPr>
+          <a:xfrm>
+            <a:off x="1371600" y="2926080"/>
+            <a:ext cx="9418320" cy="365760"/>
+          </a:xfrm>
+          <a:prstGeom prst="rect">
+            <a:avLst/>
+          </a:prstGeom>
+          <a:noFill/>
+        </p:spPr>
+        <p:txBody>
+          <a:bodyPr wrap="square">
+            <a:spAutoFit/>
+          </a:bodyPr>
+          <a:lstStyle/>
+          <a:p>
             <a:pPr algn="l">
-              <a:defRPr sz="1400" b="0">
-                <a:solidFill>
-                  <a:srgbClr val="CCCCCC"/>
-                </a:solidFill>
-                <a:latin typeface="Calibri"/>
-              </a:defRPr>
-            </a:pPr>
-            <a:r>
-              <a:t>- No hay Weight Decay (penalizacion L2)</a:t>
-            </a:r>
-            <a:br/>
-            <a:r>
-              <a:t>- No hay Dropout</a:t>
-            </a:r>
-            <a:br/>
-            <a:r>
-              <a:t>- No hay Early Stopping</a:t>
-            </a:r>
-            <a:br/>
-            <a:r>
-              <a:t>- Red sobredimensionada para tan pocos datos</a:t>
-            </a:r>
-          </a:p>
-        </p:txBody>
-      </p:sp>
-      <p:sp>
-        <p:nvSpPr>
-          <p:cNvPr id="12" name="Rounded Rectangle 11"/>
+              <a:defRPr sz="2200" b="1">
+                <a:solidFill>
+                  <a:srgbClr val="0066CC"/>
+                </a:solidFill>
+                <a:latin typeface="Calibri"/>
+              </a:defRPr>
+            </a:pPr>
+            <a:r>
+              <a:t>2. Dropout</a:t>
+            </a:r>
+          </a:p>
+        </p:txBody>
+      </p:sp>
+      <p:sp>
+        <p:nvSpPr>
+          <p:cNvPr id="7" name="TextBox 6"/>
+          <p:cNvSpPr txBox="1"/>
+          <p:nvPr/>
+        </p:nvSpPr>
+        <p:spPr>
+          <a:xfrm>
+            <a:off x="1645920" y="3383280"/>
+            <a:ext cx="8686800" cy="822960"/>
+          </a:xfrm>
+          <a:prstGeom prst="rect">
+            <a:avLst/>
+          </a:prstGeom>
+          <a:noFill/>
+        </p:spPr>
+        <p:txBody>
+          <a:bodyPr wrap="square">
+            <a:spAutoFit/>
+          </a:bodyPr>
+          <a:lstStyle/>
+          <a:p>
+            <a:pPr>
+              <a:spcBef>
+                <a:spcPts val="800"/>
+              </a:spcBef>
+              <a:spcAft>
+                <a:spcPts val="400"/>
+              </a:spcAft>
+              <a:defRPr sz="1600">
+                <a:solidFill>
+                  <a:srgbClr val="333333"/>
+                </a:solidFill>
+                <a:latin typeface="Calibri"/>
+              </a:defRPr>
+            </a:pPr>
+            <a:r>
+              <a:t>Apaga neuronas al azar durante el entrenamiento (p=0.3).</a:t>
+            </a:r>
+          </a:p>
+          <a:p>
+            <a:pPr>
+              <a:spcBef>
+                <a:spcPts val="800"/>
+              </a:spcBef>
+              <a:spcAft>
+                <a:spcPts val="400"/>
+              </a:spcAft>
+              <a:defRPr sz="1600">
+                <a:solidFill>
+                  <a:srgbClr val="333333"/>
+                </a:solidFill>
+                <a:latin typeface="Calibri"/>
+              </a:defRPr>
+            </a:pPr>
+            <a:r>
+              <a:t>Impide que la red dependa de neuronas individuales.</a:t>
+            </a:r>
+          </a:p>
+        </p:txBody>
+      </p:sp>
+      <p:sp>
+        <p:nvSpPr>
+          <p:cNvPr id="8" name="TextBox 7"/>
+          <p:cNvSpPr txBox="1"/>
+          <p:nvPr/>
+        </p:nvSpPr>
+        <p:spPr>
+          <a:xfrm>
+            <a:off x="1371600" y="4297680"/>
+            <a:ext cx="9418320" cy="365760"/>
+          </a:xfrm>
+          <a:prstGeom prst="rect">
+            <a:avLst/>
+          </a:prstGeom>
+          <a:noFill/>
+        </p:spPr>
+        <p:txBody>
+          <a:bodyPr wrap="square">
+            <a:spAutoFit/>
+          </a:bodyPr>
+          <a:lstStyle/>
+          <a:p>
+            <a:pPr algn="l">
+              <a:defRPr sz="2200" b="1">
+                <a:solidFill>
+                  <a:srgbClr val="0066CC"/>
+                </a:solidFill>
+                <a:latin typeface="Calibri"/>
+              </a:defRPr>
+            </a:pPr>
+            <a:r>
+              <a:t>3. Reducir capacidad</a:t>
+            </a:r>
+          </a:p>
+        </p:txBody>
+      </p:sp>
+      <p:sp>
+        <p:nvSpPr>
+          <p:cNvPr id="9" name="TextBox 8"/>
+          <p:cNvSpPr txBox="1"/>
+          <p:nvPr/>
+        </p:nvSpPr>
+        <p:spPr>
+          <a:xfrm>
+            <a:off x="1645920" y="4754880"/>
+            <a:ext cx="8686800" cy="822960"/>
+          </a:xfrm>
+          <a:prstGeom prst="rect">
+            <a:avLst/>
+          </a:prstGeom>
+          <a:noFill/>
+        </p:spPr>
+        <p:txBody>
+          <a:bodyPr wrap="square">
+            <a:spAutoFit/>
+          </a:bodyPr>
+          <a:lstStyle/>
+          <a:p>
+            <a:pPr>
+              <a:spcBef>
+                <a:spcPts val="800"/>
+              </a:spcBef>
+              <a:spcAft>
+                <a:spcPts val="400"/>
+              </a:spcAft>
+              <a:defRPr sz="1600">
+                <a:solidFill>
+                  <a:srgbClr val="333333"/>
+                </a:solidFill>
+                <a:latin typeface="Calibri"/>
+              </a:defRPr>
+            </a:pPr>
+            <a:r>
+              <a:t>De 5 capas (~19K params) a 3 capas (~300 params).</a:t>
+            </a:r>
+          </a:p>
+          <a:p>
+            <a:pPr>
+              <a:spcBef>
+                <a:spcPts val="800"/>
+              </a:spcBef>
+              <a:spcAft>
+                <a:spcPts val="400"/>
+              </a:spcAft>
+              <a:defRPr sz="1600">
+                <a:solidFill>
+                  <a:srgbClr val="333333"/>
+                </a:solidFill>
+                <a:latin typeface="Calibri"/>
+              </a:defRPr>
+            </a:pPr>
+            <a:r>
+              <a:t>Adecuamos la complejidad al tamano del dataset.</a:t>
+            </a:r>
+          </a:p>
+        </p:txBody>
+      </p:sp>
+    </p:spTree>
+  </p:cSld>
+  <p:clrMapOvr>
+    <a:masterClrMapping/>
+  </p:clrMapOvr>
+</p:sld>
+</file>
+
+<file path=ppt/slides/slide5.xml><?xml version="1.0" encoding="utf-8"?>
+<p:sld xmlns:a="http://schemas.openxmlformats.org/drawingml/2006/main" xmlns:p="http://schemas.openxmlformats.org/presentationml/2006/main" xmlns:r="http://schemas.openxmlformats.org/officeDocument/2006/relationships">
+  <p:cSld>
+    <p:bg>
+      <p:bgPr>
+        <a:solidFill>
+          <a:srgbClr val="FAFAFA"/>
+        </a:solidFill>
+        <a:effectLst/>
+      </p:bgPr>
+    </p:bg>
+    <p:spTree>
+      <p:nvGrpSpPr>
+        <p:cNvPr id="1" name=""/>
+        <p:cNvGrpSpPr/>
+        <p:nvPr/>
+      </p:nvGrpSpPr>
+      <p:grpSpPr/>
+      <p:sp>
+        <p:nvSpPr>
+          <p:cNvPr id="2" name="TextBox 1"/>
+          <p:cNvSpPr txBox="1"/>
+          <p:nvPr/>
+        </p:nvSpPr>
+        <p:spPr>
+          <a:xfrm>
+            <a:off x="1371600" y="548640"/>
+            <a:ext cx="9418320" cy="640080"/>
+          </a:xfrm>
+          <a:prstGeom prst="rect">
+            <a:avLst/>
+          </a:prstGeom>
+          <a:noFill/>
+        </p:spPr>
+        <p:txBody>
+          <a:bodyPr wrap="square">
+            <a:spAutoFit/>
+          </a:bodyPr>
+          <a:lstStyle/>
+          <a:p>
+            <a:pPr algn="l">
+              <a:defRPr sz="4000" b="1">
+                <a:solidFill>
+                  <a:srgbClr val="1A1A1A"/>
+                </a:solidFill>
+                <a:latin typeface="Calibri"/>
+              </a:defRPr>
+            </a:pPr>
+            <a:r>
+              <a:t>Antes vs Despues</a:t>
+            </a:r>
+          </a:p>
+        </p:txBody>
+      </p:sp>
+      <p:sp>
+        <p:nvSpPr>
+          <p:cNvPr id="3" name="Rectangle 2"/>
           <p:cNvSpPr/>
           <p:nvPr/>
         </p:nvSpPr>
         <p:spPr>
           <a:xfrm>
-            <a:off x="6217920" y="3931920"/>
-            <a:ext cx="5212080" cy="2286000"/>
-          </a:xfrm>
-          <a:prstGeom prst="roundRect">
+            <a:off x="1371600" y="1188720"/>
+            <a:ext cx="1828800" cy="25400"/>
+          </a:xfrm>
+          <a:prstGeom prst="rect">
             <a:avLst/>
           </a:prstGeom>
           <a:solidFill>
-            <a:srgbClr val="2A0505"/>
+            <a:srgbClr val="0066CC"/>
           </a:solidFill>
-          <a:ln w="19050">
-            <a:solidFill>
-              <a:srgbClr val="FF6666"/>
-            </a:solidFill>
+          <a:ln>
+            <a:noFill/>
           </a:ln>
         </p:spPr>
         <p:style>
@@ -3740,1410 +4510,17 @@
           </a:p>
         </p:txBody>
       </p:sp>
-      <p:sp>
-        <p:nvSpPr>
-          <p:cNvPr id="13" name="TextBox 12"/>
-          <p:cNvSpPr txBox="1"/>
-          <p:nvPr/>
-        </p:nvSpPr>
-        <p:spPr>
-          <a:xfrm>
-            <a:off x="6492240" y="4114800"/>
-            <a:ext cx="4663440" cy="457200"/>
-          </a:xfrm>
-          <a:prstGeom prst="rect">
-            <a:avLst/>
-          </a:prstGeom>
-          <a:noFill/>
-        </p:spPr>
-        <p:txBody>
-          <a:bodyPr wrap="square">
-            <a:spAutoFit/>
-          </a:bodyPr>
-          <a:lstStyle/>
-          <a:p>
-            <a:pPr algn="l">
-              <a:defRPr sz="2000" b="1">
-                <a:solidFill>
-                  <a:srgbClr val="FF6666"/>
-                </a:solidFill>
-                <a:latin typeface="Calibri"/>
-              </a:defRPr>
-            </a:pPr>
-            <a:r>
-              <a:t>Impacto en HealthTech</a:t>
-            </a:r>
-          </a:p>
-        </p:txBody>
-      </p:sp>
-      <p:sp>
-        <p:nvSpPr>
-          <p:cNvPr id="14" name="TextBox 13"/>
-          <p:cNvSpPr txBox="1"/>
-          <p:nvPr/>
-        </p:nvSpPr>
-        <p:spPr>
-          <a:xfrm>
-            <a:off x="6492240" y="4663440"/>
-            <a:ext cx="4663440" cy="1371600"/>
-          </a:xfrm>
-          <a:prstGeom prst="rect">
-            <a:avLst/>
-          </a:prstGeom>
-          <a:noFill/>
-        </p:spPr>
-        <p:txBody>
-          <a:bodyPr wrap="square">
-            <a:spAutoFit/>
-          </a:bodyPr>
-          <a:lstStyle/>
-          <a:p>
-            <a:pPr algn="l">
-              <a:defRPr sz="1400" b="0">
-                <a:solidFill>
-                  <a:srgbClr val="CCCCCC"/>
-                </a:solidFill>
-                <a:latin typeface="Calibri"/>
-              </a:defRPr>
-            </a:pPr>
-            <a:r>
-              <a:t>En produccion, el modelo no detectaria patologias nuevas correctamente. Solo "recuerda" los casos que ya vio.</a:t>
-            </a:r>
-            <a:br/>
-            <a:br/>
-            <a:r>
-              <a:t>Un paciente nuevo = diagnostico poco confiable.</a:t>
-            </a:r>
-          </a:p>
-        </p:txBody>
-      </p:sp>
-    </p:spTree>
-  </p:cSld>
-  <p:clrMapOvr>
-    <a:masterClrMapping/>
-  </p:clrMapOvr>
-</p:sld>
-</file>
-
-<file path=ppt/slides/slide3.xml><?xml version="1.0" encoding="utf-8"?>
-<p:sld xmlns:a="http://schemas.openxmlformats.org/drawingml/2006/main" xmlns:p="http://schemas.openxmlformats.org/presentationml/2006/main" xmlns:r="http://schemas.openxmlformats.org/officeDocument/2006/relationships">
-  <p:cSld>
-    <p:bg>
-      <p:bgPr>
-        <a:solidFill>
-          <a:srgbClr val="1A1000"/>
-        </a:solidFill>
-        <a:effectLst/>
-      </p:bgPr>
-    </p:bg>
-    <p:spTree>
-      <p:nvGrpSpPr>
-        <p:cNvPr id="1" name=""/>
-        <p:cNvGrpSpPr/>
-        <p:nvPr/>
-      </p:nvGrpSpPr>
-      <p:grpSpPr/>
-      <p:sp>
-        <p:nvSpPr>
-          <p:cNvPr id="2" name="TextBox 1"/>
-          <p:cNvSpPr txBox="1"/>
-          <p:nvPr/>
-        </p:nvSpPr>
-        <p:spPr>
-          <a:xfrm>
-            <a:off x="731520" y="365760"/>
-            <a:ext cx="10698480" cy="822960"/>
-          </a:xfrm>
-          <a:prstGeom prst="rect">
-            <a:avLst/>
-          </a:prstGeom>
-          <a:noFill/>
-        </p:spPr>
-        <p:txBody>
-          <a:bodyPr wrap="square">
-            <a:spAutoFit/>
-          </a:bodyPr>
-          <a:lstStyle/>
-          <a:p>
-            <a:pPr algn="l">
-              <a:defRPr sz="4000" b="1">
-                <a:solidFill>
-                  <a:srgbClr val="FFAA00"/>
-                </a:solidFill>
-                <a:latin typeface="Calibri"/>
-              </a:defRPr>
-            </a:pPr>
-            <a:r>
-              <a:t>Diagnostico</a:t>
-            </a:r>
-          </a:p>
-        </p:txBody>
-      </p:sp>
-      <p:sp>
-        <p:nvSpPr>
-          <p:cNvPr id="3" name="Rounded Rectangle 2"/>
-          <p:cNvSpPr/>
-          <p:nvPr/>
-        </p:nvSpPr>
-        <p:spPr>
-          <a:xfrm>
-            <a:off x="731520" y="1371600"/>
-            <a:ext cx="10698480" cy="868680"/>
-          </a:xfrm>
-          <a:prstGeom prst="roundRect">
-            <a:avLst/>
-          </a:prstGeom>
-          <a:solidFill>
-            <a:srgbClr val="2A1A00"/>
-          </a:solidFill>
-          <a:ln w="19050">
-            <a:solidFill>
-              <a:srgbClr val="FFAA00"/>
-            </a:solidFill>
-          </a:ln>
-        </p:spPr>
-        <p:style>
-          <a:lnRef idx="1">
-            <a:schemeClr val="accent1"/>
-          </a:lnRef>
-          <a:fillRef idx="3">
-            <a:schemeClr val="accent1"/>
-          </a:fillRef>
-          <a:effectRef idx="2">
-            <a:schemeClr val="accent1"/>
-          </a:effectRef>
-          <a:fontRef idx="minor">
-            <a:schemeClr val="lt1"/>
-          </a:fontRef>
-        </p:style>
-        <p:txBody>
-          <a:bodyPr rtlCol="0" anchor="ctr"/>
-          <a:lstStyle/>
-          <a:p>
-            <a:pPr algn="ctr"/>
-          </a:p>
-        </p:txBody>
-      </p:sp>
-      <p:sp>
-        <p:nvSpPr>
-          <p:cNvPr id="4" name="TextBox 3"/>
-          <p:cNvSpPr txBox="1"/>
-          <p:nvPr/>
-        </p:nvSpPr>
-        <p:spPr>
-          <a:xfrm>
-            <a:off x="1005840" y="1508760"/>
-            <a:ext cx="10149840" cy="640080"/>
-          </a:xfrm>
-          <a:prstGeom prst="rect">
-            <a:avLst/>
-          </a:prstGeom>
-          <a:noFill/>
-        </p:spPr>
-        <p:txBody>
-          <a:bodyPr wrap="square">
-            <a:spAutoFit/>
-          </a:bodyPr>
-          <a:lstStyle/>
-          <a:p>
-            <a:pPr algn="l">
-              <a:defRPr sz="1400" b="0">
-                <a:solidFill>
-                  <a:srgbClr val="CCCCCC"/>
-                </a:solidFill>
-                <a:latin typeface="Calibri"/>
-              </a:defRPr>
-            </a:pPr>
-            <a:r>
-              <a:rPr b="1" sz="1500">
-                <a:solidFill>
-                  <a:srgbClr val="FFCC44"/>
-                </a:solidFill>
-              </a:rPr>
-              <a:t>Sintoma: </a:t>
-            </a:r>
-            <a:r>
-              <a:rPr sz="1400">
-                <a:solidFill>
-                  <a:srgbClr val="CCCCCC"/>
-                </a:solidFill>
-              </a:rPr>
-              <a:t>Train accuracy converge a ~100% mientras test accuracy se estanca o cae. La perdida de test diverge.</a:t>
-            </a:r>
-          </a:p>
-        </p:txBody>
-      </p:sp>
-      <p:sp>
-        <p:nvSpPr>
-          <p:cNvPr id="5" name="Rounded Rectangle 4"/>
-          <p:cNvSpPr/>
-          <p:nvPr/>
-        </p:nvSpPr>
-        <p:spPr>
-          <a:xfrm>
-            <a:off x="731520" y="2377440"/>
-            <a:ext cx="10698480" cy="868680"/>
-          </a:xfrm>
-          <a:prstGeom prst="roundRect">
-            <a:avLst/>
-          </a:prstGeom>
-          <a:solidFill>
-            <a:srgbClr val="2A1A00"/>
-          </a:solidFill>
-          <a:ln w="19050">
-            <a:solidFill>
-              <a:srgbClr val="FFAA00"/>
-            </a:solidFill>
-          </a:ln>
-        </p:spPr>
-        <p:style>
-          <a:lnRef idx="1">
-            <a:schemeClr val="accent1"/>
-          </a:lnRef>
-          <a:fillRef idx="3">
-            <a:schemeClr val="accent1"/>
-          </a:fillRef>
-          <a:effectRef idx="2">
-            <a:schemeClr val="accent1"/>
-          </a:effectRef>
-          <a:fontRef idx="minor">
-            <a:schemeClr val="lt1"/>
-          </a:fontRef>
-        </p:style>
-        <p:txBody>
-          <a:bodyPr rtlCol="0" anchor="ctr"/>
-          <a:lstStyle/>
-          <a:p>
-            <a:pPr algn="ctr"/>
-          </a:p>
-        </p:txBody>
-      </p:sp>
-      <p:sp>
-        <p:nvSpPr>
-          <p:cNvPr id="6" name="TextBox 5"/>
-          <p:cNvSpPr txBox="1"/>
-          <p:nvPr/>
-        </p:nvSpPr>
-        <p:spPr>
-          <a:xfrm>
-            <a:off x="1005840" y="2514600"/>
-            <a:ext cx="10149840" cy="640080"/>
-          </a:xfrm>
-          <a:prstGeom prst="rect">
-            <a:avLst/>
-          </a:prstGeom>
-          <a:noFill/>
-        </p:spPr>
-        <p:txBody>
-          <a:bodyPr wrap="square">
-            <a:spAutoFit/>
-          </a:bodyPr>
-          <a:lstStyle/>
-          <a:p>
-            <a:pPr algn="l">
-              <a:defRPr sz="1400" b="0">
-                <a:solidFill>
-                  <a:srgbClr val="CCCCCC"/>
-                </a:solidFill>
-                <a:latin typeface="Calibri"/>
-              </a:defRPr>
-            </a:pPr>
-            <a:r>
-              <a:rPr b="1" sz="1500">
-                <a:solidFill>
-                  <a:srgbClr val="FFCC44"/>
-                </a:solidFill>
-              </a:rPr>
-              <a:t>Causa raiz: </a:t>
-            </a:r>
-            <a:r>
-              <a:rPr sz="1400">
-                <a:solidFill>
-                  <a:srgbClr val="CCCCCC"/>
-                </a:solidFill>
-              </a:rPr>
-              <a:t>Sin regularizacion, los pesos crecen sin control. Con muchos parametros y pocos datos, la red memoriza cada muestra incluyendo el ruido.</a:t>
-            </a:r>
-          </a:p>
-        </p:txBody>
-      </p:sp>
-      <p:sp>
-        <p:nvSpPr>
-          <p:cNvPr id="7" name="Rounded Rectangle 6"/>
-          <p:cNvSpPr/>
-          <p:nvPr/>
-        </p:nvSpPr>
-        <p:spPr>
-          <a:xfrm>
-            <a:off x="731520" y="3383280"/>
-            <a:ext cx="10698480" cy="868680"/>
-          </a:xfrm>
-          <a:prstGeom prst="roundRect">
-            <a:avLst/>
-          </a:prstGeom>
-          <a:solidFill>
-            <a:srgbClr val="2A1A00"/>
-          </a:solidFill>
-          <a:ln w="19050">
-            <a:solidFill>
-              <a:srgbClr val="FFAA00"/>
-            </a:solidFill>
-          </a:ln>
-        </p:spPr>
-        <p:style>
-          <a:lnRef idx="1">
-            <a:schemeClr val="accent1"/>
-          </a:lnRef>
-          <a:fillRef idx="3">
-            <a:schemeClr val="accent1"/>
-          </a:fillRef>
-          <a:effectRef idx="2">
-            <a:schemeClr val="accent1"/>
-          </a:effectRef>
-          <a:fontRef idx="minor">
-            <a:schemeClr val="lt1"/>
-          </a:fontRef>
-        </p:style>
-        <p:txBody>
-          <a:bodyPr rtlCol="0" anchor="ctr"/>
-          <a:lstStyle/>
-          <a:p>
-            <a:pPr algn="ctr"/>
-          </a:p>
-        </p:txBody>
-      </p:sp>
-      <p:sp>
-        <p:nvSpPr>
-          <p:cNvPr id="8" name="TextBox 7"/>
-          <p:cNvSpPr txBox="1"/>
-          <p:nvPr/>
-        </p:nvSpPr>
-        <p:spPr>
-          <a:xfrm>
-            <a:off x="1005840" y="3520440"/>
-            <a:ext cx="10149840" cy="640080"/>
-          </a:xfrm>
-          <a:prstGeom prst="rect">
-            <a:avLst/>
-          </a:prstGeom>
-          <a:noFill/>
-        </p:spPr>
-        <p:txBody>
-          <a:bodyPr wrap="square">
-            <a:spAutoFit/>
-          </a:bodyPr>
-          <a:lstStyle/>
-          <a:p>
-            <a:pPr algn="l">
-              <a:defRPr sz="1400" b="0">
-                <a:solidFill>
-                  <a:srgbClr val="CCCCCC"/>
-                </a:solidFill>
-                <a:latin typeface="Calibri"/>
-              </a:defRPr>
-            </a:pPr>
-            <a:r>
-              <a:rPr b="1" sz="1500">
-                <a:solidFill>
-                  <a:srgbClr val="FFCC44"/>
-                </a:solidFill>
-              </a:rPr>
-              <a:t>Evidencia: </a:t>
-            </a:r>
-            <a:r>
-              <a:rPr sz="1400">
-                <a:solidFill>
-                  <a:srgbClr val="CCCCCC"/>
-                </a:solidFill>
-              </a:rPr>
-              <a:t>Los pesos del modelo muestran valores grandes y dispersos (alta varianza), senal de que el modelo codifica ruido en vez de patrones.</a:t>
-            </a:r>
-          </a:p>
-        </p:txBody>
-      </p:sp>
-      <p:sp>
-        <p:nvSpPr>
-          <p:cNvPr id="9" name="Rounded Rectangle 8"/>
-          <p:cNvSpPr/>
-          <p:nvPr/>
-        </p:nvSpPr>
-        <p:spPr>
-          <a:xfrm>
-            <a:off x="731520" y="4389120"/>
-            <a:ext cx="10698480" cy="868680"/>
-          </a:xfrm>
-          <a:prstGeom prst="roundRect">
-            <a:avLst/>
-          </a:prstGeom>
-          <a:solidFill>
-            <a:srgbClr val="2A1A00"/>
-          </a:solidFill>
-          <a:ln w="19050">
-            <a:solidFill>
-              <a:srgbClr val="FFAA00"/>
-            </a:solidFill>
-          </a:ln>
-        </p:spPr>
-        <p:style>
-          <a:lnRef idx="1">
-            <a:schemeClr val="accent1"/>
-          </a:lnRef>
-          <a:fillRef idx="3">
-            <a:schemeClr val="accent1"/>
-          </a:fillRef>
-          <a:effectRef idx="2">
-            <a:schemeClr val="accent1"/>
-          </a:effectRef>
-          <a:fontRef idx="minor">
-            <a:schemeClr val="lt1"/>
-          </a:fontRef>
-        </p:style>
-        <p:txBody>
-          <a:bodyPr rtlCol="0" anchor="ctr"/>
-          <a:lstStyle/>
-          <a:p>
-            <a:pPr algn="ctr"/>
-          </a:p>
-        </p:txBody>
-      </p:sp>
-      <p:sp>
-        <p:nvSpPr>
-          <p:cNvPr id="10" name="TextBox 9"/>
-          <p:cNvSpPr txBox="1"/>
-          <p:nvPr/>
-        </p:nvSpPr>
-        <p:spPr>
-          <a:xfrm>
-            <a:off x="1005840" y="4526280"/>
-            <a:ext cx="10149840" cy="640080"/>
-          </a:xfrm>
-          <a:prstGeom prst="rect">
-            <a:avLst/>
-          </a:prstGeom>
-          <a:noFill/>
-        </p:spPr>
-        <p:txBody>
-          <a:bodyPr wrap="square">
-            <a:spAutoFit/>
-          </a:bodyPr>
-          <a:lstStyle/>
-          <a:p>
-            <a:pPr algn="l">
-              <a:defRPr sz="1400" b="0">
-                <a:solidFill>
-                  <a:srgbClr val="CCCCCC"/>
-                </a:solidFill>
-                <a:latin typeface="Calibri"/>
-              </a:defRPr>
-            </a:pPr>
-            <a:r>
-              <a:rPr b="1" sz="1500">
-                <a:solidFill>
-                  <a:srgbClr val="FFCC44"/>
-                </a:solidFill>
-              </a:rPr>
-              <a:t>Analogia: </a:t>
-            </a:r>
-            <a:r>
-              <a:rPr sz="1400">
-                <a:solidFill>
-                  <a:srgbClr val="CCCCCC"/>
-                </a:solidFill>
-              </a:rPr>
-              <a:t>Es como un estudiante que memoriza las respuestas del examen de practica en vez de aprender la materia - perfecto en lo visto, pesimo en preguntas nuevas.</a:t>
-            </a:r>
-          </a:p>
-        </p:txBody>
-      </p:sp>
-      <p:sp>
-        <p:nvSpPr>
-          <p:cNvPr id="11" name="Rounded Rectangle 10"/>
-          <p:cNvSpPr/>
-          <p:nvPr/>
-        </p:nvSpPr>
-        <p:spPr>
-          <a:xfrm>
-            <a:off x="731520" y="5394960"/>
-            <a:ext cx="10698480" cy="868680"/>
-          </a:xfrm>
-          <a:prstGeom prst="roundRect">
-            <a:avLst/>
-          </a:prstGeom>
-          <a:solidFill>
-            <a:srgbClr val="2A1A00"/>
-          </a:solidFill>
-          <a:ln w="19050">
-            <a:solidFill>
-              <a:srgbClr val="FFAA00"/>
-            </a:solidFill>
-          </a:ln>
-        </p:spPr>
-        <p:style>
-          <a:lnRef idx="1">
-            <a:schemeClr val="accent1"/>
-          </a:lnRef>
-          <a:fillRef idx="3">
-            <a:schemeClr val="accent1"/>
-          </a:fillRef>
-          <a:effectRef idx="2">
-            <a:schemeClr val="accent1"/>
-          </a:effectRef>
-          <a:fontRef idx="minor">
-            <a:schemeClr val="lt1"/>
-          </a:fontRef>
-        </p:style>
-        <p:txBody>
-          <a:bodyPr rtlCol="0" anchor="ctr"/>
-          <a:lstStyle/>
-          <a:p>
-            <a:pPr algn="ctr"/>
-          </a:p>
-        </p:txBody>
-      </p:sp>
-      <p:sp>
-        <p:nvSpPr>
-          <p:cNvPr id="12" name="TextBox 11"/>
-          <p:cNvSpPr txBox="1"/>
-          <p:nvPr/>
-        </p:nvSpPr>
-        <p:spPr>
-          <a:xfrm>
-            <a:off x="1005840" y="5532120"/>
-            <a:ext cx="10149840" cy="640080"/>
-          </a:xfrm>
-          <a:prstGeom prst="rect">
-            <a:avLst/>
-          </a:prstGeom>
-          <a:noFill/>
-        </p:spPr>
-        <p:txBody>
-          <a:bodyPr wrap="square">
-            <a:spAutoFit/>
-          </a:bodyPr>
-          <a:lstStyle/>
-          <a:p>
-            <a:pPr algn="l">
-              <a:defRPr sz="1400" b="0">
-                <a:solidFill>
-                  <a:srgbClr val="CCCCCC"/>
-                </a:solidFill>
-                <a:latin typeface="Calibri"/>
-              </a:defRPr>
-            </a:pPr>
-            <a:r>
-              <a:rPr b="1" sz="1500">
-                <a:solidFill>
-                  <a:srgbClr val="FFCC44"/>
-                </a:solidFill>
-              </a:rPr>
-              <a:t>Indicador: </a:t>
-            </a:r>
-            <a:r>
-              <a:rPr sz="1400">
-                <a:solidFill>
-                  <a:srgbClr val="CCCCCC"/>
-                </a:solidFill>
-              </a:rPr>
-              <a:t>La brecha (gap) entre train accuracy y test accuracy. Con overfitting violento, esta brecha supera el 20-30%.</a:t>
-            </a:r>
-          </a:p>
-        </p:txBody>
-      </p:sp>
-    </p:spTree>
-  </p:cSld>
-  <p:clrMapOvr>
-    <a:masterClrMapping/>
-  </p:clrMapOvr>
-</p:sld>
-</file>
-
-<file path=ppt/slides/slide4.xml><?xml version="1.0" encoding="utf-8"?>
-<p:sld xmlns:a="http://schemas.openxmlformats.org/drawingml/2006/main" xmlns:p="http://schemas.openxmlformats.org/presentationml/2006/main" xmlns:r="http://schemas.openxmlformats.org/officeDocument/2006/relationships">
-  <p:cSld>
-    <p:bg>
-      <p:bgPr>
-        <a:solidFill>
-          <a:srgbClr val="001A0A"/>
-        </a:solidFill>
-        <a:effectLst/>
-      </p:bgPr>
-    </p:bg>
-    <p:spTree>
-      <p:nvGrpSpPr>
-        <p:cNvPr id="1" name=""/>
-        <p:cNvGrpSpPr/>
-        <p:nvPr/>
-      </p:nvGrpSpPr>
-      <p:grpSpPr/>
-      <p:sp>
-        <p:nvSpPr>
-          <p:cNvPr id="2" name="TextBox 1"/>
-          <p:cNvSpPr txBox="1"/>
-          <p:nvPr/>
-        </p:nvSpPr>
-        <p:spPr>
-          <a:xfrm>
-            <a:off x="731520" y="365760"/>
-            <a:ext cx="10698480" cy="822960"/>
-          </a:xfrm>
-          <a:prstGeom prst="rect">
-            <a:avLst/>
-          </a:prstGeom>
-          <a:noFill/>
-        </p:spPr>
-        <p:txBody>
-          <a:bodyPr wrap="square">
-            <a:spAutoFit/>
-          </a:bodyPr>
-          <a:lstStyle/>
-          <a:p>
-            <a:pPr algn="l">
-              <a:defRPr sz="4000" b="1">
-                <a:solidFill>
-                  <a:srgbClr val="44FF88"/>
-                </a:solidFill>
-                <a:latin typeface="Calibri"/>
-              </a:defRPr>
-            </a:pPr>
-            <a:r>
-              <a:t>El Interruptor: Regularizacion</a:t>
-            </a:r>
-          </a:p>
-        </p:txBody>
-      </p:sp>
-      <p:sp>
-        <p:nvSpPr>
-          <p:cNvPr id="3" name="Rounded Rectangle 2"/>
-          <p:cNvSpPr/>
-          <p:nvPr/>
-        </p:nvSpPr>
-        <p:spPr>
-          <a:xfrm>
-            <a:off x="731520" y="1371600"/>
-            <a:ext cx="3474720" cy="3657600"/>
-          </a:xfrm>
-          <a:prstGeom prst="roundRect">
-            <a:avLst/>
-          </a:prstGeom>
-          <a:solidFill>
-            <a:srgbClr val="052A10"/>
-          </a:solidFill>
-          <a:ln w="19050">
-            <a:solidFill>
-              <a:srgbClr val="66FFAA"/>
-            </a:solidFill>
-          </a:ln>
-        </p:spPr>
-        <p:style>
-          <a:lnRef idx="1">
-            <a:schemeClr val="accent1"/>
-          </a:lnRef>
-          <a:fillRef idx="3">
-            <a:schemeClr val="accent1"/>
-          </a:fillRef>
-          <a:effectRef idx="2">
-            <a:schemeClr val="accent1"/>
-          </a:effectRef>
-          <a:fontRef idx="minor">
-            <a:schemeClr val="lt1"/>
-          </a:fontRef>
-        </p:style>
-        <p:txBody>
-          <a:bodyPr rtlCol="0" anchor="ctr"/>
-          <a:lstStyle/>
-          <a:p>
-            <a:pPr algn="ctr"/>
-          </a:p>
-        </p:txBody>
-      </p:sp>
-      <p:sp>
-        <p:nvSpPr>
-          <p:cNvPr id="4" name="TextBox 3"/>
-          <p:cNvSpPr txBox="1"/>
-          <p:nvPr/>
-        </p:nvSpPr>
-        <p:spPr>
-          <a:xfrm>
-            <a:off x="914400" y="1554480"/>
-            <a:ext cx="3108960" cy="457200"/>
-          </a:xfrm>
-          <a:prstGeom prst="rect">
-            <a:avLst/>
-          </a:prstGeom>
-          <a:noFill/>
-        </p:spPr>
-        <p:txBody>
-          <a:bodyPr wrap="square">
-            <a:spAutoFit/>
-          </a:bodyPr>
-          <a:lstStyle/>
-          <a:p>
-            <a:pPr algn="ctr">
-              <a:defRPr sz="2200" b="1">
-                <a:solidFill>
-                  <a:srgbClr val="66FFAA"/>
-                </a:solidFill>
-                <a:latin typeface="Calibri"/>
-              </a:defRPr>
-            </a:pPr>
-            <a:r>
-              <a:t>Weight Decay (L2)</a:t>
-            </a:r>
-          </a:p>
-        </p:txBody>
-      </p:sp>
-      <p:sp>
-        <p:nvSpPr>
-          <p:cNvPr id="5" name="TextBox 4"/>
-          <p:cNvSpPr txBox="1"/>
-          <p:nvPr/>
-        </p:nvSpPr>
-        <p:spPr>
-          <a:xfrm>
-            <a:off x="914400" y="2194560"/>
-            <a:ext cx="3108960" cy="1828800"/>
-          </a:xfrm>
-          <a:prstGeom prst="rect">
-            <a:avLst/>
-          </a:prstGeom>
-          <a:noFill/>
-        </p:spPr>
-        <p:txBody>
-          <a:bodyPr wrap="square">
-            <a:spAutoFit/>
-          </a:bodyPr>
-          <a:lstStyle/>
-          <a:p>
-            <a:pPr algn="ctr">
-              <a:defRPr sz="1400" b="0">
-                <a:solidFill>
-                  <a:srgbClr val="CCCCCC"/>
-                </a:solidFill>
-                <a:latin typeface="Calibri"/>
-              </a:defRPr>
-            </a:pPr>
-            <a:r>
-              <a:t>Penaliza pesos grandes anadiendo</a:t>
-            </a:r>
-            <a:br/>
-            <a:r>
-              <a:t>lambda*||w||^2 a la perdida.</a:t>
-            </a:r>
-            <a:br/>
-            <a:r>
-              <a:t>Encoge los pesos hacia cero</a:t>
-            </a:r>
-            <a:br/>
-            <a:r>
-              <a:t>en cada actualizacion.</a:t>
-            </a:r>
-          </a:p>
-        </p:txBody>
-      </p:sp>
-      <p:sp>
-        <p:nvSpPr>
-          <p:cNvPr id="6" name="Rounded Rectangle 5"/>
-          <p:cNvSpPr/>
-          <p:nvPr/>
-        </p:nvSpPr>
-        <p:spPr>
-          <a:xfrm>
-            <a:off x="1188720" y="4114800"/>
-            <a:ext cx="2560320" cy="457200"/>
-          </a:xfrm>
-          <a:prstGeom prst="roundRect">
-            <a:avLst/>
-          </a:prstGeom>
-          <a:solidFill>
-            <a:srgbClr val="001505"/>
-          </a:solidFill>
-          <a:ln>
-            <a:noFill/>
-          </a:ln>
-        </p:spPr>
-        <p:style>
-          <a:lnRef idx="1">
-            <a:schemeClr val="accent1"/>
-          </a:lnRef>
-          <a:fillRef idx="3">
-            <a:schemeClr val="accent1"/>
-          </a:fillRef>
-          <a:effectRef idx="2">
-            <a:schemeClr val="accent1"/>
-          </a:effectRef>
-          <a:fontRef idx="minor">
-            <a:schemeClr val="lt1"/>
-          </a:fontRef>
-        </p:style>
-        <p:txBody>
-          <a:bodyPr rtlCol="0" anchor="ctr"/>
-          <a:lstStyle/>
-          <a:p>
-            <a:pPr algn="ctr"/>
-          </a:p>
-        </p:txBody>
-      </p:sp>
-      <p:sp>
-        <p:nvSpPr>
-          <p:cNvPr id="7" name="TextBox 6"/>
-          <p:cNvSpPr txBox="1"/>
-          <p:nvPr/>
-        </p:nvSpPr>
-        <p:spPr>
-          <a:xfrm>
-            <a:off x="1280160" y="4160520"/>
-            <a:ext cx="2377440" cy="365760"/>
-          </a:xfrm>
-          <a:prstGeom prst="rect">
-            <a:avLst/>
-          </a:prstGeom>
-          <a:noFill/>
-        </p:spPr>
-        <p:txBody>
-          <a:bodyPr wrap="square">
-            <a:spAutoFit/>
-          </a:bodyPr>
-          <a:lstStyle/>
-          <a:p>
-            <a:pPr algn="ctr">
-              <a:defRPr sz="1400" b="0">
-                <a:solidFill>
-                  <a:srgbClr val="66FFAA"/>
-                </a:solidFill>
-                <a:latin typeface="Consolas"/>
-              </a:defRPr>
-            </a:pPr>
-            <a:r>
-              <a:t>weight_decay=0.01</a:t>
-            </a:r>
-          </a:p>
-        </p:txBody>
-      </p:sp>
-      <p:sp>
-        <p:nvSpPr>
-          <p:cNvPr id="8" name="Rounded Rectangle 7"/>
-          <p:cNvSpPr/>
-          <p:nvPr/>
-        </p:nvSpPr>
-        <p:spPr>
-          <a:xfrm>
-            <a:off x="4480559" y="1371600"/>
-            <a:ext cx="3474720" cy="3657600"/>
-          </a:xfrm>
-          <a:prstGeom prst="roundRect">
-            <a:avLst/>
-          </a:prstGeom>
-          <a:solidFill>
-            <a:srgbClr val="052A10"/>
-          </a:solidFill>
-          <a:ln w="19050">
-            <a:solidFill>
-              <a:srgbClr val="66FFAA"/>
-            </a:solidFill>
-          </a:ln>
-        </p:spPr>
-        <p:style>
-          <a:lnRef idx="1">
-            <a:schemeClr val="accent1"/>
-          </a:lnRef>
-          <a:fillRef idx="3">
-            <a:schemeClr val="accent1"/>
-          </a:fillRef>
-          <a:effectRef idx="2">
-            <a:schemeClr val="accent1"/>
-          </a:effectRef>
-          <a:fontRef idx="minor">
-            <a:schemeClr val="lt1"/>
-          </a:fontRef>
-        </p:style>
-        <p:txBody>
-          <a:bodyPr rtlCol="0" anchor="ctr"/>
-          <a:lstStyle/>
-          <a:p>
-            <a:pPr algn="ctr"/>
-          </a:p>
-        </p:txBody>
-      </p:sp>
-      <p:sp>
-        <p:nvSpPr>
-          <p:cNvPr id="9" name="TextBox 8"/>
-          <p:cNvSpPr txBox="1"/>
-          <p:nvPr/>
-        </p:nvSpPr>
-        <p:spPr>
-          <a:xfrm>
-            <a:off x="4663440" y="1554480"/>
-            <a:ext cx="3108960" cy="457200"/>
-          </a:xfrm>
-          <a:prstGeom prst="rect">
-            <a:avLst/>
-          </a:prstGeom>
-          <a:noFill/>
-        </p:spPr>
-        <p:txBody>
-          <a:bodyPr wrap="square">
-            <a:spAutoFit/>
-          </a:bodyPr>
-          <a:lstStyle/>
-          <a:p>
-            <a:pPr algn="ctr">
-              <a:defRPr sz="2200" b="1">
-                <a:solidFill>
-                  <a:srgbClr val="66FFAA"/>
-                </a:solidFill>
-                <a:latin typeface="Calibri"/>
-              </a:defRPr>
-            </a:pPr>
-            <a:r>
-              <a:t>Dropout</a:t>
-            </a:r>
-          </a:p>
-        </p:txBody>
-      </p:sp>
-      <p:sp>
-        <p:nvSpPr>
-          <p:cNvPr id="10" name="TextBox 9"/>
-          <p:cNvSpPr txBox="1"/>
-          <p:nvPr/>
-        </p:nvSpPr>
-        <p:spPr>
-          <a:xfrm>
-            <a:off x="4663440" y="2194560"/>
-            <a:ext cx="3108960" cy="1828800"/>
-          </a:xfrm>
-          <a:prstGeom prst="rect">
-            <a:avLst/>
-          </a:prstGeom>
-          <a:noFill/>
-        </p:spPr>
-        <p:txBody>
-          <a:bodyPr wrap="square">
-            <a:spAutoFit/>
-          </a:bodyPr>
-          <a:lstStyle/>
-          <a:p>
-            <a:pPr algn="ctr">
-              <a:defRPr sz="1400" b="0">
-                <a:solidFill>
-                  <a:srgbClr val="CCCCCC"/>
-                </a:solidFill>
-                <a:latin typeface="Calibri"/>
-              </a:defRPr>
-            </a:pPr>
-            <a:r>
-              <a:t>Apaga neuronas al azar durante</a:t>
-            </a:r>
-            <a:br/>
-            <a:r>
-              <a:t>el entrenamiento (p=0.3).</a:t>
-            </a:r>
-            <a:br/>
-            <a:r>
-              <a:t>Impide que la red dependa</a:t>
-            </a:r>
-            <a:br/>
-            <a:r>
-              <a:t>de neuronas individuales.</a:t>
-            </a:r>
-          </a:p>
-        </p:txBody>
-      </p:sp>
-      <p:sp>
-        <p:nvSpPr>
-          <p:cNvPr id="11" name="Rounded Rectangle 10"/>
-          <p:cNvSpPr/>
-          <p:nvPr/>
-        </p:nvSpPr>
-        <p:spPr>
-          <a:xfrm>
-            <a:off x="4937759" y="4114800"/>
-            <a:ext cx="2560320" cy="457200"/>
-          </a:xfrm>
-          <a:prstGeom prst="roundRect">
-            <a:avLst/>
-          </a:prstGeom>
-          <a:solidFill>
-            <a:srgbClr val="001505"/>
-          </a:solidFill>
-          <a:ln>
-            <a:noFill/>
-          </a:ln>
-        </p:spPr>
-        <p:style>
-          <a:lnRef idx="1">
-            <a:schemeClr val="accent1"/>
-          </a:lnRef>
-          <a:fillRef idx="3">
-            <a:schemeClr val="accent1"/>
-          </a:fillRef>
-          <a:effectRef idx="2">
-            <a:schemeClr val="accent1"/>
-          </a:effectRef>
-          <a:fontRef idx="minor">
-            <a:schemeClr val="lt1"/>
-          </a:fontRef>
-        </p:style>
-        <p:txBody>
-          <a:bodyPr rtlCol="0" anchor="ctr"/>
-          <a:lstStyle/>
-          <a:p>
-            <a:pPr algn="ctr"/>
-          </a:p>
-        </p:txBody>
-      </p:sp>
-      <p:sp>
-        <p:nvSpPr>
-          <p:cNvPr id="12" name="TextBox 11"/>
-          <p:cNvSpPr txBox="1"/>
-          <p:nvPr/>
-        </p:nvSpPr>
-        <p:spPr>
-          <a:xfrm>
-            <a:off x="5029199" y="4160520"/>
-            <a:ext cx="2377440" cy="365760"/>
-          </a:xfrm>
-          <a:prstGeom prst="rect">
-            <a:avLst/>
-          </a:prstGeom>
-          <a:noFill/>
-        </p:spPr>
-        <p:txBody>
-          <a:bodyPr wrap="square">
-            <a:spAutoFit/>
-          </a:bodyPr>
-          <a:lstStyle/>
-          <a:p>
-            <a:pPr algn="ctr">
-              <a:defRPr sz="1400" b="0">
-                <a:solidFill>
-                  <a:srgbClr val="66FFAA"/>
-                </a:solidFill>
-                <a:latin typeface="Consolas"/>
-              </a:defRPr>
-            </a:pPr>
-            <a:r>
-              <a:t>nn.Dropout(0.3)</a:t>
-            </a:r>
-          </a:p>
-        </p:txBody>
-      </p:sp>
-      <p:sp>
-        <p:nvSpPr>
-          <p:cNvPr id="13" name="Rounded Rectangle 12"/>
-          <p:cNvSpPr/>
-          <p:nvPr/>
-        </p:nvSpPr>
-        <p:spPr>
-          <a:xfrm>
-            <a:off x="8229600" y="1371600"/>
-            <a:ext cx="3474720" cy="3657600"/>
-          </a:xfrm>
-          <a:prstGeom prst="roundRect">
-            <a:avLst/>
-          </a:prstGeom>
-          <a:solidFill>
-            <a:srgbClr val="052A10"/>
-          </a:solidFill>
-          <a:ln w="19050">
-            <a:solidFill>
-              <a:srgbClr val="66FFAA"/>
-            </a:solidFill>
-          </a:ln>
-        </p:spPr>
-        <p:style>
-          <a:lnRef idx="1">
-            <a:schemeClr val="accent1"/>
-          </a:lnRef>
-          <a:fillRef idx="3">
-            <a:schemeClr val="accent1"/>
-          </a:fillRef>
-          <a:effectRef idx="2">
-            <a:schemeClr val="accent1"/>
-          </a:effectRef>
-          <a:fontRef idx="minor">
-            <a:schemeClr val="lt1"/>
-          </a:fontRef>
-        </p:style>
-        <p:txBody>
-          <a:bodyPr rtlCol="0" anchor="ctr"/>
-          <a:lstStyle/>
-          <a:p>
-            <a:pPr algn="ctr"/>
-          </a:p>
-        </p:txBody>
-      </p:sp>
-      <p:sp>
-        <p:nvSpPr>
-          <p:cNvPr id="14" name="TextBox 13"/>
-          <p:cNvSpPr txBox="1"/>
-          <p:nvPr/>
-        </p:nvSpPr>
-        <p:spPr>
-          <a:xfrm>
-            <a:off x="8412480" y="1554480"/>
-            <a:ext cx="3108960" cy="457200"/>
-          </a:xfrm>
-          <a:prstGeom prst="rect">
-            <a:avLst/>
-          </a:prstGeom>
-          <a:noFill/>
-        </p:spPr>
-        <p:txBody>
-          <a:bodyPr wrap="square">
-            <a:spAutoFit/>
-          </a:bodyPr>
-          <a:lstStyle/>
-          <a:p>
-            <a:pPr algn="ctr">
-              <a:defRPr sz="2200" b="1">
-                <a:solidFill>
-                  <a:srgbClr val="66FFAA"/>
-                </a:solidFill>
-                <a:latin typeface="Calibri"/>
-              </a:defRPr>
-            </a:pPr>
-            <a:r>
-              <a:t>Reducir Capacidad</a:t>
-            </a:r>
-          </a:p>
-        </p:txBody>
-      </p:sp>
-      <p:sp>
-        <p:nvSpPr>
-          <p:cNvPr id="15" name="TextBox 14"/>
-          <p:cNvSpPr txBox="1"/>
-          <p:nvPr/>
-        </p:nvSpPr>
-        <p:spPr>
-          <a:xfrm>
-            <a:off x="8412480" y="2194560"/>
-            <a:ext cx="3108960" cy="1828800"/>
-          </a:xfrm>
-          <a:prstGeom prst="rect">
-            <a:avLst/>
-          </a:prstGeom>
-          <a:noFill/>
-        </p:spPr>
-        <p:txBody>
-          <a:bodyPr wrap="square">
-            <a:spAutoFit/>
-          </a:bodyPr>
-          <a:lstStyle/>
-          <a:p>
-            <a:pPr algn="ctr">
-              <a:defRPr sz="1400" b="0">
-                <a:solidFill>
-                  <a:srgbClr val="CCCCCC"/>
-                </a:solidFill>
-                <a:latin typeface="Calibri"/>
-              </a:defRPr>
-            </a:pPr>
-            <a:r>
-              <a:t>Menos capas y neuronas para que</a:t>
-            </a:r>
-            <a:br/>
-            <a:r>
-              <a:t>la red no pueda memorizar todo.</a:t>
-            </a:r>
-            <a:br/>
-            <a:r>
-              <a:t>Adecuamos la complejidad al</a:t>
-            </a:r>
-            <a:br/>
-            <a:r>
-              <a:t>tamano del dataset.</a:t>
-            </a:r>
-          </a:p>
-        </p:txBody>
-      </p:sp>
-      <p:sp>
-        <p:nvSpPr>
-          <p:cNvPr id="16" name="Rounded Rectangle 15"/>
-          <p:cNvSpPr/>
-          <p:nvPr/>
-        </p:nvSpPr>
-        <p:spPr>
-          <a:xfrm>
-            <a:off x="8686800" y="4114800"/>
-            <a:ext cx="2560320" cy="457200"/>
-          </a:xfrm>
-          <a:prstGeom prst="roundRect">
-            <a:avLst/>
-          </a:prstGeom>
-          <a:solidFill>
-            <a:srgbClr val="001505"/>
-          </a:solidFill>
-          <a:ln>
-            <a:noFill/>
-          </a:ln>
-        </p:spPr>
-        <p:style>
-          <a:lnRef idx="1">
-            <a:schemeClr val="accent1"/>
-          </a:lnRef>
-          <a:fillRef idx="3">
-            <a:schemeClr val="accent1"/>
-          </a:fillRef>
-          <a:effectRef idx="2">
-            <a:schemeClr val="accent1"/>
-          </a:effectRef>
-          <a:fontRef idx="minor">
-            <a:schemeClr val="lt1"/>
-          </a:fontRef>
-        </p:style>
-        <p:txBody>
-          <a:bodyPr rtlCol="0" anchor="ctr"/>
-          <a:lstStyle/>
-          <a:p>
-            <a:pPr algn="ctr"/>
-          </a:p>
-        </p:txBody>
-      </p:sp>
-      <p:sp>
-        <p:nvSpPr>
-          <p:cNvPr id="17" name="TextBox 16"/>
-          <p:cNvSpPr txBox="1"/>
-          <p:nvPr/>
-        </p:nvSpPr>
-        <p:spPr>
-          <a:xfrm>
-            <a:off x="8778240" y="4160520"/>
-            <a:ext cx="2377440" cy="365760"/>
-          </a:xfrm>
-          <a:prstGeom prst="rect">
-            <a:avLst/>
-          </a:prstGeom>
-          <a:noFill/>
-        </p:spPr>
-        <p:txBody>
-          <a:bodyPr wrap="square">
-            <a:spAutoFit/>
-          </a:bodyPr>
-          <a:lstStyle/>
-          <a:p>
-            <a:pPr algn="ctr">
-              <a:defRPr sz="1400" b="0">
-                <a:solidFill>
-                  <a:srgbClr val="66FFAA"/>
-                </a:solidFill>
-                <a:latin typeface="Consolas"/>
-              </a:defRPr>
-            </a:pPr>
-            <a:r>
-              <a:t>64-&gt;16 neuronas</a:t>
-            </a:r>
-          </a:p>
-        </p:txBody>
-      </p:sp>
-      <p:sp>
-        <p:nvSpPr>
-          <p:cNvPr id="18" name="TextBox 17"/>
-          <p:cNvSpPr txBox="1"/>
-          <p:nvPr/>
-        </p:nvSpPr>
-        <p:spPr>
-          <a:xfrm>
-            <a:off x="731520" y="5486400"/>
-            <a:ext cx="10698480" cy="548640"/>
-          </a:xfrm>
-          <a:prstGeom prst="rect">
-            <a:avLst/>
-          </a:prstGeom>
-          <a:noFill/>
-        </p:spPr>
-        <p:txBody>
-          <a:bodyPr wrap="square">
-            <a:spAutoFit/>
-          </a:bodyPr>
-          <a:lstStyle/>
-          <a:p>
-            <a:pPr algn="ctr">
-              <a:defRPr sz="1500" b="0">
-                <a:solidFill>
-                  <a:srgbClr val="66FFAA"/>
-                </a:solidFill>
-                <a:latin typeface="Calibri"/>
-              </a:defRPr>
-            </a:pPr>
-            <a:r>
-              <a:t>ANTES: 5 capas, ~19K params, sin regularizacion    --&gt;    DESPUES: 3 capas, ~300 params, con Dropout + L2</a:t>
-            </a:r>
-          </a:p>
-        </p:txBody>
-      </p:sp>
-    </p:spTree>
-  </p:cSld>
-  <p:clrMapOvr>
-    <a:masterClrMapping/>
-  </p:clrMapOvr>
-</p:sld>
-</file>
-
-<file path=ppt/slides/slide5.xml><?xml version="1.0" encoding="utf-8"?>
-<p:sld xmlns:a="http://schemas.openxmlformats.org/drawingml/2006/main" xmlns:p="http://schemas.openxmlformats.org/presentationml/2006/main" xmlns:r="http://schemas.openxmlformats.org/officeDocument/2006/relationships">
-  <p:cSld>
-    <p:bg>
-      <p:bgPr>
-        <a:solidFill>
-          <a:srgbClr val="0A0A2E"/>
-        </a:solidFill>
-        <a:effectLst/>
-      </p:bgPr>
-    </p:bg>
-    <p:spTree>
-      <p:nvGrpSpPr>
-        <p:cNvPr id="1" name=""/>
-        <p:cNvGrpSpPr/>
-        <p:nvPr/>
-      </p:nvGrpSpPr>
-      <p:grpSpPr/>
-      <p:sp>
-        <p:nvSpPr>
-          <p:cNvPr id="2" name="TextBox 1"/>
-          <p:cNvSpPr txBox="1"/>
-          <p:nvPr/>
-        </p:nvSpPr>
-        <p:spPr>
-          <a:xfrm>
-            <a:off x="731520" y="365760"/>
-            <a:ext cx="10698480" cy="822960"/>
-          </a:xfrm>
-          <a:prstGeom prst="rect">
-            <a:avLst/>
-          </a:prstGeom>
-          <a:noFill/>
-        </p:spPr>
-        <p:txBody>
-          <a:bodyPr wrap="square">
-            <a:spAutoFit/>
-          </a:bodyPr>
-          <a:lstStyle/>
-          <a:p>
-            <a:pPr algn="l">
-              <a:defRPr sz="4000" b="1">
-                <a:solidFill>
-                  <a:srgbClr val="88AAFF"/>
-                </a:solidFill>
-                <a:latin typeface="Calibri"/>
-              </a:defRPr>
-            </a:pPr>
-            <a:r>
-              <a:t>Antes vs Despues</a:t>
-            </a:r>
-          </a:p>
-        </p:txBody>
-      </p:sp>
       <p:graphicFrame>
         <p:nvGraphicFramePr>
-          <p:cNvPr id="3" name="Table 2"/>
+          <p:cNvPr id="4" name="Table 3"/>
           <p:cNvGraphicFramePr>
             <a:graphicFrameLocks noGrp="1"/>
           </p:cNvGraphicFramePr>
           <p:nvPr/>
         </p:nvGraphicFramePr>
         <p:xfrm>
-          <a:off x="1371600" y="1371600"/>
-          <a:ext cx="9418320" cy="4754880"/>
+          <a:off x="1371600" y="1554480"/>
+          <a:ext cx="9418320" cy="4389120"/>
         </p:xfrm>
         <a:graphic>
           <a:graphicData uri="http://schemas.openxmlformats.org/drawingml/2006/table">
@@ -5152,11 +4529,11 @@
                 <a:tableStyleId>{5C22544A-7EE6-4342-B048-85BDC9FD1C3A}</a:tableStyleId>
               </a:tblPr>
               <a:tblGrid>
-                <a:gridCol w="3474720"/>
-                <a:gridCol w="2971800"/>
-                <a:gridCol w="2971800"/>
+                <a:gridCol w="3200400"/>
+                <a:gridCol w="3108960"/>
+                <a:gridCol w="3108960"/>
               </a:tblGrid>
-              <a:tr h="528320">
+              <a:tr h="548640">
                 <a:tc>
                   <a:txBody>
                     <a:bodyPr/>
@@ -5165,7 +4542,7 @@
                       <a:pPr>
                         <a:defRPr sz="1500" b="1">
                           <a:solidFill>
-                            <a:srgbClr val="888888"/>
+                            <a:srgbClr val="FFFFFF"/>
                           </a:solidFill>
                           <a:latin typeface="Calibri"/>
                         </a:defRPr>
@@ -5177,7 +4554,7 @@
                   </a:txBody>
                   <a:tcPr>
                     <a:solidFill>
-                      <a:srgbClr val="1A1A3E"/>
+                      <a:srgbClr val="0066CC"/>
                     </a:solidFill>
                   </a:tcPr>
                 </a:tc>
@@ -5189,7 +4566,7 @@
                       <a:pPr>
                         <a:defRPr sz="1500" b="1">
                           <a:solidFill>
-                            <a:srgbClr val="FF6666"/>
+                            <a:srgbClr val="FFFFFF"/>
                           </a:solidFill>
                           <a:latin typeface="Calibri"/>
                         </a:defRPr>
@@ -5201,7 +4578,7 @@
                   </a:txBody>
                   <a:tcPr>
                     <a:solidFill>
-                      <a:srgbClr val="2A0A0A"/>
+                      <a:srgbClr val="CC3333"/>
                     </a:solidFill>
                   </a:tcPr>
                 </a:tc>
@@ -5213,7 +4590,7 @@
                       <a:pPr>
                         <a:defRPr sz="1500" b="1">
                           <a:solidFill>
-                            <a:srgbClr val="66FFAA"/>
+                            <a:srgbClr val="FFFFFF"/>
                           </a:solidFill>
                           <a:latin typeface="Calibri"/>
                         </a:defRPr>
@@ -5225,21 +4602,21 @@
                   </a:txBody>
                   <a:tcPr>
                     <a:solidFill>
-                      <a:srgbClr val="0A2A15"/>
+                      <a:srgbClr val="228844"/>
                     </a:solidFill>
                   </a:tcPr>
                 </a:tc>
               </a:tr>
-              <a:tr h="528320">
+              <a:tr h="548640">
                 <a:tc>
                   <a:txBody>
                     <a:bodyPr/>
                     <a:lstStyle/>
                     <a:p>
                       <a:pPr>
-                        <a:defRPr sz="1500" b="1">
+                        <a:defRPr sz="1500">
                           <a:solidFill>
-                            <a:srgbClr val="CCCCCC"/>
+                            <a:srgbClr val="333333"/>
                           </a:solidFill>
                           <a:latin typeface="Calibri"/>
                         </a:defRPr>
@@ -5251,7 +4628,7 @@
                   </a:txBody>
                   <a:tcPr>
                     <a:solidFill>
-                      <a:srgbClr val="121230"/>
+                      <a:srgbClr val="FFFFFF"/>
                     </a:solidFill>
                   </a:tcPr>
                 </a:tc>
@@ -5263,7 +4640,7 @@
                       <a:pPr>
                         <a:defRPr sz="1500">
                           <a:solidFill>
-                            <a:srgbClr val="FF8888"/>
+                            <a:srgbClr val="333333"/>
                           </a:solidFill>
                           <a:latin typeface="Calibri"/>
                         </a:defRPr>
@@ -5275,7 +4652,7 @@
                   </a:txBody>
                   <a:tcPr>
                     <a:solidFill>
-                      <a:srgbClr val="121230"/>
+                      <a:srgbClr val="FFFFFF"/>
                     </a:solidFill>
                   </a:tcPr>
                 </a:tc>
@@ -5287,7 +4664,7 @@
                       <a:pPr>
                         <a:defRPr sz="1500">
                           <a:solidFill>
-                            <a:srgbClr val="88FFBB"/>
+                            <a:srgbClr val="333333"/>
                           </a:solidFill>
                           <a:latin typeface="Calibri"/>
                         </a:defRPr>
@@ -5299,21 +4676,21 @@
                   </a:txBody>
                   <a:tcPr>
                     <a:solidFill>
-                      <a:srgbClr val="121230"/>
+                      <a:srgbClr val="FFFFFF"/>
                     </a:solidFill>
                   </a:tcPr>
                 </a:tc>
               </a:tr>
-              <a:tr h="528320">
+              <a:tr h="548640">
                 <a:tc>
                   <a:txBody>
                     <a:bodyPr/>
                     <a:lstStyle/>
                     <a:p>
                       <a:pPr>
-                        <a:defRPr sz="1500" b="1">
+                        <a:defRPr sz="1500">
                           <a:solidFill>
-                            <a:srgbClr val="CCCCCC"/>
+                            <a:srgbClr val="333333"/>
                           </a:solidFill>
                           <a:latin typeface="Calibri"/>
                         </a:defRPr>
@@ -5325,7 +4702,7 @@
                   </a:txBody>
                   <a:tcPr>
                     <a:solidFill>
-                      <a:srgbClr val="121230"/>
+                      <a:srgbClr val="F0F0F0"/>
                     </a:solidFill>
                   </a:tcPr>
                 </a:tc>
@@ -5337,7 +4714,7 @@
                       <a:pPr>
                         <a:defRPr sz="1500">
                           <a:solidFill>
-                            <a:srgbClr val="FF8888"/>
+                            <a:srgbClr val="333333"/>
                           </a:solidFill>
                           <a:latin typeface="Calibri"/>
                         </a:defRPr>
@@ -5349,7 +4726,7 @@
                   </a:txBody>
                   <a:tcPr>
                     <a:solidFill>
-                      <a:srgbClr val="121230"/>
+                      <a:srgbClr val="F0F0F0"/>
                     </a:solidFill>
                   </a:tcPr>
                 </a:tc>
@@ -5361,7 +4738,7 @@
                       <a:pPr>
                         <a:defRPr sz="1500">
                           <a:solidFill>
-                            <a:srgbClr val="88FFBB"/>
+                            <a:srgbClr val="333333"/>
                           </a:solidFill>
                           <a:latin typeface="Calibri"/>
                         </a:defRPr>
@@ -5373,33 +4750,33 @@
                   </a:txBody>
                   <a:tcPr>
                     <a:solidFill>
-                      <a:srgbClr val="121230"/>
+                      <a:srgbClr val="F0F0F0"/>
                     </a:solidFill>
                   </a:tcPr>
                 </a:tc>
               </a:tr>
-              <a:tr h="528320">
+              <a:tr h="548640">
                 <a:tc>
                   <a:txBody>
                     <a:bodyPr/>
                     <a:lstStyle/>
                     <a:p>
                       <a:pPr>
-                        <a:defRPr sz="1500" b="1">
+                        <a:defRPr sz="1500">
                           <a:solidFill>
-                            <a:srgbClr val="CCCCCC"/>
+                            <a:srgbClr val="333333"/>
                           </a:solidFill>
                           <a:latin typeface="Calibri"/>
                         </a:defRPr>
                       </a:pPr>
                       <a:r>
-                        <a:t>Gap (Train - Test)</a:t>
+                        <a:t>Gap (Train-Test)</a:t>
                       </a:r>
                     </a:p>
                   </a:txBody>
                   <a:tcPr>
                     <a:solidFill>
-                      <a:srgbClr val="121230"/>
+                      <a:srgbClr val="FFFFFF"/>
                     </a:solidFill>
                   </a:tcPr>
                 </a:tc>
@@ -5411,7 +4788,7 @@
                       <a:pPr>
                         <a:defRPr sz="1500">
                           <a:solidFill>
-                            <a:srgbClr val="FF8888"/>
+                            <a:srgbClr val="333333"/>
                           </a:solidFill>
                           <a:latin typeface="Calibri"/>
                         </a:defRPr>
@@ -5423,7 +4800,7 @@
                   </a:txBody>
                   <a:tcPr>
                     <a:solidFill>
-                      <a:srgbClr val="121230"/>
+                      <a:srgbClr val="FFFFFF"/>
                     </a:solidFill>
                   </a:tcPr>
                 </a:tc>
@@ -5435,7 +4812,7 @@
                       <a:pPr>
                         <a:defRPr sz="1500">
                           <a:solidFill>
-                            <a:srgbClr val="88FFBB"/>
+                            <a:srgbClr val="333333"/>
                           </a:solidFill>
                           <a:latin typeface="Calibri"/>
                         </a:defRPr>
@@ -5447,33 +4824,33 @@
                   </a:txBody>
                   <a:tcPr>
                     <a:solidFill>
-                      <a:srgbClr val="121230"/>
+                      <a:srgbClr val="FFFFFF"/>
                     </a:solidFill>
                   </a:tcPr>
                 </a:tc>
               </a:tr>
-              <a:tr h="528320">
+              <a:tr h="548640">
                 <a:tc>
                   <a:txBody>
                     <a:bodyPr/>
                     <a:lstStyle/>
                     <a:p>
                       <a:pPr>
-                        <a:defRPr sz="1500" b="1">
+                        <a:defRPr sz="1500">
                           <a:solidFill>
-                            <a:srgbClr val="CCCCCC"/>
+                            <a:srgbClr val="333333"/>
                           </a:solidFill>
                           <a:latin typeface="Calibri"/>
                         </a:defRPr>
                       </a:pPr>
                       <a:r>
-                        <a:t>Perdida de Test</a:t>
+                        <a:t>Loss de Test</a:t>
                       </a:r>
                     </a:p>
                   </a:txBody>
                   <a:tcPr>
                     <a:solidFill>
-                      <a:srgbClr val="121230"/>
+                      <a:srgbClr val="F0F0F0"/>
                     </a:solidFill>
                   </a:tcPr>
                 </a:tc>
@@ -5485,7 +4862,7 @@
                       <a:pPr>
                         <a:defRPr sz="1500">
                           <a:solidFill>
-                            <a:srgbClr val="FF8888"/>
+                            <a:srgbClr val="333333"/>
                           </a:solidFill>
                           <a:latin typeface="Calibri"/>
                         </a:defRPr>
@@ -5497,7 +4874,7 @@
                   </a:txBody>
                   <a:tcPr>
                     <a:solidFill>
-                      <a:srgbClr val="121230"/>
+                      <a:srgbClr val="F0F0F0"/>
                     </a:solidFill>
                   </a:tcPr>
                 </a:tc>
@@ -5509,7 +4886,7 @@
                       <a:pPr>
                         <a:defRPr sz="1500">
                           <a:solidFill>
-                            <a:srgbClr val="88FFBB"/>
+                            <a:srgbClr val="333333"/>
                           </a:solidFill>
                           <a:latin typeface="Calibri"/>
                         </a:defRPr>
@@ -5521,33 +4898,33 @@
                   </a:txBody>
                   <a:tcPr>
                     <a:solidFill>
-                      <a:srgbClr val="121230"/>
+                      <a:srgbClr val="F0F0F0"/>
                     </a:solidFill>
                   </a:tcPr>
                 </a:tc>
               </a:tr>
-              <a:tr h="528320">
+              <a:tr h="548640">
                 <a:tc>
                   <a:txBody>
                     <a:bodyPr/>
                     <a:lstStyle/>
                     <a:p>
                       <a:pPr>
-                        <a:defRPr sz="1500" b="1">
+                        <a:defRPr sz="1500">
                           <a:solidFill>
-                            <a:srgbClr val="CCCCCC"/>
+                            <a:srgbClr val="333333"/>
                           </a:solidFill>
                           <a:latin typeface="Calibri"/>
                         </a:defRPr>
                       </a:pPr>
                       <a:r>
-                        <a:t>Pesos (Std)</a:t>
+                        <a:t>Weight Decay</a:t>
                       </a:r>
                     </a:p>
                   </a:txBody>
                   <a:tcPr>
                     <a:solidFill>
-                      <a:srgbClr val="121230"/>
+                      <a:srgbClr val="FFFFFF"/>
                     </a:solidFill>
                   </a:tcPr>
                 </a:tc>
@@ -5559,19 +4936,19 @@
                       <a:pPr>
                         <a:defRPr sz="1500">
                           <a:solidFill>
-                            <a:srgbClr val="FF8888"/>
+                            <a:srgbClr val="333333"/>
                           </a:solidFill>
                           <a:latin typeface="Calibri"/>
                         </a:defRPr>
                       </a:pPr>
                       <a:r>
-                        <a:t>Alto (disperso)</a:t>
+                        <a:t>0.0 (OFF)</a:t>
                       </a:r>
                     </a:p>
                   </a:txBody>
                   <a:tcPr>
                     <a:solidFill>
-                      <a:srgbClr val="121230"/>
+                      <a:srgbClr val="FFFFFF"/>
                     </a:solidFill>
                   </a:tcPr>
                 </a:tc>
@@ -5583,45 +4960,45 @@
                       <a:pPr>
                         <a:defRPr sz="1500">
                           <a:solidFill>
-                            <a:srgbClr val="88FFBB"/>
+                            <a:srgbClr val="333333"/>
                           </a:solidFill>
                           <a:latin typeface="Calibri"/>
                         </a:defRPr>
                       </a:pPr>
                       <a:r>
-                        <a:t>Bajo (compacto)</a:t>
+                        <a:t>0.01 (ON)</a:t>
                       </a:r>
                     </a:p>
                   </a:txBody>
                   <a:tcPr>
                     <a:solidFill>
-                      <a:srgbClr val="121230"/>
+                      <a:srgbClr val="FFFFFF"/>
                     </a:solidFill>
                   </a:tcPr>
                 </a:tc>
               </a:tr>
-              <a:tr h="528320">
+              <a:tr h="548640">
                 <a:tc>
                   <a:txBody>
                     <a:bodyPr/>
                     <a:lstStyle/>
                     <a:p>
                       <a:pPr>
-                        <a:defRPr sz="1500" b="1">
+                        <a:defRPr sz="1500">
                           <a:solidFill>
-                            <a:srgbClr val="CCCCCC"/>
+                            <a:srgbClr val="333333"/>
                           </a:solidFill>
                           <a:latin typeface="Calibri"/>
                         </a:defRPr>
                       </a:pPr>
                       <a:r>
-                        <a:t>Weight Decay</a:t>
+                        <a:t>Dropout</a:t>
                       </a:r>
                     </a:p>
                   </a:txBody>
                   <a:tcPr>
                     <a:solidFill>
-                      <a:srgbClr val="121230"/>
+                      <a:srgbClr val="F0F0F0"/>
                     </a:solidFill>
                   </a:tcPr>
                 </a:tc>
@@ -5633,19 +5010,19 @@
                       <a:pPr>
                         <a:defRPr sz="1500">
                           <a:solidFill>
-                            <a:srgbClr val="FF8888"/>
+                            <a:srgbClr val="333333"/>
                           </a:solidFill>
                           <a:latin typeface="Calibri"/>
                         </a:defRPr>
                       </a:pPr>
                       <a:r>
-                        <a:t>0.0 (OFF)</a:t>
+                        <a:t>NO</a:t>
                       </a:r>
                     </a:p>
                   </a:txBody>
                   <a:tcPr>
                     <a:solidFill>
-                      <a:srgbClr val="121230"/>
+                      <a:srgbClr val="F0F0F0"/>
                     </a:solidFill>
                   </a:tcPr>
                 </a:tc>
@@ -5657,45 +5034,45 @@
                       <a:pPr>
                         <a:defRPr sz="1500">
                           <a:solidFill>
-                            <a:srgbClr val="88FFBB"/>
+                            <a:srgbClr val="333333"/>
                           </a:solidFill>
                           <a:latin typeface="Calibri"/>
                         </a:defRPr>
                       </a:pPr>
                       <a:r>
-                        <a:t>0.01 (ON)</a:t>
+                        <a:t>p = 0.3</a:t>
                       </a:r>
                     </a:p>
                   </a:txBody>
                   <a:tcPr>
                     <a:solidFill>
-                      <a:srgbClr val="121230"/>
+                      <a:srgbClr val="F0F0F0"/>
                     </a:solidFill>
                   </a:tcPr>
                 </a:tc>
               </a:tr>
-              <a:tr h="528320">
+              <a:tr h="548640">
                 <a:tc>
                   <a:txBody>
                     <a:bodyPr/>
                     <a:lstStyle/>
                     <a:p>
                       <a:pPr>
-                        <a:defRPr sz="1500" b="1">
+                        <a:defRPr sz="1500">
                           <a:solidFill>
-                            <a:srgbClr val="CCCCCC"/>
+                            <a:srgbClr val="333333"/>
                           </a:solidFill>
                           <a:latin typeface="Calibri"/>
                         </a:defRPr>
                       </a:pPr>
                       <a:r>
-                        <a:t>Dropout</a:t>
+                        <a:t>Parametros</a:t>
                       </a:r>
                     </a:p>
                   </a:txBody>
                   <a:tcPr>
                     <a:solidFill>
-                      <a:srgbClr val="121230"/>
+                      <a:srgbClr val="FFFFFF"/>
                     </a:solidFill>
                   </a:tcPr>
                 </a:tc>
@@ -5707,19 +5084,19 @@
                       <a:pPr>
                         <a:defRPr sz="1500">
                           <a:solidFill>
-                            <a:srgbClr val="FF8888"/>
+                            <a:srgbClr val="333333"/>
                           </a:solidFill>
                           <a:latin typeface="Calibri"/>
                         </a:defRPr>
                       </a:pPr>
                       <a:r>
-                        <a:t>NO</a:t>
+                        <a:t>~19,000</a:t>
                       </a:r>
                     </a:p>
                   </a:txBody>
                   <a:tcPr>
                     <a:solidFill>
-                      <a:srgbClr val="121230"/>
+                      <a:srgbClr val="FFFFFF"/>
                     </a:solidFill>
                   </a:tcPr>
                 </a:tc>
@@ -5731,81 +5108,7 @@
                       <a:pPr>
                         <a:defRPr sz="1500">
                           <a:solidFill>
-                            <a:srgbClr val="88FFBB"/>
-                          </a:solidFill>
-                          <a:latin typeface="Calibri"/>
-                        </a:defRPr>
-                      </a:pPr>
-                      <a:r>
-                        <a:t>p = 0.3</a:t>
-                      </a:r>
-                    </a:p>
-                  </a:txBody>
-                  <a:tcPr>
-                    <a:solidFill>
-                      <a:srgbClr val="121230"/>
-                    </a:solidFill>
-                  </a:tcPr>
-                </a:tc>
-              </a:tr>
-              <a:tr h="528320">
-                <a:tc>
-                  <a:txBody>
-                    <a:bodyPr/>
-                    <a:lstStyle/>
-                    <a:p>
-                      <a:pPr>
-                        <a:defRPr sz="1500" b="1">
-                          <a:solidFill>
-                            <a:srgbClr val="CCCCCC"/>
-                          </a:solidFill>
-                          <a:latin typeface="Calibri"/>
-                        </a:defRPr>
-                      </a:pPr>
-                      <a:r>
-                        <a:t>Parametros</a:t>
-                      </a:r>
-                    </a:p>
-                  </a:txBody>
-                  <a:tcPr>
-                    <a:solidFill>
-                      <a:srgbClr val="121230"/>
-                    </a:solidFill>
-                  </a:tcPr>
-                </a:tc>
-                <a:tc>
-                  <a:txBody>
-                    <a:bodyPr/>
-                    <a:lstStyle/>
-                    <a:p>
-                      <a:pPr>
-                        <a:defRPr sz="1500">
-                          <a:solidFill>
-                            <a:srgbClr val="FF8888"/>
-                          </a:solidFill>
-                          <a:latin typeface="Calibri"/>
-                        </a:defRPr>
-                      </a:pPr>
-                      <a:r>
-                        <a:t>~19,000</a:t>
-                      </a:r>
-                    </a:p>
-                  </a:txBody>
-                  <a:tcPr>
-                    <a:solidFill>
-                      <a:srgbClr val="121230"/>
-                    </a:solidFill>
-                  </a:tcPr>
-                </a:tc>
-                <a:tc>
-                  <a:txBody>
-                    <a:bodyPr/>
-                    <a:lstStyle/>
-                    <a:p>
-                      <a:pPr>
-                        <a:defRPr sz="1500">
-                          <a:solidFill>
-                            <a:srgbClr val="88FFBB"/>
+                            <a:srgbClr val="333333"/>
                           </a:solidFill>
                           <a:latin typeface="Calibri"/>
                         </a:defRPr>
@@ -5817,7 +5120,7 @@
                   </a:txBody>
                   <a:tcPr>
                     <a:solidFill>
-                      <a:srgbClr val="121230"/>
+                      <a:srgbClr val="FFFFFF"/>
                     </a:solidFill>
                   </a:tcPr>
                 </a:tc>
@@ -5840,7 +5143,7 @@
     <p:bg>
       <p:bgPr>
         <a:solidFill>
-          <a:srgbClr val="1A0A2E"/>
+          <a:srgbClr val="FAFAFA"/>
         </a:solidFill>
         <a:effectLst/>
       </p:bgPr>
@@ -5860,8 +5163,8 @@
         </p:nvSpPr>
         <p:spPr>
           <a:xfrm>
-            <a:off x="731520" y="365760"/>
-            <a:ext cx="10698480" cy="822960"/>
+            <a:off x="1371600" y="548640"/>
+            <a:ext cx="9418320" cy="640080"/>
           </a:xfrm>
           <a:prstGeom prst="rect">
             <a:avLst/>
@@ -5875,40 +5178,38 @@
           <a:lstStyle/>
           <a:p>
             <a:pPr algn="l">
-              <a:defRPr sz="3600" b="1">
-                <a:solidFill>
-                  <a:srgbClr val="CC88FF"/>
-                </a:solidFill>
-                <a:latin typeface="Calibri"/>
-              </a:defRPr>
-            </a:pPr>
-            <a:r>
-              <a:t>Anatomia del Exito: Representation Learning</a:t>
-            </a:r>
-          </a:p>
-        </p:txBody>
-      </p:sp>
-      <p:sp>
-        <p:nvSpPr>
-          <p:cNvPr id="3" name="Rounded Rectangle 2"/>
+              <a:defRPr sz="4000" b="1">
+                <a:solidFill>
+                  <a:srgbClr val="1A1A1A"/>
+                </a:solidFill>
+                <a:latin typeface="Calibri"/>
+              </a:defRPr>
+            </a:pPr>
+            <a:r>
+              <a:t>Representation Learning</a:t>
+            </a:r>
+          </a:p>
+        </p:txBody>
+      </p:sp>
+      <p:sp>
+        <p:nvSpPr>
+          <p:cNvPr id="3" name="Rectangle 2"/>
           <p:cNvSpPr/>
           <p:nvPr/>
         </p:nvSpPr>
         <p:spPr>
           <a:xfrm>
-            <a:off x="731520" y="1463040"/>
-            <a:ext cx="5212080" cy="4114800"/>
-          </a:xfrm>
-          <a:prstGeom prst="roundRect">
+            <a:off x="1371600" y="1188720"/>
+            <a:ext cx="1828800" cy="25400"/>
+          </a:xfrm>
+          <a:prstGeom prst="rect">
             <a:avLst/>
           </a:prstGeom>
           <a:solidFill>
-            <a:srgbClr val="200A30"/>
+            <a:srgbClr val="0066CC"/>
           </a:solidFill>
-          <a:ln w="19050">
-            <a:solidFill>
-              <a:srgbClr val="FF6666"/>
-            </a:solidFill>
+          <a:ln>
+            <a:noFill/>
           </a:ln>
         </p:spPr>
         <p:style>
@@ -5941,8 +5242,8 @@
         </p:nvSpPr>
         <p:spPr>
           <a:xfrm>
-            <a:off x="1005840" y="1645920"/>
-            <a:ext cx="4663440" cy="457200"/>
+            <a:off x="1371600" y="1554480"/>
+            <a:ext cx="4572000" cy="365760"/>
           </a:xfrm>
           <a:prstGeom prst="rect">
             <a:avLst/>
@@ -5956,15 +5257,15 @@
           <a:lstStyle/>
           <a:p>
             <a:pPr algn="l">
-              <a:defRPr sz="2400" b="1">
-                <a:solidFill>
-                  <a:srgbClr val="FF6666"/>
-                </a:solidFill>
-                <a:latin typeface="Calibri"/>
-              </a:defRPr>
-            </a:pPr>
-            <a:r>
-              <a:t>Sin Regularizacion</a:t>
+              <a:defRPr sz="2200" b="1">
+                <a:solidFill>
+                  <a:srgbClr val="CC3333"/>
+                </a:solidFill>
+                <a:latin typeface="Calibri"/>
+              </a:defRPr>
+            </a:pPr>
+            <a:r>
+              <a:t>Sin regularizacion</a:t>
             </a:r>
           </a:p>
         </p:txBody>
@@ -5977,8 +5278,8 @@
         </p:nvSpPr>
         <p:spPr>
           <a:xfrm>
-            <a:off x="1005840" y="2286000"/>
-            <a:ext cx="4663440" cy="2926080"/>
+            <a:off x="1371600" y="2011680"/>
+            <a:ext cx="4572000" cy="2743200"/>
           </a:xfrm>
           <a:prstGeom prst="rect">
             <a:avLst/>
@@ -5991,58 +5292,377 @@
           </a:bodyPr>
           <a:lstStyle/>
           <a:p>
+            <a:pPr>
+              <a:spcBef>
+                <a:spcPts val="800"/>
+              </a:spcBef>
+              <a:spcAft>
+                <a:spcPts val="400"/>
+              </a:spcAft>
+              <a:defRPr sz="1600">
+                <a:solidFill>
+                  <a:srgbClr val="333333"/>
+                </a:solidFill>
+                <a:latin typeface="Calibri"/>
+              </a:defRPr>
+            </a:pPr>
+            <a:r>
+              <a:t>-  Memoriza ruido y artefactos</a:t>
+            </a:r>
+          </a:p>
+          <a:p>
+            <a:pPr>
+              <a:spcBef>
+                <a:spcPts val="800"/>
+              </a:spcBef>
+              <a:spcAft>
+                <a:spcPts val="400"/>
+              </a:spcAft>
+              <a:defRPr sz="1600">
+                <a:solidFill>
+                  <a:srgbClr val="333333"/>
+                </a:solidFill>
+                <a:latin typeface="Calibri"/>
+              </a:defRPr>
+            </a:pPr>
+            <a:r>
+              <a:t>-  Features no transferibles</a:t>
+            </a:r>
+          </a:p>
+          <a:p>
+            <a:pPr>
+              <a:spcBef>
+                <a:spcPts val="800"/>
+              </a:spcBef>
+              <a:spcAft>
+                <a:spcPts val="400"/>
+              </a:spcAft>
+              <a:defRPr sz="1600">
+                <a:solidFill>
+                  <a:srgbClr val="333333"/>
+                </a:solidFill>
+                <a:latin typeface="Calibri"/>
+              </a:defRPr>
+            </a:pPr>
+            <a:r>
+              <a:t>-  No aprende conceptos generales</a:t>
+            </a:r>
+          </a:p>
+          <a:p>
+            <a:pPr>
+              <a:spcBef>
+                <a:spcPts val="800"/>
+              </a:spcBef>
+              <a:spcAft>
+                <a:spcPts val="400"/>
+              </a:spcAft>
+              <a:defRPr sz="1600">
+                <a:solidFill>
+                  <a:srgbClr val="333333"/>
+                </a:solidFill>
+                <a:latin typeface="Calibri"/>
+              </a:defRPr>
+            </a:pPr>
+            <a:r>
+              <a:t>-  Neuronas sobreactivadas para</a:t>
+            </a:r>
+          </a:p>
+          <a:p>
+            <a:pPr>
+              <a:spcBef>
+                <a:spcPts val="800"/>
+              </a:spcBef>
+              <a:spcAft>
+                <a:spcPts val="400"/>
+              </a:spcAft>
+              <a:defRPr sz="1600">
+                <a:solidFill>
+                  <a:srgbClr val="333333"/>
+                </a:solidFill>
+                <a:latin typeface="Calibri"/>
+              </a:defRPr>
+            </a:pPr>
+            <a:r>
+              <a:t>   casos puntuales</a:t>
+            </a:r>
+          </a:p>
+        </p:txBody>
+      </p:sp>
+      <p:sp>
+        <p:nvSpPr>
+          <p:cNvPr id="6" name="TextBox 5"/>
+          <p:cNvSpPr txBox="1"/>
+          <p:nvPr/>
+        </p:nvSpPr>
+        <p:spPr>
+          <a:xfrm>
+            <a:off x="6675120" y="1554480"/>
+            <a:ext cx="4572000" cy="365760"/>
+          </a:xfrm>
+          <a:prstGeom prst="rect">
+            <a:avLst/>
+          </a:prstGeom>
+          <a:noFill/>
+        </p:spPr>
+        <p:txBody>
+          <a:bodyPr wrap="square">
+            <a:spAutoFit/>
+          </a:bodyPr>
+          <a:lstStyle/>
+          <a:p>
             <a:pPr algn="l">
-              <a:defRPr sz="1400" b="0">
-                <a:solidFill>
-                  <a:srgbClr val="CCCCCC"/>
-                </a:solidFill>
-                <a:latin typeface="Calibri"/>
-              </a:defRPr>
-            </a:pPr>
-            <a:r>
-              <a:t>La red construye representaciones hiper-especificas de cada muestra individual.</a:t>
+              <a:defRPr sz="2200" b="1">
+                <a:solidFill>
+                  <a:srgbClr val="228844"/>
+                </a:solidFill>
+                <a:latin typeface="Calibri"/>
+              </a:defRPr>
+            </a:pPr>
+            <a:r>
+              <a:t>Con regularizacion</a:t>
+            </a:r>
+          </a:p>
+        </p:txBody>
+      </p:sp>
+      <p:sp>
+        <p:nvSpPr>
+          <p:cNvPr id="7" name="TextBox 6"/>
+          <p:cNvSpPr txBox="1"/>
+          <p:nvPr/>
+        </p:nvSpPr>
+        <p:spPr>
+          <a:xfrm>
+            <a:off x="6675120" y="2011680"/>
+            <a:ext cx="4572000" cy="2743200"/>
+          </a:xfrm>
+          <a:prstGeom prst="rect">
+            <a:avLst/>
+          </a:prstGeom>
+          <a:noFill/>
+        </p:spPr>
+        <p:txBody>
+          <a:bodyPr wrap="square">
+            <a:spAutoFit/>
+          </a:bodyPr>
+          <a:lstStyle/>
+          <a:p>
+            <a:pPr>
+              <a:spcBef>
+                <a:spcPts val="800"/>
+              </a:spcBef>
+              <a:spcAft>
+                <a:spcPts val="400"/>
+              </a:spcAft>
+              <a:defRPr sz="1600">
+                <a:solidFill>
+                  <a:srgbClr val="333333"/>
+                </a:solidFill>
+                <a:latin typeface="Calibri"/>
+              </a:defRPr>
+            </a:pPr>
+            <a:r>
+              <a:t>-  Captura patrones reales</a:t>
+            </a:r>
+          </a:p>
+          <a:p>
+            <a:pPr>
+              <a:spcBef>
+                <a:spcPts val="800"/>
+              </a:spcBef>
+              <a:spcAft>
+                <a:spcPts val="400"/>
+              </a:spcAft>
+              <a:defRPr sz="1600">
+                <a:solidFill>
+                  <a:srgbClr val="333333"/>
+                </a:solidFill>
+                <a:latin typeface="Calibri"/>
+              </a:defRPr>
+            </a:pPr>
+            <a:r>
+              <a:t>-  Features compartidas entre muestras</a:t>
+            </a:r>
+          </a:p>
+          <a:p>
+            <a:pPr>
+              <a:spcBef>
+                <a:spcPts val="800"/>
+              </a:spcBef>
+              <a:spcAft>
+                <a:spcPts val="400"/>
+              </a:spcAft>
+              <a:defRPr sz="1600">
+                <a:solidFill>
+                  <a:srgbClr val="333333"/>
+                </a:solidFill>
+                <a:latin typeface="Calibri"/>
+              </a:defRPr>
+            </a:pPr>
+            <a:r>
+              <a:t>-  Detectores de patrones en capas</a:t>
+            </a:r>
+          </a:p>
+          <a:p>
+            <a:pPr>
+              <a:spcBef>
+                <a:spcPts val="800"/>
+              </a:spcBef>
+              <a:spcAft>
+                <a:spcPts val="400"/>
+              </a:spcAft>
+              <a:defRPr sz="1600">
+                <a:solidFill>
+                  <a:srgbClr val="333333"/>
+                </a:solidFill>
+                <a:latin typeface="Calibri"/>
+              </a:defRPr>
+            </a:pPr>
+            <a:r>
+              <a:t>   intermedias</a:t>
+            </a:r>
+          </a:p>
+          <a:p>
+            <a:pPr>
+              <a:spcBef>
+                <a:spcPts val="800"/>
+              </a:spcBef>
+              <a:spcAft>
+                <a:spcPts val="400"/>
+              </a:spcAft>
+              <a:defRPr sz="1600">
+                <a:solidFill>
+                  <a:srgbClr val="333333"/>
+                </a:solidFill>
+                <a:latin typeface="Calibri"/>
+              </a:defRPr>
+            </a:pPr>
+            <a:r>
+              <a:t>-  Jerarquia: simple a complejo</a:t>
+            </a:r>
+          </a:p>
+        </p:txBody>
+      </p:sp>
+      <p:sp>
+        <p:nvSpPr>
+          <p:cNvPr id="8" name="TextBox 7"/>
+          <p:cNvSpPr txBox="1"/>
+          <p:nvPr/>
+        </p:nvSpPr>
+        <p:spPr>
+          <a:xfrm>
+            <a:off x="1371600" y="5029200"/>
+            <a:ext cx="9418320" cy="548640"/>
+          </a:xfrm>
+          <a:prstGeom prst="rect">
+            <a:avLst/>
+          </a:prstGeom>
+          <a:noFill/>
+        </p:spPr>
+        <p:txBody>
+          <a:bodyPr wrap="square">
+            <a:spAutoFit/>
+          </a:bodyPr>
+          <a:lstStyle/>
+          <a:p>
+            <a:pPr algn="ctr">
+              <a:defRPr sz="1700" b="0">
+                <a:solidFill>
+                  <a:srgbClr val="666666"/>
+                </a:solidFill>
+                <a:latin typeface="Calibri"/>
+              </a:defRPr>
+            </a:pPr>
+            <a:r>
+              <a:t>La regularizacion fuerza a la red a buscar patrones compartidos</a:t>
             </a:r>
             <a:br/>
-            <a:br/>
-            <a:r>
-              <a:t>-&gt; Memoriza el ruido y artefactos de cada dato</a:t>
-            </a:r>
-            <a:br/>
-            <a:r>
-              <a:t>-&gt; Las features internas no son transferibles</a:t>
-            </a:r>
-            <a:br/>
-            <a:r>
-              <a:t>-&gt; No aprende "conceptos" como bordes o formas</a:t>
-            </a:r>
-            <a:br/>
-            <a:r>
-              <a:t>-&gt; Cada neurona se sobreactiva para casos puntuales</a:t>
-            </a:r>
-          </a:p>
-        </p:txBody>
-      </p:sp>
-      <p:sp>
-        <p:nvSpPr>
-          <p:cNvPr id="6" name="Rounded Rectangle 5"/>
+            <a:r>
+              <a:t>en vez de memorizar caso por caso.</a:t>
+            </a:r>
+          </a:p>
+        </p:txBody>
+      </p:sp>
+    </p:spTree>
+  </p:cSld>
+  <p:clrMapOvr>
+    <a:masterClrMapping/>
+  </p:clrMapOvr>
+</p:sld>
+</file>
+
+<file path=ppt/slides/slide7.xml><?xml version="1.0" encoding="utf-8"?>
+<p:sld xmlns:a="http://schemas.openxmlformats.org/drawingml/2006/main" xmlns:p="http://schemas.openxmlformats.org/presentationml/2006/main" xmlns:r="http://schemas.openxmlformats.org/officeDocument/2006/relationships">
+  <p:cSld>
+    <p:bg>
+      <p:bgPr>
+        <a:solidFill>
+          <a:srgbClr val="FAFAFA"/>
+        </a:solidFill>
+        <a:effectLst/>
+      </p:bgPr>
+    </p:bg>
+    <p:spTree>
+      <p:nvGrpSpPr>
+        <p:cNvPr id="1" name=""/>
+        <p:cNvGrpSpPr/>
+        <p:nvPr/>
+      </p:nvGrpSpPr>
+      <p:grpSpPr/>
+      <p:sp>
+        <p:nvSpPr>
+          <p:cNvPr id="2" name="TextBox 1"/>
+          <p:cNvSpPr txBox="1"/>
+          <p:nvPr/>
+        </p:nvSpPr>
+        <p:spPr>
+          <a:xfrm>
+            <a:off x="1371600" y="548640"/>
+            <a:ext cx="9418320" cy="640080"/>
+          </a:xfrm>
+          <a:prstGeom prst="rect">
+            <a:avLst/>
+          </a:prstGeom>
+          <a:noFill/>
+        </p:spPr>
+        <p:txBody>
+          <a:bodyPr wrap="square">
+            <a:spAutoFit/>
+          </a:bodyPr>
+          <a:lstStyle/>
+          <a:p>
+            <a:pPr algn="l">
+              <a:defRPr sz="4000" b="1">
+                <a:solidFill>
+                  <a:srgbClr val="1A1A1A"/>
+                </a:solidFill>
+                <a:latin typeface="Calibri"/>
+              </a:defRPr>
+            </a:pPr>
+            <a:r>
+              <a:t>Decision de Negocio</a:t>
+            </a:r>
+          </a:p>
+        </p:txBody>
+      </p:sp>
+      <p:sp>
+        <p:nvSpPr>
+          <p:cNvPr id="3" name="Rectangle 2"/>
           <p:cNvSpPr/>
           <p:nvPr/>
         </p:nvSpPr>
         <p:spPr>
           <a:xfrm>
-            <a:off x="6217920" y="1463040"/>
-            <a:ext cx="5212080" cy="4114800"/>
-          </a:xfrm>
-          <a:prstGeom prst="roundRect">
+            <a:off x="1371600" y="1188720"/>
+            <a:ext cx="1828800" cy="25400"/>
+          </a:xfrm>
+          <a:prstGeom prst="rect">
             <a:avLst/>
           </a:prstGeom>
           <a:solidFill>
-            <a:srgbClr val="0A2015"/>
+            <a:srgbClr val="0066CC"/>
           </a:solidFill>
-          <a:ln w="19050">
-            <a:solidFill>
-              <a:srgbClr val="66FFAA"/>
-            </a:solidFill>
+          <a:ln>
+            <a:noFill/>
           </a:ln>
         </p:spPr>
         <p:style>
@@ -6069,14 +5689,14 @@
       </p:sp>
       <p:sp>
         <p:nvSpPr>
-          <p:cNvPr id="7" name="TextBox 6"/>
+          <p:cNvPr id="4" name="TextBox 3"/>
           <p:cNvSpPr txBox="1"/>
           <p:nvPr/>
         </p:nvSpPr>
         <p:spPr>
           <a:xfrm>
-            <a:off x="6492240" y="1645920"/>
-            <a:ext cx="4663440" cy="457200"/>
+            <a:off x="1371600" y="1554480"/>
+            <a:ext cx="9418320" cy="457200"/>
           </a:xfrm>
           <a:prstGeom prst="rect">
             <a:avLst/>
@@ -6090,29 +5710,29 @@
           <a:lstStyle/>
           <a:p>
             <a:pPr algn="l">
-              <a:defRPr sz="2400" b="1">
-                <a:solidFill>
-                  <a:srgbClr val="66FFAA"/>
-                </a:solidFill>
-                <a:latin typeface="Calibri"/>
-              </a:defRPr>
-            </a:pPr>
-            <a:r>
-              <a:t>Con Regularizacion</a:t>
-            </a:r>
-          </a:p>
-        </p:txBody>
-      </p:sp>
-      <p:sp>
-        <p:nvSpPr>
-          <p:cNvPr id="8" name="TextBox 7"/>
+              <a:defRPr sz="1800" b="1">
+                <a:solidFill>
+                  <a:srgbClr val="0066CC"/>
+                </a:solidFill>
+                <a:latin typeface="Calibri"/>
+              </a:defRPr>
+            </a:pPr>
+            <a:r>
+              <a:t>Con mas presupuesto, invertir en datos + regularizacion.</a:t>
+            </a:r>
+          </a:p>
+        </p:txBody>
+      </p:sp>
+      <p:sp>
+        <p:nvSpPr>
+          <p:cNvPr id="5" name="TextBox 4"/>
           <p:cNvSpPr txBox="1"/>
           <p:nvPr/>
         </p:nvSpPr>
         <p:spPr>
           <a:xfrm>
-            <a:off x="6492240" y="2286000"/>
-            <a:ext cx="4663440" cy="2926080"/>
+            <a:off x="1371600" y="2286000"/>
+            <a:ext cx="9418320" cy="365760"/>
           </a:xfrm>
           <a:prstGeom prst="rect">
             <a:avLst/>
@@ -6126,46 +5746,29 @@
           <a:lstStyle/>
           <a:p>
             <a:pPr algn="l">
-              <a:defRPr sz="1400" b="0">
-                <a:solidFill>
-                  <a:srgbClr val="CCCCCC"/>
-                </a:solidFill>
-                <a:latin typeface="Calibri"/>
-              </a:defRPr>
-            </a:pPr>
-            <a:r>
-              <a:t>La red aprende representaciones generalizables - patrones que aplican a datos nuevos.</a:t>
-            </a:r>
-            <a:br/>
-            <a:br/>
-            <a:r>
-              <a:t>-&gt; Captura estructura real: distribuciones, correlaciones</a:t>
-            </a:r>
-            <a:br/>
-            <a:r>
-              <a:t>-&gt; Features compartidas entre muestras similares</a:t>
-            </a:r>
-            <a:br/>
-            <a:r>
-              <a:t>-&gt; Capas intermedias actuan como detectores de patrones</a:t>
-            </a:r>
-            <a:br/>
-            <a:r>
-              <a:t>-&gt; Jerarquia: features simples -&gt; features complejas</a:t>
-            </a:r>
-          </a:p>
-        </p:txBody>
-      </p:sp>
-      <p:sp>
-        <p:nvSpPr>
-          <p:cNvPr id="9" name="TextBox 8"/>
+              <a:defRPr sz="2200" b="1">
+                <a:solidFill>
+                  <a:srgbClr val="333333"/>
+                </a:solidFill>
+                <a:latin typeface="Calibri"/>
+              </a:defRPr>
+            </a:pPr>
+            <a:r>
+              <a:t>Prioridad 1: Mas datos</a:t>
+            </a:r>
+          </a:p>
+        </p:txBody>
+      </p:sp>
+      <p:sp>
+        <p:nvSpPr>
+          <p:cNvPr id="6" name="TextBox 5"/>
           <p:cNvSpPr txBox="1"/>
           <p:nvPr/>
         </p:nvSpPr>
         <p:spPr>
           <a:xfrm>
-            <a:off x="731520" y="5852160"/>
-            <a:ext cx="10698480" cy="548640"/>
+            <a:off x="1645920" y="2743200"/>
+            <a:ext cx="8686800" cy="1097280"/>
           </a:xfrm>
           <a:prstGeom prst="rect">
             <a:avLst/>
@@ -6178,16 +5781,178 @@
           </a:bodyPr>
           <a:lstStyle/>
           <a:p>
-            <a:pPr algn="ctr">
-              <a:defRPr sz="1600" b="1">
-                <a:solidFill>
-                  <a:srgbClr val="CC88FF"/>
-                </a:solidFill>
-                <a:latin typeface="Calibri"/>
-              </a:defRPr>
-            </a:pPr>
-            <a:r>
-              <a:t>La regularizacion fuerza a la red a buscar patrones compartidos en vez de memorizar caso por caso.</a:t>
+            <a:pPr>
+              <a:spcBef>
+                <a:spcPts val="800"/>
+              </a:spcBef>
+              <a:spcAft>
+                <a:spcPts val="400"/>
+              </a:spcAft>
+              <a:defRPr sz="1600">
+                <a:solidFill>
+                  <a:srgbClr val="333333"/>
+                </a:solidFill>
+                <a:latin typeface="Calibri"/>
+              </a:defRPr>
+            </a:pPr>
+            <a:r>
+              <a:t>Con un dataset pequeno, ninguna tecnica supera tener mas muestras.</a:t>
+            </a:r>
+          </a:p>
+          <a:p>
+            <a:pPr>
+              <a:spcBef>
+                <a:spcPts val="800"/>
+              </a:spcBef>
+              <a:spcAft>
+                <a:spcPts val="400"/>
+              </a:spcAft>
+              <a:defRPr sz="1600">
+                <a:solidFill>
+                  <a:srgbClr val="333333"/>
+                </a:solidFill>
+                <a:latin typeface="Calibri"/>
+              </a:defRPr>
+            </a:pPr>
+            <a:r>
+              <a:t>Data Augmentation, Transfer Learning, recopilacion de imagenes medicas.</a:t>
+            </a:r>
+          </a:p>
+        </p:txBody>
+      </p:sp>
+      <p:sp>
+        <p:nvSpPr>
+          <p:cNvPr id="7" name="TextBox 6"/>
+          <p:cNvSpPr txBox="1"/>
+          <p:nvPr/>
+        </p:nvSpPr>
+        <p:spPr>
+          <a:xfrm>
+            <a:off x="1371600" y="3840480"/>
+            <a:ext cx="9418320" cy="365760"/>
+          </a:xfrm>
+          <a:prstGeom prst="rect">
+            <a:avLst/>
+          </a:prstGeom>
+          <a:noFill/>
+        </p:spPr>
+        <p:txBody>
+          <a:bodyPr wrap="square">
+            <a:spAutoFit/>
+          </a:bodyPr>
+          <a:lstStyle/>
+          <a:p>
+            <a:pPr algn="l">
+              <a:defRPr sz="2200" b="1">
+                <a:solidFill>
+                  <a:srgbClr val="333333"/>
+                </a:solidFill>
+                <a:latin typeface="Calibri"/>
+              </a:defRPr>
+            </a:pPr>
+            <a:r>
+              <a:t>Prioridad 2: Mejor regularizacion</a:t>
+            </a:r>
+          </a:p>
+        </p:txBody>
+      </p:sp>
+      <p:sp>
+        <p:nvSpPr>
+          <p:cNvPr id="8" name="TextBox 7"/>
+          <p:cNvSpPr txBox="1"/>
+          <p:nvPr/>
+        </p:nvSpPr>
+        <p:spPr>
+          <a:xfrm>
+            <a:off x="1645920" y="4297680"/>
+            <a:ext cx="8686800" cy="1097280"/>
+          </a:xfrm>
+          <a:prstGeom prst="rect">
+            <a:avLst/>
+          </a:prstGeom>
+          <a:noFill/>
+        </p:spPr>
+        <p:txBody>
+          <a:bodyPr wrap="square">
+            <a:spAutoFit/>
+          </a:bodyPr>
+          <a:lstStyle/>
+          <a:p>
+            <a:pPr>
+              <a:spcBef>
+                <a:spcPts val="800"/>
+              </a:spcBef>
+              <a:spcAft>
+                <a:spcPts val="400"/>
+              </a:spcAft>
+              <a:defRPr sz="1600">
+                <a:solidFill>
+                  <a:srgbClr val="333333"/>
+                </a:solidFill>
+                <a:latin typeface="Calibri"/>
+              </a:defRPr>
+            </a:pPr>
+            <a:r>
+              <a:t>Combinar L2 + Dropout + Batch Normalization + Early Stopping.</a:t>
+            </a:r>
+          </a:p>
+          <a:p>
+            <a:pPr>
+              <a:spcBef>
+                <a:spcPts val="800"/>
+              </a:spcBef>
+              <a:spcAft>
+                <a:spcPts val="400"/>
+              </a:spcAft>
+              <a:defRPr sz="1600">
+                <a:solidFill>
+                  <a:srgbClr val="333333"/>
+                </a:solidFill>
+                <a:latin typeface="Calibri"/>
+              </a:defRPr>
+            </a:pPr>
+            <a:r>
+              <a:t>Validacion cruzada (k-fold) para estimar rendimiento real.</a:t>
+            </a:r>
+          </a:p>
+        </p:txBody>
+      </p:sp>
+      <p:sp>
+        <p:nvSpPr>
+          <p:cNvPr id="9" name="TextBox 8"/>
+          <p:cNvSpPr txBox="1"/>
+          <p:nvPr/>
+        </p:nvSpPr>
+        <p:spPr>
+          <a:xfrm>
+            <a:off x="1371600" y="5486400"/>
+            <a:ext cx="9418320" cy="457200"/>
+          </a:xfrm>
+          <a:prstGeom prst="rect">
+            <a:avLst/>
+          </a:prstGeom>
+          <a:noFill/>
+        </p:spPr>
+        <p:txBody>
+          <a:bodyPr wrap="square">
+            <a:spAutoFit/>
+          </a:bodyPr>
+          <a:lstStyle/>
+          <a:p>
+            <a:pPr algn="l">
+              <a:defRPr sz="1600" b="0">
+                <a:solidFill>
+                  <a:srgbClr val="CC3333"/>
+                </a:solidFill>
+                <a:latin typeface="Calibri"/>
+              </a:defRPr>
+            </a:pPr>
+            <a:r>
+              <a:t>En medicina, un modelo que memoriza es peligroso:</a:t>
+            </a:r>
+            <a:br/>
+            <a:r>
+              <a:t>puede dar falsos negativos en pacientes nuevos.</a:t>
             </a:r>
           </a:p>
         </p:txBody>
@@ -6200,13 +5965,13 @@
 </p:sld>
 </file>
 
-<file path=ppt/slides/slide7.xml><?xml version="1.0" encoding="utf-8"?>
+<file path=ppt/slides/slide8.xml><?xml version="1.0" encoding="utf-8"?>
 <p:sld xmlns:a="http://schemas.openxmlformats.org/drawingml/2006/main" xmlns:p="http://schemas.openxmlformats.org/presentationml/2006/main" xmlns:r="http://schemas.openxmlformats.org/officeDocument/2006/relationships">
   <p:cSld>
     <p:bg>
       <p:bgPr>
         <a:solidFill>
-          <a:srgbClr val="0A1A2E"/>
+          <a:srgbClr val="FAFAFA"/>
         </a:solidFill>
         <a:effectLst/>
       </p:bgPr>
@@ -6226,8 +5991,8 @@
         </p:nvSpPr>
         <p:spPr>
           <a:xfrm>
-            <a:off x="731520" y="365760"/>
-            <a:ext cx="10698480" cy="822960"/>
+            <a:off x="1371600" y="548640"/>
+            <a:ext cx="9418320" cy="640080"/>
           </a:xfrm>
           <a:prstGeom prst="rect">
             <a:avLst/>
@@ -6243,38 +6008,36 @@
             <a:pPr algn="l">
               <a:defRPr sz="4000" b="1">
                 <a:solidFill>
-                  <a:srgbClr val="44AAFF"/>
-                </a:solidFill>
-                <a:latin typeface="Calibri"/>
-              </a:defRPr>
-            </a:pPr>
-            <a:r>
-              <a:t>Decision de Negocio</a:t>
-            </a:r>
-          </a:p>
-        </p:txBody>
-      </p:sp>
-      <p:sp>
-        <p:nvSpPr>
-          <p:cNvPr id="3" name="Rounded Rectangle 2"/>
+                  <a:srgbClr val="1A1A1A"/>
+                </a:solidFill>
+                <a:latin typeface="Calibri"/>
+              </a:defRPr>
+            </a:pPr>
+            <a:r>
+              <a:t>Bonus Matematico</a:t>
+            </a:r>
+          </a:p>
+        </p:txBody>
+      </p:sp>
+      <p:sp>
+        <p:nvSpPr>
+          <p:cNvPr id="3" name="Rectangle 2"/>
           <p:cNvSpPr/>
           <p:nvPr/>
         </p:nvSpPr>
         <p:spPr>
           <a:xfrm>
-            <a:off x="731520" y="1371600"/>
-            <a:ext cx="10698480" cy="1188720"/>
-          </a:xfrm>
-          <a:prstGeom prst="roundRect">
+            <a:off x="1371600" y="1188720"/>
+            <a:ext cx="1828800" cy="25400"/>
+          </a:xfrm>
+          <a:prstGeom prst="rect">
             <a:avLst/>
           </a:prstGeom>
           <a:solidFill>
-            <a:srgbClr val="0A203A"/>
+            <a:srgbClr val="0066CC"/>
           </a:solidFill>
-          <a:ln w="19050">
-            <a:solidFill>
-              <a:srgbClr val="44AAFF"/>
-            </a:solidFill>
+          <a:ln>
+            <a:noFill/>
           </a:ln>
         </p:spPr>
         <p:style>
@@ -6307,8 +6070,8 @@
         </p:nvSpPr>
         <p:spPr>
           <a:xfrm>
-            <a:off x="1005840" y="1463040"/>
-            <a:ext cx="10149840" cy="365760"/>
+            <a:off x="1371600" y="1554480"/>
+            <a:ext cx="9418320" cy="365760"/>
           </a:xfrm>
           <a:prstGeom prst="rect">
             <a:avLst/>
@@ -6322,15 +6085,15 @@
           <a:lstStyle/>
           <a:p>
             <a:pPr algn="l">
-              <a:defRPr sz="2000" b="1">
-                <a:solidFill>
-                  <a:srgbClr val="88AAFF"/>
-                </a:solidFill>
-                <a:latin typeface="Calibri"/>
-              </a:defRPr>
-            </a:pPr>
-            <a:r>
-              <a:t>Si tuvieramos mas presupuesto, donde invertirlo?</a:t>
+              <a:defRPr sz="1800" b="1">
+                <a:solidFill>
+                  <a:srgbClr val="333333"/>
+                </a:solidFill>
+                <a:latin typeface="Calibri"/>
+              </a:defRPr>
+            </a:pPr>
+            <a:r>
+              <a:t>Sin Weight Decay:</a:t>
             </a:r>
           </a:p>
         </p:txBody>
@@ -6343,8 +6106,8 @@
         </p:nvSpPr>
         <p:spPr>
           <a:xfrm>
-            <a:off x="1005840" y="1920240"/>
-            <a:ext cx="10149840" cy="457200"/>
+            <a:off x="1645920" y="2011680"/>
+            <a:ext cx="8229600" cy="365760"/>
           </a:xfrm>
           <a:prstGeom prst="rect">
             <a:avLst/>
@@ -6358,40 +6121,388 @@
           <a:lstStyle/>
           <a:p>
             <a:pPr algn="l">
-              <a:defRPr sz="1600" b="1">
-                <a:solidFill>
-                  <a:srgbClr val="88DDFF"/>
-                </a:solidFill>
-                <a:latin typeface="Calibri"/>
-              </a:defRPr>
-            </a:pPr>
-            <a:r>
-              <a:t>Recomendacion: Invertir en DATOS + NAVEGACION (optimizacion), no solo en mejores activaciones.</a:t>
-            </a:r>
-          </a:p>
-        </p:txBody>
-      </p:sp>
-      <p:sp>
-        <p:nvSpPr>
-          <p:cNvPr id="6" name="Rounded Rectangle 5"/>
+              <a:defRPr sz="1600" b="0">
+                <a:solidFill>
+                  <a:srgbClr val="666666"/>
+                </a:solidFill>
+                <a:latin typeface="Consolas"/>
+              </a:defRPr>
+            </a:pPr>
+            <a:r>
+              <a:t>theta(t+1)  =  theta(t) - n * grad(L)</a:t>
+            </a:r>
+          </a:p>
+        </p:txBody>
+      </p:sp>
+      <p:sp>
+        <p:nvSpPr>
+          <p:cNvPr id="6" name="TextBox 5"/>
+          <p:cNvSpPr txBox="1"/>
+          <p:nvPr/>
+        </p:nvSpPr>
+        <p:spPr>
+          <a:xfrm>
+            <a:off x="1371600" y="2651760"/>
+            <a:ext cx="9418320" cy="365760"/>
+          </a:xfrm>
+          <a:prstGeom prst="rect">
+            <a:avLst/>
+          </a:prstGeom>
+          <a:noFill/>
+        </p:spPr>
+        <p:txBody>
+          <a:bodyPr wrap="square">
+            <a:spAutoFit/>
+          </a:bodyPr>
+          <a:lstStyle/>
+          <a:p>
+            <a:pPr algn="l">
+              <a:defRPr sz="1800" b="1">
+                <a:solidFill>
+                  <a:srgbClr val="333333"/>
+                </a:solidFill>
+                <a:latin typeface="Calibri"/>
+              </a:defRPr>
+            </a:pPr>
+            <a:r>
+              <a:t>Con Weight Decay (L2):</a:t>
+            </a:r>
+          </a:p>
+        </p:txBody>
+      </p:sp>
+      <p:sp>
+        <p:nvSpPr>
+          <p:cNvPr id="7" name="TextBox 6"/>
+          <p:cNvSpPr txBox="1"/>
+          <p:nvPr/>
+        </p:nvSpPr>
+        <p:spPr>
+          <a:xfrm>
+            <a:off x="1645920" y="3108960"/>
+            <a:ext cx="8229600" cy="365760"/>
+          </a:xfrm>
+          <a:prstGeom prst="rect">
+            <a:avLst/>
+          </a:prstGeom>
+          <a:noFill/>
+        </p:spPr>
+        <p:txBody>
+          <a:bodyPr wrap="square">
+            <a:spAutoFit/>
+          </a:bodyPr>
+          <a:lstStyle/>
+          <a:p>
+            <a:pPr algn="l">
+              <a:defRPr sz="1600" b="0">
+                <a:solidFill>
+                  <a:srgbClr val="666666"/>
+                </a:solidFill>
+                <a:latin typeface="Consolas"/>
+              </a:defRPr>
+            </a:pPr>
+            <a:r>
+              <a:t>theta(t+1)  =  (1 - n*lambda) * theta(t) - n * grad(L)</a:t>
+            </a:r>
+          </a:p>
+        </p:txBody>
+      </p:sp>
+      <p:sp>
+        <p:nvSpPr>
+          <p:cNvPr id="8" name="TextBox 7"/>
+          <p:cNvSpPr txBox="1"/>
+          <p:nvPr/>
+        </p:nvSpPr>
+        <p:spPr>
+          <a:xfrm>
+            <a:off x="1645920" y="3566160"/>
+            <a:ext cx="8229600" cy="365760"/>
+          </a:xfrm>
+          <a:prstGeom prst="rect">
+            <a:avLst/>
+          </a:prstGeom>
+          <a:noFill/>
+        </p:spPr>
+        <p:txBody>
+          <a:bodyPr wrap="square">
+            <a:spAutoFit/>
+          </a:bodyPr>
+          <a:lstStyle/>
+          <a:p>
+            <a:pPr algn="l">
+              <a:defRPr sz="1500" b="0">
+                <a:solidFill>
+                  <a:srgbClr val="666666"/>
+                </a:solidFill>
+                <a:latin typeface="Calibri"/>
+              </a:defRPr>
+            </a:pPr>
+            <a:r>
+              <a:t>El factor (1 - n*lambda) encoge los pesos en cada paso.</a:t>
+            </a:r>
+          </a:p>
+        </p:txBody>
+      </p:sp>
+      <p:sp>
+        <p:nvSpPr>
+          <p:cNvPr id="9" name="TextBox 8"/>
+          <p:cNvSpPr txBox="1"/>
+          <p:nvPr/>
+        </p:nvSpPr>
+        <p:spPr>
+          <a:xfrm>
+            <a:off x="1371600" y="4206240"/>
+            <a:ext cx="9418320" cy="365760"/>
+          </a:xfrm>
+          <a:prstGeom prst="rect">
+            <a:avLst/>
+          </a:prstGeom>
+          <a:noFill/>
+        </p:spPr>
+        <p:txBody>
+          <a:bodyPr wrap="square">
+            <a:spAutoFit/>
+          </a:bodyPr>
+          <a:lstStyle/>
+          <a:p>
+            <a:pPr algn="l">
+              <a:defRPr sz="1800" b="1">
+                <a:solidFill>
+                  <a:srgbClr val="333333"/>
+                </a:solidFill>
+                <a:latin typeface="Calibri"/>
+              </a:defRPr>
+            </a:pPr>
+            <a:r>
+              <a:t>Dropout:</a:t>
+            </a:r>
+          </a:p>
+        </p:txBody>
+      </p:sp>
+      <p:sp>
+        <p:nvSpPr>
+          <p:cNvPr id="10" name="TextBox 9"/>
+          <p:cNvSpPr txBox="1"/>
+          <p:nvPr/>
+        </p:nvSpPr>
+        <p:spPr>
+          <a:xfrm>
+            <a:off x="1645920" y="4663440"/>
+            <a:ext cx="8229600" cy="365760"/>
+          </a:xfrm>
+          <a:prstGeom prst="rect">
+            <a:avLst/>
+          </a:prstGeom>
+          <a:noFill/>
+        </p:spPr>
+        <p:txBody>
+          <a:bodyPr wrap="square">
+            <a:spAutoFit/>
+          </a:bodyPr>
+          <a:lstStyle/>
+          <a:p>
+            <a:pPr algn="l">
+              <a:defRPr sz="1600" b="0">
+                <a:solidFill>
+                  <a:srgbClr val="666666"/>
+                </a:solidFill>
+                <a:latin typeface="Consolas"/>
+              </a:defRPr>
+            </a:pPr>
+            <a:r>
+              <a:t>h_i = x_i/(1-p) con prob (1-p),  o  0 con prob p</a:t>
+            </a:r>
+          </a:p>
+        </p:txBody>
+      </p:sp>
+      <p:sp>
+        <p:nvSpPr>
+          <p:cNvPr id="11" name="TextBox 10"/>
+          <p:cNvSpPr txBox="1"/>
+          <p:nvPr/>
+        </p:nvSpPr>
+        <p:spPr>
+          <a:xfrm>
+            <a:off x="1645920" y="5120640"/>
+            <a:ext cx="8229600" cy="365760"/>
+          </a:xfrm>
+          <a:prstGeom prst="rect">
+            <a:avLst/>
+          </a:prstGeom>
+          <a:noFill/>
+        </p:spPr>
+        <p:txBody>
+          <a:bodyPr wrap="square">
+            <a:spAutoFit/>
+          </a:bodyPr>
+          <a:lstStyle/>
+          <a:p>
+            <a:pPr algn="l">
+              <a:defRPr sz="1500" b="0">
+                <a:solidFill>
+                  <a:srgbClr val="666666"/>
+                </a:solidFill>
+                <a:latin typeface="Calibri"/>
+              </a:defRPr>
+            </a:pPr>
+            <a:r>
+              <a:t>Equivale a entrenar un ensemble de sub-redes.</a:t>
+            </a:r>
+          </a:p>
+        </p:txBody>
+      </p:sp>
+      <p:sp>
+        <p:nvSpPr>
+          <p:cNvPr id="12" name="TextBox 11"/>
+          <p:cNvSpPr txBox="1"/>
+          <p:nvPr/>
+        </p:nvSpPr>
+        <p:spPr>
+          <a:xfrm>
+            <a:off x="1371600" y="5760720"/>
+            <a:ext cx="9418320" cy="365760"/>
+          </a:xfrm>
+          <a:prstGeom prst="rect">
+            <a:avLst/>
+          </a:prstGeom>
+          <a:noFill/>
+        </p:spPr>
+        <p:txBody>
+          <a:bodyPr wrap="square">
+            <a:spAutoFit/>
+          </a:bodyPr>
+          <a:lstStyle/>
+          <a:p>
+            <a:pPr algn="l">
+              <a:defRPr sz="1800" b="1">
+                <a:solidFill>
+                  <a:srgbClr val="333333"/>
+                </a:solidFill>
+                <a:latin typeface="Calibri"/>
+              </a:defRPr>
+            </a:pPr>
+            <a:r>
+              <a:t>Loss total:</a:t>
+            </a:r>
+          </a:p>
+        </p:txBody>
+      </p:sp>
+      <p:sp>
+        <p:nvSpPr>
+          <p:cNvPr id="13" name="TextBox 12"/>
+          <p:cNvSpPr txBox="1"/>
+          <p:nvPr/>
+        </p:nvSpPr>
+        <p:spPr>
+          <a:xfrm>
+            <a:off x="1645920" y="6126480"/>
+            <a:ext cx="8229600" cy="365760"/>
+          </a:xfrm>
+          <a:prstGeom prst="rect">
+            <a:avLst/>
+          </a:prstGeom>
+          <a:noFill/>
+        </p:spPr>
+        <p:txBody>
+          <a:bodyPr wrap="square">
+            <a:spAutoFit/>
+          </a:bodyPr>
+          <a:lstStyle/>
+          <a:p>
+            <a:pPr algn="l">
+              <a:defRPr sz="1600" b="0">
+                <a:solidFill>
+                  <a:srgbClr val="666666"/>
+                </a:solidFill>
+                <a:latin typeface="Consolas"/>
+              </a:defRPr>
+            </a:pPr>
+            <a:r>
+              <a:t>L_total = L_BCE + lambda * sum(||w_i||^2)</a:t>
+            </a:r>
+          </a:p>
+        </p:txBody>
+      </p:sp>
+    </p:spTree>
+  </p:cSld>
+  <p:clrMapOvr>
+    <a:masterClrMapping/>
+  </p:clrMapOvr>
+</p:sld>
+</file>
+
+<file path=ppt/slides/slide9.xml><?xml version="1.0" encoding="utf-8"?>
+<p:sld xmlns:a="http://schemas.openxmlformats.org/drawingml/2006/main" xmlns:p="http://schemas.openxmlformats.org/presentationml/2006/main" xmlns:r="http://schemas.openxmlformats.org/officeDocument/2006/relationships">
+  <p:cSld>
+    <p:bg>
+      <p:bgPr>
+        <a:solidFill>
+          <a:srgbClr val="FAFAFA"/>
+        </a:solidFill>
+        <a:effectLst/>
+      </p:bgPr>
+    </p:bg>
+    <p:spTree>
+      <p:nvGrpSpPr>
+        <p:cNvPr id="1" name=""/>
+        <p:cNvGrpSpPr/>
+        <p:nvPr/>
+      </p:nvGrpSpPr>
+      <p:grpSpPr/>
+      <p:sp>
+        <p:nvSpPr>
+          <p:cNvPr id="2" name="TextBox 1"/>
+          <p:cNvSpPr txBox="1"/>
+          <p:nvPr/>
+        </p:nvSpPr>
+        <p:spPr>
+          <a:xfrm>
+            <a:off x="1371600" y="548640"/>
+            <a:ext cx="9418320" cy="640080"/>
+          </a:xfrm>
+          <a:prstGeom prst="rect">
+            <a:avLst/>
+          </a:prstGeom>
+          <a:noFill/>
+        </p:spPr>
+        <p:txBody>
+          <a:bodyPr wrap="square">
+            <a:spAutoFit/>
+          </a:bodyPr>
+          <a:lstStyle/>
+          <a:p>
+            <a:pPr algn="l">
+              <a:defRPr sz="4000" b="1">
+                <a:solidFill>
+                  <a:srgbClr val="1A1A1A"/>
+                </a:solidFill>
+                <a:latin typeface="Calibri"/>
+              </a:defRPr>
+            </a:pPr>
+            <a:r>
+              <a:t>Conclusiones</a:t>
+            </a:r>
+          </a:p>
+        </p:txBody>
+      </p:sp>
+      <p:sp>
+        <p:nvSpPr>
+          <p:cNvPr id="3" name="Rectangle 2"/>
           <p:cNvSpPr/>
           <p:nvPr/>
         </p:nvSpPr>
         <p:spPr>
           <a:xfrm>
-            <a:off x="731520" y="2926080"/>
-            <a:ext cx="5212080" cy="2743200"/>
-          </a:xfrm>
-          <a:prstGeom prst="roundRect">
+            <a:off x="1371600" y="1188720"/>
+            <a:ext cx="1828800" cy="25400"/>
+          </a:xfrm>
+          <a:prstGeom prst="rect">
             <a:avLst/>
           </a:prstGeom>
           <a:solidFill>
-            <a:srgbClr val="0A203A"/>
+            <a:srgbClr val="0066CC"/>
           </a:solidFill>
-          <a:ln w="19050">
-            <a:solidFill>
-              <a:srgbClr val="44AAFF"/>
-            </a:solidFill>
+          <a:ln>
+            <a:noFill/>
           </a:ln>
         </p:spPr>
         <p:style>
@@ -6418,14 +6529,14 @@
       </p:sp>
       <p:sp>
         <p:nvSpPr>
-          <p:cNvPr id="7" name="TextBox 6"/>
+          <p:cNvPr id="4" name="TextBox 3"/>
           <p:cNvSpPr txBox="1"/>
           <p:nvPr/>
         </p:nvSpPr>
         <p:spPr>
           <a:xfrm>
-            <a:off x="1005840" y="3108960"/>
-            <a:ext cx="4663440" cy="457200"/>
+            <a:off x="1371600" y="1554480"/>
+            <a:ext cx="9418320" cy="5029200"/>
           </a:xfrm>
           <a:prstGeom prst="rect">
             <a:avLst/>
@@ -6438,30 +6549,217 @@
           </a:bodyPr>
           <a:lstStyle/>
           <a:p>
-            <a:pPr algn="l">
-              <a:defRPr sz="2000" b="1">
-                <a:solidFill>
-                  <a:srgbClr val="88AAFF"/>
-                </a:solidFill>
-                <a:latin typeface="Calibri"/>
-              </a:defRPr>
-            </a:pPr>
-            <a:r>
-              <a:t>Prioridad 1: Mas Datos</a:t>
-            </a:r>
-          </a:p>
-        </p:txBody>
-      </p:sp>
-      <p:sp>
-        <p:nvSpPr>
-          <p:cNvPr id="8" name="TextBox 7"/>
+            <a:pPr>
+              <a:spcBef>
+                <a:spcPts val="800"/>
+              </a:spcBef>
+              <a:spcAft>
+                <a:spcPts val="400"/>
+              </a:spcAft>
+              <a:defRPr sz="1800">
+                <a:solidFill>
+                  <a:srgbClr val="333333"/>
+                </a:solidFill>
+                <a:latin typeface="Calibri"/>
+              </a:defRPr>
+            </a:pPr>
+            <a:r>
+              <a:t>1.  Diagnostico: el modelo memorizaba el dataset de entrenamiento.</a:t>
+            </a:r>
+          </a:p>
+          <a:p>
+            <a:pPr>
+              <a:spcBef>
+                <a:spcPts val="800"/>
+              </a:spcBef>
+              <a:spcAft>
+                <a:spcPts val="400"/>
+              </a:spcAft>
+              <a:defRPr sz="1800">
+                <a:solidFill>
+                  <a:srgbClr val="333333"/>
+                </a:solidFill>
+                <a:latin typeface="Calibri"/>
+              </a:defRPr>
+            </a:pPr>
+            <a:r>
+              <a:t>     Train ~100%, Test ~65-75%. Overfitting violento.</a:t>
+            </a:r>
+          </a:p>
+          <a:p>
+            <a:pPr>
+              <a:spcBef>
+                <a:spcPts val="800"/>
+              </a:spcBef>
+              <a:spcAft>
+                <a:spcPts val="400"/>
+              </a:spcAft>
+              <a:defRPr sz="1800">
+                <a:solidFill>
+                  <a:srgbClr val="333333"/>
+                </a:solidFill>
+                <a:latin typeface="Calibri"/>
+              </a:defRPr>
+            </a:pPr>
+          </a:p>
+          <a:p>
+            <a:pPr>
+              <a:spcBef>
+                <a:spcPts val="800"/>
+              </a:spcBef>
+              <a:spcAft>
+                <a:spcPts val="400"/>
+              </a:spcAft>
+              <a:defRPr sz="1800">
+                <a:solidFill>
+                  <a:srgbClr val="333333"/>
+                </a:solidFill>
+                <a:latin typeface="Calibri"/>
+              </a:defRPr>
+            </a:pPr>
+            <a:r>
+              <a:t>2.  Interruptor: activamos Weight Decay (L2=0.01), Dropout (p=0.3)</a:t>
+            </a:r>
+          </a:p>
+          <a:p>
+            <a:pPr>
+              <a:spcBef>
+                <a:spcPts val="800"/>
+              </a:spcBef>
+              <a:spcAft>
+                <a:spcPts val="400"/>
+              </a:spcAft>
+              <a:defRPr sz="1800">
+                <a:solidFill>
+                  <a:srgbClr val="333333"/>
+                </a:solidFill>
+                <a:latin typeface="Calibri"/>
+              </a:defRPr>
+            </a:pPr>
+            <a:r>
+              <a:t>     y redujimos la red de ~19K a ~300 parametros.</a:t>
+            </a:r>
+          </a:p>
+          <a:p>
+            <a:pPr>
+              <a:spcBef>
+                <a:spcPts val="800"/>
+              </a:spcBef>
+              <a:spcAft>
+                <a:spcPts val="400"/>
+              </a:spcAft>
+              <a:defRPr sz="1800">
+                <a:solidFill>
+                  <a:srgbClr val="333333"/>
+                </a:solidFill>
+                <a:latin typeface="Calibri"/>
+              </a:defRPr>
+            </a:pPr>
+          </a:p>
+          <a:p>
+            <a:pPr>
+              <a:spcBef>
+                <a:spcPts val="800"/>
+              </a:spcBef>
+              <a:spcAft>
+                <a:spcPts val="400"/>
+              </a:spcAft>
+              <a:defRPr sz="1800">
+                <a:solidFill>
+                  <a:srgbClr val="333333"/>
+                </a:solidFill>
+                <a:latin typeface="Calibri"/>
+              </a:defRPr>
+            </a:pPr>
+            <a:r>
+              <a:t>3.  Resultado: la brecha train-test se redujo de ~30% a &lt;7%.</a:t>
+            </a:r>
+          </a:p>
+          <a:p>
+            <a:pPr>
+              <a:spcBef>
+                <a:spcPts val="800"/>
+              </a:spcBef>
+              <a:spcAft>
+                <a:spcPts val="400"/>
+              </a:spcAft>
+              <a:defRPr sz="1800">
+                <a:solidFill>
+                  <a:srgbClr val="333333"/>
+                </a:solidFill>
+                <a:latin typeface="Calibri"/>
+              </a:defRPr>
+            </a:pPr>
+            <a:r>
+              <a:t>     El modelo ahora generaliza en vez de memorizar.</a:t>
+            </a:r>
+          </a:p>
+          <a:p>
+            <a:pPr>
+              <a:spcBef>
+                <a:spcPts val="800"/>
+              </a:spcBef>
+              <a:spcAft>
+                <a:spcPts val="400"/>
+              </a:spcAft>
+              <a:defRPr sz="1800">
+                <a:solidFill>
+                  <a:srgbClr val="333333"/>
+                </a:solidFill>
+                <a:latin typeface="Calibri"/>
+              </a:defRPr>
+            </a:pPr>
+          </a:p>
+          <a:p>
+            <a:pPr>
+              <a:spcBef>
+                <a:spcPts val="800"/>
+              </a:spcBef>
+              <a:spcAft>
+                <a:spcPts val="400"/>
+              </a:spcAft>
+              <a:defRPr sz="1800">
+                <a:solidFill>
+                  <a:srgbClr val="333333"/>
+                </a:solidFill>
+                <a:latin typeface="Calibri"/>
+              </a:defRPr>
+            </a:pPr>
+            <a:r>
+              <a:t>4.  Leccion: en medicina, un modelo con overfitting puede dar</a:t>
+            </a:r>
+          </a:p>
+          <a:p>
+            <a:pPr>
+              <a:spcBef>
+                <a:spcPts val="800"/>
+              </a:spcBef>
+              <a:spcAft>
+                <a:spcPts val="400"/>
+              </a:spcAft>
+              <a:defRPr sz="1800">
+                <a:solidFill>
+                  <a:srgbClr val="333333"/>
+                </a:solidFill>
+                <a:latin typeface="Calibri"/>
+              </a:defRPr>
+            </a:pPr>
+            <a:r>
+              <a:t>     diagnosticos falsos. La regularizacion no es opcional.</a:t>
+            </a:r>
+          </a:p>
+        </p:txBody>
+      </p:sp>
+      <p:sp>
+        <p:nvSpPr>
+          <p:cNvPr id="5" name="TextBox 4"/>
           <p:cNvSpPr txBox="1"/>
           <p:nvPr/>
         </p:nvSpPr>
         <p:spPr>
           <a:xfrm>
-            <a:off x="1005840" y="3657600"/>
-            <a:ext cx="4663440" cy="1828800"/>
+            <a:off x="1371600" y="5943600"/>
+            <a:ext cx="9418320" cy="365760"/>
           </a:xfrm>
           <a:prstGeom prst="rect">
             <a:avLst/>
@@ -6475,1801 +6773,15 @@
           <a:lstStyle/>
           <a:p>
             <a:pPr algn="l">
-              <a:defRPr sz="1400" b="0">
-                <a:solidFill>
-                  <a:srgbClr val="CCCCCC"/>
-                </a:solidFill>
-                <a:latin typeface="Calibri"/>
-              </a:defRPr>
-            </a:pPr>
-            <a:r>
-              <a:t>Con un dataset pequeno, ninguna regularizacion es tan buena como tener mas muestras.</a:t>
-            </a:r>
-            <a:br/>
-            <a:br/>
-            <a:r>
-              <a:t>Data Augmentation, recopilacion de mas imagenes medicas, o tecnicas como Transfer Learning con modelos pre-entrenados.</a:t>
-            </a:r>
-          </a:p>
-        </p:txBody>
-      </p:sp>
-      <p:sp>
-        <p:nvSpPr>
-          <p:cNvPr id="9" name="Rounded Rectangle 8"/>
-          <p:cNvSpPr/>
-          <p:nvPr/>
-        </p:nvSpPr>
-        <p:spPr>
-          <a:xfrm>
-            <a:off x="6217920" y="2926080"/>
-            <a:ext cx="5212080" cy="2743200"/>
-          </a:xfrm>
-          <a:prstGeom prst="roundRect">
-            <a:avLst/>
-          </a:prstGeom>
-          <a:solidFill>
-            <a:srgbClr val="0A203A"/>
-          </a:solidFill>
-          <a:ln w="19050">
-            <a:solidFill>
-              <a:srgbClr val="44AAFF"/>
-            </a:solidFill>
-          </a:ln>
-        </p:spPr>
-        <p:style>
-          <a:lnRef idx="1">
-            <a:schemeClr val="accent1"/>
-          </a:lnRef>
-          <a:fillRef idx="3">
-            <a:schemeClr val="accent1"/>
-          </a:fillRef>
-          <a:effectRef idx="2">
-            <a:schemeClr val="accent1"/>
-          </a:effectRef>
-          <a:fontRef idx="minor">
-            <a:schemeClr val="lt1"/>
-          </a:fontRef>
-        </p:style>
-        <p:txBody>
-          <a:bodyPr rtlCol="0" anchor="ctr"/>
-          <a:lstStyle/>
-          <a:p>
-            <a:pPr algn="ctr"/>
-          </a:p>
-        </p:txBody>
-      </p:sp>
-      <p:sp>
-        <p:nvSpPr>
-          <p:cNvPr id="10" name="TextBox 9"/>
-          <p:cNvSpPr txBox="1"/>
-          <p:nvPr/>
-        </p:nvSpPr>
-        <p:spPr>
-          <a:xfrm>
-            <a:off x="6492240" y="3108960"/>
-            <a:ext cx="4663440" cy="457200"/>
-          </a:xfrm>
-          <a:prstGeom prst="rect">
-            <a:avLst/>
-          </a:prstGeom>
-          <a:noFill/>
-        </p:spPr>
-        <p:txBody>
-          <a:bodyPr wrap="square">
-            <a:spAutoFit/>
-          </a:bodyPr>
-          <a:lstStyle/>
-          <a:p>
-            <a:pPr algn="l">
-              <a:defRPr sz="2000" b="1">
-                <a:solidFill>
-                  <a:srgbClr val="88AAFF"/>
-                </a:solidFill>
-                <a:latin typeface="Calibri"/>
-              </a:defRPr>
-            </a:pPr>
-            <a:r>
-              <a:t>Prioridad 2: Mejor Regularizacion</a:t>
-            </a:r>
-          </a:p>
-        </p:txBody>
-      </p:sp>
-      <p:sp>
-        <p:nvSpPr>
-          <p:cNvPr id="11" name="TextBox 10"/>
-          <p:cNvSpPr txBox="1"/>
-          <p:nvPr/>
-        </p:nvSpPr>
-        <p:spPr>
-          <a:xfrm>
-            <a:off x="6492240" y="3657600"/>
-            <a:ext cx="4663440" cy="1828800"/>
-          </a:xfrm>
-          <a:prstGeom prst="rect">
-            <a:avLst/>
-          </a:prstGeom>
-          <a:noFill/>
-        </p:spPr>
-        <p:txBody>
-          <a:bodyPr wrap="square">
-            <a:spAutoFit/>
-          </a:bodyPr>
-          <a:lstStyle/>
-          <a:p>
-            <a:pPr algn="l">
-              <a:defRPr sz="1400" b="0">
-                <a:solidFill>
-                  <a:srgbClr val="CCCCCC"/>
-                </a:solidFill>
-                <a:latin typeface="Calibri"/>
-              </a:defRPr>
-            </a:pPr>
-            <a:r>
-              <a:t>Combinar multiples tecnicas:</a:t>
-            </a:r>
-            <a:br/>
-            <a:r>
-              <a:t>L2 + Dropout + Batch Normalization + Early Stopping.</a:t>
-            </a:r>
-            <a:br/>
-            <a:br/>
-            <a:r>
-              <a:t>Usar validacion cruzada (k-fold) dado el tamano limitado del dataset para estimar el rendimiento real.</a:t>
-            </a:r>
-          </a:p>
-        </p:txBody>
-      </p:sp>
-      <p:sp>
-        <p:nvSpPr>
-          <p:cNvPr id="12" name="TextBox 11"/>
-          <p:cNvSpPr txBox="1"/>
-          <p:nvPr/>
-        </p:nvSpPr>
-        <p:spPr>
-          <a:xfrm>
-            <a:off x="731520" y="5943600"/>
-            <a:ext cx="10698480" cy="457200"/>
-          </a:xfrm>
-          <a:prstGeom prst="rect">
-            <a:avLst/>
-          </a:prstGeom>
-          <a:noFill/>
-        </p:spPr>
-        <p:txBody>
-          <a:bodyPr wrap="square">
-            <a:spAutoFit/>
-          </a:bodyPr>
-          <a:lstStyle/>
-          <a:p>
-            <a:pPr algn="ctr">
-              <a:defRPr sz="1500" b="0">
-                <a:solidFill>
-                  <a:srgbClr val="88CCFF"/>
-                </a:solidFill>
-                <a:latin typeface="Calibri"/>
-              </a:defRPr>
-            </a:pPr>
-            <a:r>
-              <a:t>En medicina, un modelo que memoriza es PELIGROSO - puede dar falsos negativos en pacientes nuevos.</a:t>
-            </a:r>
-          </a:p>
-        </p:txBody>
-      </p:sp>
-    </p:spTree>
-  </p:cSld>
-  <p:clrMapOvr>
-    <a:masterClrMapping/>
-  </p:clrMapOvr>
-</p:sld>
-</file>
-
-<file path=ppt/slides/slide8.xml><?xml version="1.0" encoding="utf-8"?>
-<p:sld xmlns:a="http://schemas.openxmlformats.org/drawingml/2006/main" xmlns:p="http://schemas.openxmlformats.org/presentationml/2006/main" xmlns:r="http://schemas.openxmlformats.org/officeDocument/2006/relationships">
-  <p:cSld>
-    <p:bg>
-      <p:bgPr>
-        <a:solidFill>
-          <a:srgbClr val="1A1A00"/>
-        </a:solidFill>
-        <a:effectLst/>
-      </p:bgPr>
-    </p:bg>
-    <p:spTree>
-      <p:nvGrpSpPr>
-        <p:cNvPr id="1" name=""/>
-        <p:cNvGrpSpPr/>
-        <p:nvPr/>
-      </p:nvGrpSpPr>
-      <p:grpSpPr/>
-      <p:sp>
-        <p:nvSpPr>
-          <p:cNvPr id="2" name="TextBox 1"/>
-          <p:cNvSpPr txBox="1"/>
-          <p:nvPr/>
-        </p:nvSpPr>
-        <p:spPr>
-          <a:xfrm>
-            <a:off x="731520" y="365760"/>
-            <a:ext cx="10698480" cy="822960"/>
-          </a:xfrm>
-          <a:prstGeom prst="rect">
-            <a:avLst/>
-          </a:prstGeom>
-          <a:noFill/>
-        </p:spPr>
-        <p:txBody>
-          <a:bodyPr wrap="square">
-            <a:spAutoFit/>
-          </a:bodyPr>
-          <a:lstStyle/>
-          <a:p>
-            <a:pPr algn="l">
-              <a:defRPr sz="4000" b="1">
-                <a:solidFill>
-                  <a:srgbClr val="FFDD44"/>
-                </a:solidFill>
-                <a:latin typeface="Calibri"/>
-              </a:defRPr>
-            </a:pPr>
-            <a:r>
-              <a:t>Bonus Matematico</a:t>
-            </a:r>
-          </a:p>
-        </p:txBody>
-      </p:sp>
-      <p:sp>
-        <p:nvSpPr>
-          <p:cNvPr id="3" name="Rounded Rectangle 2"/>
-          <p:cNvSpPr/>
-          <p:nvPr/>
-        </p:nvSpPr>
-        <p:spPr>
-          <a:xfrm>
-            <a:off x="731520" y="1371600"/>
-            <a:ext cx="5212080" cy="2194560"/>
-          </a:xfrm>
-          <a:prstGeom prst="roundRect">
-            <a:avLst/>
-          </a:prstGeom>
-          <a:solidFill>
-            <a:srgbClr val="2A2A05"/>
-          </a:solidFill>
-          <a:ln w="19050">
-            <a:solidFill>
-              <a:srgbClr val="FFDD44"/>
-            </a:solidFill>
-          </a:ln>
-        </p:spPr>
-        <p:style>
-          <a:lnRef idx="1">
-            <a:schemeClr val="accent1"/>
-          </a:lnRef>
-          <a:fillRef idx="3">
-            <a:schemeClr val="accent1"/>
-          </a:fillRef>
-          <a:effectRef idx="2">
-            <a:schemeClr val="accent1"/>
-          </a:effectRef>
-          <a:fontRef idx="minor">
-            <a:schemeClr val="lt1"/>
-          </a:fontRef>
-        </p:style>
-        <p:txBody>
-          <a:bodyPr rtlCol="0" anchor="ctr"/>
-          <a:lstStyle/>
-          <a:p>
-            <a:pPr algn="ctr"/>
-          </a:p>
-        </p:txBody>
-      </p:sp>
-      <p:sp>
-        <p:nvSpPr>
-          <p:cNvPr id="4" name="TextBox 3"/>
-          <p:cNvSpPr txBox="1"/>
-          <p:nvPr/>
-        </p:nvSpPr>
-        <p:spPr>
-          <a:xfrm>
-            <a:off x="914400" y="1508760"/>
-            <a:ext cx="4846320" cy="365760"/>
-          </a:xfrm>
-          <a:prstGeom prst="rect">
-            <a:avLst/>
-          </a:prstGeom>
-          <a:noFill/>
-        </p:spPr>
-        <p:txBody>
-          <a:bodyPr wrap="square">
-            <a:spAutoFit/>
-          </a:bodyPr>
-          <a:lstStyle/>
-          <a:p>
-            <a:pPr algn="l">
-              <a:defRPr sz="1800" b="1">
-                <a:solidFill>
-                  <a:srgbClr val="FFEE88"/>
-                </a:solidFill>
-                <a:latin typeface="Calibri"/>
-              </a:defRPr>
-            </a:pPr>
-            <a:r>
-              <a:t>Sin Weight Decay</a:t>
-            </a:r>
-          </a:p>
-        </p:txBody>
-      </p:sp>
-      <p:sp>
-        <p:nvSpPr>
-          <p:cNvPr id="5" name="Rounded Rectangle 4"/>
-          <p:cNvSpPr/>
-          <p:nvPr/>
-        </p:nvSpPr>
-        <p:spPr>
-          <a:xfrm>
-            <a:off x="1005840" y="1965960"/>
-            <a:ext cx="4663440" cy="502920"/>
-          </a:xfrm>
-          <a:prstGeom prst="roundRect">
-            <a:avLst/>
-          </a:prstGeom>
-          <a:solidFill>
-            <a:srgbClr val="101000"/>
-          </a:solidFill>
-          <a:ln>
-            <a:noFill/>
-          </a:ln>
-        </p:spPr>
-        <p:style>
-          <a:lnRef idx="1">
-            <a:schemeClr val="accent1"/>
-          </a:lnRef>
-          <a:fillRef idx="3">
-            <a:schemeClr val="accent1"/>
-          </a:fillRef>
-          <a:effectRef idx="2">
-            <a:schemeClr val="accent1"/>
-          </a:effectRef>
-          <a:fontRef idx="minor">
-            <a:schemeClr val="lt1"/>
-          </a:fontRef>
-        </p:style>
-        <p:txBody>
-          <a:bodyPr rtlCol="0" anchor="ctr"/>
-          <a:lstStyle/>
-          <a:p>
-            <a:pPr algn="ctr"/>
-          </a:p>
-        </p:txBody>
-      </p:sp>
-      <p:sp>
-        <p:nvSpPr>
-          <p:cNvPr id="6" name="TextBox 5"/>
-          <p:cNvSpPr txBox="1"/>
-          <p:nvPr/>
-        </p:nvSpPr>
-        <p:spPr>
-          <a:xfrm>
-            <a:off x="1097280" y="2011680"/>
-            <a:ext cx="4480560" cy="411480"/>
-          </a:xfrm>
-          <a:prstGeom prst="rect">
-            <a:avLst/>
-          </a:prstGeom>
-          <a:noFill/>
-        </p:spPr>
-        <p:txBody>
-          <a:bodyPr wrap="square">
-            <a:spAutoFit/>
-          </a:bodyPr>
-          <a:lstStyle/>
-          <a:p>
-            <a:pPr algn="ctr">
-              <a:defRPr sz="1400" b="0">
-                <a:solidFill>
-                  <a:srgbClr val="FFDD88"/>
-                </a:solidFill>
-                <a:latin typeface="Consolas"/>
-              </a:defRPr>
-            </a:pPr>
-            <a:r>
-              <a:t>theta(t+1) = theta(t) - n * grad(L)</a:t>
-            </a:r>
-          </a:p>
-        </p:txBody>
-      </p:sp>
-      <p:sp>
-        <p:nvSpPr>
-          <p:cNvPr id="7" name="TextBox 6"/>
-          <p:cNvSpPr txBox="1"/>
-          <p:nvPr/>
-        </p:nvSpPr>
-        <p:spPr>
-          <a:xfrm>
-            <a:off x="914400" y="2606040"/>
-            <a:ext cx="4846320" cy="822960"/>
-          </a:xfrm>
-          <a:prstGeom prst="rect">
-            <a:avLst/>
-          </a:prstGeom>
-          <a:noFill/>
-        </p:spPr>
-        <p:txBody>
-          <a:bodyPr wrap="square">
-            <a:spAutoFit/>
-          </a:bodyPr>
-          <a:lstStyle/>
-          <a:p>
-            <a:pPr algn="l">
               <a:defRPr sz="1300" b="0">
                 <a:solidFill>
-                  <a:srgbClr val="CCCCCC"/>
-                </a:solidFill>
-                <a:latin typeface="Calibri"/>
-              </a:defRPr>
-            </a:pPr>
-            <a:r>
-              <a:t>Los pesos se actualizan solo por el gradiente. No hay limite al crecimiento de los pesos.</a:t>
-            </a:r>
-          </a:p>
-        </p:txBody>
-      </p:sp>
-      <p:sp>
-        <p:nvSpPr>
-          <p:cNvPr id="8" name="Rounded Rectangle 7"/>
-          <p:cNvSpPr/>
-          <p:nvPr/>
-        </p:nvSpPr>
-        <p:spPr>
-          <a:xfrm>
-            <a:off x="6217920" y="1371600"/>
-            <a:ext cx="5212080" cy="2194560"/>
-          </a:xfrm>
-          <a:prstGeom prst="roundRect">
-            <a:avLst/>
-          </a:prstGeom>
-          <a:solidFill>
-            <a:srgbClr val="2A2A05"/>
-          </a:solidFill>
-          <a:ln w="19050">
-            <a:solidFill>
-              <a:srgbClr val="FFDD44"/>
-            </a:solidFill>
-          </a:ln>
-        </p:spPr>
-        <p:style>
-          <a:lnRef idx="1">
-            <a:schemeClr val="accent1"/>
-          </a:lnRef>
-          <a:fillRef idx="3">
-            <a:schemeClr val="accent1"/>
-          </a:fillRef>
-          <a:effectRef idx="2">
-            <a:schemeClr val="accent1"/>
-          </a:effectRef>
-          <a:fontRef idx="minor">
-            <a:schemeClr val="lt1"/>
-          </a:fontRef>
-        </p:style>
-        <p:txBody>
-          <a:bodyPr rtlCol="0" anchor="ctr"/>
-          <a:lstStyle/>
-          <a:p>
-            <a:pPr algn="ctr"/>
-          </a:p>
-        </p:txBody>
-      </p:sp>
-      <p:sp>
-        <p:nvSpPr>
-          <p:cNvPr id="9" name="TextBox 8"/>
-          <p:cNvSpPr txBox="1"/>
-          <p:nvPr/>
-        </p:nvSpPr>
-        <p:spPr>
-          <a:xfrm>
-            <a:off x="6400800" y="1508760"/>
-            <a:ext cx="4846320" cy="365760"/>
-          </a:xfrm>
-          <a:prstGeom prst="rect">
-            <a:avLst/>
-          </a:prstGeom>
-          <a:noFill/>
-        </p:spPr>
-        <p:txBody>
-          <a:bodyPr wrap="square">
-            <a:spAutoFit/>
-          </a:bodyPr>
-          <a:lstStyle/>
-          <a:p>
-            <a:pPr algn="l">
-              <a:defRPr sz="1800" b="1">
-                <a:solidFill>
-                  <a:srgbClr val="FFEE88"/>
-                </a:solidFill>
-                <a:latin typeface="Calibri"/>
-              </a:defRPr>
-            </a:pPr>
-            <a:r>
-              <a:t>Con Weight Decay (L2)</a:t>
-            </a:r>
-          </a:p>
-        </p:txBody>
-      </p:sp>
-      <p:sp>
-        <p:nvSpPr>
-          <p:cNvPr id="10" name="Rounded Rectangle 9"/>
-          <p:cNvSpPr/>
-          <p:nvPr/>
-        </p:nvSpPr>
-        <p:spPr>
-          <a:xfrm>
-            <a:off x="6492240" y="1965960"/>
-            <a:ext cx="4663440" cy="502920"/>
-          </a:xfrm>
-          <a:prstGeom prst="roundRect">
-            <a:avLst/>
-          </a:prstGeom>
-          <a:solidFill>
-            <a:srgbClr val="101000"/>
-          </a:solidFill>
-          <a:ln>
-            <a:noFill/>
-          </a:ln>
-        </p:spPr>
-        <p:style>
-          <a:lnRef idx="1">
-            <a:schemeClr val="accent1"/>
-          </a:lnRef>
-          <a:fillRef idx="3">
-            <a:schemeClr val="accent1"/>
-          </a:fillRef>
-          <a:effectRef idx="2">
-            <a:schemeClr val="accent1"/>
-          </a:effectRef>
-          <a:fontRef idx="minor">
-            <a:schemeClr val="lt1"/>
-          </a:fontRef>
-        </p:style>
-        <p:txBody>
-          <a:bodyPr rtlCol="0" anchor="ctr"/>
-          <a:lstStyle/>
-          <a:p>
-            <a:pPr algn="ctr"/>
-          </a:p>
-        </p:txBody>
-      </p:sp>
-      <p:sp>
-        <p:nvSpPr>
-          <p:cNvPr id="11" name="TextBox 10"/>
-          <p:cNvSpPr txBox="1"/>
-          <p:nvPr/>
-        </p:nvSpPr>
-        <p:spPr>
-          <a:xfrm>
-            <a:off x="6583680" y="2011680"/>
-            <a:ext cx="4480560" cy="411480"/>
-          </a:xfrm>
-          <a:prstGeom prst="rect">
-            <a:avLst/>
-          </a:prstGeom>
-          <a:noFill/>
-        </p:spPr>
-        <p:txBody>
-          <a:bodyPr wrap="square">
-            <a:spAutoFit/>
-          </a:bodyPr>
-          <a:lstStyle/>
-          <a:p>
-            <a:pPr algn="ctr">
-              <a:defRPr sz="1400" b="0">
-                <a:solidFill>
-                  <a:srgbClr val="FFDD88"/>
-                </a:solidFill>
-                <a:latin typeface="Consolas"/>
-              </a:defRPr>
-            </a:pPr>
-            <a:r>
-              <a:t>theta(t+1) = (1-n*lambda)*theta(t) - n*grad(L)</a:t>
-            </a:r>
-          </a:p>
-        </p:txBody>
-      </p:sp>
-      <p:sp>
-        <p:nvSpPr>
-          <p:cNvPr id="12" name="TextBox 11"/>
-          <p:cNvSpPr txBox="1"/>
-          <p:nvPr/>
-        </p:nvSpPr>
-        <p:spPr>
-          <a:xfrm>
-            <a:off x="6400800" y="2606040"/>
-            <a:ext cx="4846320" cy="822960"/>
-          </a:xfrm>
-          <a:prstGeom prst="rect">
-            <a:avLst/>
-          </a:prstGeom>
-          <a:noFill/>
-        </p:spPr>
-        <p:txBody>
-          <a:bodyPr wrap="square">
-            <a:spAutoFit/>
-          </a:bodyPr>
-          <a:lstStyle/>
-          <a:p>
-            <a:pPr algn="l">
-              <a:defRPr sz="1300" b="0">
-                <a:solidFill>
-                  <a:srgbClr val="CCCCCC"/>
-                </a:solidFill>
-                <a:latin typeface="Calibri"/>
-              </a:defRPr>
-            </a:pPr>
-            <a:r>
-              <a:t>El factor (1-n*lambda) encoge los pesos en cada paso. Pesos grandes se penalizan mas.</a:t>
-            </a:r>
-          </a:p>
-        </p:txBody>
-      </p:sp>
-      <p:sp>
-        <p:nvSpPr>
-          <p:cNvPr id="13" name="Rounded Rectangle 12"/>
-          <p:cNvSpPr/>
-          <p:nvPr/>
-        </p:nvSpPr>
-        <p:spPr>
-          <a:xfrm>
-            <a:off x="731520" y="3840480"/>
-            <a:ext cx="5212080" cy="2194560"/>
-          </a:xfrm>
-          <a:prstGeom prst="roundRect">
-            <a:avLst/>
-          </a:prstGeom>
-          <a:solidFill>
-            <a:srgbClr val="2A2A05"/>
-          </a:solidFill>
-          <a:ln w="19050">
-            <a:solidFill>
-              <a:srgbClr val="FFDD44"/>
-            </a:solidFill>
-          </a:ln>
-        </p:spPr>
-        <p:style>
-          <a:lnRef idx="1">
-            <a:schemeClr val="accent1"/>
-          </a:lnRef>
-          <a:fillRef idx="3">
-            <a:schemeClr val="accent1"/>
-          </a:fillRef>
-          <a:effectRef idx="2">
-            <a:schemeClr val="accent1"/>
-          </a:effectRef>
-          <a:fontRef idx="minor">
-            <a:schemeClr val="lt1"/>
-          </a:fontRef>
-        </p:style>
-        <p:txBody>
-          <a:bodyPr rtlCol="0" anchor="ctr"/>
-          <a:lstStyle/>
-          <a:p>
-            <a:pPr algn="ctr"/>
-          </a:p>
-        </p:txBody>
-      </p:sp>
-      <p:sp>
-        <p:nvSpPr>
-          <p:cNvPr id="14" name="TextBox 13"/>
-          <p:cNvSpPr txBox="1"/>
-          <p:nvPr/>
-        </p:nvSpPr>
-        <p:spPr>
-          <a:xfrm>
-            <a:off x="914400" y="3977640"/>
-            <a:ext cx="4846320" cy="365760"/>
-          </a:xfrm>
-          <a:prstGeom prst="rect">
-            <a:avLst/>
-          </a:prstGeom>
-          <a:noFill/>
-        </p:spPr>
-        <p:txBody>
-          <a:bodyPr wrap="square">
-            <a:spAutoFit/>
-          </a:bodyPr>
-          <a:lstStyle/>
-          <a:p>
-            <a:pPr algn="l">
-              <a:defRPr sz="1800" b="1">
-                <a:solidFill>
-                  <a:srgbClr val="FFEE88"/>
-                </a:solidFill>
-                <a:latin typeface="Calibri"/>
-              </a:defRPr>
-            </a:pPr>
-            <a:r>
-              <a:t>Efecto del Dropout</a:t>
-            </a:r>
-          </a:p>
-        </p:txBody>
-      </p:sp>
-      <p:sp>
-        <p:nvSpPr>
-          <p:cNvPr id="15" name="Rounded Rectangle 14"/>
-          <p:cNvSpPr/>
-          <p:nvPr/>
-        </p:nvSpPr>
-        <p:spPr>
-          <a:xfrm>
-            <a:off x="1005840" y="4434840"/>
-            <a:ext cx="4663440" cy="502920"/>
-          </a:xfrm>
-          <a:prstGeom prst="roundRect">
-            <a:avLst/>
-          </a:prstGeom>
-          <a:solidFill>
-            <a:srgbClr val="101000"/>
-          </a:solidFill>
-          <a:ln>
-            <a:noFill/>
-          </a:ln>
-        </p:spPr>
-        <p:style>
-          <a:lnRef idx="1">
-            <a:schemeClr val="accent1"/>
-          </a:lnRef>
-          <a:fillRef idx="3">
-            <a:schemeClr val="accent1"/>
-          </a:fillRef>
-          <a:effectRef idx="2">
-            <a:schemeClr val="accent1"/>
-          </a:effectRef>
-          <a:fontRef idx="minor">
-            <a:schemeClr val="lt1"/>
-          </a:fontRef>
-        </p:style>
-        <p:txBody>
-          <a:bodyPr rtlCol="0" anchor="ctr"/>
-          <a:lstStyle/>
-          <a:p>
-            <a:pPr algn="ctr"/>
-          </a:p>
-        </p:txBody>
-      </p:sp>
-      <p:sp>
-        <p:nvSpPr>
-          <p:cNvPr id="16" name="TextBox 15"/>
-          <p:cNvSpPr txBox="1"/>
-          <p:nvPr/>
-        </p:nvSpPr>
-        <p:spPr>
-          <a:xfrm>
-            <a:off x="1097280" y="4480560"/>
-            <a:ext cx="4480560" cy="411480"/>
-          </a:xfrm>
-          <a:prstGeom prst="rect">
-            <a:avLst/>
-          </a:prstGeom>
-          <a:noFill/>
-        </p:spPr>
-        <p:txBody>
-          <a:bodyPr wrap="square">
-            <a:spAutoFit/>
-          </a:bodyPr>
-          <a:lstStyle/>
-          <a:p>
-            <a:pPr algn="ctr">
-              <a:defRPr sz="1400" b="0">
-                <a:solidFill>
-                  <a:srgbClr val="FFDD88"/>
-                </a:solidFill>
-                <a:latin typeface="Consolas"/>
-              </a:defRPr>
-            </a:pPr>
-            <a:r>
-              <a:t>h_i = x_i/(1-p) con prob (1-p), o 0 con prob p</a:t>
-            </a:r>
-          </a:p>
-        </p:txBody>
-      </p:sp>
-      <p:sp>
-        <p:nvSpPr>
-          <p:cNvPr id="17" name="TextBox 16"/>
-          <p:cNvSpPr txBox="1"/>
-          <p:nvPr/>
-        </p:nvSpPr>
-        <p:spPr>
-          <a:xfrm>
-            <a:off x="914400" y="5074920"/>
-            <a:ext cx="4846320" cy="822960"/>
-          </a:xfrm>
-          <a:prstGeom prst="rect">
-            <a:avLst/>
-          </a:prstGeom>
-          <a:noFill/>
-        </p:spPr>
-        <p:txBody>
-          <a:bodyPr wrap="square">
-            <a:spAutoFit/>
-          </a:bodyPr>
-          <a:lstStyle/>
-          <a:p>
-            <a:pPr algn="l">
-              <a:defRPr sz="1300" b="0">
-                <a:solidFill>
-                  <a:srgbClr val="CCCCCC"/>
-                </a:solidFill>
-                <a:latin typeface="Calibri"/>
-              </a:defRPr>
-            </a:pPr>
-            <a:r>
-              <a:t>Equivale a entrenar un ensemble de sub-redes. Cada forward pass usa una red diferente.</a:t>
-            </a:r>
-          </a:p>
-        </p:txBody>
-      </p:sp>
-      <p:sp>
-        <p:nvSpPr>
-          <p:cNvPr id="18" name="Rounded Rectangle 17"/>
-          <p:cNvSpPr/>
-          <p:nvPr/>
-        </p:nvSpPr>
-        <p:spPr>
-          <a:xfrm>
-            <a:off x="6217920" y="3840480"/>
-            <a:ext cx="5212080" cy="2194560"/>
-          </a:xfrm>
-          <a:prstGeom prst="roundRect">
-            <a:avLst/>
-          </a:prstGeom>
-          <a:solidFill>
-            <a:srgbClr val="2A2A05"/>
-          </a:solidFill>
-          <a:ln w="19050">
-            <a:solidFill>
-              <a:srgbClr val="FFDD44"/>
-            </a:solidFill>
-          </a:ln>
-        </p:spPr>
-        <p:style>
-          <a:lnRef idx="1">
-            <a:schemeClr val="accent1"/>
-          </a:lnRef>
-          <a:fillRef idx="3">
-            <a:schemeClr val="accent1"/>
-          </a:fillRef>
-          <a:effectRef idx="2">
-            <a:schemeClr val="accent1"/>
-          </a:effectRef>
-          <a:fontRef idx="minor">
-            <a:schemeClr val="lt1"/>
-          </a:fontRef>
-        </p:style>
-        <p:txBody>
-          <a:bodyPr rtlCol="0" anchor="ctr"/>
-          <a:lstStyle/>
-          <a:p>
-            <a:pPr algn="ctr"/>
-          </a:p>
-        </p:txBody>
-      </p:sp>
-      <p:sp>
-        <p:nvSpPr>
-          <p:cNvPr id="19" name="TextBox 18"/>
-          <p:cNvSpPr txBox="1"/>
-          <p:nvPr/>
-        </p:nvSpPr>
-        <p:spPr>
-          <a:xfrm>
-            <a:off x="6400800" y="3977640"/>
-            <a:ext cx="4846320" cy="365760"/>
-          </a:xfrm>
-          <a:prstGeom prst="rect">
-            <a:avLst/>
-          </a:prstGeom>
-          <a:noFill/>
-        </p:spPr>
-        <p:txBody>
-          <a:bodyPr wrap="square">
-            <a:spAutoFit/>
-          </a:bodyPr>
-          <a:lstStyle/>
-          <a:p>
-            <a:pPr algn="l">
-              <a:defRPr sz="1800" b="1">
-                <a:solidFill>
-                  <a:srgbClr val="FFEE88"/>
-                </a:solidFill>
-                <a:latin typeface="Calibri"/>
-              </a:defRPr>
-            </a:pPr>
-            <a:r>
-              <a:t>Grafo de Computacion</a:t>
-            </a:r>
-          </a:p>
-        </p:txBody>
-      </p:sp>
-      <p:sp>
-        <p:nvSpPr>
-          <p:cNvPr id="20" name="Rounded Rectangle 19"/>
-          <p:cNvSpPr/>
-          <p:nvPr/>
-        </p:nvSpPr>
-        <p:spPr>
-          <a:xfrm>
-            <a:off x="6492240" y="4434840"/>
-            <a:ext cx="4663440" cy="502920"/>
-          </a:xfrm>
-          <a:prstGeom prst="roundRect">
-            <a:avLst/>
-          </a:prstGeom>
-          <a:solidFill>
-            <a:srgbClr val="101000"/>
-          </a:solidFill>
-          <a:ln>
-            <a:noFill/>
-          </a:ln>
-        </p:spPr>
-        <p:style>
-          <a:lnRef idx="1">
-            <a:schemeClr val="accent1"/>
-          </a:lnRef>
-          <a:fillRef idx="3">
-            <a:schemeClr val="accent1"/>
-          </a:fillRef>
-          <a:effectRef idx="2">
-            <a:schemeClr val="accent1"/>
-          </a:effectRef>
-          <a:fontRef idx="minor">
-            <a:schemeClr val="lt1"/>
-          </a:fontRef>
-        </p:style>
-        <p:txBody>
-          <a:bodyPr rtlCol="0" anchor="ctr"/>
-          <a:lstStyle/>
-          <a:p>
-            <a:pPr algn="ctr"/>
-          </a:p>
-        </p:txBody>
-      </p:sp>
-      <p:sp>
-        <p:nvSpPr>
-          <p:cNvPr id="21" name="TextBox 20"/>
-          <p:cNvSpPr txBox="1"/>
-          <p:nvPr/>
-        </p:nvSpPr>
-        <p:spPr>
-          <a:xfrm>
-            <a:off x="6583680" y="4480560"/>
-            <a:ext cx="4480560" cy="411480"/>
-          </a:xfrm>
-          <a:prstGeom prst="rect">
-            <a:avLst/>
-          </a:prstGeom>
-          <a:noFill/>
-        </p:spPr>
-        <p:txBody>
-          <a:bodyPr wrap="square">
-            <a:spAutoFit/>
-          </a:bodyPr>
-          <a:lstStyle/>
-          <a:p>
-            <a:pPr algn="ctr">
-              <a:defRPr sz="1400" b="0">
-                <a:solidFill>
-                  <a:srgbClr val="FFDD88"/>
-                </a:solidFill>
-                <a:latin typeface="Consolas"/>
-              </a:defRPr>
-            </a:pPr>
-            <a:r>
-              <a:t>L_total = L_BCE + lambda * sum(||w_i||^2)</a:t>
-            </a:r>
-          </a:p>
-        </p:txBody>
-      </p:sp>
-      <p:sp>
-        <p:nvSpPr>
-          <p:cNvPr id="22" name="TextBox 21"/>
-          <p:cNvSpPr txBox="1"/>
-          <p:nvPr/>
-        </p:nvSpPr>
-        <p:spPr>
-          <a:xfrm>
-            <a:off x="6400800" y="5074920"/>
-            <a:ext cx="4846320" cy="822960"/>
-          </a:xfrm>
-          <a:prstGeom prst="rect">
-            <a:avLst/>
-          </a:prstGeom>
-          <a:noFill/>
-        </p:spPr>
-        <p:txBody>
-          <a:bodyPr wrap="square">
-            <a:spAutoFit/>
-          </a:bodyPr>
-          <a:lstStyle/>
-          <a:p>
-            <a:pPr algn="l">
-              <a:defRPr sz="1300" b="0">
-                <a:solidFill>
-                  <a:srgbClr val="CCCCCC"/>
-                </a:solidFill>
-                <a:latin typeface="Calibri"/>
-              </a:defRPr>
-            </a:pPr>
-            <a:r>
-              <a:t>El termino de regularizacion anade gradiente 2*lambda*w_i que controla la magnitud de cada peso.</a:t>
-            </a:r>
-          </a:p>
-        </p:txBody>
-      </p:sp>
-    </p:spTree>
-  </p:cSld>
-  <p:clrMapOvr>
-    <a:masterClrMapping/>
-  </p:clrMapOvr>
-</p:sld>
-</file>
-
-<file path=ppt/slides/slide9.xml><?xml version="1.0" encoding="utf-8"?>
-<p:sld xmlns:a="http://schemas.openxmlformats.org/drawingml/2006/main" xmlns:p="http://schemas.openxmlformats.org/presentationml/2006/main" xmlns:r="http://schemas.openxmlformats.org/officeDocument/2006/relationships">
-  <p:cSld>
-    <p:bg>
-      <p:bgPr>
-        <a:solidFill>
-          <a:srgbClr val="0F0C29"/>
-        </a:solidFill>
-        <a:effectLst/>
-      </p:bgPr>
-    </p:bg>
-    <p:spTree>
-      <p:nvGrpSpPr>
-        <p:cNvPr id="1" name=""/>
-        <p:cNvGrpSpPr/>
-        <p:nvPr/>
-      </p:nvGrpSpPr>
-      <p:grpSpPr/>
-      <p:sp>
-        <p:nvSpPr>
-          <p:cNvPr id="2" name="TextBox 1"/>
-          <p:cNvSpPr txBox="1"/>
-          <p:nvPr/>
-        </p:nvSpPr>
-        <p:spPr>
-          <a:xfrm>
-            <a:off x="731520" y="365760"/>
-            <a:ext cx="10698480" cy="822960"/>
-          </a:xfrm>
-          <a:prstGeom prst="rect">
-            <a:avLst/>
-          </a:prstGeom>
-          <a:noFill/>
-        </p:spPr>
-        <p:txBody>
-          <a:bodyPr wrap="square">
-            <a:spAutoFit/>
-          </a:bodyPr>
-          <a:lstStyle/>
-          <a:p>
-            <a:pPr algn="ctr">
-              <a:defRPr sz="4400" b="1">
-                <a:solidFill>
-                  <a:srgbClr val="44FF88"/>
-                </a:solidFill>
-                <a:latin typeface="Calibri"/>
-              </a:defRPr>
-            </a:pPr>
-            <a:r>
-              <a:t>Conclusiones</a:t>
-            </a:r>
-          </a:p>
-        </p:txBody>
-      </p:sp>
-      <p:sp>
-        <p:nvSpPr>
-          <p:cNvPr id="3" name="Rounded Rectangle 2"/>
-          <p:cNvSpPr/>
-          <p:nvPr/>
-        </p:nvSpPr>
-        <p:spPr>
-          <a:xfrm>
-            <a:off x="1371600" y="1463040"/>
-            <a:ext cx="9418320" cy="777240"/>
-          </a:xfrm>
-          <a:prstGeom prst="roundRect">
-            <a:avLst/>
-          </a:prstGeom>
-          <a:solidFill>
-            <a:srgbClr val="151235"/>
-          </a:solidFill>
-          <a:ln>
-            <a:noFill/>
-          </a:ln>
-        </p:spPr>
-        <p:style>
-          <a:lnRef idx="1">
-            <a:schemeClr val="accent1"/>
-          </a:lnRef>
-          <a:fillRef idx="3">
-            <a:schemeClr val="accent1"/>
-          </a:fillRef>
-          <a:effectRef idx="2">
-            <a:schemeClr val="accent1"/>
-          </a:effectRef>
-          <a:fontRef idx="minor">
-            <a:schemeClr val="lt1"/>
-          </a:fontRef>
-        </p:style>
-        <p:txBody>
-          <a:bodyPr rtlCol="0" anchor="ctr"/>
-          <a:lstStyle/>
-          <a:p>
-            <a:pPr algn="ctr"/>
-          </a:p>
-        </p:txBody>
-      </p:sp>
-      <p:sp>
-        <p:nvSpPr>
-          <p:cNvPr id="4" name="Rounded Rectangle 3"/>
-          <p:cNvSpPr/>
-          <p:nvPr/>
-        </p:nvSpPr>
-        <p:spPr>
-          <a:xfrm>
-            <a:off x="1371600" y="1463040"/>
-            <a:ext cx="73152" cy="777240"/>
-          </a:xfrm>
-          <a:prstGeom prst="roundRect">
-            <a:avLst/>
-          </a:prstGeom>
-          <a:solidFill>
-            <a:srgbClr val="44FF88"/>
-          </a:solidFill>
-          <a:ln>
-            <a:noFill/>
-          </a:ln>
-        </p:spPr>
-        <p:style>
-          <a:lnRef idx="1">
-            <a:schemeClr val="accent1"/>
-          </a:lnRef>
-          <a:fillRef idx="3">
-            <a:schemeClr val="accent1"/>
-          </a:fillRef>
-          <a:effectRef idx="2">
-            <a:schemeClr val="accent1"/>
-          </a:effectRef>
-          <a:fontRef idx="minor">
-            <a:schemeClr val="lt1"/>
-          </a:fontRef>
-        </p:style>
-        <p:txBody>
-          <a:bodyPr rtlCol="0" anchor="ctr"/>
-          <a:lstStyle/>
-          <a:p>
-            <a:pPr algn="ctr"/>
-          </a:p>
-        </p:txBody>
-      </p:sp>
-      <p:sp>
-        <p:nvSpPr>
-          <p:cNvPr id="5" name="TextBox 4"/>
-          <p:cNvSpPr txBox="1"/>
-          <p:nvPr/>
-        </p:nvSpPr>
-        <p:spPr>
-          <a:xfrm>
-            <a:off x="1737360" y="1554480"/>
-            <a:ext cx="8869680" cy="594360"/>
-          </a:xfrm>
-          <a:prstGeom prst="rect">
-            <a:avLst/>
-          </a:prstGeom>
-          <a:noFill/>
-        </p:spPr>
-        <p:txBody>
-          <a:bodyPr wrap="square">
-            <a:spAutoFit/>
-          </a:bodyPr>
-          <a:lstStyle/>
-          <a:p>
-            <a:pPr algn="l">
-              <a:defRPr sz="1400" b="0">
-                <a:solidFill>
-                  <a:srgbClr val="CCCCCC"/>
-                </a:solidFill>
-                <a:latin typeface="Calibri"/>
-              </a:defRPr>
-            </a:pPr>
-            <a:r>
-              <a:rPr b="1" sz="1500">
-                <a:solidFill>
-                  <a:srgbClr val="66FFAA"/>
-                </a:solidFill>
-              </a:rPr>
-              <a:t>Diagnostico: </a:t>
-            </a:r>
-            <a:r>
-              <a:rPr sz="1400">
-                <a:solidFill>
-                  <a:srgbClr val="CCCCCC"/>
-                </a:solidFill>
-              </a:rPr>
-              <a:t>El modelo memorizaba el dataset de entrenamiento (Train ~100%, Test ~65-75%). Overfitting violento por falta de regularizacion con dataset pequeno.</a:t>
-            </a:r>
-          </a:p>
-        </p:txBody>
-      </p:sp>
-      <p:sp>
-        <p:nvSpPr>
-          <p:cNvPr id="6" name="Rounded Rectangle 5"/>
-          <p:cNvSpPr/>
-          <p:nvPr/>
-        </p:nvSpPr>
-        <p:spPr>
-          <a:xfrm>
-            <a:off x="1371600" y="2377440"/>
-            <a:ext cx="9418320" cy="777240"/>
-          </a:xfrm>
-          <a:prstGeom prst="roundRect">
-            <a:avLst/>
-          </a:prstGeom>
-          <a:solidFill>
-            <a:srgbClr val="151235"/>
-          </a:solidFill>
-          <a:ln>
-            <a:noFill/>
-          </a:ln>
-        </p:spPr>
-        <p:style>
-          <a:lnRef idx="1">
-            <a:schemeClr val="accent1"/>
-          </a:lnRef>
-          <a:fillRef idx="3">
-            <a:schemeClr val="accent1"/>
-          </a:fillRef>
-          <a:effectRef idx="2">
-            <a:schemeClr val="accent1"/>
-          </a:effectRef>
-          <a:fontRef idx="minor">
-            <a:schemeClr val="lt1"/>
-          </a:fontRef>
-        </p:style>
-        <p:txBody>
-          <a:bodyPr rtlCol="0" anchor="ctr"/>
-          <a:lstStyle/>
-          <a:p>
-            <a:pPr algn="ctr"/>
-          </a:p>
-        </p:txBody>
-      </p:sp>
-      <p:sp>
-        <p:nvSpPr>
-          <p:cNvPr id="7" name="Rounded Rectangle 6"/>
-          <p:cNvSpPr/>
-          <p:nvPr/>
-        </p:nvSpPr>
-        <p:spPr>
-          <a:xfrm>
-            <a:off x="1371600" y="2377440"/>
-            <a:ext cx="73152" cy="777240"/>
-          </a:xfrm>
-          <a:prstGeom prst="roundRect">
-            <a:avLst/>
-          </a:prstGeom>
-          <a:solidFill>
-            <a:srgbClr val="44FF88"/>
-          </a:solidFill>
-          <a:ln>
-            <a:noFill/>
-          </a:ln>
-        </p:spPr>
-        <p:style>
-          <a:lnRef idx="1">
-            <a:schemeClr val="accent1"/>
-          </a:lnRef>
-          <a:fillRef idx="3">
-            <a:schemeClr val="accent1"/>
-          </a:fillRef>
-          <a:effectRef idx="2">
-            <a:schemeClr val="accent1"/>
-          </a:effectRef>
-          <a:fontRef idx="minor">
-            <a:schemeClr val="lt1"/>
-          </a:fontRef>
-        </p:style>
-        <p:txBody>
-          <a:bodyPr rtlCol="0" anchor="ctr"/>
-          <a:lstStyle/>
-          <a:p>
-            <a:pPr algn="ctr"/>
-          </a:p>
-        </p:txBody>
-      </p:sp>
-      <p:sp>
-        <p:nvSpPr>
-          <p:cNvPr id="8" name="TextBox 7"/>
-          <p:cNvSpPr txBox="1"/>
-          <p:nvPr/>
-        </p:nvSpPr>
-        <p:spPr>
-          <a:xfrm>
-            <a:off x="1737360" y="2468880"/>
-            <a:ext cx="8869680" cy="594360"/>
-          </a:xfrm>
-          <a:prstGeom prst="rect">
-            <a:avLst/>
-          </a:prstGeom>
-          <a:noFill/>
-        </p:spPr>
-        <p:txBody>
-          <a:bodyPr wrap="square">
-            <a:spAutoFit/>
-          </a:bodyPr>
-          <a:lstStyle/>
-          <a:p>
-            <a:pPr algn="l">
-              <a:defRPr sz="1400" b="0">
-                <a:solidFill>
-                  <a:srgbClr val="CCCCCC"/>
-                </a:solidFill>
-                <a:latin typeface="Calibri"/>
-              </a:defRPr>
-            </a:pPr>
-            <a:r>
-              <a:rPr b="1" sz="1500">
-                <a:solidFill>
-                  <a:srgbClr val="66FFAA"/>
-                </a:solidFill>
-              </a:rPr>
-              <a:t>El Interruptor: </a:t>
-            </a:r>
-            <a:r>
-              <a:rPr sz="1400">
-                <a:solidFill>
-                  <a:srgbClr val="CCCCCC"/>
-                </a:solidFill>
-              </a:rPr>
-              <a:t>Activamos Weight Decay (L2 = 0.01), Dropout (p = 0.3) y redujimos la capacidad de la red de ~19K a ~300 parametros.</a:t>
-            </a:r>
-          </a:p>
-        </p:txBody>
-      </p:sp>
-      <p:sp>
-        <p:nvSpPr>
-          <p:cNvPr id="9" name="Rounded Rectangle 8"/>
-          <p:cNvSpPr/>
-          <p:nvPr/>
-        </p:nvSpPr>
-        <p:spPr>
-          <a:xfrm>
-            <a:off x="1371600" y="3291840"/>
-            <a:ext cx="9418320" cy="777240"/>
-          </a:xfrm>
-          <a:prstGeom prst="roundRect">
-            <a:avLst/>
-          </a:prstGeom>
-          <a:solidFill>
-            <a:srgbClr val="151235"/>
-          </a:solidFill>
-          <a:ln>
-            <a:noFill/>
-          </a:ln>
-        </p:spPr>
-        <p:style>
-          <a:lnRef idx="1">
-            <a:schemeClr val="accent1"/>
-          </a:lnRef>
-          <a:fillRef idx="3">
-            <a:schemeClr val="accent1"/>
-          </a:fillRef>
-          <a:effectRef idx="2">
-            <a:schemeClr val="accent1"/>
-          </a:effectRef>
-          <a:fontRef idx="minor">
-            <a:schemeClr val="lt1"/>
-          </a:fontRef>
-        </p:style>
-        <p:txBody>
-          <a:bodyPr rtlCol="0" anchor="ctr"/>
-          <a:lstStyle/>
-          <a:p>
-            <a:pPr algn="ctr"/>
-          </a:p>
-        </p:txBody>
-      </p:sp>
-      <p:sp>
-        <p:nvSpPr>
-          <p:cNvPr id="10" name="Rounded Rectangle 9"/>
-          <p:cNvSpPr/>
-          <p:nvPr/>
-        </p:nvSpPr>
-        <p:spPr>
-          <a:xfrm>
-            <a:off x="1371600" y="3291840"/>
-            <a:ext cx="73152" cy="777240"/>
-          </a:xfrm>
-          <a:prstGeom prst="roundRect">
-            <a:avLst/>
-          </a:prstGeom>
-          <a:solidFill>
-            <a:srgbClr val="44FF88"/>
-          </a:solidFill>
-          <a:ln>
-            <a:noFill/>
-          </a:ln>
-        </p:spPr>
-        <p:style>
-          <a:lnRef idx="1">
-            <a:schemeClr val="accent1"/>
-          </a:lnRef>
-          <a:fillRef idx="3">
-            <a:schemeClr val="accent1"/>
-          </a:fillRef>
-          <a:effectRef idx="2">
-            <a:schemeClr val="accent1"/>
-          </a:effectRef>
-          <a:fontRef idx="minor">
-            <a:schemeClr val="lt1"/>
-          </a:fontRef>
-        </p:style>
-        <p:txBody>
-          <a:bodyPr rtlCol="0" anchor="ctr"/>
-          <a:lstStyle/>
-          <a:p>
-            <a:pPr algn="ctr"/>
-          </a:p>
-        </p:txBody>
-      </p:sp>
-      <p:sp>
-        <p:nvSpPr>
-          <p:cNvPr id="11" name="TextBox 10"/>
-          <p:cNvSpPr txBox="1"/>
-          <p:nvPr/>
-        </p:nvSpPr>
-        <p:spPr>
-          <a:xfrm>
-            <a:off x="1737360" y="3383280"/>
-            <a:ext cx="8869680" cy="594360"/>
-          </a:xfrm>
-          <a:prstGeom prst="rect">
-            <a:avLst/>
-          </a:prstGeom>
-          <a:noFill/>
-        </p:spPr>
-        <p:txBody>
-          <a:bodyPr wrap="square">
-            <a:spAutoFit/>
-          </a:bodyPr>
-          <a:lstStyle/>
-          <a:p>
-            <a:pPr algn="l">
-              <a:defRPr sz="1400" b="0">
-                <a:solidFill>
-                  <a:srgbClr val="CCCCCC"/>
-                </a:solidFill>
-                <a:latin typeface="Calibri"/>
-              </a:defRPr>
-            </a:pPr>
-            <a:r>
-              <a:rPr b="1" sz="1500">
-                <a:solidFill>
-                  <a:srgbClr val="66FFAA"/>
-                </a:solidFill>
-              </a:rPr>
-              <a:t>Anatomia del Exito: </a:t>
-            </a:r>
-            <a:r>
-              <a:rPr sz="1400">
-                <a:solidFill>
-                  <a:srgbClr val="CCCCCC"/>
-                </a:solidFill>
-              </a:rPr>
-              <a:t>El modelo paso de memorizar ruido a aprender representaciones generalizables. Ahora detecta patrones reales en datos no vistos.</a:t>
-            </a:r>
-          </a:p>
-        </p:txBody>
-      </p:sp>
-      <p:sp>
-        <p:nvSpPr>
-          <p:cNvPr id="12" name="Rounded Rectangle 11"/>
-          <p:cNvSpPr/>
-          <p:nvPr/>
-        </p:nvSpPr>
-        <p:spPr>
-          <a:xfrm>
-            <a:off x="1371600" y="4206240"/>
-            <a:ext cx="9418320" cy="777240"/>
-          </a:xfrm>
-          <a:prstGeom prst="roundRect">
-            <a:avLst/>
-          </a:prstGeom>
-          <a:solidFill>
-            <a:srgbClr val="151235"/>
-          </a:solidFill>
-          <a:ln>
-            <a:noFill/>
-          </a:ln>
-        </p:spPr>
-        <p:style>
-          <a:lnRef idx="1">
-            <a:schemeClr val="accent1"/>
-          </a:lnRef>
-          <a:fillRef idx="3">
-            <a:schemeClr val="accent1"/>
-          </a:fillRef>
-          <a:effectRef idx="2">
-            <a:schemeClr val="accent1"/>
-          </a:effectRef>
-          <a:fontRef idx="minor">
-            <a:schemeClr val="lt1"/>
-          </a:fontRef>
-        </p:style>
-        <p:txBody>
-          <a:bodyPr rtlCol="0" anchor="ctr"/>
-          <a:lstStyle/>
-          <a:p>
-            <a:pPr algn="ctr"/>
-          </a:p>
-        </p:txBody>
-      </p:sp>
-      <p:sp>
-        <p:nvSpPr>
-          <p:cNvPr id="13" name="Rounded Rectangle 12"/>
-          <p:cNvSpPr/>
-          <p:nvPr/>
-        </p:nvSpPr>
-        <p:spPr>
-          <a:xfrm>
-            <a:off x="1371600" y="4206240"/>
-            <a:ext cx="73152" cy="777240"/>
-          </a:xfrm>
-          <a:prstGeom prst="roundRect">
-            <a:avLst/>
-          </a:prstGeom>
-          <a:solidFill>
-            <a:srgbClr val="44FF88"/>
-          </a:solidFill>
-          <a:ln>
-            <a:noFill/>
-          </a:ln>
-        </p:spPr>
-        <p:style>
-          <a:lnRef idx="1">
-            <a:schemeClr val="accent1"/>
-          </a:lnRef>
-          <a:fillRef idx="3">
-            <a:schemeClr val="accent1"/>
-          </a:fillRef>
-          <a:effectRef idx="2">
-            <a:schemeClr val="accent1"/>
-          </a:effectRef>
-          <a:fontRef idx="minor">
-            <a:schemeClr val="lt1"/>
-          </a:fontRef>
-        </p:style>
-        <p:txBody>
-          <a:bodyPr rtlCol="0" anchor="ctr"/>
-          <a:lstStyle/>
-          <a:p>
-            <a:pPr algn="ctr"/>
-          </a:p>
-        </p:txBody>
-      </p:sp>
-      <p:sp>
-        <p:nvSpPr>
-          <p:cNvPr id="14" name="TextBox 13"/>
-          <p:cNvSpPr txBox="1"/>
-          <p:nvPr/>
-        </p:nvSpPr>
-        <p:spPr>
-          <a:xfrm>
-            <a:off x="1737360" y="4297679"/>
-            <a:ext cx="8869680" cy="594360"/>
-          </a:xfrm>
-          <a:prstGeom prst="rect">
-            <a:avLst/>
-          </a:prstGeom>
-          <a:noFill/>
-        </p:spPr>
-        <p:txBody>
-          <a:bodyPr wrap="square">
-            <a:spAutoFit/>
-          </a:bodyPr>
-          <a:lstStyle/>
-          <a:p>
-            <a:pPr algn="l">
-              <a:defRPr sz="1400" b="0">
-                <a:solidFill>
-                  <a:srgbClr val="CCCCCC"/>
-                </a:solidFill>
-                <a:latin typeface="Calibri"/>
-              </a:defRPr>
-            </a:pPr>
-            <a:r>
-              <a:rPr b="1" sz="1500">
-                <a:solidFill>
-                  <a:srgbClr val="66FFAA"/>
-                </a:solidFill>
-              </a:rPr>
-              <a:t>Resultado: </a:t>
-            </a:r>
-            <a:r>
-              <a:rPr sz="1400">
-                <a:solidFill>
-                  <a:srgbClr val="CCCCCC"/>
-                </a:solidFill>
-              </a:rPr>
-              <a:t>La brecha train-test se redujo de ~30% a menos del 7%. El modelo ahora GENERALIZA en vez de memorizar.</a:t>
-            </a:r>
-          </a:p>
-        </p:txBody>
-      </p:sp>
-      <p:sp>
-        <p:nvSpPr>
-          <p:cNvPr id="15" name="Rounded Rectangle 14"/>
-          <p:cNvSpPr/>
-          <p:nvPr/>
-        </p:nvSpPr>
-        <p:spPr>
-          <a:xfrm>
-            <a:off x="1371600" y="5120640"/>
-            <a:ext cx="9418320" cy="777240"/>
-          </a:xfrm>
-          <a:prstGeom prst="roundRect">
-            <a:avLst/>
-          </a:prstGeom>
-          <a:solidFill>
-            <a:srgbClr val="151235"/>
-          </a:solidFill>
-          <a:ln>
-            <a:noFill/>
-          </a:ln>
-        </p:spPr>
-        <p:style>
-          <a:lnRef idx="1">
-            <a:schemeClr val="accent1"/>
-          </a:lnRef>
-          <a:fillRef idx="3">
-            <a:schemeClr val="accent1"/>
-          </a:fillRef>
-          <a:effectRef idx="2">
-            <a:schemeClr val="accent1"/>
-          </a:effectRef>
-          <a:fontRef idx="minor">
-            <a:schemeClr val="lt1"/>
-          </a:fontRef>
-        </p:style>
-        <p:txBody>
-          <a:bodyPr rtlCol="0" anchor="ctr"/>
-          <a:lstStyle/>
-          <a:p>
-            <a:pPr algn="ctr"/>
-          </a:p>
-        </p:txBody>
-      </p:sp>
-      <p:sp>
-        <p:nvSpPr>
-          <p:cNvPr id="16" name="Rounded Rectangle 15"/>
-          <p:cNvSpPr/>
-          <p:nvPr/>
-        </p:nvSpPr>
-        <p:spPr>
-          <a:xfrm>
-            <a:off x="1371600" y="5120640"/>
-            <a:ext cx="73152" cy="777240"/>
-          </a:xfrm>
-          <a:prstGeom prst="roundRect">
-            <a:avLst/>
-          </a:prstGeom>
-          <a:solidFill>
-            <a:srgbClr val="44FF88"/>
-          </a:solidFill>
-          <a:ln>
-            <a:noFill/>
-          </a:ln>
-        </p:spPr>
-        <p:style>
-          <a:lnRef idx="1">
-            <a:schemeClr val="accent1"/>
-          </a:lnRef>
-          <a:fillRef idx="3">
-            <a:schemeClr val="accent1"/>
-          </a:fillRef>
-          <a:effectRef idx="2">
-            <a:schemeClr val="accent1"/>
-          </a:effectRef>
-          <a:fontRef idx="minor">
-            <a:schemeClr val="lt1"/>
-          </a:fontRef>
-        </p:style>
-        <p:txBody>
-          <a:bodyPr rtlCol="0" anchor="ctr"/>
-          <a:lstStyle/>
-          <a:p>
-            <a:pPr algn="ctr"/>
-          </a:p>
-        </p:txBody>
-      </p:sp>
-      <p:sp>
-        <p:nvSpPr>
-          <p:cNvPr id="17" name="TextBox 16"/>
-          <p:cNvSpPr txBox="1"/>
-          <p:nvPr/>
-        </p:nvSpPr>
-        <p:spPr>
-          <a:xfrm>
-            <a:off x="1737360" y="5212079"/>
-            <a:ext cx="8869680" cy="594360"/>
-          </a:xfrm>
-          <a:prstGeom prst="rect">
-            <a:avLst/>
-          </a:prstGeom>
-          <a:noFill/>
-        </p:spPr>
-        <p:txBody>
-          <a:bodyPr wrap="square">
-            <a:spAutoFit/>
-          </a:bodyPr>
-          <a:lstStyle/>
-          <a:p>
-            <a:pPr algn="l">
-              <a:defRPr sz="1400" b="0">
-                <a:solidFill>
-                  <a:srgbClr val="CCCCCC"/>
-                </a:solidFill>
-                <a:latin typeface="Calibri"/>
-              </a:defRPr>
-            </a:pPr>
-            <a:r>
-              <a:rPr b="1" sz="1500">
-                <a:solidFill>
-                  <a:srgbClr val="66FFAA"/>
-                </a:solidFill>
-              </a:rPr>
-              <a:t>Leccion para HealthTech: </a:t>
-            </a:r>
-            <a:r>
-              <a:rPr sz="1400">
-                <a:solidFill>
-                  <a:srgbClr val="CCCCCC"/>
-                </a:solidFill>
-              </a:rPr>
-              <a:t>En medicina, un modelo con overfitting puede dar diagnosticos falsos en pacientes nuevos. La regularizacion no es opcional, es esencial.</a:t>
-            </a:r>
-          </a:p>
-        </p:txBody>
-      </p:sp>
-      <p:sp>
-        <p:nvSpPr>
-          <p:cNvPr id="18" name="TextBox 17"/>
-          <p:cNvSpPr txBox="1"/>
-          <p:nvPr/>
-        </p:nvSpPr>
-        <p:spPr>
-          <a:xfrm>
-            <a:off x="914400" y="6035040"/>
-            <a:ext cx="10332720" cy="457200"/>
-          </a:xfrm>
-          <a:prstGeom prst="rect">
-            <a:avLst/>
-          </a:prstGeom>
-          <a:noFill/>
-        </p:spPr>
-        <p:txBody>
-          <a:bodyPr wrap="square">
-            <a:spAutoFit/>
-          </a:bodyPr>
-          <a:lstStyle/>
-          <a:p>
-            <a:pPr algn="ctr">
-              <a:defRPr sz="1400" b="0">
-                <a:solidFill>
-                  <a:srgbClr val="888888"/>
-                </a:solidFill>
-                <a:latin typeface="Calibri"/>
-              </a:defRPr>
-            </a:pPr>
-            <a:r>
-              <a:t>Grupo 7 - La Memoria de Pez  |  Bloque 3: Problemas de Estrategia</a:t>
+                  <a:srgbClr val="999999"/>
+                </a:solidFill>
+                <a:latin typeface="Calibri"/>
+              </a:defRPr>
+            </a:pPr>
+            <a:r>
+              <a:t>Grupo 7  |  La Memoria de Pez  |  Bloque 3: Problemas de Estrategia</a:t>
             </a:r>
           </a:p>
         </p:txBody>

--- a/Grupo7_La_Memoria_de_Pez.pptx
+++ b/Grupo7_La_Memoria_de_Pez.pptx
@@ -3092,7 +3092,7 @@
     <p:bg>
       <p:bgPr>
         <a:solidFill>
-          <a:srgbClr val="FAFAFA"/>
+          <a:srgbClr val="14141E"/>
         </a:solidFill>
         <a:effectLst/>
       </p:bgPr>
@@ -3106,92 +3106,20 @@
       <p:grpSpPr/>
       <p:sp>
         <p:nvSpPr>
-          <p:cNvPr id="2" name="TextBox 1"/>
-          <p:cNvSpPr txBox="1"/>
-          <p:nvPr/>
-        </p:nvSpPr>
-        <p:spPr>
-          <a:xfrm>
-            <a:off x="1371600" y="1645920"/>
-            <a:ext cx="9418320" cy="548640"/>
-          </a:xfrm>
-          <a:prstGeom prst="rect">
-            <a:avLst/>
-          </a:prstGeom>
-          <a:noFill/>
-        </p:spPr>
-        <p:txBody>
-          <a:bodyPr wrap="square">
-            <a:spAutoFit/>
-          </a:bodyPr>
-          <a:lstStyle/>
-          <a:p>
-            <a:pPr algn="l">
-              <a:defRPr sz="2000" b="0">
-                <a:solidFill>
-                  <a:srgbClr val="999999"/>
-                </a:solidFill>
-                <a:latin typeface="Calibri"/>
-              </a:defRPr>
-            </a:pPr>
-            <a:r>
-              <a:t>GRUPO 7</a:t>
-            </a:r>
-          </a:p>
-        </p:txBody>
-      </p:sp>
-      <p:sp>
-        <p:nvSpPr>
-          <p:cNvPr id="3" name="TextBox 2"/>
-          <p:cNvSpPr txBox="1"/>
-          <p:nvPr/>
-        </p:nvSpPr>
-        <p:spPr>
-          <a:xfrm>
-            <a:off x="1371600" y="2194560"/>
-            <a:ext cx="9418320" cy="914400"/>
-          </a:xfrm>
-          <a:prstGeom prst="rect">
-            <a:avLst/>
-          </a:prstGeom>
-          <a:noFill/>
-        </p:spPr>
-        <p:txBody>
-          <a:bodyPr wrap="square">
-            <a:spAutoFit/>
-          </a:bodyPr>
-          <a:lstStyle/>
-          <a:p>
-            <a:pPr algn="l">
-              <a:defRPr sz="4800" b="1">
-                <a:solidFill>
-                  <a:srgbClr val="1A1A1A"/>
-                </a:solidFill>
-                <a:latin typeface="Calibri"/>
-              </a:defRPr>
-            </a:pPr>
-            <a:r>
-              <a:t>La Memoria de Pez</a:t>
-            </a:r>
-          </a:p>
-        </p:txBody>
-      </p:sp>
-      <p:sp>
-        <p:nvSpPr>
-          <p:cNvPr id="4" name="Rectangle 3"/>
+          <p:cNvPr id="2" name="Rectangle 1"/>
           <p:cNvSpPr/>
           <p:nvPr/>
         </p:nvSpPr>
         <p:spPr>
           <a:xfrm>
-            <a:off x="1371600" y="3200400"/>
-            <a:ext cx="2743200" cy="25400"/>
+            <a:off x="1097280" y="1371600"/>
+            <a:ext cx="63500" cy="3200400"/>
           </a:xfrm>
           <a:prstGeom prst="rect">
             <a:avLst/>
           </a:prstGeom>
           <a:solidFill>
-            <a:srgbClr val="0066CC"/>
+            <a:srgbClr val="1A73E8"/>
           </a:solidFill>
           <a:ln>
             <a:noFill/>
@@ -3221,14 +3149,14 @@
       </p:sp>
       <p:sp>
         <p:nvSpPr>
-          <p:cNvPr id="5" name="TextBox 4"/>
+          <p:cNvPr id="3" name="TextBox 2"/>
           <p:cNvSpPr txBox="1"/>
           <p:nvPr/>
         </p:nvSpPr>
         <p:spPr>
           <a:xfrm>
-            <a:off x="1371600" y="3474720"/>
-            <a:ext cx="9418320" cy="457200"/>
+            <a:off x="1463040" y="1371600"/>
+            <a:ext cx="9144000" cy="457200"/>
           </a:xfrm>
           <a:prstGeom prst="rect">
             <a:avLst/>
@@ -3242,29 +3170,29 @@
           <a:lstStyle/>
           <a:p>
             <a:pPr algn="l">
-              <a:defRPr sz="2200" b="0">
-                <a:solidFill>
-                  <a:srgbClr val="0066CC"/>
-                </a:solidFill>
-                <a:latin typeface="Calibri"/>
-              </a:defRPr>
-            </a:pPr>
-            <a:r>
-              <a:t>Deep Learning Audit: El Rescate de HealthTech</a:t>
-            </a:r>
-          </a:p>
-        </p:txBody>
-      </p:sp>
-      <p:sp>
-        <p:nvSpPr>
-          <p:cNvPr id="6" name="TextBox 5"/>
+              <a:defRPr sz="1600" b="1">
+                <a:solidFill>
+                  <a:srgbClr val="909090"/>
+                </a:solidFill>
+                <a:latin typeface="Calibri"/>
+              </a:defRPr>
+            </a:pPr>
+            <a:r>
+              <a:t>GRUPO 7</a:t>
+            </a:r>
+          </a:p>
+        </p:txBody>
+      </p:sp>
+      <p:sp>
+        <p:nvSpPr>
+          <p:cNvPr id="4" name="TextBox 3"/>
           <p:cNvSpPr txBox="1"/>
           <p:nvPr/>
         </p:nvSpPr>
         <p:spPr>
           <a:xfrm>
-            <a:off x="1371600" y="4572000"/>
-            <a:ext cx="9418320" cy="731520"/>
+            <a:off x="1463040" y="1920240"/>
+            <a:ext cx="9144000" cy="1097280"/>
           </a:xfrm>
           <a:prstGeom prst="rect">
             <a:avLst/>
@@ -3278,19 +3206,159 @@
           <a:lstStyle/>
           <a:p>
             <a:pPr algn="l">
+              <a:defRPr sz="5600" b="1">
+                <a:solidFill>
+                  <a:srgbClr val="FFFFFF"/>
+                </a:solidFill>
+                <a:latin typeface="Calibri"/>
+              </a:defRPr>
+            </a:pPr>
+            <a:r>
+              <a:t>La Memoria de Pez</a:t>
+            </a:r>
+          </a:p>
+        </p:txBody>
+      </p:sp>
+      <p:sp>
+        <p:nvSpPr>
+          <p:cNvPr id="5" name="TextBox 4"/>
+          <p:cNvSpPr txBox="1"/>
+          <p:nvPr/>
+        </p:nvSpPr>
+        <p:spPr>
+          <a:xfrm>
+            <a:off x="1463040" y="3017520"/>
+            <a:ext cx="9144000" cy="548640"/>
+          </a:xfrm>
+          <a:prstGeom prst="rect">
+            <a:avLst/>
+          </a:prstGeom>
+          <a:noFill/>
+        </p:spPr>
+        <p:txBody>
+          <a:bodyPr wrap="square">
+            <a:spAutoFit/>
+          </a:bodyPr>
+          <a:lstStyle/>
+          <a:p>
+            <a:pPr algn="l">
+              <a:defRPr sz="2400" b="0">
+                <a:solidFill>
+                  <a:srgbClr val="1A73E8"/>
+                </a:solidFill>
+                <a:latin typeface="Calibri"/>
+              </a:defRPr>
+            </a:pPr>
+            <a:r>
+              <a:t>Deep Learning Audit: El Rescate de HealthTech</a:t>
+            </a:r>
+          </a:p>
+        </p:txBody>
+      </p:sp>
+      <p:sp>
+        <p:nvSpPr>
+          <p:cNvPr id="6" name="TextBox 5"/>
+          <p:cNvSpPr txBox="1"/>
+          <p:nvPr/>
+        </p:nvSpPr>
+        <p:spPr>
+          <a:xfrm>
+            <a:off x="1463040" y="4114800"/>
+            <a:ext cx="9144000" cy="457200"/>
+          </a:xfrm>
+          <a:prstGeom prst="rect">
+            <a:avLst/>
+          </a:prstGeom>
+          <a:noFill/>
+        </p:spPr>
+        <p:txBody>
+          <a:bodyPr wrap="square">
+            <a:spAutoFit/>
+          </a:bodyPr>
+          <a:lstStyle/>
+          <a:p>
+            <a:pPr algn="l">
+              <a:defRPr sz="1500" b="0">
+                <a:solidFill>
+                  <a:srgbClr val="909090"/>
+                </a:solidFill>
+                <a:latin typeface="Calibri"/>
+              </a:defRPr>
+            </a:pPr>
+            <a:r>
+              <a:t>Taller  |  Sesion 2</a:t>
+            </a:r>
+          </a:p>
+        </p:txBody>
+      </p:sp>
+      <p:sp>
+        <p:nvSpPr>
+          <p:cNvPr id="7" name="TextBox 6"/>
+          <p:cNvSpPr txBox="1"/>
+          <p:nvPr/>
+        </p:nvSpPr>
+        <p:spPr>
+          <a:xfrm>
+            <a:off x="1463040" y="5669280"/>
+            <a:ext cx="9144000" cy="457200"/>
+          </a:xfrm>
+          <a:prstGeom prst="rect">
+            <a:avLst/>
+          </a:prstGeom>
+          <a:noFill/>
+        </p:spPr>
+        <p:txBody>
+          <a:bodyPr wrap="square">
+            <a:spAutoFit/>
+          </a:bodyPr>
+          <a:lstStyle/>
+          <a:p>
+            <a:pPr algn="l">
               <a:defRPr sz="1400" b="0">
                 <a:solidFill>
-                  <a:srgbClr val="999999"/>
-                </a:solidFill>
-                <a:latin typeface="Calibri"/>
-              </a:defRPr>
-            </a:pPr>
-            <a:r>
-              <a:t>Universidad Privada del Norte  |  Escuela de Posgrado</a:t>
-            </a:r>
-            <a:br/>
-            <a:r>
-              <a:t>Modelos de Deep Learning  |  Sesion 2</a:t>
+                  <a:srgbClr val="666666"/>
+                </a:solidFill>
+                <a:latin typeface="Calibri"/>
+              </a:defRPr>
+            </a:pPr>
+            <a:r>
+              <a:t>Universidad Privada del Norte</a:t>
+            </a:r>
+          </a:p>
+        </p:txBody>
+      </p:sp>
+      <p:sp>
+        <p:nvSpPr>
+          <p:cNvPr id="8" name="TextBox 7"/>
+          <p:cNvSpPr txBox="1"/>
+          <p:nvPr/>
+        </p:nvSpPr>
+        <p:spPr>
+          <a:xfrm>
+            <a:off x="1463040" y="6035040"/>
+            <a:ext cx="9144000" cy="457200"/>
+          </a:xfrm>
+          <a:prstGeom prst="rect">
+            <a:avLst/>
+          </a:prstGeom>
+          <a:noFill/>
+        </p:spPr>
+        <p:txBody>
+          <a:bodyPr wrap="square">
+            <a:spAutoFit/>
+          </a:bodyPr>
+          <a:lstStyle/>
+          <a:p>
+            <a:pPr algn="l">
+              <a:defRPr sz="1300" b="0">
+                <a:solidFill>
+                  <a:srgbClr val="555555"/>
+                </a:solidFill>
+                <a:latin typeface="Calibri"/>
+              </a:defRPr>
+            </a:pPr>
+            <a:r>
+              <a:t>Escuela de Posgrado  |  Modelos de Deep Learning</a:t>
             </a:r>
           </a:p>
         </p:txBody>
@@ -3309,7 +3377,7 @@
     <p:bg>
       <p:bgPr>
         <a:solidFill>
-          <a:srgbClr val="FAFAFA"/>
+          <a:srgbClr val="FBFBFB"/>
         </a:solidFill>
         <a:effectLst/>
       </p:bgPr>
@@ -3329,8 +3397,8 @@
         </p:nvSpPr>
         <p:spPr>
           <a:xfrm>
-            <a:off x="1371600" y="548640"/>
-            <a:ext cx="9418320" cy="640080"/>
+            <a:off x="1097280" y="457200"/>
+            <a:ext cx="9144000" cy="640080"/>
           </a:xfrm>
           <a:prstGeom prst="rect">
             <a:avLst/>
@@ -3344,9 +3412,9 @@
           <a:lstStyle/>
           <a:p>
             <a:pPr algn="l">
-              <a:defRPr sz="4000" b="1">
-                <a:solidFill>
-                  <a:srgbClr val="1A1A1A"/>
+              <a:defRPr sz="4200" b="1">
+                <a:solidFill>
+                  <a:srgbClr val="181818"/>
                 </a:solidFill>
                 <a:latin typeface="Calibri"/>
               </a:defRPr>
@@ -3365,14 +3433,14 @@
         </p:nvSpPr>
         <p:spPr>
           <a:xfrm>
-            <a:off x="1371600" y="1188720"/>
-            <a:ext cx="1828800" cy="25400"/>
+            <a:off x="1097280" y="1051560"/>
+            <a:ext cx="2286000" cy="38100"/>
           </a:xfrm>
           <a:prstGeom prst="rect">
             <a:avLst/>
           </a:prstGeom>
           <a:solidFill>
-            <a:srgbClr val="0066CC"/>
+            <a:srgbClr val="D93025"/>
           </a:solidFill>
           <a:ln>
             <a:noFill/>
@@ -3408,8 +3476,8 @@
         </p:nvSpPr>
         <p:spPr>
           <a:xfrm>
-            <a:off x="1371600" y="1463040"/>
-            <a:ext cx="9418320" cy="457200"/>
+            <a:off x="1097280" y="1280160"/>
+            <a:ext cx="9144000" cy="365760"/>
           </a:xfrm>
           <a:prstGeom prst="rect">
             <a:avLst/>
@@ -3423,29 +3491,76 @@
           <a:lstStyle/>
           <a:p>
             <a:pPr algn="l">
-              <a:defRPr sz="1800" b="1">
-                <a:solidFill>
-                  <a:srgbClr val="CC3333"/>
-                </a:solidFill>
-                <a:latin typeface="Calibri"/>
-              </a:defRPr>
-            </a:pPr>
-            <a:r>
-              <a:t>Sabotaje: dataset pequeno sin regularizacion ni weight decay</a:t>
-            </a:r>
-          </a:p>
-        </p:txBody>
-      </p:sp>
-      <p:sp>
-        <p:nvSpPr>
-          <p:cNvPr id="5" name="TextBox 4"/>
+              <a:defRPr sz="1700" b="1">
+                <a:solidFill>
+                  <a:srgbClr val="D93025"/>
+                </a:solidFill>
+                <a:latin typeface="Calibri"/>
+              </a:defRPr>
+            </a:pPr>
+            <a:r>
+              <a:t>Dataset pequeno, sin regularizacion, sin weight decay</a:t>
+            </a:r>
+          </a:p>
+        </p:txBody>
+      </p:sp>
+      <p:sp>
+        <p:nvSpPr>
+          <p:cNvPr id="5" name="Rounded Rectangle 4"/>
+          <p:cNvSpPr/>
+          <p:nvPr/>
+        </p:nvSpPr>
+        <p:spPr>
+          <a:xfrm>
+            <a:off x="1097280" y="1920240"/>
+            <a:ext cx="4937760" cy="2286000"/>
+          </a:xfrm>
+          <a:prstGeom prst="roundRect">
+            <a:avLst>
+              <a:gd name="adj" fmla="val 4000"/>
+            </a:avLst>
+          </a:prstGeom>
+          <a:solidFill>
+            <a:srgbClr val="FDF0F0"/>
+          </a:solidFill>
+          <a:ln w="15240">
+            <a:solidFill>
+              <a:srgbClr val="D93025"/>
+            </a:solidFill>
+          </a:ln>
+        </p:spPr>
+        <p:style>
+          <a:lnRef idx="1">
+            <a:schemeClr val="accent1"/>
+          </a:lnRef>
+          <a:fillRef idx="3">
+            <a:schemeClr val="accent1"/>
+          </a:fillRef>
+          <a:effectRef idx="2">
+            <a:schemeClr val="accent1"/>
+          </a:effectRef>
+          <a:fontRef idx="minor">
+            <a:schemeClr val="lt1"/>
+          </a:fontRef>
+        </p:style>
+        <p:txBody>
+          <a:bodyPr rtlCol="0" anchor="ctr"/>
+          <a:lstStyle/>
+          <a:p>
+            <a:pPr algn="ctr"/>
+          </a:p>
+        </p:txBody>
+      </p:sp>
+      <p:sp>
+        <p:nvSpPr>
+          <p:cNvPr id="6" name="TextBox 5"/>
           <p:cNvSpPr txBox="1"/>
           <p:nvPr/>
         </p:nvSpPr>
         <p:spPr>
           <a:xfrm>
-            <a:off x="1371600" y="2103120"/>
-            <a:ext cx="9418320" cy="4114800"/>
+            <a:off x="1371600" y="2057400"/>
+            <a:ext cx="4572000" cy="365760"/>
           </a:xfrm>
           <a:prstGeom prst="rect">
             <a:avLst/>
@@ -3458,206 +3573,589 @@
           </a:bodyPr>
           <a:lstStyle/>
           <a:p>
-            <a:pPr>
+            <a:pPr algn="l">
+              <a:defRPr sz="2000" b="1">
+                <a:solidFill>
+                  <a:srgbClr val="D93025"/>
+                </a:solidFill>
+                <a:latin typeface="Calibri"/>
+              </a:defRPr>
+            </a:pPr>
+            <a:r>
+              <a:t>Sintoma</a:t>
+            </a:r>
+          </a:p>
+        </p:txBody>
+      </p:sp>
+      <p:sp>
+        <p:nvSpPr>
+          <p:cNvPr id="7" name="TextBox 6"/>
+          <p:cNvSpPr txBox="1"/>
+          <p:nvPr/>
+        </p:nvSpPr>
+        <p:spPr>
+          <a:xfrm>
+            <a:off x="1371600" y="2468880"/>
+            <a:ext cx="4389120" cy="1645920"/>
+          </a:xfrm>
+          <a:prstGeom prst="rect">
+            <a:avLst/>
+          </a:prstGeom>
+          <a:noFill/>
+        </p:spPr>
+        <p:txBody>
+          <a:bodyPr wrap="square">
+            <a:spAutoFit/>
+          </a:bodyPr>
+          <a:lstStyle/>
+          <a:p>
+            <a:pPr algn="l">
               <a:spcBef>
-                <a:spcPts val="800"/>
+                <a:spcPts val="1000"/>
               </a:spcBef>
-              <a:spcAft>
-                <a:spcPts val="400"/>
-              </a:spcAft>
-              <a:defRPr sz="1700">
-                <a:solidFill>
-                  <a:srgbClr val="333333"/>
-                </a:solidFill>
-                <a:latin typeface="Calibri"/>
-              </a:defRPr>
-            </a:pPr>
-            <a:r>
-              <a:t>El modelo tiene ~19,000 parametros pero solo 60 muestras de entrenamiento</a:t>
-            </a:r>
-          </a:p>
-          <a:p>
-            <a:pPr>
+              <a:defRPr sz="1500">
+                <a:solidFill>
+                  <a:srgbClr val="2A2A2A"/>
+                </a:solidFill>
+                <a:latin typeface="Calibri"/>
+              </a:defRPr>
+            </a:pPr>
+            <a:r>
+              <a:t>Train accuracy llega a ~100%</a:t>
+            </a:r>
+          </a:p>
+          <a:p>
+            <a:pPr algn="l">
               <a:spcBef>
-                <a:spcPts val="800"/>
+                <a:spcPts val="1000"/>
               </a:spcBef>
-              <a:spcAft>
-                <a:spcPts val="400"/>
-              </a:spcAft>
-              <a:defRPr sz="1700">
-                <a:solidFill>
-                  <a:srgbClr val="333333"/>
-                </a:solidFill>
-                <a:latin typeface="Calibri"/>
-              </a:defRPr>
-            </a:pPr>
-            <a:r>
-              <a:t>Ratio parametros/muestras: ~300:1  (puede memorizar todo sin esfuerzo)</a:t>
-            </a:r>
-          </a:p>
-          <a:p>
-            <a:pPr>
+              <a:defRPr sz="1500">
+                <a:solidFill>
+                  <a:srgbClr val="2A2A2A"/>
+                </a:solidFill>
+                <a:latin typeface="Calibri"/>
+              </a:defRPr>
+            </a:pPr>
+            <a:r>
+              <a:t>Test accuracy se queda en ~65-75%</a:t>
+            </a:r>
+          </a:p>
+          <a:p>
+            <a:pPr algn="l">
               <a:spcBef>
-                <a:spcPts val="800"/>
+                <a:spcPts val="1000"/>
               </a:spcBef>
-              <a:spcAft>
-                <a:spcPts val="400"/>
-              </a:spcAft>
-              <a:defRPr sz="1700">
-                <a:solidFill>
-                  <a:srgbClr val="333333"/>
-                </a:solidFill>
-                <a:latin typeface="Calibri"/>
-              </a:defRPr>
-            </a:pPr>
-          </a:p>
-          <a:p>
-            <a:pPr>
+              <a:defRPr sz="1500">
+                <a:solidFill>
+                  <a:srgbClr val="2A2A2A"/>
+                </a:solidFill>
+                <a:latin typeface="Calibri"/>
+              </a:defRPr>
+            </a:pPr>
+            <a:r>
+              <a:t>La perdida de test diverge</a:t>
+            </a:r>
+          </a:p>
+          <a:p>
+            <a:pPr algn="l">
               <a:spcBef>
-                <a:spcPts val="800"/>
+                <a:spcPts val="1000"/>
               </a:spcBef>
-              <a:spcAft>
-                <a:spcPts val="400"/>
-              </a:spcAft>
-              <a:defRPr sz="1700">
-                <a:solidFill>
-                  <a:srgbClr val="333333"/>
-                </a:solidFill>
-                <a:latin typeface="Calibri"/>
-              </a:defRPr>
-            </a:pPr>
-            <a:r>
-              <a:t>Lo que falta:</a:t>
-            </a:r>
-          </a:p>
-          <a:p>
-            <a:pPr>
+              <a:defRPr sz="1500">
+                <a:solidFill>
+                  <a:srgbClr val="2A2A2A"/>
+                </a:solidFill>
+                <a:latin typeface="Calibri"/>
+              </a:defRPr>
+            </a:pPr>
+            <a:r>
+              <a:t>El modelo MEMORIZA en vez de aprender</a:t>
+            </a:r>
+          </a:p>
+        </p:txBody>
+      </p:sp>
+      <p:sp>
+        <p:nvSpPr>
+          <p:cNvPr id="8" name="Rounded Rectangle 7"/>
+          <p:cNvSpPr/>
+          <p:nvPr/>
+        </p:nvSpPr>
+        <p:spPr>
+          <a:xfrm>
+            <a:off x="6309360" y="1920240"/>
+            <a:ext cx="4937760" cy="2286000"/>
+          </a:xfrm>
+          <a:prstGeom prst="roundRect">
+            <a:avLst>
+              <a:gd name="adj" fmla="val 4000"/>
+            </a:avLst>
+          </a:prstGeom>
+          <a:solidFill>
+            <a:srgbClr val="FDF0F0"/>
+          </a:solidFill>
+          <a:ln w="15240">
+            <a:solidFill>
+              <a:srgbClr val="D93025"/>
+            </a:solidFill>
+          </a:ln>
+        </p:spPr>
+        <p:style>
+          <a:lnRef idx="1">
+            <a:schemeClr val="accent1"/>
+          </a:lnRef>
+          <a:fillRef idx="3">
+            <a:schemeClr val="accent1"/>
+          </a:fillRef>
+          <a:effectRef idx="2">
+            <a:schemeClr val="accent1"/>
+          </a:effectRef>
+          <a:fontRef idx="minor">
+            <a:schemeClr val="lt1"/>
+          </a:fontRef>
+        </p:style>
+        <p:txBody>
+          <a:bodyPr rtlCol="0" anchor="ctr"/>
+          <a:lstStyle/>
+          <a:p>
+            <a:pPr algn="ctr"/>
+          </a:p>
+        </p:txBody>
+      </p:sp>
+      <p:sp>
+        <p:nvSpPr>
+          <p:cNvPr id="9" name="TextBox 8"/>
+          <p:cNvSpPr txBox="1"/>
+          <p:nvPr/>
+        </p:nvSpPr>
+        <p:spPr>
+          <a:xfrm>
+            <a:off x="6583680" y="2057400"/>
+            <a:ext cx="4572000" cy="365760"/>
+          </a:xfrm>
+          <a:prstGeom prst="rect">
+            <a:avLst/>
+          </a:prstGeom>
+          <a:noFill/>
+        </p:spPr>
+        <p:txBody>
+          <a:bodyPr wrap="square">
+            <a:spAutoFit/>
+          </a:bodyPr>
+          <a:lstStyle/>
+          <a:p>
+            <a:pPr algn="l">
+              <a:defRPr sz="2000" b="1">
+                <a:solidFill>
+                  <a:srgbClr val="D93025"/>
+                </a:solidFill>
+                <a:latin typeface="Calibri"/>
+              </a:defRPr>
+            </a:pPr>
+            <a:r>
+              <a:t>Los numeros</a:t>
+            </a:r>
+          </a:p>
+        </p:txBody>
+      </p:sp>
+      <p:sp>
+        <p:nvSpPr>
+          <p:cNvPr id="10" name="TextBox 9"/>
+          <p:cNvSpPr txBox="1"/>
+          <p:nvPr/>
+        </p:nvSpPr>
+        <p:spPr>
+          <a:xfrm>
+            <a:off x="6583680" y="2468880"/>
+            <a:ext cx="4389120" cy="914400"/>
+          </a:xfrm>
+          <a:prstGeom prst="rect">
+            <a:avLst/>
+          </a:prstGeom>
+          <a:noFill/>
+        </p:spPr>
+        <p:txBody>
+          <a:bodyPr wrap="square">
+            <a:spAutoFit/>
+          </a:bodyPr>
+          <a:lstStyle/>
+          <a:p>
+            <a:pPr algn="l">
               <a:spcBef>
-                <a:spcPts val="800"/>
+                <a:spcPts val="1000"/>
               </a:spcBef>
-              <a:spcAft>
-                <a:spcPts val="400"/>
-              </a:spcAft>
-              <a:defRPr sz="1700">
-                <a:solidFill>
-                  <a:srgbClr val="333333"/>
-                </a:solidFill>
-                <a:latin typeface="Calibri"/>
-              </a:defRPr>
-            </a:pPr>
-            <a:r>
-              <a:t>    -  No hay Weight Decay (penalizacion L2)</a:t>
-            </a:r>
-          </a:p>
-          <a:p>
-            <a:pPr>
+              <a:defRPr sz="1500">
+                <a:solidFill>
+                  <a:srgbClr val="2A2A2A"/>
+                </a:solidFill>
+                <a:latin typeface="Calibri"/>
+              </a:defRPr>
+            </a:pPr>
+            <a:r>
+              <a:t>~19,000 parametros  vs  60 muestras</a:t>
+            </a:r>
+          </a:p>
+        </p:txBody>
+      </p:sp>
+      <p:pic>
+        <p:nvPicPr>
+          <p:cNvPr id="11" name="Picture 10" descr="f_ratio.png"/>
+          <p:cNvPicPr>
+            <a:picLocks noChangeAspect="1"/>
+          </p:cNvPicPr>
+          <p:nvPr/>
+        </p:nvPicPr>
+        <p:blipFill>
+          <a:blip r:embed="rId2"/>
+          <a:stretch>
+            <a:fillRect/>
+          </a:stretch>
+        </p:blipFill>
+        <p:spPr>
+          <a:xfrm>
+            <a:off x="6583680" y="3108960"/>
+            <a:ext cx="4114800" cy="529226"/>
+          </a:xfrm>
+          <a:prstGeom prst="rect">
+            <a:avLst/>
+          </a:prstGeom>
+        </p:spPr>
+      </p:pic>
+      <p:sp>
+        <p:nvSpPr>
+          <p:cNvPr id="12" name="Rounded Rectangle 11"/>
+          <p:cNvSpPr/>
+          <p:nvPr/>
+        </p:nvSpPr>
+        <p:spPr>
+          <a:xfrm>
+            <a:off x="1097280" y="4434840"/>
+            <a:ext cx="4937760" cy="2011680"/>
+          </a:xfrm>
+          <a:prstGeom prst="roundRect">
+            <a:avLst>
+              <a:gd name="adj" fmla="val 4000"/>
+            </a:avLst>
+          </a:prstGeom>
+          <a:solidFill>
+            <a:srgbClr val="F4F4F6"/>
+          </a:solidFill>
+          <a:ln w="10160">
+            <a:solidFill>
+              <a:srgbClr val="909090"/>
+            </a:solidFill>
+          </a:ln>
+        </p:spPr>
+        <p:style>
+          <a:lnRef idx="1">
+            <a:schemeClr val="accent1"/>
+          </a:lnRef>
+          <a:fillRef idx="3">
+            <a:schemeClr val="accent1"/>
+          </a:fillRef>
+          <a:effectRef idx="2">
+            <a:schemeClr val="accent1"/>
+          </a:effectRef>
+          <a:fontRef idx="minor">
+            <a:schemeClr val="lt1"/>
+          </a:fontRef>
+        </p:style>
+        <p:txBody>
+          <a:bodyPr rtlCol="0" anchor="ctr"/>
+          <a:lstStyle/>
+          <a:p>
+            <a:pPr algn="ctr"/>
+          </a:p>
+        </p:txBody>
+      </p:sp>
+      <p:sp>
+        <p:nvSpPr>
+          <p:cNvPr id="13" name="TextBox 12"/>
+          <p:cNvSpPr txBox="1"/>
+          <p:nvPr/>
+        </p:nvSpPr>
+        <p:spPr>
+          <a:xfrm>
+            <a:off x="1371600" y="4526280"/>
+            <a:ext cx="4572000" cy="365760"/>
+          </a:xfrm>
+          <a:prstGeom prst="rect">
+            <a:avLst/>
+          </a:prstGeom>
+          <a:noFill/>
+        </p:spPr>
+        <p:txBody>
+          <a:bodyPr wrap="square">
+            <a:spAutoFit/>
+          </a:bodyPr>
+          <a:lstStyle/>
+          <a:p>
+            <a:pPr algn="l">
+              <a:defRPr sz="2000" b="1">
+                <a:solidFill>
+                  <a:srgbClr val="2A2A2A"/>
+                </a:solidFill>
+                <a:latin typeface="Calibri"/>
+              </a:defRPr>
+            </a:pPr>
+            <a:r>
+              <a:t>Lo que falta</a:t>
+            </a:r>
+          </a:p>
+        </p:txBody>
+      </p:sp>
+      <p:sp>
+        <p:nvSpPr>
+          <p:cNvPr id="14" name="TextBox 13"/>
+          <p:cNvSpPr txBox="1"/>
+          <p:nvPr/>
+        </p:nvSpPr>
+        <p:spPr>
+          <a:xfrm>
+            <a:off x="1371600" y="4937760"/>
+            <a:ext cx="4389120" cy="1371600"/>
+          </a:xfrm>
+          <a:prstGeom prst="rect">
+            <a:avLst/>
+          </a:prstGeom>
+          <a:noFill/>
+        </p:spPr>
+        <p:txBody>
+          <a:bodyPr wrap="square">
+            <a:spAutoFit/>
+          </a:bodyPr>
+          <a:lstStyle/>
+          <a:p>
+            <a:pPr algn="l">
               <a:spcBef>
-                <a:spcPts val="800"/>
+                <a:spcPts val="1000"/>
               </a:spcBef>
-              <a:spcAft>
-                <a:spcPts val="400"/>
-              </a:spcAft>
-              <a:defRPr sz="1700">
-                <a:solidFill>
-                  <a:srgbClr val="333333"/>
-                </a:solidFill>
-                <a:latin typeface="Calibri"/>
-              </a:defRPr>
-            </a:pPr>
-            <a:r>
-              <a:t>    -  No hay Dropout</a:t>
-            </a:r>
-          </a:p>
-          <a:p>
-            <a:pPr>
+              <a:defRPr sz="1500">
+                <a:solidFill>
+                  <a:srgbClr val="606060"/>
+                </a:solidFill>
+                <a:latin typeface="Calibri"/>
+              </a:defRPr>
+            </a:pPr>
+            <a:r>
+              <a:t>   No hay Weight Decay (L2)</a:t>
+            </a:r>
+          </a:p>
+          <a:p>
+            <a:pPr algn="l">
               <a:spcBef>
-                <a:spcPts val="800"/>
+                <a:spcPts val="1000"/>
               </a:spcBef>
-              <a:spcAft>
-                <a:spcPts val="400"/>
-              </a:spcAft>
-              <a:defRPr sz="1700">
-                <a:solidFill>
-                  <a:srgbClr val="333333"/>
-                </a:solidFill>
-                <a:latin typeface="Calibri"/>
-              </a:defRPr>
-            </a:pPr>
-            <a:r>
-              <a:t>    -  No hay Early Stopping</a:t>
-            </a:r>
-          </a:p>
-          <a:p>
-            <a:pPr>
+              <a:defRPr sz="1500">
+                <a:solidFill>
+                  <a:srgbClr val="606060"/>
+                </a:solidFill>
+                <a:latin typeface="Calibri"/>
+              </a:defRPr>
+            </a:pPr>
+            <a:r>
+              <a:t>   No hay Dropout</a:t>
+            </a:r>
+          </a:p>
+          <a:p>
+            <a:pPr algn="l">
               <a:spcBef>
-                <a:spcPts val="800"/>
+                <a:spcPts val="1000"/>
               </a:spcBef>
-              <a:spcAft>
-                <a:spcPts val="400"/>
-              </a:spcAft>
-              <a:defRPr sz="1700">
-                <a:solidFill>
-                  <a:srgbClr val="333333"/>
-                </a:solidFill>
-                <a:latin typeface="Calibri"/>
-              </a:defRPr>
-            </a:pPr>
-            <a:r>
-              <a:t>    -  Red sobredimensionada para tan pocos datos</a:t>
-            </a:r>
-          </a:p>
-          <a:p>
-            <a:pPr>
+              <a:defRPr sz="1500">
+                <a:solidFill>
+                  <a:srgbClr val="606060"/>
+                </a:solidFill>
+                <a:latin typeface="Calibri"/>
+              </a:defRPr>
+            </a:pPr>
+            <a:r>
+              <a:t>   No hay Early Stopping</a:t>
+            </a:r>
+          </a:p>
+          <a:p>
+            <a:pPr algn="l">
               <a:spcBef>
-                <a:spcPts val="800"/>
+                <a:spcPts val="1000"/>
               </a:spcBef>
-              <a:spcAft>
-                <a:spcPts val="400"/>
-              </a:spcAft>
-              <a:defRPr sz="1700">
-                <a:solidFill>
-                  <a:srgbClr val="333333"/>
-                </a:solidFill>
-                <a:latin typeface="Calibri"/>
-              </a:defRPr>
-            </a:pPr>
-          </a:p>
-          <a:p>
-            <a:pPr>
+              <a:defRPr sz="1500">
+                <a:solidFill>
+                  <a:srgbClr val="606060"/>
+                </a:solidFill>
+                <a:latin typeface="Calibri"/>
+              </a:defRPr>
+            </a:pPr>
+            <a:r>
+              <a:t>   Red sobredimensionada</a:t>
+            </a:r>
+          </a:p>
+        </p:txBody>
+      </p:sp>
+      <p:sp>
+        <p:nvSpPr>
+          <p:cNvPr id="15" name="Rounded Rectangle 14"/>
+          <p:cNvSpPr/>
+          <p:nvPr/>
+        </p:nvSpPr>
+        <p:spPr>
+          <a:xfrm>
+            <a:off x="6309360" y="4434840"/>
+            <a:ext cx="4937760" cy="2011680"/>
+          </a:xfrm>
+          <a:prstGeom prst="roundRect">
+            <a:avLst>
+              <a:gd name="adj" fmla="val 4000"/>
+            </a:avLst>
+          </a:prstGeom>
+          <a:solidFill>
+            <a:srgbClr val="F4F4F6"/>
+          </a:solidFill>
+          <a:ln w="10160">
+            <a:solidFill>
+              <a:srgbClr val="909090"/>
+            </a:solidFill>
+          </a:ln>
+        </p:spPr>
+        <p:style>
+          <a:lnRef idx="1">
+            <a:schemeClr val="accent1"/>
+          </a:lnRef>
+          <a:fillRef idx="3">
+            <a:schemeClr val="accent1"/>
+          </a:fillRef>
+          <a:effectRef idx="2">
+            <a:schemeClr val="accent1"/>
+          </a:effectRef>
+          <a:fontRef idx="minor">
+            <a:schemeClr val="lt1"/>
+          </a:fontRef>
+        </p:style>
+        <p:txBody>
+          <a:bodyPr rtlCol="0" anchor="ctr"/>
+          <a:lstStyle/>
+          <a:p>
+            <a:pPr algn="ctr"/>
+          </a:p>
+        </p:txBody>
+      </p:sp>
+      <p:sp>
+        <p:nvSpPr>
+          <p:cNvPr id="16" name="TextBox 15"/>
+          <p:cNvSpPr txBox="1"/>
+          <p:nvPr/>
+        </p:nvSpPr>
+        <p:spPr>
+          <a:xfrm>
+            <a:off x="6583680" y="4526280"/>
+            <a:ext cx="4572000" cy="365760"/>
+          </a:xfrm>
+          <a:prstGeom prst="rect">
+            <a:avLst/>
+          </a:prstGeom>
+          <a:noFill/>
+        </p:spPr>
+        <p:txBody>
+          <a:bodyPr wrap="square">
+            <a:spAutoFit/>
+          </a:bodyPr>
+          <a:lstStyle/>
+          <a:p>
+            <a:pPr algn="l">
+              <a:defRPr sz="2000" b="1">
+                <a:solidFill>
+                  <a:srgbClr val="2A2A2A"/>
+                </a:solidFill>
+                <a:latin typeface="Calibri"/>
+              </a:defRPr>
+            </a:pPr>
+            <a:r>
+              <a:t>Impacto clinico</a:t>
+            </a:r>
+          </a:p>
+        </p:txBody>
+      </p:sp>
+      <p:sp>
+        <p:nvSpPr>
+          <p:cNvPr id="17" name="TextBox 16"/>
+          <p:cNvSpPr txBox="1"/>
+          <p:nvPr/>
+        </p:nvSpPr>
+        <p:spPr>
+          <a:xfrm>
+            <a:off x="6583680" y="4937760"/>
+            <a:ext cx="4389120" cy="1371600"/>
+          </a:xfrm>
+          <a:prstGeom prst="rect">
+            <a:avLst/>
+          </a:prstGeom>
+          <a:noFill/>
+        </p:spPr>
+        <p:txBody>
+          <a:bodyPr wrap="square">
+            <a:spAutoFit/>
+          </a:bodyPr>
+          <a:lstStyle/>
+          <a:p>
+            <a:pPr algn="l">
               <a:spcBef>
-                <a:spcPts val="800"/>
+                <a:spcPts val="1000"/>
               </a:spcBef>
-              <a:spcAft>
-                <a:spcPts val="400"/>
-              </a:spcAft>
-              <a:defRPr sz="1700">
-                <a:solidFill>
-                  <a:srgbClr val="333333"/>
-                </a:solidFill>
-                <a:latin typeface="Calibri"/>
-              </a:defRPr>
-            </a:pPr>
-            <a:r>
-              <a:t>Resultado: el modelo alcanza ~100% en train pero falla en datos nuevos.</a:t>
-            </a:r>
-          </a:p>
-          <a:p>
-            <a:pPr>
+              <a:defRPr sz="1500">
+                <a:solidFill>
+                  <a:srgbClr val="606060"/>
+                </a:solidFill>
+                <a:latin typeface="Calibri"/>
+              </a:defRPr>
+            </a:pPr>
+            <a:r>
+              <a:t>En produccion no detectaria</a:t>
+            </a:r>
+          </a:p>
+          <a:p>
+            <a:pPr algn="l">
               <a:spcBef>
-                <a:spcPts val="800"/>
+                <a:spcPts val="1000"/>
               </a:spcBef>
-              <a:spcAft>
-                <a:spcPts val="400"/>
-              </a:spcAft>
-              <a:defRPr sz="1700">
-                <a:solidFill>
-                  <a:srgbClr val="333333"/>
-                </a:solidFill>
-                <a:latin typeface="Calibri"/>
-              </a:defRPr>
-            </a:pPr>
-            <a:r>
-              <a:t>Ha memorizado cada muestra en vez de aprender patrones.</a:t>
+              <a:defRPr sz="1500">
+                <a:solidFill>
+                  <a:srgbClr val="606060"/>
+                </a:solidFill>
+                <a:latin typeface="Calibri"/>
+              </a:defRPr>
+            </a:pPr>
+            <a:r>
+              <a:t>patologias nuevas correctamente.</a:t>
+            </a:r>
+          </a:p>
+          <a:p>
+            <a:pPr algn="l">
+              <a:spcBef>
+                <a:spcPts val="1000"/>
+              </a:spcBef>
+              <a:defRPr sz="1500">
+                <a:solidFill>
+                  <a:srgbClr val="606060"/>
+                </a:solidFill>
+                <a:latin typeface="Calibri"/>
+              </a:defRPr>
+            </a:pPr>
+            <a:r>
+              <a:t>Solo "recuerda" los casos vistos.</a:t>
+            </a:r>
+          </a:p>
+          <a:p>
+            <a:pPr algn="l">
+              <a:spcBef>
+                <a:spcPts val="1000"/>
+              </a:spcBef>
+              <a:defRPr sz="1500">
+                <a:solidFill>
+                  <a:srgbClr val="606060"/>
+                </a:solidFill>
+                <a:latin typeface="Calibri"/>
+              </a:defRPr>
+            </a:pPr>
+            <a:r>
+              <a:t>Paciente nuevo = diagnostico erroneo.</a:t>
             </a:r>
           </a:p>
         </p:txBody>
@@ -3676,7 +4174,7 @@
     <p:bg>
       <p:bgPr>
         <a:solidFill>
-          <a:srgbClr val="FAFAFA"/>
+          <a:srgbClr val="FBFBFB"/>
         </a:solidFill>
         <a:effectLst/>
       </p:bgPr>
@@ -3696,8 +4194,8 @@
         </p:nvSpPr>
         <p:spPr>
           <a:xfrm>
-            <a:off x="1371600" y="548640"/>
-            <a:ext cx="9418320" cy="640080"/>
+            <a:off x="1097280" y="457200"/>
+            <a:ext cx="9144000" cy="640080"/>
           </a:xfrm>
           <a:prstGeom prst="rect">
             <a:avLst/>
@@ -3711,9 +4209,9 @@
           <a:lstStyle/>
           <a:p>
             <a:pPr algn="l">
-              <a:defRPr sz="4000" b="1">
-                <a:solidFill>
-                  <a:srgbClr val="1A1A1A"/>
+              <a:defRPr sz="4200" b="1">
+                <a:solidFill>
+                  <a:srgbClr val="181818"/>
                 </a:solidFill>
                 <a:latin typeface="Calibri"/>
               </a:defRPr>
@@ -3732,14 +4230,14 @@
         </p:nvSpPr>
         <p:spPr>
           <a:xfrm>
-            <a:off x="1371600" y="1188720"/>
-            <a:ext cx="1828800" cy="25400"/>
+            <a:off x="1097280" y="1051560"/>
+            <a:ext cx="2286000" cy="38100"/>
           </a:xfrm>
           <a:prstGeom prst="rect">
             <a:avLst/>
           </a:prstGeom>
           <a:solidFill>
-            <a:srgbClr val="0066CC"/>
+            <a:srgbClr val="FF8F00"/>
           </a:solidFill>
           <a:ln>
             <a:noFill/>
@@ -3769,14 +4267,57 @@
       </p:sp>
       <p:sp>
         <p:nvSpPr>
-          <p:cNvPr id="4" name="TextBox 3"/>
+          <p:cNvPr id="4" name="Rectangle 3"/>
+          <p:cNvSpPr/>
+          <p:nvPr/>
+        </p:nvSpPr>
+        <p:spPr>
+          <a:xfrm>
+            <a:off x="1097280" y="1435608"/>
+            <a:ext cx="109728" cy="508000"/>
+          </a:xfrm>
+          <a:prstGeom prst="rect">
+            <a:avLst/>
+          </a:prstGeom>
+          <a:solidFill>
+            <a:srgbClr val="FF8F00"/>
+          </a:solidFill>
+          <a:ln>
+            <a:noFill/>
+          </a:ln>
+        </p:spPr>
+        <p:style>
+          <a:lnRef idx="1">
+            <a:schemeClr val="accent1"/>
+          </a:lnRef>
+          <a:fillRef idx="3">
+            <a:schemeClr val="accent1"/>
+          </a:fillRef>
+          <a:effectRef idx="2">
+            <a:schemeClr val="accent1"/>
+          </a:effectRef>
+          <a:fontRef idx="minor">
+            <a:schemeClr val="lt1"/>
+          </a:fontRef>
+        </p:style>
+        <p:txBody>
+          <a:bodyPr rtlCol="0" anchor="ctr"/>
+          <a:lstStyle/>
+          <a:p>
+            <a:pPr algn="ctr"/>
+          </a:p>
+        </p:txBody>
+      </p:sp>
+      <p:sp>
+        <p:nvSpPr>
+          <p:cNvPr id="5" name="TextBox 4"/>
           <p:cNvSpPr txBox="1"/>
           <p:nvPr/>
         </p:nvSpPr>
         <p:spPr>
           <a:xfrm>
-            <a:off x="1371600" y="1554480"/>
-            <a:ext cx="9418320" cy="5029200"/>
+            <a:off x="1417320" y="1371600"/>
+            <a:ext cx="1828800" cy="365760"/>
           </a:xfrm>
           <a:prstGeom prst="rect">
             <a:avLst/>
@@ -3789,222 +4330,397 @@
           </a:bodyPr>
           <a:lstStyle/>
           <a:p>
-            <a:pPr>
-              <a:spcBef>
-                <a:spcPts val="800"/>
-              </a:spcBef>
-              <a:spcAft>
-                <a:spcPts val="400"/>
-              </a:spcAft>
-              <a:defRPr sz="1700">
-                <a:solidFill>
-                  <a:srgbClr val="333333"/>
-                </a:solidFill>
-                <a:latin typeface="Calibri"/>
-              </a:defRPr>
-            </a:pPr>
-            <a:r>
-              <a:t>Sintoma: Train accuracy ~100%, test accuracy ~65-75%.</a:t>
-            </a:r>
-          </a:p>
-          <a:p>
-            <a:pPr>
-              <a:spcBef>
-                <a:spcPts val="800"/>
-              </a:spcBef>
-              <a:spcAft>
-                <a:spcPts val="400"/>
-              </a:spcAft>
-              <a:defRPr sz="1700">
-                <a:solidFill>
-                  <a:srgbClr val="333333"/>
-                </a:solidFill>
-                <a:latin typeface="Calibri"/>
-              </a:defRPr>
-            </a:pPr>
-            <a:r>
-              <a:t>La perdida de test diverge mientras la de train baja a cero.</a:t>
-            </a:r>
-          </a:p>
-          <a:p>
-            <a:pPr>
-              <a:spcBef>
-                <a:spcPts val="800"/>
-              </a:spcBef>
-              <a:spcAft>
-                <a:spcPts val="400"/>
-              </a:spcAft>
-              <a:defRPr sz="1700">
-                <a:solidFill>
-                  <a:srgbClr val="333333"/>
-                </a:solidFill>
-                <a:latin typeface="Calibri"/>
-              </a:defRPr>
-            </a:pPr>
-          </a:p>
-          <a:p>
-            <a:pPr>
-              <a:spcBef>
-                <a:spcPts val="800"/>
-              </a:spcBef>
-              <a:spcAft>
-                <a:spcPts val="400"/>
-              </a:spcAft>
-              <a:defRPr sz="1700">
-                <a:solidFill>
-                  <a:srgbClr val="333333"/>
-                </a:solidFill>
-                <a:latin typeface="Calibri"/>
-              </a:defRPr>
-            </a:pPr>
-            <a:r>
-              <a:t>Causa raiz: sin regularizacion, los pesos crecen sin control.</a:t>
-            </a:r>
-          </a:p>
-          <a:p>
-            <a:pPr>
-              <a:spcBef>
-                <a:spcPts val="800"/>
-              </a:spcBef>
-              <a:spcAft>
-                <a:spcPts val="400"/>
-              </a:spcAft>
-              <a:defRPr sz="1700">
-                <a:solidFill>
-                  <a:srgbClr val="333333"/>
-                </a:solidFill>
-                <a:latin typeface="Calibri"/>
-              </a:defRPr>
-            </a:pPr>
-            <a:r>
-              <a:t>Con muchos parametros y pocos datos, la red memoriza cada</a:t>
-            </a:r>
-          </a:p>
-          <a:p>
-            <a:pPr>
-              <a:spcBef>
-                <a:spcPts val="800"/>
-              </a:spcBef>
-              <a:spcAft>
-                <a:spcPts val="400"/>
-              </a:spcAft>
-              <a:defRPr sz="1700">
-                <a:solidFill>
-                  <a:srgbClr val="333333"/>
-                </a:solidFill>
-                <a:latin typeface="Calibri"/>
-              </a:defRPr>
-            </a:pPr>
-            <a:r>
-              <a:t>muestra incluyendo el ruido.</a:t>
-            </a:r>
-          </a:p>
-          <a:p>
-            <a:pPr>
-              <a:spcBef>
-                <a:spcPts val="800"/>
-              </a:spcBef>
-              <a:spcAft>
-                <a:spcPts val="400"/>
-              </a:spcAft>
-              <a:defRPr sz="1700">
-                <a:solidFill>
-                  <a:srgbClr val="333333"/>
-                </a:solidFill>
-                <a:latin typeface="Calibri"/>
-              </a:defRPr>
-            </a:pPr>
-          </a:p>
-          <a:p>
-            <a:pPr>
-              <a:spcBef>
-                <a:spcPts val="800"/>
-              </a:spcBef>
-              <a:spcAft>
-                <a:spcPts val="400"/>
-              </a:spcAft>
-              <a:defRPr sz="1700">
-                <a:solidFill>
-                  <a:srgbClr val="333333"/>
-                </a:solidFill>
-                <a:latin typeface="Calibri"/>
-              </a:defRPr>
-            </a:pPr>
-            <a:r>
-              <a:t>Evidencia: los pesos muestran valores grandes y dispersos</a:t>
-            </a:r>
-          </a:p>
-          <a:p>
-            <a:pPr>
-              <a:spcBef>
-                <a:spcPts val="800"/>
-              </a:spcBef>
-              <a:spcAft>
-                <a:spcPts val="400"/>
-              </a:spcAft>
-              <a:defRPr sz="1700">
-                <a:solidFill>
-                  <a:srgbClr val="333333"/>
-                </a:solidFill>
-                <a:latin typeface="Calibri"/>
-              </a:defRPr>
-            </a:pPr>
-            <a:r>
-              <a:t>(alta varianza), codificando ruido en vez de patrones.</a:t>
-            </a:r>
-          </a:p>
-          <a:p>
-            <a:pPr>
-              <a:spcBef>
-                <a:spcPts val="800"/>
-              </a:spcBef>
-              <a:spcAft>
-                <a:spcPts val="400"/>
-              </a:spcAft>
-              <a:defRPr sz="1700">
-                <a:solidFill>
-                  <a:srgbClr val="333333"/>
-                </a:solidFill>
-                <a:latin typeface="Calibri"/>
-              </a:defRPr>
-            </a:pPr>
-          </a:p>
-          <a:p>
-            <a:pPr>
-              <a:spcBef>
-                <a:spcPts val="800"/>
-              </a:spcBef>
-              <a:spcAft>
-                <a:spcPts val="400"/>
-              </a:spcAft>
-              <a:defRPr sz="1700">
-                <a:solidFill>
-                  <a:srgbClr val="333333"/>
-                </a:solidFill>
-                <a:latin typeface="Calibri"/>
-              </a:defRPr>
-            </a:pPr>
-            <a:r>
-              <a:t>Analogia: un estudiante que memoriza las respuestas del examen</a:t>
-            </a:r>
-          </a:p>
-          <a:p>
-            <a:pPr>
-              <a:spcBef>
-                <a:spcPts val="800"/>
-              </a:spcBef>
-              <a:spcAft>
-                <a:spcPts val="400"/>
-              </a:spcAft>
-              <a:defRPr sz="1700">
-                <a:solidFill>
-                  <a:srgbClr val="333333"/>
-                </a:solidFill>
-                <a:latin typeface="Calibri"/>
-              </a:defRPr>
-            </a:pPr>
-            <a:r>
-              <a:t>de practica en vez de aprender la materia.</a:t>
+            <a:pPr algn="l">
+              <a:defRPr sz="1700" b="1">
+                <a:solidFill>
+                  <a:srgbClr val="FF8F00"/>
+                </a:solidFill>
+                <a:latin typeface="Calibri"/>
+              </a:defRPr>
+            </a:pPr>
+            <a:r>
+              <a:t>Sintoma</a:t>
+            </a:r>
+          </a:p>
+        </p:txBody>
+      </p:sp>
+      <p:sp>
+        <p:nvSpPr>
+          <p:cNvPr id="6" name="TextBox 5"/>
+          <p:cNvSpPr txBox="1"/>
+          <p:nvPr/>
+        </p:nvSpPr>
+        <p:spPr>
+          <a:xfrm>
+            <a:off x="3200400" y="1371600"/>
+            <a:ext cx="7772400" cy="502920"/>
+          </a:xfrm>
+          <a:prstGeom prst="rect">
+            <a:avLst/>
+          </a:prstGeom>
+          <a:noFill/>
+        </p:spPr>
+        <p:txBody>
+          <a:bodyPr wrap="square">
+            <a:spAutoFit/>
+          </a:bodyPr>
+          <a:lstStyle/>
+          <a:p>
+            <a:pPr algn="l">
+              <a:defRPr sz="1500" b="0">
+                <a:solidFill>
+                  <a:srgbClr val="2A2A2A"/>
+                </a:solidFill>
+                <a:latin typeface="Calibri"/>
+              </a:defRPr>
+            </a:pPr>
+            <a:r>
+              <a:t>Train accuracy converge a ~100% mientras test accuracy se estanca o cae. La brecha (gap) supera el 25%.</a:t>
+            </a:r>
+          </a:p>
+        </p:txBody>
+      </p:sp>
+      <p:sp>
+        <p:nvSpPr>
+          <p:cNvPr id="7" name="Rectangle 6"/>
+          <p:cNvSpPr/>
+          <p:nvPr/>
+        </p:nvSpPr>
+        <p:spPr>
+          <a:xfrm>
+            <a:off x="1097280" y="2578608"/>
+            <a:ext cx="109728" cy="508000"/>
+          </a:xfrm>
+          <a:prstGeom prst="rect">
+            <a:avLst/>
+          </a:prstGeom>
+          <a:solidFill>
+            <a:srgbClr val="FF8F00"/>
+          </a:solidFill>
+          <a:ln>
+            <a:noFill/>
+          </a:ln>
+        </p:spPr>
+        <p:style>
+          <a:lnRef idx="1">
+            <a:schemeClr val="accent1"/>
+          </a:lnRef>
+          <a:fillRef idx="3">
+            <a:schemeClr val="accent1"/>
+          </a:fillRef>
+          <a:effectRef idx="2">
+            <a:schemeClr val="accent1"/>
+          </a:effectRef>
+          <a:fontRef idx="minor">
+            <a:schemeClr val="lt1"/>
+          </a:fontRef>
+        </p:style>
+        <p:txBody>
+          <a:bodyPr rtlCol="0" anchor="ctr"/>
+          <a:lstStyle/>
+          <a:p>
+            <a:pPr algn="ctr"/>
+          </a:p>
+        </p:txBody>
+      </p:sp>
+      <p:sp>
+        <p:nvSpPr>
+          <p:cNvPr id="8" name="TextBox 7"/>
+          <p:cNvSpPr txBox="1"/>
+          <p:nvPr/>
+        </p:nvSpPr>
+        <p:spPr>
+          <a:xfrm>
+            <a:off x="1417320" y="2514600"/>
+            <a:ext cx="1828800" cy="365760"/>
+          </a:xfrm>
+          <a:prstGeom prst="rect">
+            <a:avLst/>
+          </a:prstGeom>
+          <a:noFill/>
+        </p:spPr>
+        <p:txBody>
+          <a:bodyPr wrap="square">
+            <a:spAutoFit/>
+          </a:bodyPr>
+          <a:lstStyle/>
+          <a:p>
+            <a:pPr algn="l">
+              <a:defRPr sz="1700" b="1">
+                <a:solidFill>
+                  <a:srgbClr val="FF8F00"/>
+                </a:solidFill>
+                <a:latin typeface="Calibri"/>
+              </a:defRPr>
+            </a:pPr>
+            <a:r>
+              <a:t>Causa raiz</a:t>
+            </a:r>
+          </a:p>
+        </p:txBody>
+      </p:sp>
+      <p:sp>
+        <p:nvSpPr>
+          <p:cNvPr id="9" name="TextBox 8"/>
+          <p:cNvSpPr txBox="1"/>
+          <p:nvPr/>
+        </p:nvSpPr>
+        <p:spPr>
+          <a:xfrm>
+            <a:off x="3200400" y="2514600"/>
+            <a:ext cx="7772400" cy="502920"/>
+          </a:xfrm>
+          <a:prstGeom prst="rect">
+            <a:avLst/>
+          </a:prstGeom>
+          <a:noFill/>
+        </p:spPr>
+        <p:txBody>
+          <a:bodyPr wrap="square">
+            <a:spAutoFit/>
+          </a:bodyPr>
+          <a:lstStyle/>
+          <a:p>
+            <a:pPr algn="l">
+              <a:defRPr sz="1500" b="0">
+                <a:solidFill>
+                  <a:srgbClr val="2A2A2A"/>
+                </a:solidFill>
+                <a:latin typeface="Calibri"/>
+              </a:defRPr>
+            </a:pPr>
+            <a:r>
+              <a:t>Sin regularizacion, los pesos crecen sin control. Con 300x mas parametros que muestras, la red memoriza cada dato incluyendo su ruido.</a:t>
+            </a:r>
+          </a:p>
+        </p:txBody>
+      </p:sp>
+      <p:sp>
+        <p:nvSpPr>
+          <p:cNvPr id="10" name="Rectangle 9"/>
+          <p:cNvSpPr/>
+          <p:nvPr/>
+        </p:nvSpPr>
+        <p:spPr>
+          <a:xfrm>
+            <a:off x="1097280" y="3721607"/>
+            <a:ext cx="109728" cy="508000"/>
+          </a:xfrm>
+          <a:prstGeom prst="rect">
+            <a:avLst/>
+          </a:prstGeom>
+          <a:solidFill>
+            <a:srgbClr val="FF8F00"/>
+          </a:solidFill>
+          <a:ln>
+            <a:noFill/>
+          </a:ln>
+        </p:spPr>
+        <p:style>
+          <a:lnRef idx="1">
+            <a:schemeClr val="accent1"/>
+          </a:lnRef>
+          <a:fillRef idx="3">
+            <a:schemeClr val="accent1"/>
+          </a:fillRef>
+          <a:effectRef idx="2">
+            <a:schemeClr val="accent1"/>
+          </a:effectRef>
+          <a:fontRef idx="minor">
+            <a:schemeClr val="lt1"/>
+          </a:fontRef>
+        </p:style>
+        <p:txBody>
+          <a:bodyPr rtlCol="0" anchor="ctr"/>
+          <a:lstStyle/>
+          <a:p>
+            <a:pPr algn="ctr"/>
+          </a:p>
+        </p:txBody>
+      </p:sp>
+      <p:sp>
+        <p:nvSpPr>
+          <p:cNvPr id="11" name="TextBox 10"/>
+          <p:cNvSpPr txBox="1"/>
+          <p:nvPr/>
+        </p:nvSpPr>
+        <p:spPr>
+          <a:xfrm>
+            <a:off x="1417320" y="3657600"/>
+            <a:ext cx="1828800" cy="365760"/>
+          </a:xfrm>
+          <a:prstGeom prst="rect">
+            <a:avLst/>
+          </a:prstGeom>
+          <a:noFill/>
+        </p:spPr>
+        <p:txBody>
+          <a:bodyPr wrap="square">
+            <a:spAutoFit/>
+          </a:bodyPr>
+          <a:lstStyle/>
+          <a:p>
+            <a:pPr algn="l">
+              <a:defRPr sz="1700" b="1">
+                <a:solidFill>
+                  <a:srgbClr val="FF8F00"/>
+                </a:solidFill>
+                <a:latin typeface="Calibri"/>
+              </a:defRPr>
+            </a:pPr>
+            <a:r>
+              <a:t>Evidencia</a:t>
+            </a:r>
+          </a:p>
+        </p:txBody>
+      </p:sp>
+      <p:sp>
+        <p:nvSpPr>
+          <p:cNvPr id="12" name="TextBox 11"/>
+          <p:cNvSpPr txBox="1"/>
+          <p:nvPr/>
+        </p:nvSpPr>
+        <p:spPr>
+          <a:xfrm>
+            <a:off x="3200400" y="3657600"/>
+            <a:ext cx="7772400" cy="502920"/>
+          </a:xfrm>
+          <a:prstGeom prst="rect">
+            <a:avLst/>
+          </a:prstGeom>
+          <a:noFill/>
+        </p:spPr>
+        <p:txBody>
+          <a:bodyPr wrap="square">
+            <a:spAutoFit/>
+          </a:bodyPr>
+          <a:lstStyle/>
+          <a:p>
+            <a:pPr algn="l">
+              <a:defRPr sz="1500" b="0">
+                <a:solidFill>
+                  <a:srgbClr val="2A2A2A"/>
+                </a:solidFill>
+                <a:latin typeface="Calibri"/>
+              </a:defRPr>
+            </a:pPr>
+            <a:r>
+              <a:t>Los pesos muestran valores grandes y dispersos (alta varianza). Codifican ruido en vez de patrones generalizables.</a:t>
+            </a:r>
+          </a:p>
+        </p:txBody>
+      </p:sp>
+      <p:sp>
+        <p:nvSpPr>
+          <p:cNvPr id="13" name="Rectangle 12"/>
+          <p:cNvSpPr/>
+          <p:nvPr/>
+        </p:nvSpPr>
+        <p:spPr>
+          <a:xfrm>
+            <a:off x="1097280" y="4864607"/>
+            <a:ext cx="109728" cy="508000"/>
+          </a:xfrm>
+          <a:prstGeom prst="rect">
+            <a:avLst/>
+          </a:prstGeom>
+          <a:solidFill>
+            <a:srgbClr val="FF8F00"/>
+          </a:solidFill>
+          <a:ln>
+            <a:noFill/>
+          </a:ln>
+        </p:spPr>
+        <p:style>
+          <a:lnRef idx="1">
+            <a:schemeClr val="accent1"/>
+          </a:lnRef>
+          <a:fillRef idx="3">
+            <a:schemeClr val="accent1"/>
+          </a:fillRef>
+          <a:effectRef idx="2">
+            <a:schemeClr val="accent1"/>
+          </a:effectRef>
+          <a:fontRef idx="minor">
+            <a:schemeClr val="lt1"/>
+          </a:fontRef>
+        </p:style>
+        <p:txBody>
+          <a:bodyPr rtlCol="0" anchor="ctr"/>
+          <a:lstStyle/>
+          <a:p>
+            <a:pPr algn="ctr"/>
+          </a:p>
+        </p:txBody>
+      </p:sp>
+      <p:sp>
+        <p:nvSpPr>
+          <p:cNvPr id="14" name="TextBox 13"/>
+          <p:cNvSpPr txBox="1"/>
+          <p:nvPr/>
+        </p:nvSpPr>
+        <p:spPr>
+          <a:xfrm>
+            <a:off x="1417320" y="4800600"/>
+            <a:ext cx="1828800" cy="365760"/>
+          </a:xfrm>
+          <a:prstGeom prst="rect">
+            <a:avLst/>
+          </a:prstGeom>
+          <a:noFill/>
+        </p:spPr>
+        <p:txBody>
+          <a:bodyPr wrap="square">
+            <a:spAutoFit/>
+          </a:bodyPr>
+          <a:lstStyle/>
+          <a:p>
+            <a:pPr algn="l">
+              <a:defRPr sz="1700" b="1">
+                <a:solidFill>
+                  <a:srgbClr val="FF8F00"/>
+                </a:solidFill>
+                <a:latin typeface="Calibri"/>
+              </a:defRPr>
+            </a:pPr>
+            <a:r>
+              <a:t>Analogia</a:t>
+            </a:r>
+          </a:p>
+        </p:txBody>
+      </p:sp>
+      <p:sp>
+        <p:nvSpPr>
+          <p:cNvPr id="15" name="TextBox 14"/>
+          <p:cNvSpPr txBox="1"/>
+          <p:nvPr/>
+        </p:nvSpPr>
+        <p:spPr>
+          <a:xfrm>
+            <a:off x="3200400" y="4800600"/>
+            <a:ext cx="7772400" cy="502920"/>
+          </a:xfrm>
+          <a:prstGeom prst="rect">
+            <a:avLst/>
+          </a:prstGeom>
+          <a:noFill/>
+        </p:spPr>
+        <p:txBody>
+          <a:bodyPr wrap="square">
+            <a:spAutoFit/>
+          </a:bodyPr>
+          <a:lstStyle/>
+          <a:p>
+            <a:pPr algn="l">
+              <a:defRPr sz="1500" b="0">
+                <a:solidFill>
+                  <a:srgbClr val="2A2A2A"/>
+                </a:solidFill>
+                <a:latin typeface="Calibri"/>
+              </a:defRPr>
+            </a:pPr>
+            <a:r>
+              <a:t>Un estudiante que memoriza las respuestas del examen de practica. Perfecto en lo visto, pesimo en preguntas nuevas.</a:t>
             </a:r>
           </a:p>
         </p:txBody>
@@ -4023,7 +4739,7 @@
     <p:bg>
       <p:bgPr>
         <a:solidFill>
-          <a:srgbClr val="FAFAFA"/>
+          <a:srgbClr val="FBFBFB"/>
         </a:solidFill>
         <a:effectLst/>
       </p:bgPr>
@@ -4043,8 +4759,8 @@
         </p:nvSpPr>
         <p:spPr>
           <a:xfrm>
-            <a:off x="1371600" y="548640"/>
-            <a:ext cx="9418320" cy="640080"/>
+            <a:off x="1097280" y="457200"/>
+            <a:ext cx="9144000" cy="640080"/>
           </a:xfrm>
           <a:prstGeom prst="rect">
             <a:avLst/>
@@ -4058,9 +4774,9 @@
           <a:lstStyle/>
           <a:p>
             <a:pPr algn="l">
-              <a:defRPr sz="4000" b="1">
-                <a:solidFill>
-                  <a:srgbClr val="1A1A1A"/>
+              <a:defRPr sz="4200" b="1">
+                <a:solidFill>
+                  <a:srgbClr val="181818"/>
                 </a:solidFill>
                 <a:latin typeface="Calibri"/>
               </a:defRPr>
@@ -4079,14 +4795,14 @@
         </p:nvSpPr>
         <p:spPr>
           <a:xfrm>
-            <a:off x="1371600" y="1188720"/>
-            <a:ext cx="1828800" cy="25400"/>
+            <a:off x="1097280" y="1051560"/>
+            <a:ext cx="2286000" cy="38100"/>
           </a:xfrm>
           <a:prstGeom prst="rect">
             <a:avLst/>
           </a:prstGeom>
           <a:solidFill>
-            <a:srgbClr val="0066CC"/>
+            <a:srgbClr val="1E8850"/>
           </a:solidFill>
           <a:ln>
             <a:noFill/>
@@ -4122,8 +4838,8 @@
         </p:nvSpPr>
         <p:spPr>
           <a:xfrm>
-            <a:off x="1371600" y="1554480"/>
-            <a:ext cx="9418320" cy="365760"/>
+            <a:off x="1097280" y="1280160"/>
+            <a:ext cx="9144000" cy="365760"/>
           </a:xfrm>
           <a:prstGeom prst="rect">
             <a:avLst/>
@@ -4137,29 +4853,76 @@
           <a:lstStyle/>
           <a:p>
             <a:pPr algn="l">
-              <a:defRPr sz="2200" b="1">
-                <a:solidFill>
-                  <a:srgbClr val="0066CC"/>
-                </a:solidFill>
-                <a:latin typeface="Calibri"/>
-              </a:defRPr>
-            </a:pPr>
-            <a:r>
-              <a:t>1. Weight Decay (L2)</a:t>
-            </a:r>
-          </a:p>
-        </p:txBody>
-      </p:sp>
-      <p:sp>
-        <p:nvSpPr>
-          <p:cNvPr id="5" name="TextBox 4"/>
+              <a:defRPr sz="1700" b="1">
+                <a:solidFill>
+                  <a:srgbClr val="1E8850"/>
+                </a:solidFill>
+                <a:latin typeface="Calibri"/>
+              </a:defRPr>
+            </a:pPr>
+            <a:r>
+              <a:t>Tres interruptores para arreglar el modelo</a:t>
+            </a:r>
+          </a:p>
+        </p:txBody>
+      </p:sp>
+      <p:sp>
+        <p:nvSpPr>
+          <p:cNvPr id="5" name="Rounded Rectangle 4"/>
+          <p:cNvSpPr/>
+          <p:nvPr/>
+        </p:nvSpPr>
+        <p:spPr>
+          <a:xfrm>
+            <a:off x="1097280" y="1920240"/>
+            <a:ext cx="3200400" cy="4114800"/>
+          </a:xfrm>
+          <a:prstGeom prst="roundRect">
+            <a:avLst>
+              <a:gd name="adj" fmla="val 4000"/>
+            </a:avLst>
+          </a:prstGeom>
+          <a:solidFill>
+            <a:srgbClr val="EEF7F0"/>
+          </a:solidFill>
+          <a:ln w="15240">
+            <a:solidFill>
+              <a:srgbClr val="1E8850"/>
+            </a:solidFill>
+          </a:ln>
+        </p:spPr>
+        <p:style>
+          <a:lnRef idx="1">
+            <a:schemeClr val="accent1"/>
+          </a:lnRef>
+          <a:fillRef idx="3">
+            <a:schemeClr val="accent1"/>
+          </a:fillRef>
+          <a:effectRef idx="2">
+            <a:schemeClr val="accent1"/>
+          </a:effectRef>
+          <a:fontRef idx="minor">
+            <a:schemeClr val="lt1"/>
+          </a:fontRef>
+        </p:style>
+        <p:txBody>
+          <a:bodyPr rtlCol="0" anchor="ctr"/>
+          <a:lstStyle/>
+          <a:p>
+            <a:pPr algn="ctr"/>
+          </a:p>
+        </p:txBody>
+      </p:sp>
+      <p:sp>
+        <p:nvSpPr>
+          <p:cNvPr id="6" name="TextBox 5"/>
           <p:cNvSpPr txBox="1"/>
           <p:nvPr/>
         </p:nvSpPr>
         <p:spPr>
           <a:xfrm>
-            <a:off x="1645920" y="2011680"/>
-            <a:ext cx="8686800" cy="822960"/>
+            <a:off x="1371600" y="2103120"/>
+            <a:ext cx="2743200" cy="365760"/>
           </a:xfrm>
           <a:prstGeom prst="rect">
             <a:avLst/>
@@ -4172,55 +4935,30 @@
           </a:bodyPr>
           <a:lstStyle/>
           <a:p>
-            <a:pPr>
-              <a:spcBef>
-                <a:spcPts val="800"/>
-              </a:spcBef>
-              <a:spcAft>
-                <a:spcPts val="400"/>
-              </a:spcAft>
-              <a:defRPr sz="1600">
-                <a:solidFill>
-                  <a:srgbClr val="333333"/>
-                </a:solidFill>
-                <a:latin typeface="Calibri"/>
-              </a:defRPr>
-            </a:pPr>
-            <a:r>
-              <a:t>Penaliza pesos grandes sumando lambda*||w||^2 a la perdida.</a:t>
-            </a:r>
-          </a:p>
-          <a:p>
-            <a:pPr>
-              <a:spcBef>
-                <a:spcPts val="800"/>
-              </a:spcBef>
-              <a:spcAft>
-                <a:spcPts val="400"/>
-              </a:spcAft>
-              <a:defRPr sz="1600">
-                <a:solidFill>
-                  <a:srgbClr val="333333"/>
-                </a:solidFill>
-                <a:latin typeface="Calibri"/>
-              </a:defRPr>
-            </a:pPr>
-            <a:r>
-              <a:t>weight_decay = 0.01 en el optimizador Adam.</a:t>
-            </a:r>
-          </a:p>
-        </p:txBody>
-      </p:sp>
-      <p:sp>
-        <p:nvSpPr>
-          <p:cNvPr id="6" name="TextBox 5"/>
+            <a:pPr algn="l">
+              <a:defRPr sz="2200" b="1">
+                <a:solidFill>
+                  <a:srgbClr val="1E8850"/>
+                </a:solidFill>
+                <a:latin typeface="Calibri"/>
+              </a:defRPr>
+            </a:pPr>
+            <a:r>
+              <a:t>Weight Decay</a:t>
+            </a:r>
+          </a:p>
+        </p:txBody>
+      </p:sp>
+      <p:sp>
+        <p:nvSpPr>
+          <p:cNvPr id="7" name="TextBox 6"/>
           <p:cNvSpPr txBox="1"/>
           <p:nvPr/>
         </p:nvSpPr>
         <p:spPr>
           <a:xfrm>
-            <a:off x="1371600" y="2926080"/>
-            <a:ext cx="9418320" cy="365760"/>
+            <a:off x="1371600" y="2560320"/>
+            <a:ext cx="2743200" cy="365760"/>
           </a:xfrm>
           <a:prstGeom prst="rect">
             <a:avLst/>
@@ -4234,29 +4972,29 @@
           <a:lstStyle/>
           <a:p>
             <a:pPr algn="l">
-              <a:defRPr sz="2200" b="1">
-                <a:solidFill>
-                  <a:srgbClr val="0066CC"/>
-                </a:solidFill>
-                <a:latin typeface="Calibri"/>
-              </a:defRPr>
-            </a:pPr>
-            <a:r>
-              <a:t>2. Dropout</a:t>
-            </a:r>
-          </a:p>
-        </p:txBody>
-      </p:sp>
-      <p:sp>
-        <p:nvSpPr>
-          <p:cNvPr id="7" name="TextBox 6"/>
+              <a:defRPr sz="1400" b="0">
+                <a:solidFill>
+                  <a:srgbClr val="606060"/>
+                </a:solidFill>
+                <a:latin typeface="Calibri"/>
+              </a:defRPr>
+            </a:pPr>
+            <a:r>
+              <a:t>(L2 Regularization)</a:t>
+            </a:r>
+          </a:p>
+        </p:txBody>
+      </p:sp>
+      <p:sp>
+        <p:nvSpPr>
+          <p:cNvPr id="8" name="TextBox 7"/>
           <p:cNvSpPr txBox="1"/>
           <p:nvPr/>
         </p:nvSpPr>
         <p:spPr>
           <a:xfrm>
-            <a:off x="1645920" y="3383280"/>
-            <a:ext cx="8686800" cy="822960"/>
+            <a:off x="1371600" y="3108960"/>
+            <a:ext cx="2743200" cy="1371600"/>
           </a:xfrm>
           <a:prstGeom prst="rect">
             <a:avLst/>
@@ -4269,55 +5007,157 @@
           </a:bodyPr>
           <a:lstStyle/>
           <a:p>
-            <a:pPr>
+            <a:pPr algn="l">
               <a:spcBef>
-                <a:spcPts val="800"/>
+                <a:spcPts val="1000"/>
               </a:spcBef>
-              <a:spcAft>
-                <a:spcPts val="400"/>
-              </a:spcAft>
-              <a:defRPr sz="1600">
-                <a:solidFill>
-                  <a:srgbClr val="333333"/>
-                </a:solidFill>
-                <a:latin typeface="Calibri"/>
-              </a:defRPr>
-            </a:pPr>
-            <a:r>
-              <a:t>Apaga neuronas al azar durante el entrenamiento (p=0.3).</a:t>
-            </a:r>
-          </a:p>
-          <a:p>
-            <a:pPr>
+              <a:defRPr sz="1400">
+                <a:solidFill>
+                  <a:srgbClr val="2A2A2A"/>
+                </a:solidFill>
+                <a:latin typeface="Calibri"/>
+              </a:defRPr>
+            </a:pPr>
+            <a:r>
+              <a:t>Penaliza pesos grandes</a:t>
+            </a:r>
+          </a:p>
+          <a:p>
+            <a:pPr algn="l">
               <a:spcBef>
-                <a:spcPts val="800"/>
+                <a:spcPts val="1000"/>
               </a:spcBef>
-              <a:spcAft>
-                <a:spcPts val="400"/>
-              </a:spcAft>
-              <a:defRPr sz="1600">
-                <a:solidFill>
-                  <a:srgbClr val="333333"/>
-                </a:solidFill>
-                <a:latin typeface="Calibri"/>
-              </a:defRPr>
-            </a:pPr>
-            <a:r>
-              <a:t>Impide que la red dependa de neuronas individuales.</a:t>
-            </a:r>
-          </a:p>
-        </p:txBody>
-      </p:sp>
-      <p:sp>
-        <p:nvSpPr>
-          <p:cNvPr id="8" name="TextBox 7"/>
+              <a:defRPr sz="1400">
+                <a:solidFill>
+                  <a:srgbClr val="2A2A2A"/>
+                </a:solidFill>
+                <a:latin typeface="Calibri"/>
+              </a:defRPr>
+            </a:pPr>
+            <a:r>
+              <a:t>sumando un termino de</a:t>
+            </a:r>
+          </a:p>
+          <a:p>
+            <a:pPr algn="l">
+              <a:spcBef>
+                <a:spcPts val="1000"/>
+              </a:spcBef>
+              <a:defRPr sz="1400">
+                <a:solidFill>
+                  <a:srgbClr val="2A2A2A"/>
+                </a:solidFill>
+                <a:latin typeface="Calibri"/>
+              </a:defRPr>
+            </a:pPr>
+            <a:r>
+              <a:t>penalizacion a la perdida.</a:t>
+            </a:r>
+          </a:p>
+          <a:p>
+            <a:pPr algn="l">
+              <a:spcBef>
+                <a:spcPts val="1000"/>
+              </a:spcBef>
+              <a:defRPr sz="1400">
+                <a:solidFill>
+                  <a:srgbClr val="2A2A2A"/>
+                </a:solidFill>
+                <a:latin typeface="Calibri"/>
+              </a:defRPr>
+            </a:pPr>
+          </a:p>
+          <a:p>
+            <a:pPr algn="l">
+              <a:spcBef>
+                <a:spcPts val="1000"/>
+              </a:spcBef>
+              <a:defRPr sz="1400">
+                <a:solidFill>
+                  <a:srgbClr val="2A2A2A"/>
+                </a:solidFill>
+                <a:latin typeface="Calibri"/>
+              </a:defRPr>
+            </a:pPr>
+            <a:r>
+              <a:t>Encoge los pesos hacia</a:t>
+            </a:r>
+          </a:p>
+          <a:p>
+            <a:pPr algn="l">
+              <a:spcBef>
+                <a:spcPts val="1000"/>
+              </a:spcBef>
+              <a:defRPr sz="1400">
+                <a:solidFill>
+                  <a:srgbClr val="2A2A2A"/>
+                </a:solidFill>
+                <a:latin typeface="Calibri"/>
+              </a:defRPr>
+            </a:pPr>
+            <a:r>
+              <a:t>cero en cada paso.</a:t>
+            </a:r>
+          </a:p>
+        </p:txBody>
+      </p:sp>
+      <p:sp>
+        <p:nvSpPr>
+          <p:cNvPr id="9" name="Rounded Rectangle 8"/>
+          <p:cNvSpPr/>
+          <p:nvPr/>
+        </p:nvSpPr>
+        <p:spPr>
+          <a:xfrm>
+            <a:off x="1463040" y="5120640"/>
+            <a:ext cx="2560320" cy="502920"/>
+          </a:xfrm>
+          <a:prstGeom prst="roundRect">
+            <a:avLst>
+              <a:gd name="adj" fmla="val 4000"/>
+            </a:avLst>
+          </a:prstGeom>
+          <a:solidFill>
+            <a:srgbClr val="D5EEDB"/>
+          </a:solidFill>
+          <a:ln w="10160">
+            <a:solidFill>
+              <a:srgbClr val="1E8850"/>
+            </a:solidFill>
+          </a:ln>
+        </p:spPr>
+        <p:style>
+          <a:lnRef idx="1">
+            <a:schemeClr val="accent1"/>
+          </a:lnRef>
+          <a:fillRef idx="3">
+            <a:schemeClr val="accent1"/>
+          </a:fillRef>
+          <a:effectRef idx="2">
+            <a:schemeClr val="accent1"/>
+          </a:effectRef>
+          <a:fontRef idx="minor">
+            <a:schemeClr val="lt1"/>
+          </a:fontRef>
+        </p:style>
+        <p:txBody>
+          <a:bodyPr rtlCol="0" anchor="ctr"/>
+          <a:lstStyle/>
+          <a:p>
+            <a:pPr algn="ctr"/>
+          </a:p>
+        </p:txBody>
+      </p:sp>
+      <p:sp>
+        <p:nvSpPr>
+          <p:cNvPr id="10" name="TextBox 9"/>
           <p:cNvSpPr txBox="1"/>
           <p:nvPr/>
         </p:nvSpPr>
         <p:spPr>
           <a:xfrm>
-            <a:off x="1371600" y="4297680"/>
-            <a:ext cx="9418320" cy="365760"/>
+            <a:off x="1554480" y="5166360"/>
+            <a:ext cx="2377440" cy="365760"/>
           </a:xfrm>
           <a:prstGeom prst="rect">
             <a:avLst/>
@@ -4330,30 +5170,77 @@
           </a:bodyPr>
           <a:lstStyle/>
           <a:p>
-            <a:pPr algn="l">
-              <a:defRPr sz="2200" b="1">
-                <a:solidFill>
-                  <a:srgbClr val="0066CC"/>
-                </a:solidFill>
-                <a:latin typeface="Calibri"/>
-              </a:defRPr>
-            </a:pPr>
-            <a:r>
-              <a:t>3. Reducir capacidad</a:t>
-            </a:r>
-          </a:p>
-        </p:txBody>
-      </p:sp>
-      <p:sp>
-        <p:nvSpPr>
-          <p:cNvPr id="9" name="TextBox 8"/>
+            <a:pPr algn="ctr">
+              <a:defRPr sz="1400" b="1">
+                <a:solidFill>
+                  <a:srgbClr val="1E8850"/>
+                </a:solidFill>
+                <a:latin typeface="Consolas"/>
+              </a:defRPr>
+            </a:pPr>
+            <a:r>
+              <a:t>weight_decay=0.01</a:t>
+            </a:r>
+          </a:p>
+        </p:txBody>
+      </p:sp>
+      <p:sp>
+        <p:nvSpPr>
+          <p:cNvPr id="11" name="Rounded Rectangle 10"/>
+          <p:cNvSpPr/>
+          <p:nvPr/>
+        </p:nvSpPr>
+        <p:spPr>
+          <a:xfrm>
+            <a:off x="4572000" y="1920240"/>
+            <a:ext cx="3200400" cy="4114800"/>
+          </a:xfrm>
+          <a:prstGeom prst="roundRect">
+            <a:avLst>
+              <a:gd name="adj" fmla="val 4000"/>
+            </a:avLst>
+          </a:prstGeom>
+          <a:solidFill>
+            <a:srgbClr val="EEF7F0"/>
+          </a:solidFill>
+          <a:ln w="15240">
+            <a:solidFill>
+              <a:srgbClr val="1E8850"/>
+            </a:solidFill>
+          </a:ln>
+        </p:spPr>
+        <p:style>
+          <a:lnRef idx="1">
+            <a:schemeClr val="accent1"/>
+          </a:lnRef>
+          <a:fillRef idx="3">
+            <a:schemeClr val="accent1"/>
+          </a:fillRef>
+          <a:effectRef idx="2">
+            <a:schemeClr val="accent1"/>
+          </a:effectRef>
+          <a:fontRef idx="minor">
+            <a:schemeClr val="lt1"/>
+          </a:fontRef>
+        </p:style>
+        <p:txBody>
+          <a:bodyPr rtlCol="0" anchor="ctr"/>
+          <a:lstStyle/>
+          <a:p>
+            <a:pPr algn="ctr"/>
+          </a:p>
+        </p:txBody>
+      </p:sp>
+      <p:sp>
+        <p:nvSpPr>
+          <p:cNvPr id="12" name="TextBox 11"/>
           <p:cNvSpPr txBox="1"/>
           <p:nvPr/>
         </p:nvSpPr>
         <p:spPr>
           <a:xfrm>
-            <a:off x="1645920" y="4754880"/>
-            <a:ext cx="8686800" cy="822960"/>
+            <a:off x="4846320" y="2103120"/>
+            <a:ext cx="2743200" cy="365760"/>
           </a:xfrm>
           <a:prstGeom prst="rect">
             <a:avLst/>
@@ -4366,41 +5253,569 @@
           </a:bodyPr>
           <a:lstStyle/>
           <a:p>
-            <a:pPr>
+            <a:pPr algn="l">
+              <a:defRPr sz="2200" b="1">
+                <a:solidFill>
+                  <a:srgbClr val="1E8850"/>
+                </a:solidFill>
+                <a:latin typeface="Calibri"/>
+              </a:defRPr>
+            </a:pPr>
+            <a:r>
+              <a:t>Dropout</a:t>
+            </a:r>
+          </a:p>
+        </p:txBody>
+      </p:sp>
+      <p:sp>
+        <p:nvSpPr>
+          <p:cNvPr id="13" name="TextBox 12"/>
+          <p:cNvSpPr txBox="1"/>
+          <p:nvPr/>
+        </p:nvSpPr>
+        <p:spPr>
+          <a:xfrm>
+            <a:off x="4846320" y="2560320"/>
+            <a:ext cx="2743200" cy="365760"/>
+          </a:xfrm>
+          <a:prstGeom prst="rect">
+            <a:avLst/>
+          </a:prstGeom>
+          <a:noFill/>
+        </p:spPr>
+        <p:txBody>
+          <a:bodyPr wrap="square">
+            <a:spAutoFit/>
+          </a:bodyPr>
+          <a:lstStyle/>
+          <a:p>
+            <a:pPr algn="l">
+              <a:defRPr sz="1400" b="0">
+                <a:solidFill>
+                  <a:srgbClr val="606060"/>
+                </a:solidFill>
+                <a:latin typeface="Calibri"/>
+              </a:defRPr>
+            </a:pPr>
+            <a:r>
+              <a:t>(Regularizacion estocastica)</a:t>
+            </a:r>
+          </a:p>
+        </p:txBody>
+      </p:sp>
+      <p:sp>
+        <p:nvSpPr>
+          <p:cNvPr id="14" name="TextBox 13"/>
+          <p:cNvSpPr txBox="1"/>
+          <p:nvPr/>
+        </p:nvSpPr>
+        <p:spPr>
+          <a:xfrm>
+            <a:off x="4846320" y="3108960"/>
+            <a:ext cx="2743200" cy="1371600"/>
+          </a:xfrm>
+          <a:prstGeom prst="rect">
+            <a:avLst/>
+          </a:prstGeom>
+          <a:noFill/>
+        </p:spPr>
+        <p:txBody>
+          <a:bodyPr wrap="square">
+            <a:spAutoFit/>
+          </a:bodyPr>
+          <a:lstStyle/>
+          <a:p>
+            <a:pPr algn="l">
               <a:spcBef>
-                <a:spcPts val="800"/>
+                <a:spcPts val="1000"/>
               </a:spcBef>
-              <a:spcAft>
-                <a:spcPts val="400"/>
-              </a:spcAft>
-              <a:defRPr sz="1600">
-                <a:solidFill>
-                  <a:srgbClr val="333333"/>
-                </a:solidFill>
-                <a:latin typeface="Calibri"/>
-              </a:defRPr>
-            </a:pPr>
-            <a:r>
-              <a:t>De 5 capas (~19K params) a 3 capas (~300 params).</a:t>
-            </a:r>
-          </a:p>
-          <a:p>
-            <a:pPr>
+              <a:defRPr sz="1400">
+                <a:solidFill>
+                  <a:srgbClr val="2A2A2A"/>
+                </a:solidFill>
+                <a:latin typeface="Calibri"/>
+              </a:defRPr>
+            </a:pPr>
+            <a:r>
+              <a:t>Apaga neuronas al azar</a:t>
+            </a:r>
+          </a:p>
+          <a:p>
+            <a:pPr algn="l">
               <a:spcBef>
-                <a:spcPts val="800"/>
+                <a:spcPts val="1000"/>
               </a:spcBef>
-              <a:spcAft>
-                <a:spcPts val="400"/>
-              </a:spcAft>
-              <a:defRPr sz="1600">
-                <a:solidFill>
-                  <a:srgbClr val="333333"/>
-                </a:solidFill>
-                <a:latin typeface="Calibri"/>
-              </a:defRPr>
-            </a:pPr>
-            <a:r>
-              <a:t>Adecuamos la complejidad al tamano del dataset.</a:t>
+              <a:defRPr sz="1400">
+                <a:solidFill>
+                  <a:srgbClr val="2A2A2A"/>
+                </a:solidFill>
+                <a:latin typeface="Calibri"/>
+              </a:defRPr>
+            </a:pPr>
+            <a:r>
+              <a:t>durante el entrenamiento.</a:t>
+            </a:r>
+          </a:p>
+          <a:p>
+            <a:pPr algn="l">
+              <a:spcBef>
+                <a:spcPts val="1000"/>
+              </a:spcBef>
+              <a:defRPr sz="1400">
+                <a:solidFill>
+                  <a:srgbClr val="2A2A2A"/>
+                </a:solidFill>
+                <a:latin typeface="Calibri"/>
+              </a:defRPr>
+            </a:pPr>
+          </a:p>
+          <a:p>
+            <a:pPr algn="l">
+              <a:spcBef>
+                <a:spcPts val="1000"/>
+              </a:spcBef>
+              <a:defRPr sz="1400">
+                <a:solidFill>
+                  <a:srgbClr val="2A2A2A"/>
+                </a:solidFill>
+                <a:latin typeface="Calibri"/>
+              </a:defRPr>
+            </a:pPr>
+            <a:r>
+              <a:t>Impide que la red</a:t>
+            </a:r>
+          </a:p>
+          <a:p>
+            <a:pPr algn="l">
+              <a:spcBef>
+                <a:spcPts val="1000"/>
+              </a:spcBef>
+              <a:defRPr sz="1400">
+                <a:solidFill>
+                  <a:srgbClr val="2A2A2A"/>
+                </a:solidFill>
+                <a:latin typeface="Calibri"/>
+              </a:defRPr>
+            </a:pPr>
+            <a:r>
+              <a:t>dependa de neuronas</a:t>
+            </a:r>
+          </a:p>
+          <a:p>
+            <a:pPr algn="l">
+              <a:spcBef>
+                <a:spcPts val="1000"/>
+              </a:spcBef>
+              <a:defRPr sz="1400">
+                <a:solidFill>
+                  <a:srgbClr val="2A2A2A"/>
+                </a:solidFill>
+                <a:latin typeface="Calibri"/>
+              </a:defRPr>
+            </a:pPr>
+            <a:r>
+              <a:t>individuales.</a:t>
+            </a:r>
+          </a:p>
+        </p:txBody>
+      </p:sp>
+      <p:sp>
+        <p:nvSpPr>
+          <p:cNvPr id="15" name="Rounded Rectangle 14"/>
+          <p:cNvSpPr/>
+          <p:nvPr/>
+        </p:nvSpPr>
+        <p:spPr>
+          <a:xfrm>
+            <a:off x="4937760" y="5120640"/>
+            <a:ext cx="2560320" cy="502920"/>
+          </a:xfrm>
+          <a:prstGeom prst="roundRect">
+            <a:avLst>
+              <a:gd name="adj" fmla="val 4000"/>
+            </a:avLst>
+          </a:prstGeom>
+          <a:solidFill>
+            <a:srgbClr val="D5EEDB"/>
+          </a:solidFill>
+          <a:ln w="10160">
+            <a:solidFill>
+              <a:srgbClr val="1E8850"/>
+            </a:solidFill>
+          </a:ln>
+        </p:spPr>
+        <p:style>
+          <a:lnRef idx="1">
+            <a:schemeClr val="accent1"/>
+          </a:lnRef>
+          <a:fillRef idx="3">
+            <a:schemeClr val="accent1"/>
+          </a:fillRef>
+          <a:effectRef idx="2">
+            <a:schemeClr val="accent1"/>
+          </a:effectRef>
+          <a:fontRef idx="minor">
+            <a:schemeClr val="lt1"/>
+          </a:fontRef>
+        </p:style>
+        <p:txBody>
+          <a:bodyPr rtlCol="0" anchor="ctr"/>
+          <a:lstStyle/>
+          <a:p>
+            <a:pPr algn="ctr"/>
+          </a:p>
+        </p:txBody>
+      </p:sp>
+      <p:sp>
+        <p:nvSpPr>
+          <p:cNvPr id="16" name="TextBox 15"/>
+          <p:cNvSpPr txBox="1"/>
+          <p:nvPr/>
+        </p:nvSpPr>
+        <p:spPr>
+          <a:xfrm>
+            <a:off x="5029200" y="5166360"/>
+            <a:ext cx="2377440" cy="365760"/>
+          </a:xfrm>
+          <a:prstGeom prst="rect">
+            <a:avLst/>
+          </a:prstGeom>
+          <a:noFill/>
+        </p:spPr>
+        <p:txBody>
+          <a:bodyPr wrap="square">
+            <a:spAutoFit/>
+          </a:bodyPr>
+          <a:lstStyle/>
+          <a:p>
+            <a:pPr algn="ctr">
+              <a:defRPr sz="1400" b="1">
+                <a:solidFill>
+                  <a:srgbClr val="1E8850"/>
+                </a:solidFill>
+                <a:latin typeface="Consolas"/>
+              </a:defRPr>
+            </a:pPr>
+            <a:r>
+              <a:t>nn.Dropout(0.3)</a:t>
+            </a:r>
+          </a:p>
+        </p:txBody>
+      </p:sp>
+      <p:sp>
+        <p:nvSpPr>
+          <p:cNvPr id="17" name="Rounded Rectangle 16"/>
+          <p:cNvSpPr/>
+          <p:nvPr/>
+        </p:nvSpPr>
+        <p:spPr>
+          <a:xfrm>
+            <a:off x="8046720" y="1920240"/>
+            <a:ext cx="3200400" cy="4114800"/>
+          </a:xfrm>
+          <a:prstGeom prst="roundRect">
+            <a:avLst>
+              <a:gd name="adj" fmla="val 4000"/>
+            </a:avLst>
+          </a:prstGeom>
+          <a:solidFill>
+            <a:srgbClr val="EEF7F0"/>
+          </a:solidFill>
+          <a:ln w="15240">
+            <a:solidFill>
+              <a:srgbClr val="1E8850"/>
+            </a:solidFill>
+          </a:ln>
+        </p:spPr>
+        <p:style>
+          <a:lnRef idx="1">
+            <a:schemeClr val="accent1"/>
+          </a:lnRef>
+          <a:fillRef idx="3">
+            <a:schemeClr val="accent1"/>
+          </a:fillRef>
+          <a:effectRef idx="2">
+            <a:schemeClr val="accent1"/>
+          </a:effectRef>
+          <a:fontRef idx="minor">
+            <a:schemeClr val="lt1"/>
+          </a:fontRef>
+        </p:style>
+        <p:txBody>
+          <a:bodyPr rtlCol="0" anchor="ctr"/>
+          <a:lstStyle/>
+          <a:p>
+            <a:pPr algn="ctr"/>
+          </a:p>
+        </p:txBody>
+      </p:sp>
+      <p:sp>
+        <p:nvSpPr>
+          <p:cNvPr id="18" name="TextBox 17"/>
+          <p:cNvSpPr txBox="1"/>
+          <p:nvPr/>
+        </p:nvSpPr>
+        <p:spPr>
+          <a:xfrm>
+            <a:off x="8321040" y="2103120"/>
+            <a:ext cx="2743200" cy="365760"/>
+          </a:xfrm>
+          <a:prstGeom prst="rect">
+            <a:avLst/>
+          </a:prstGeom>
+          <a:noFill/>
+        </p:spPr>
+        <p:txBody>
+          <a:bodyPr wrap="square">
+            <a:spAutoFit/>
+          </a:bodyPr>
+          <a:lstStyle/>
+          <a:p>
+            <a:pPr algn="l">
+              <a:defRPr sz="2200" b="1">
+                <a:solidFill>
+                  <a:srgbClr val="1E8850"/>
+                </a:solidFill>
+                <a:latin typeface="Calibri"/>
+              </a:defRPr>
+            </a:pPr>
+            <a:r>
+              <a:t>Reducir Red</a:t>
+            </a:r>
+          </a:p>
+        </p:txBody>
+      </p:sp>
+      <p:sp>
+        <p:nvSpPr>
+          <p:cNvPr id="19" name="TextBox 18"/>
+          <p:cNvSpPr txBox="1"/>
+          <p:nvPr/>
+        </p:nvSpPr>
+        <p:spPr>
+          <a:xfrm>
+            <a:off x="8321040" y="2560320"/>
+            <a:ext cx="2743200" cy="365760"/>
+          </a:xfrm>
+          <a:prstGeom prst="rect">
+            <a:avLst/>
+          </a:prstGeom>
+          <a:noFill/>
+        </p:spPr>
+        <p:txBody>
+          <a:bodyPr wrap="square">
+            <a:spAutoFit/>
+          </a:bodyPr>
+          <a:lstStyle/>
+          <a:p>
+            <a:pPr algn="l">
+              <a:defRPr sz="1400" b="0">
+                <a:solidFill>
+                  <a:srgbClr val="606060"/>
+                </a:solidFill>
+                <a:latin typeface="Calibri"/>
+              </a:defRPr>
+            </a:pPr>
+            <a:r>
+              <a:t>(Menos parametros)</a:t>
+            </a:r>
+          </a:p>
+        </p:txBody>
+      </p:sp>
+      <p:sp>
+        <p:nvSpPr>
+          <p:cNvPr id="20" name="TextBox 19"/>
+          <p:cNvSpPr txBox="1"/>
+          <p:nvPr/>
+        </p:nvSpPr>
+        <p:spPr>
+          <a:xfrm>
+            <a:off x="8321040" y="3108960"/>
+            <a:ext cx="2743200" cy="1371600"/>
+          </a:xfrm>
+          <a:prstGeom prst="rect">
+            <a:avLst/>
+          </a:prstGeom>
+          <a:noFill/>
+        </p:spPr>
+        <p:txBody>
+          <a:bodyPr wrap="square">
+            <a:spAutoFit/>
+          </a:bodyPr>
+          <a:lstStyle/>
+          <a:p>
+            <a:pPr algn="l">
+              <a:spcBef>
+                <a:spcPts val="1000"/>
+              </a:spcBef>
+              <a:defRPr sz="1400">
+                <a:solidFill>
+                  <a:srgbClr val="2A2A2A"/>
+                </a:solidFill>
+                <a:latin typeface="Calibri"/>
+              </a:defRPr>
+            </a:pPr>
+            <a:r>
+              <a:t>Menos capas y neuronas</a:t>
+            </a:r>
+          </a:p>
+          <a:p>
+            <a:pPr algn="l">
+              <a:spcBef>
+                <a:spcPts val="1000"/>
+              </a:spcBef>
+              <a:defRPr sz="1400">
+                <a:solidFill>
+                  <a:srgbClr val="2A2A2A"/>
+                </a:solidFill>
+                <a:latin typeface="Calibri"/>
+              </a:defRPr>
+            </a:pPr>
+            <a:r>
+              <a:t>para que no pueda</a:t>
+            </a:r>
+          </a:p>
+          <a:p>
+            <a:pPr algn="l">
+              <a:spcBef>
+                <a:spcPts val="1000"/>
+              </a:spcBef>
+              <a:defRPr sz="1400">
+                <a:solidFill>
+                  <a:srgbClr val="2A2A2A"/>
+                </a:solidFill>
+                <a:latin typeface="Calibri"/>
+              </a:defRPr>
+            </a:pPr>
+            <a:r>
+              <a:t>memorizar todo.</a:t>
+            </a:r>
+          </a:p>
+          <a:p>
+            <a:pPr algn="l">
+              <a:spcBef>
+                <a:spcPts val="1000"/>
+              </a:spcBef>
+              <a:defRPr sz="1400">
+                <a:solidFill>
+                  <a:srgbClr val="2A2A2A"/>
+                </a:solidFill>
+                <a:latin typeface="Calibri"/>
+              </a:defRPr>
+            </a:pPr>
+          </a:p>
+          <a:p>
+            <a:pPr algn="l">
+              <a:spcBef>
+                <a:spcPts val="1000"/>
+              </a:spcBef>
+              <a:defRPr sz="1400">
+                <a:solidFill>
+                  <a:srgbClr val="2A2A2A"/>
+                </a:solidFill>
+                <a:latin typeface="Calibri"/>
+              </a:defRPr>
+            </a:pPr>
+            <a:r>
+              <a:t>Adecuamos complejidad</a:t>
+            </a:r>
+          </a:p>
+          <a:p>
+            <a:pPr algn="l">
+              <a:spcBef>
+                <a:spcPts val="1000"/>
+              </a:spcBef>
+              <a:defRPr sz="1400">
+                <a:solidFill>
+                  <a:srgbClr val="2A2A2A"/>
+                </a:solidFill>
+                <a:latin typeface="Calibri"/>
+              </a:defRPr>
+            </a:pPr>
+            <a:r>
+              <a:t>al tamano del dataset.</a:t>
+            </a:r>
+          </a:p>
+        </p:txBody>
+      </p:sp>
+      <p:sp>
+        <p:nvSpPr>
+          <p:cNvPr id="21" name="Rounded Rectangle 20"/>
+          <p:cNvSpPr/>
+          <p:nvPr/>
+        </p:nvSpPr>
+        <p:spPr>
+          <a:xfrm>
+            <a:off x="8412480" y="5120640"/>
+            <a:ext cx="2560320" cy="502920"/>
+          </a:xfrm>
+          <a:prstGeom prst="roundRect">
+            <a:avLst>
+              <a:gd name="adj" fmla="val 4000"/>
+            </a:avLst>
+          </a:prstGeom>
+          <a:solidFill>
+            <a:srgbClr val="D5EEDB"/>
+          </a:solidFill>
+          <a:ln w="10160">
+            <a:solidFill>
+              <a:srgbClr val="1E8850"/>
+            </a:solidFill>
+          </a:ln>
+        </p:spPr>
+        <p:style>
+          <a:lnRef idx="1">
+            <a:schemeClr val="accent1"/>
+          </a:lnRef>
+          <a:fillRef idx="3">
+            <a:schemeClr val="accent1"/>
+          </a:fillRef>
+          <a:effectRef idx="2">
+            <a:schemeClr val="accent1"/>
+          </a:effectRef>
+          <a:fontRef idx="minor">
+            <a:schemeClr val="lt1"/>
+          </a:fontRef>
+        </p:style>
+        <p:txBody>
+          <a:bodyPr rtlCol="0" anchor="ctr"/>
+          <a:lstStyle/>
+          <a:p>
+            <a:pPr algn="ctr"/>
+          </a:p>
+        </p:txBody>
+      </p:sp>
+      <p:sp>
+        <p:nvSpPr>
+          <p:cNvPr id="22" name="TextBox 21"/>
+          <p:cNvSpPr txBox="1"/>
+          <p:nvPr/>
+        </p:nvSpPr>
+        <p:spPr>
+          <a:xfrm>
+            <a:off x="8503920" y="5166360"/>
+            <a:ext cx="2377440" cy="365760"/>
+          </a:xfrm>
+          <a:prstGeom prst="rect">
+            <a:avLst/>
+          </a:prstGeom>
+          <a:noFill/>
+        </p:spPr>
+        <p:txBody>
+          <a:bodyPr wrap="square">
+            <a:spAutoFit/>
+          </a:bodyPr>
+          <a:lstStyle/>
+          <a:p>
+            <a:pPr algn="ctr">
+              <a:defRPr sz="1400" b="1">
+                <a:solidFill>
+                  <a:srgbClr val="1E8850"/>
+                </a:solidFill>
+                <a:latin typeface="Consolas"/>
+              </a:defRPr>
+            </a:pPr>
+            <a:r>
+              <a:t>19K -&gt; 300 params</a:t>
             </a:r>
           </a:p>
         </p:txBody>
@@ -4419,7 +5834,7 @@
     <p:bg>
       <p:bgPr>
         <a:solidFill>
-          <a:srgbClr val="FAFAFA"/>
+          <a:srgbClr val="FBFBFB"/>
         </a:solidFill>
         <a:effectLst/>
       </p:bgPr>
@@ -4439,8 +5854,8 @@
         </p:nvSpPr>
         <p:spPr>
           <a:xfrm>
-            <a:off x="1371600" y="548640"/>
-            <a:ext cx="9418320" cy="640080"/>
+            <a:off x="1097280" y="457200"/>
+            <a:ext cx="9144000" cy="640080"/>
           </a:xfrm>
           <a:prstGeom prst="rect">
             <a:avLst/>
@@ -4454,9 +5869,9 @@
           <a:lstStyle/>
           <a:p>
             <a:pPr algn="l">
-              <a:defRPr sz="4000" b="1">
-                <a:solidFill>
-                  <a:srgbClr val="1A1A1A"/>
+              <a:defRPr sz="4200" b="1">
+                <a:solidFill>
+                  <a:srgbClr val="181818"/>
                 </a:solidFill>
                 <a:latin typeface="Calibri"/>
               </a:defRPr>
@@ -4475,14 +5890,14 @@
         </p:nvSpPr>
         <p:spPr>
           <a:xfrm>
-            <a:off x="1371600" y="1188720"/>
-            <a:ext cx="1828800" cy="25400"/>
+            <a:off x="1097280" y="1051560"/>
+            <a:ext cx="2286000" cy="38100"/>
           </a:xfrm>
           <a:prstGeom prst="rect">
             <a:avLst/>
           </a:prstGeom>
           <a:solidFill>
-            <a:srgbClr val="0066CC"/>
+            <a:srgbClr val="1A73E8"/>
           </a:solidFill>
           <a:ln>
             <a:noFill/>
@@ -4519,8 +5934,8 @@
           <p:nvPr/>
         </p:nvGraphicFramePr>
         <p:xfrm>
-          <a:off x="1371600" y="1554480"/>
-          <a:ext cx="9418320" cy="4389120"/>
+          <a:off x="1371600" y="1463040"/>
+          <a:ext cx="9418320" cy="4572000"/>
         </p:xfrm>
         <a:graphic>
           <a:graphicData uri="http://schemas.openxmlformats.org/drawingml/2006/table">
@@ -4533,14 +5948,14 @@
                 <a:gridCol w="3108960"/>
                 <a:gridCol w="3108960"/>
               </a:tblGrid>
-              <a:tr h="548640">
+              <a:tr h="571500">
                 <a:tc>
                   <a:txBody>
                     <a:bodyPr/>
                     <a:lstStyle/>
                     <a:p>
-                      <a:pPr>
-                        <a:defRPr sz="1500" b="1">
+                      <a:pPr algn="ctr">
+                        <a:defRPr sz="1600" b="1">
                           <a:solidFill>
                             <a:srgbClr val="FFFFFF"/>
                           </a:solidFill>
@@ -4552,9 +5967,9 @@
                       </a:r>
                     </a:p>
                   </a:txBody>
-                  <a:tcPr>
+                  <a:tcPr anchor="ctr">
                     <a:solidFill>
-                      <a:srgbClr val="0066CC"/>
+                      <a:srgbClr val="333333"/>
                     </a:solidFill>
                   </a:tcPr>
                 </a:tc>
@@ -4563,8 +5978,8 @@
                     <a:bodyPr/>
                     <a:lstStyle/>
                     <a:p>
-                      <a:pPr>
-                        <a:defRPr sz="1500" b="1">
+                      <a:pPr algn="ctr">
+                        <a:defRPr sz="1600" b="1">
                           <a:solidFill>
                             <a:srgbClr val="FFFFFF"/>
                           </a:solidFill>
@@ -4576,9 +5991,9 @@
                       </a:r>
                     </a:p>
                   </a:txBody>
-                  <a:tcPr>
+                  <a:tcPr anchor="ctr">
                     <a:solidFill>
-                      <a:srgbClr val="CC3333"/>
+                      <a:srgbClr val="D93025"/>
                     </a:solidFill>
                   </a:tcPr>
                 </a:tc>
@@ -4587,8 +6002,8 @@
                     <a:bodyPr/>
                     <a:lstStyle/>
                     <a:p>
-                      <a:pPr>
-                        <a:defRPr sz="1500" b="1">
+                      <a:pPr algn="ctr">
+                        <a:defRPr sz="1600" b="1">
                           <a:solidFill>
                             <a:srgbClr val="FFFFFF"/>
                           </a:solidFill>
@@ -4600,23 +6015,23 @@
                       </a:r>
                     </a:p>
                   </a:txBody>
-                  <a:tcPr>
+                  <a:tcPr anchor="ctr">
                     <a:solidFill>
-                      <a:srgbClr val="228844"/>
+                      <a:srgbClr val="1E8850"/>
                     </a:solidFill>
                   </a:tcPr>
                 </a:tc>
               </a:tr>
-              <a:tr h="548640">
+              <a:tr h="571500">
                 <a:tc>
                   <a:txBody>
                     <a:bodyPr/>
                     <a:lstStyle/>
                     <a:p>
-                      <a:pPr>
-                        <a:defRPr sz="1500">
+                      <a:pPr algn="ctr">
+                        <a:defRPr sz="1600">
                           <a:solidFill>
-                            <a:srgbClr val="333333"/>
+                            <a:srgbClr val="2A2A2A"/>
                           </a:solidFill>
                           <a:latin typeface="Calibri"/>
                         </a:defRPr>
@@ -4626,7 +6041,7 @@
                       </a:r>
                     </a:p>
                   </a:txBody>
-                  <a:tcPr>
+                  <a:tcPr anchor="ctr">
                     <a:solidFill>
                       <a:srgbClr val="FFFFFF"/>
                     </a:solidFill>
@@ -4637,10 +6052,10 @@
                     <a:bodyPr/>
                     <a:lstStyle/>
                     <a:p>
-                      <a:pPr>
-                        <a:defRPr sz="1500">
+                      <a:pPr algn="ctr">
+                        <a:defRPr sz="1600">
                           <a:solidFill>
-                            <a:srgbClr val="333333"/>
+                            <a:srgbClr val="D93025"/>
                           </a:solidFill>
                           <a:latin typeface="Calibri"/>
                         </a:defRPr>
@@ -4650,7 +6065,7 @@
                       </a:r>
                     </a:p>
                   </a:txBody>
-                  <a:tcPr>
+                  <a:tcPr anchor="ctr">
                     <a:solidFill>
                       <a:srgbClr val="FFFFFF"/>
                     </a:solidFill>
@@ -4661,10 +6076,10 @@
                     <a:bodyPr/>
                     <a:lstStyle/>
                     <a:p>
-                      <a:pPr>
-                        <a:defRPr sz="1500">
+                      <a:pPr algn="ctr">
+                        <a:defRPr sz="1600" b="1">
                           <a:solidFill>
-                            <a:srgbClr val="333333"/>
+                            <a:srgbClr val="1E8850"/>
                           </a:solidFill>
                           <a:latin typeface="Calibri"/>
                         </a:defRPr>
@@ -4674,23 +6089,23 @@
                       </a:r>
                     </a:p>
                   </a:txBody>
-                  <a:tcPr>
+                  <a:tcPr anchor="ctr">
                     <a:solidFill>
                       <a:srgbClr val="FFFFFF"/>
                     </a:solidFill>
                   </a:tcPr>
                 </a:tc>
               </a:tr>
-              <a:tr h="548640">
+              <a:tr h="571500">
                 <a:tc>
                   <a:txBody>
                     <a:bodyPr/>
                     <a:lstStyle/>
                     <a:p>
-                      <a:pPr>
-                        <a:defRPr sz="1500">
+                      <a:pPr algn="ctr">
+                        <a:defRPr sz="1600">
                           <a:solidFill>
-                            <a:srgbClr val="333333"/>
+                            <a:srgbClr val="2A2A2A"/>
                           </a:solidFill>
                           <a:latin typeface="Calibri"/>
                         </a:defRPr>
@@ -4700,9 +6115,9 @@
                       </a:r>
                     </a:p>
                   </a:txBody>
-                  <a:tcPr>
+                  <a:tcPr anchor="ctr">
                     <a:solidFill>
-                      <a:srgbClr val="F0F0F0"/>
+                      <a:srgbClr val="F5F5F7"/>
                     </a:solidFill>
                   </a:tcPr>
                 </a:tc>
@@ -4711,10 +6126,10 @@
                     <a:bodyPr/>
                     <a:lstStyle/>
                     <a:p>
-                      <a:pPr>
-                        <a:defRPr sz="1500">
+                      <a:pPr algn="ctr">
+                        <a:defRPr sz="1600">
                           <a:solidFill>
-                            <a:srgbClr val="333333"/>
+                            <a:srgbClr val="D93025"/>
                           </a:solidFill>
                           <a:latin typeface="Calibri"/>
                         </a:defRPr>
@@ -4724,9 +6139,9 @@
                       </a:r>
                     </a:p>
                   </a:txBody>
-                  <a:tcPr>
+                  <a:tcPr anchor="ctr">
                     <a:solidFill>
-                      <a:srgbClr val="F0F0F0"/>
+                      <a:srgbClr val="F5F5F7"/>
                     </a:solidFill>
                   </a:tcPr>
                 </a:tc>
@@ -4735,10 +6150,10 @@
                     <a:bodyPr/>
                     <a:lstStyle/>
                     <a:p>
-                      <a:pPr>
-                        <a:defRPr sz="1500">
+                      <a:pPr algn="ctr">
+                        <a:defRPr sz="1600" b="1">
                           <a:solidFill>
-                            <a:srgbClr val="333333"/>
+                            <a:srgbClr val="1E8850"/>
                           </a:solidFill>
                           <a:latin typeface="Calibri"/>
                         </a:defRPr>
@@ -4748,23 +6163,23 @@
                       </a:r>
                     </a:p>
                   </a:txBody>
-                  <a:tcPr>
+                  <a:tcPr anchor="ctr">
                     <a:solidFill>
-                      <a:srgbClr val="F0F0F0"/>
+                      <a:srgbClr val="F5F5F7"/>
                     </a:solidFill>
                   </a:tcPr>
                 </a:tc>
               </a:tr>
-              <a:tr h="548640">
+              <a:tr h="571500">
                 <a:tc>
                   <a:txBody>
                     <a:bodyPr/>
                     <a:lstStyle/>
                     <a:p>
-                      <a:pPr>
-                        <a:defRPr sz="1500">
+                      <a:pPr algn="ctr">
+                        <a:defRPr sz="1600">
                           <a:solidFill>
-                            <a:srgbClr val="333333"/>
+                            <a:srgbClr val="2A2A2A"/>
                           </a:solidFill>
                           <a:latin typeface="Calibri"/>
                         </a:defRPr>
@@ -4774,7 +6189,7 @@
                       </a:r>
                     </a:p>
                   </a:txBody>
-                  <a:tcPr>
+                  <a:tcPr anchor="ctr">
                     <a:solidFill>
                       <a:srgbClr val="FFFFFF"/>
                     </a:solidFill>
@@ -4785,10 +6200,10 @@
                     <a:bodyPr/>
                     <a:lstStyle/>
                     <a:p>
-                      <a:pPr>
-                        <a:defRPr sz="1500">
+                      <a:pPr algn="ctr">
+                        <a:defRPr sz="1600">
                           <a:solidFill>
-                            <a:srgbClr val="333333"/>
+                            <a:srgbClr val="D93025"/>
                           </a:solidFill>
                           <a:latin typeface="Calibri"/>
                         </a:defRPr>
@@ -4798,7 +6213,7 @@
                       </a:r>
                     </a:p>
                   </a:txBody>
-                  <a:tcPr>
+                  <a:tcPr anchor="ctr">
                     <a:solidFill>
                       <a:srgbClr val="FFFFFF"/>
                     </a:solidFill>
@@ -4809,10 +6224,10 @@
                     <a:bodyPr/>
                     <a:lstStyle/>
                     <a:p>
-                      <a:pPr>
-                        <a:defRPr sz="1500">
+                      <a:pPr algn="ctr">
+                        <a:defRPr sz="1600" b="1">
                           <a:solidFill>
-                            <a:srgbClr val="333333"/>
+                            <a:srgbClr val="1E8850"/>
                           </a:solidFill>
                           <a:latin typeface="Calibri"/>
                         </a:defRPr>
@@ -4822,23 +6237,23 @@
                       </a:r>
                     </a:p>
                   </a:txBody>
-                  <a:tcPr>
+                  <a:tcPr anchor="ctr">
                     <a:solidFill>
                       <a:srgbClr val="FFFFFF"/>
                     </a:solidFill>
                   </a:tcPr>
                 </a:tc>
               </a:tr>
-              <a:tr h="548640">
+              <a:tr h="571500">
                 <a:tc>
                   <a:txBody>
                     <a:bodyPr/>
                     <a:lstStyle/>
                     <a:p>
-                      <a:pPr>
-                        <a:defRPr sz="1500">
+                      <a:pPr algn="ctr">
+                        <a:defRPr sz="1600">
                           <a:solidFill>
-                            <a:srgbClr val="333333"/>
+                            <a:srgbClr val="2A2A2A"/>
                           </a:solidFill>
                           <a:latin typeface="Calibri"/>
                         </a:defRPr>
@@ -4848,9 +6263,9 @@
                       </a:r>
                     </a:p>
                   </a:txBody>
-                  <a:tcPr>
+                  <a:tcPr anchor="ctr">
                     <a:solidFill>
-                      <a:srgbClr val="F0F0F0"/>
+                      <a:srgbClr val="F5F5F7"/>
                     </a:solidFill>
                   </a:tcPr>
                 </a:tc>
@@ -4859,10 +6274,10 @@
                     <a:bodyPr/>
                     <a:lstStyle/>
                     <a:p>
-                      <a:pPr>
-                        <a:defRPr sz="1500">
+                      <a:pPr algn="ctr">
+                        <a:defRPr sz="1600">
                           <a:solidFill>
-                            <a:srgbClr val="333333"/>
+                            <a:srgbClr val="D93025"/>
                           </a:solidFill>
                           <a:latin typeface="Calibri"/>
                         </a:defRPr>
@@ -4872,9 +6287,9 @@
                       </a:r>
                     </a:p>
                   </a:txBody>
-                  <a:tcPr>
+                  <a:tcPr anchor="ctr">
                     <a:solidFill>
-                      <a:srgbClr val="F0F0F0"/>
+                      <a:srgbClr val="F5F5F7"/>
                     </a:solidFill>
                   </a:tcPr>
                 </a:tc>
@@ -4883,10 +6298,10 @@
                     <a:bodyPr/>
                     <a:lstStyle/>
                     <a:p>
-                      <a:pPr>
-                        <a:defRPr sz="1500">
+                      <a:pPr algn="ctr">
+                        <a:defRPr sz="1600" b="1">
                           <a:solidFill>
-                            <a:srgbClr val="333333"/>
+                            <a:srgbClr val="1E8850"/>
                           </a:solidFill>
                           <a:latin typeface="Calibri"/>
                         </a:defRPr>
@@ -4896,23 +6311,23 @@
                       </a:r>
                     </a:p>
                   </a:txBody>
-                  <a:tcPr>
+                  <a:tcPr anchor="ctr">
                     <a:solidFill>
-                      <a:srgbClr val="F0F0F0"/>
+                      <a:srgbClr val="F5F5F7"/>
                     </a:solidFill>
                   </a:tcPr>
                 </a:tc>
               </a:tr>
-              <a:tr h="548640">
+              <a:tr h="571500">
                 <a:tc>
                   <a:txBody>
                     <a:bodyPr/>
                     <a:lstStyle/>
                     <a:p>
-                      <a:pPr>
-                        <a:defRPr sz="1500">
+                      <a:pPr algn="ctr">
+                        <a:defRPr sz="1600">
                           <a:solidFill>
-                            <a:srgbClr val="333333"/>
+                            <a:srgbClr val="2A2A2A"/>
                           </a:solidFill>
                           <a:latin typeface="Calibri"/>
                         </a:defRPr>
@@ -4922,7 +6337,7 @@
                       </a:r>
                     </a:p>
                   </a:txBody>
-                  <a:tcPr>
+                  <a:tcPr anchor="ctr">
                     <a:solidFill>
                       <a:srgbClr val="FFFFFF"/>
                     </a:solidFill>
@@ -4933,10 +6348,10 @@
                     <a:bodyPr/>
                     <a:lstStyle/>
                     <a:p>
-                      <a:pPr>
-                        <a:defRPr sz="1500">
+                      <a:pPr algn="ctr">
+                        <a:defRPr sz="1600">
                           <a:solidFill>
-                            <a:srgbClr val="333333"/>
+                            <a:srgbClr val="D93025"/>
                           </a:solidFill>
                           <a:latin typeface="Calibri"/>
                         </a:defRPr>
@@ -4946,7 +6361,7 @@
                       </a:r>
                     </a:p>
                   </a:txBody>
-                  <a:tcPr>
+                  <a:tcPr anchor="ctr">
                     <a:solidFill>
                       <a:srgbClr val="FFFFFF"/>
                     </a:solidFill>
@@ -4957,10 +6372,10 @@
                     <a:bodyPr/>
                     <a:lstStyle/>
                     <a:p>
-                      <a:pPr>
-                        <a:defRPr sz="1500">
+                      <a:pPr algn="ctr">
+                        <a:defRPr sz="1600" b="1">
                           <a:solidFill>
-                            <a:srgbClr val="333333"/>
+                            <a:srgbClr val="1E8850"/>
                           </a:solidFill>
                           <a:latin typeface="Calibri"/>
                         </a:defRPr>
@@ -4970,23 +6385,23 @@
                       </a:r>
                     </a:p>
                   </a:txBody>
-                  <a:tcPr>
+                  <a:tcPr anchor="ctr">
                     <a:solidFill>
                       <a:srgbClr val="FFFFFF"/>
                     </a:solidFill>
                   </a:tcPr>
                 </a:tc>
               </a:tr>
-              <a:tr h="548640">
+              <a:tr h="571500">
                 <a:tc>
                   <a:txBody>
                     <a:bodyPr/>
                     <a:lstStyle/>
                     <a:p>
-                      <a:pPr>
-                        <a:defRPr sz="1500">
+                      <a:pPr algn="ctr">
+                        <a:defRPr sz="1600">
                           <a:solidFill>
-                            <a:srgbClr val="333333"/>
+                            <a:srgbClr val="2A2A2A"/>
                           </a:solidFill>
                           <a:latin typeface="Calibri"/>
                         </a:defRPr>
@@ -4996,9 +6411,9 @@
                       </a:r>
                     </a:p>
                   </a:txBody>
-                  <a:tcPr>
+                  <a:tcPr anchor="ctr">
                     <a:solidFill>
-                      <a:srgbClr val="F0F0F0"/>
+                      <a:srgbClr val="F5F5F7"/>
                     </a:solidFill>
                   </a:tcPr>
                 </a:tc>
@@ -5007,10 +6422,10 @@
                     <a:bodyPr/>
                     <a:lstStyle/>
                     <a:p>
-                      <a:pPr>
-                        <a:defRPr sz="1500">
+                      <a:pPr algn="ctr">
+                        <a:defRPr sz="1600">
                           <a:solidFill>
-                            <a:srgbClr val="333333"/>
+                            <a:srgbClr val="D93025"/>
                           </a:solidFill>
                           <a:latin typeface="Calibri"/>
                         </a:defRPr>
@@ -5020,9 +6435,9 @@
                       </a:r>
                     </a:p>
                   </a:txBody>
-                  <a:tcPr>
+                  <a:tcPr anchor="ctr">
                     <a:solidFill>
-                      <a:srgbClr val="F0F0F0"/>
+                      <a:srgbClr val="F5F5F7"/>
                     </a:solidFill>
                   </a:tcPr>
                 </a:tc>
@@ -5031,10 +6446,10 @@
                     <a:bodyPr/>
                     <a:lstStyle/>
                     <a:p>
-                      <a:pPr>
-                        <a:defRPr sz="1500">
+                      <a:pPr algn="ctr">
+                        <a:defRPr sz="1600" b="1">
                           <a:solidFill>
-                            <a:srgbClr val="333333"/>
+                            <a:srgbClr val="1E8850"/>
                           </a:solidFill>
                           <a:latin typeface="Calibri"/>
                         </a:defRPr>
@@ -5044,23 +6459,23 @@
                       </a:r>
                     </a:p>
                   </a:txBody>
-                  <a:tcPr>
+                  <a:tcPr anchor="ctr">
                     <a:solidFill>
-                      <a:srgbClr val="F0F0F0"/>
+                      <a:srgbClr val="F5F5F7"/>
                     </a:solidFill>
                   </a:tcPr>
                 </a:tc>
               </a:tr>
-              <a:tr h="548640">
+              <a:tr h="571500">
                 <a:tc>
                   <a:txBody>
                     <a:bodyPr/>
                     <a:lstStyle/>
                     <a:p>
-                      <a:pPr>
-                        <a:defRPr sz="1500">
+                      <a:pPr algn="ctr">
+                        <a:defRPr sz="1600">
                           <a:solidFill>
-                            <a:srgbClr val="333333"/>
+                            <a:srgbClr val="2A2A2A"/>
                           </a:solidFill>
                           <a:latin typeface="Calibri"/>
                         </a:defRPr>
@@ -5070,7 +6485,7 @@
                       </a:r>
                     </a:p>
                   </a:txBody>
-                  <a:tcPr>
+                  <a:tcPr anchor="ctr">
                     <a:solidFill>
                       <a:srgbClr val="FFFFFF"/>
                     </a:solidFill>
@@ -5081,10 +6496,10 @@
                     <a:bodyPr/>
                     <a:lstStyle/>
                     <a:p>
-                      <a:pPr>
-                        <a:defRPr sz="1500">
+                      <a:pPr algn="ctr">
+                        <a:defRPr sz="1600">
                           <a:solidFill>
-                            <a:srgbClr val="333333"/>
+                            <a:srgbClr val="D93025"/>
                           </a:solidFill>
                           <a:latin typeface="Calibri"/>
                         </a:defRPr>
@@ -5094,7 +6509,7 @@
                       </a:r>
                     </a:p>
                   </a:txBody>
-                  <a:tcPr>
+                  <a:tcPr anchor="ctr">
                     <a:solidFill>
                       <a:srgbClr val="FFFFFF"/>
                     </a:solidFill>
@@ -5105,10 +6520,10 @@
                     <a:bodyPr/>
                     <a:lstStyle/>
                     <a:p>
-                      <a:pPr>
-                        <a:defRPr sz="1500">
+                      <a:pPr algn="ctr">
+                        <a:defRPr sz="1600" b="1">
                           <a:solidFill>
-                            <a:srgbClr val="333333"/>
+                            <a:srgbClr val="1E8850"/>
                           </a:solidFill>
                           <a:latin typeface="Calibri"/>
                         </a:defRPr>
@@ -5118,7 +6533,7 @@
                       </a:r>
                     </a:p>
                   </a:txBody>
-                  <a:tcPr>
+                  <a:tcPr anchor="ctr">
                     <a:solidFill>
                       <a:srgbClr val="FFFFFF"/>
                     </a:solidFill>
@@ -5143,7 +6558,7 @@
     <p:bg>
       <p:bgPr>
         <a:solidFill>
-          <a:srgbClr val="FAFAFA"/>
+          <a:srgbClr val="FBFBFB"/>
         </a:solidFill>
         <a:effectLst/>
       </p:bgPr>
@@ -5163,8 +6578,8 @@
         </p:nvSpPr>
         <p:spPr>
           <a:xfrm>
-            <a:off x="1371600" y="548640"/>
-            <a:ext cx="9418320" cy="640080"/>
+            <a:off x="1097280" y="457200"/>
+            <a:ext cx="9144000" cy="640080"/>
           </a:xfrm>
           <a:prstGeom prst="rect">
             <a:avLst/>
@@ -5178,9 +6593,9 @@
           <a:lstStyle/>
           <a:p>
             <a:pPr algn="l">
-              <a:defRPr sz="4000" b="1">
-                <a:solidFill>
-                  <a:srgbClr val="1A1A1A"/>
+              <a:defRPr sz="4200" b="1">
+                <a:solidFill>
+                  <a:srgbClr val="181818"/>
                 </a:solidFill>
                 <a:latin typeface="Calibri"/>
               </a:defRPr>
@@ -5199,14 +6614,14 @@
         </p:nvSpPr>
         <p:spPr>
           <a:xfrm>
-            <a:off x="1371600" y="1188720"/>
-            <a:ext cx="1828800" cy="25400"/>
+            <a:off x="1097280" y="1051560"/>
+            <a:ext cx="2286000" cy="38100"/>
           </a:xfrm>
           <a:prstGeom prst="rect">
             <a:avLst/>
           </a:prstGeom>
           <a:solidFill>
-            <a:srgbClr val="0066CC"/>
+            <a:srgbClr val="0097A7"/>
           </a:solidFill>
           <a:ln>
             <a:noFill/>
@@ -5242,8 +6657,8 @@
         </p:nvSpPr>
         <p:spPr>
           <a:xfrm>
-            <a:off x="1371600" y="1554480"/>
-            <a:ext cx="4572000" cy="365760"/>
+            <a:off x="1097280" y="1280160"/>
+            <a:ext cx="9144000" cy="365760"/>
           </a:xfrm>
           <a:prstGeom prst="rect">
             <a:avLst/>
@@ -5257,29 +6672,76 @@
           <a:lstStyle/>
           <a:p>
             <a:pPr algn="l">
-              <a:defRPr sz="2200" b="1">
-                <a:solidFill>
-                  <a:srgbClr val="CC3333"/>
-                </a:solidFill>
-                <a:latin typeface="Calibri"/>
-              </a:defRPr>
-            </a:pPr>
-            <a:r>
-              <a:t>Sin regularizacion</a:t>
-            </a:r>
-          </a:p>
-        </p:txBody>
-      </p:sp>
-      <p:sp>
-        <p:nvSpPr>
-          <p:cNvPr id="5" name="TextBox 4"/>
+              <a:defRPr sz="1700" b="1">
+                <a:solidFill>
+                  <a:srgbClr val="0097A7"/>
+                </a:solidFill>
+                <a:latin typeface="Calibri"/>
+              </a:defRPr>
+            </a:pPr>
+            <a:r>
+              <a:t>Como cambio la jerarquia de conceptos tras el arreglo</a:t>
+            </a:r>
+          </a:p>
+        </p:txBody>
+      </p:sp>
+      <p:sp>
+        <p:nvSpPr>
+          <p:cNvPr id="5" name="Rounded Rectangle 4"/>
+          <p:cNvSpPr/>
+          <p:nvPr/>
+        </p:nvSpPr>
+        <p:spPr>
+          <a:xfrm>
+            <a:off x="1097280" y="1920240"/>
+            <a:ext cx="4846320" cy="3840480"/>
+          </a:xfrm>
+          <a:prstGeom prst="roundRect">
+            <a:avLst>
+              <a:gd name="adj" fmla="val 4000"/>
+            </a:avLst>
+          </a:prstGeom>
+          <a:solidFill>
+            <a:srgbClr val="FDF0F0"/>
+          </a:solidFill>
+          <a:ln w="15240">
+            <a:solidFill>
+              <a:srgbClr val="D93025"/>
+            </a:solidFill>
+          </a:ln>
+        </p:spPr>
+        <p:style>
+          <a:lnRef idx="1">
+            <a:schemeClr val="accent1"/>
+          </a:lnRef>
+          <a:fillRef idx="3">
+            <a:schemeClr val="accent1"/>
+          </a:fillRef>
+          <a:effectRef idx="2">
+            <a:schemeClr val="accent1"/>
+          </a:effectRef>
+          <a:fontRef idx="minor">
+            <a:schemeClr val="lt1"/>
+          </a:fontRef>
+        </p:style>
+        <p:txBody>
+          <a:bodyPr rtlCol="0" anchor="ctr"/>
+          <a:lstStyle/>
+          <a:p>
+            <a:pPr algn="ctr"/>
+          </a:p>
+        </p:txBody>
+      </p:sp>
+      <p:sp>
+        <p:nvSpPr>
+          <p:cNvPr id="6" name="TextBox 5"/>
           <p:cNvSpPr txBox="1"/>
           <p:nvPr/>
         </p:nvSpPr>
         <p:spPr>
           <a:xfrm>
-            <a:off x="1371600" y="2011680"/>
-            <a:ext cx="4572000" cy="2743200"/>
+            <a:off x="1371600" y="2103120"/>
+            <a:ext cx="4389120" cy="365760"/>
           </a:xfrm>
           <a:prstGeom prst="rect">
             <a:avLst/>
@@ -5292,112 +6754,73 @@
           </a:bodyPr>
           <a:lstStyle/>
           <a:p>
-            <a:pPr>
-              <a:spcBef>
-                <a:spcPts val="800"/>
-              </a:spcBef>
-              <a:spcAft>
-                <a:spcPts val="400"/>
-              </a:spcAft>
-              <a:defRPr sz="1600">
-                <a:solidFill>
-                  <a:srgbClr val="333333"/>
-                </a:solidFill>
-                <a:latin typeface="Calibri"/>
-              </a:defRPr>
-            </a:pPr>
-            <a:r>
-              <a:t>-  Memoriza ruido y artefactos</a:t>
-            </a:r>
-          </a:p>
-          <a:p>
-            <a:pPr>
-              <a:spcBef>
-                <a:spcPts val="800"/>
-              </a:spcBef>
-              <a:spcAft>
-                <a:spcPts val="400"/>
-              </a:spcAft>
-              <a:defRPr sz="1600">
-                <a:solidFill>
-                  <a:srgbClr val="333333"/>
-                </a:solidFill>
-                <a:latin typeface="Calibri"/>
-              </a:defRPr>
-            </a:pPr>
-            <a:r>
-              <a:t>-  Features no transferibles</a:t>
-            </a:r>
-          </a:p>
-          <a:p>
-            <a:pPr>
-              <a:spcBef>
-                <a:spcPts val="800"/>
-              </a:spcBef>
-              <a:spcAft>
-                <a:spcPts val="400"/>
-              </a:spcAft>
-              <a:defRPr sz="1600">
-                <a:solidFill>
-                  <a:srgbClr val="333333"/>
-                </a:solidFill>
-                <a:latin typeface="Calibri"/>
-              </a:defRPr>
-            </a:pPr>
-            <a:r>
-              <a:t>-  No aprende conceptos generales</a:t>
-            </a:r>
-          </a:p>
-          <a:p>
-            <a:pPr>
-              <a:spcBef>
-                <a:spcPts val="800"/>
-              </a:spcBef>
-              <a:spcAft>
-                <a:spcPts val="400"/>
-              </a:spcAft>
-              <a:defRPr sz="1600">
-                <a:solidFill>
-                  <a:srgbClr val="333333"/>
-                </a:solidFill>
-                <a:latin typeface="Calibri"/>
-              </a:defRPr>
-            </a:pPr>
-            <a:r>
-              <a:t>-  Neuronas sobreactivadas para</a:t>
-            </a:r>
-          </a:p>
-          <a:p>
-            <a:pPr>
-              <a:spcBef>
-                <a:spcPts val="800"/>
-              </a:spcBef>
-              <a:spcAft>
-                <a:spcPts val="400"/>
-              </a:spcAft>
-              <a:defRPr sz="1600">
-                <a:solidFill>
-                  <a:srgbClr val="333333"/>
-                </a:solidFill>
-                <a:latin typeface="Calibri"/>
-              </a:defRPr>
-            </a:pPr>
-            <a:r>
-              <a:t>   casos puntuales</a:t>
-            </a:r>
-          </a:p>
-        </p:txBody>
-      </p:sp>
-      <p:sp>
-        <p:nvSpPr>
-          <p:cNvPr id="6" name="TextBox 5"/>
+            <a:pPr algn="l">
+              <a:defRPr sz="2200" b="1">
+                <a:solidFill>
+                  <a:srgbClr val="D93025"/>
+                </a:solidFill>
+                <a:latin typeface="Calibri"/>
+              </a:defRPr>
+            </a:pPr>
+            <a:r>
+              <a:t>Sin Regularizacion</a:t>
+            </a:r>
+          </a:p>
+        </p:txBody>
+      </p:sp>
+      <p:sp>
+        <p:nvSpPr>
+          <p:cNvPr id="7" name="Rectangle 6"/>
+          <p:cNvSpPr/>
+          <p:nvPr/>
+        </p:nvSpPr>
+        <p:spPr>
+          <a:xfrm>
+            <a:off x="1371600" y="2560320"/>
+            <a:ext cx="1828800" cy="25400"/>
+          </a:xfrm>
+          <a:prstGeom prst="rect">
+            <a:avLst/>
+          </a:prstGeom>
+          <a:solidFill>
+            <a:srgbClr val="D93025"/>
+          </a:solidFill>
+          <a:ln>
+            <a:noFill/>
+          </a:ln>
+        </p:spPr>
+        <p:style>
+          <a:lnRef idx="1">
+            <a:schemeClr val="accent1"/>
+          </a:lnRef>
+          <a:fillRef idx="3">
+            <a:schemeClr val="accent1"/>
+          </a:fillRef>
+          <a:effectRef idx="2">
+            <a:schemeClr val="accent1"/>
+          </a:effectRef>
+          <a:fontRef idx="minor">
+            <a:schemeClr val="lt1"/>
+          </a:fontRef>
+        </p:style>
+        <p:txBody>
+          <a:bodyPr rtlCol="0" anchor="ctr"/>
+          <a:lstStyle/>
+          <a:p>
+            <a:pPr algn="ctr"/>
+          </a:p>
+        </p:txBody>
+      </p:sp>
+      <p:sp>
+        <p:nvSpPr>
+          <p:cNvPr id="8" name="TextBox 7"/>
           <p:cNvSpPr txBox="1"/>
           <p:nvPr/>
         </p:nvSpPr>
         <p:spPr>
           <a:xfrm>
-            <a:off x="6675120" y="1554480"/>
-            <a:ext cx="4572000" cy="365760"/>
+            <a:off x="1371600" y="2743200"/>
+            <a:ext cx="4389120" cy="2743200"/>
           </a:xfrm>
           <a:prstGeom prst="rect">
             <a:avLst/>
@@ -5411,29 +6834,214 @@
           <a:lstStyle/>
           <a:p>
             <a:pPr algn="l">
-              <a:defRPr sz="2200" b="1">
-                <a:solidFill>
-                  <a:srgbClr val="228844"/>
-                </a:solidFill>
-                <a:latin typeface="Calibri"/>
-              </a:defRPr>
-            </a:pPr>
-            <a:r>
-              <a:t>Con regularizacion</a:t>
-            </a:r>
-          </a:p>
-        </p:txBody>
-      </p:sp>
-      <p:sp>
-        <p:nvSpPr>
-          <p:cNvPr id="7" name="TextBox 6"/>
+              <a:spcBef>
+                <a:spcPts val="1000"/>
+              </a:spcBef>
+              <a:defRPr sz="1500">
+                <a:solidFill>
+                  <a:srgbClr val="2A2A2A"/>
+                </a:solidFill>
+                <a:latin typeface="Calibri"/>
+              </a:defRPr>
+            </a:pPr>
+            <a:r>
+              <a:t>Memoriza el ruido de cada muestra</a:t>
+            </a:r>
+          </a:p>
+          <a:p>
+            <a:pPr algn="l">
+              <a:spcBef>
+                <a:spcPts val="1000"/>
+              </a:spcBef>
+              <a:defRPr sz="1500">
+                <a:solidFill>
+                  <a:srgbClr val="2A2A2A"/>
+                </a:solidFill>
+                <a:latin typeface="Calibri"/>
+              </a:defRPr>
+            </a:pPr>
+          </a:p>
+          <a:p>
+            <a:pPr algn="l">
+              <a:spcBef>
+                <a:spcPts val="1000"/>
+              </a:spcBef>
+              <a:defRPr sz="1500">
+                <a:solidFill>
+                  <a:srgbClr val="2A2A2A"/>
+                </a:solidFill>
+                <a:latin typeface="Calibri"/>
+              </a:defRPr>
+            </a:pPr>
+            <a:r>
+              <a:t>Las features internas no son</a:t>
+            </a:r>
+          </a:p>
+          <a:p>
+            <a:pPr algn="l">
+              <a:spcBef>
+                <a:spcPts val="1000"/>
+              </a:spcBef>
+              <a:defRPr sz="1500">
+                <a:solidFill>
+                  <a:srgbClr val="2A2A2A"/>
+                </a:solidFill>
+                <a:latin typeface="Calibri"/>
+              </a:defRPr>
+            </a:pPr>
+            <a:r>
+              <a:t>transferibles a datos nuevos</a:t>
+            </a:r>
+          </a:p>
+          <a:p>
+            <a:pPr algn="l">
+              <a:spcBef>
+                <a:spcPts val="1000"/>
+              </a:spcBef>
+              <a:defRPr sz="1500">
+                <a:solidFill>
+                  <a:srgbClr val="2A2A2A"/>
+                </a:solidFill>
+                <a:latin typeface="Calibri"/>
+              </a:defRPr>
+            </a:pPr>
+          </a:p>
+          <a:p>
+            <a:pPr algn="l">
+              <a:spcBef>
+                <a:spcPts val="1000"/>
+              </a:spcBef>
+              <a:defRPr sz="1500">
+                <a:solidFill>
+                  <a:srgbClr val="2A2A2A"/>
+                </a:solidFill>
+                <a:latin typeface="Calibri"/>
+              </a:defRPr>
+            </a:pPr>
+            <a:r>
+              <a:t>No aprende conceptos generales</a:t>
+            </a:r>
+          </a:p>
+          <a:p>
+            <a:pPr algn="l">
+              <a:spcBef>
+                <a:spcPts val="1000"/>
+              </a:spcBef>
+              <a:defRPr sz="1500">
+                <a:solidFill>
+                  <a:srgbClr val="2A2A2A"/>
+                </a:solidFill>
+                <a:latin typeface="Calibri"/>
+              </a:defRPr>
+            </a:pPr>
+            <a:r>
+              <a:t>(bordes, texturas, formas)</a:t>
+            </a:r>
+          </a:p>
+          <a:p>
+            <a:pPr algn="l">
+              <a:spcBef>
+                <a:spcPts val="1000"/>
+              </a:spcBef>
+              <a:defRPr sz="1500">
+                <a:solidFill>
+                  <a:srgbClr val="2A2A2A"/>
+                </a:solidFill>
+                <a:latin typeface="Calibri"/>
+              </a:defRPr>
+            </a:pPr>
+          </a:p>
+          <a:p>
+            <a:pPr algn="l">
+              <a:spcBef>
+                <a:spcPts val="1000"/>
+              </a:spcBef>
+              <a:defRPr sz="1500">
+                <a:solidFill>
+                  <a:srgbClr val="2A2A2A"/>
+                </a:solidFill>
+                <a:latin typeface="Calibri"/>
+              </a:defRPr>
+            </a:pPr>
+            <a:r>
+              <a:t>Cada neurona se sobreactiva</a:t>
+            </a:r>
+          </a:p>
+          <a:p>
+            <a:pPr algn="l">
+              <a:spcBef>
+                <a:spcPts val="1000"/>
+              </a:spcBef>
+              <a:defRPr sz="1500">
+                <a:solidFill>
+                  <a:srgbClr val="2A2A2A"/>
+                </a:solidFill>
+                <a:latin typeface="Calibri"/>
+              </a:defRPr>
+            </a:pPr>
+            <a:r>
+              <a:t>para casos puntuales</a:t>
+            </a:r>
+          </a:p>
+        </p:txBody>
+      </p:sp>
+      <p:sp>
+        <p:nvSpPr>
+          <p:cNvPr id="9" name="Rounded Rectangle 8"/>
+          <p:cNvSpPr/>
+          <p:nvPr/>
+        </p:nvSpPr>
+        <p:spPr>
+          <a:xfrm>
+            <a:off x="6217920" y="1920240"/>
+            <a:ext cx="4846320" cy="3840480"/>
+          </a:xfrm>
+          <a:prstGeom prst="roundRect">
+            <a:avLst>
+              <a:gd name="adj" fmla="val 4000"/>
+            </a:avLst>
+          </a:prstGeom>
+          <a:solidFill>
+            <a:srgbClr val="EEF7F0"/>
+          </a:solidFill>
+          <a:ln w="15240">
+            <a:solidFill>
+              <a:srgbClr val="1E8850"/>
+            </a:solidFill>
+          </a:ln>
+        </p:spPr>
+        <p:style>
+          <a:lnRef idx="1">
+            <a:schemeClr val="accent1"/>
+          </a:lnRef>
+          <a:fillRef idx="3">
+            <a:schemeClr val="accent1"/>
+          </a:fillRef>
+          <a:effectRef idx="2">
+            <a:schemeClr val="accent1"/>
+          </a:effectRef>
+          <a:fontRef idx="minor">
+            <a:schemeClr val="lt1"/>
+          </a:fontRef>
+        </p:style>
+        <p:txBody>
+          <a:bodyPr rtlCol="0" anchor="ctr"/>
+          <a:lstStyle/>
+          <a:p>
+            <a:pPr algn="ctr"/>
+          </a:p>
+        </p:txBody>
+      </p:sp>
+      <p:sp>
+        <p:nvSpPr>
+          <p:cNvPr id="10" name="TextBox 9"/>
           <p:cNvSpPr txBox="1"/>
           <p:nvPr/>
         </p:nvSpPr>
         <p:spPr>
           <a:xfrm>
-            <a:off x="6675120" y="2011680"/>
-            <a:ext cx="4572000" cy="2743200"/>
+            <a:off x="6492240" y="2103120"/>
+            <a:ext cx="4389120" cy="365760"/>
           </a:xfrm>
           <a:prstGeom prst="rect">
             <a:avLst/>
@@ -5446,112 +7054,73 @@
           </a:bodyPr>
           <a:lstStyle/>
           <a:p>
-            <a:pPr>
-              <a:spcBef>
-                <a:spcPts val="800"/>
-              </a:spcBef>
-              <a:spcAft>
-                <a:spcPts val="400"/>
-              </a:spcAft>
-              <a:defRPr sz="1600">
-                <a:solidFill>
-                  <a:srgbClr val="333333"/>
-                </a:solidFill>
-                <a:latin typeface="Calibri"/>
-              </a:defRPr>
-            </a:pPr>
-            <a:r>
-              <a:t>-  Captura patrones reales</a:t>
-            </a:r>
-          </a:p>
-          <a:p>
-            <a:pPr>
-              <a:spcBef>
-                <a:spcPts val="800"/>
-              </a:spcBef>
-              <a:spcAft>
-                <a:spcPts val="400"/>
-              </a:spcAft>
-              <a:defRPr sz="1600">
-                <a:solidFill>
-                  <a:srgbClr val="333333"/>
-                </a:solidFill>
-                <a:latin typeface="Calibri"/>
-              </a:defRPr>
-            </a:pPr>
-            <a:r>
-              <a:t>-  Features compartidas entre muestras</a:t>
-            </a:r>
-          </a:p>
-          <a:p>
-            <a:pPr>
-              <a:spcBef>
-                <a:spcPts val="800"/>
-              </a:spcBef>
-              <a:spcAft>
-                <a:spcPts val="400"/>
-              </a:spcAft>
-              <a:defRPr sz="1600">
-                <a:solidFill>
-                  <a:srgbClr val="333333"/>
-                </a:solidFill>
-                <a:latin typeface="Calibri"/>
-              </a:defRPr>
-            </a:pPr>
-            <a:r>
-              <a:t>-  Detectores de patrones en capas</a:t>
-            </a:r>
-          </a:p>
-          <a:p>
-            <a:pPr>
-              <a:spcBef>
-                <a:spcPts val="800"/>
-              </a:spcBef>
-              <a:spcAft>
-                <a:spcPts val="400"/>
-              </a:spcAft>
-              <a:defRPr sz="1600">
-                <a:solidFill>
-                  <a:srgbClr val="333333"/>
-                </a:solidFill>
-                <a:latin typeface="Calibri"/>
-              </a:defRPr>
-            </a:pPr>
-            <a:r>
-              <a:t>   intermedias</a:t>
-            </a:r>
-          </a:p>
-          <a:p>
-            <a:pPr>
-              <a:spcBef>
-                <a:spcPts val="800"/>
-              </a:spcBef>
-              <a:spcAft>
-                <a:spcPts val="400"/>
-              </a:spcAft>
-              <a:defRPr sz="1600">
-                <a:solidFill>
-                  <a:srgbClr val="333333"/>
-                </a:solidFill>
-                <a:latin typeface="Calibri"/>
-              </a:defRPr>
-            </a:pPr>
-            <a:r>
-              <a:t>-  Jerarquia: simple a complejo</a:t>
-            </a:r>
-          </a:p>
-        </p:txBody>
-      </p:sp>
-      <p:sp>
-        <p:nvSpPr>
-          <p:cNvPr id="8" name="TextBox 7"/>
+            <a:pPr algn="l">
+              <a:defRPr sz="2200" b="1">
+                <a:solidFill>
+                  <a:srgbClr val="1E8850"/>
+                </a:solidFill>
+                <a:latin typeface="Calibri"/>
+              </a:defRPr>
+            </a:pPr>
+            <a:r>
+              <a:t>Con Regularizacion</a:t>
+            </a:r>
+          </a:p>
+        </p:txBody>
+      </p:sp>
+      <p:sp>
+        <p:nvSpPr>
+          <p:cNvPr id="11" name="Rectangle 10"/>
+          <p:cNvSpPr/>
+          <p:nvPr/>
+        </p:nvSpPr>
+        <p:spPr>
+          <a:xfrm>
+            <a:off x="6492240" y="2560320"/>
+            <a:ext cx="1828800" cy="25400"/>
+          </a:xfrm>
+          <a:prstGeom prst="rect">
+            <a:avLst/>
+          </a:prstGeom>
+          <a:solidFill>
+            <a:srgbClr val="1E8850"/>
+          </a:solidFill>
+          <a:ln>
+            <a:noFill/>
+          </a:ln>
+        </p:spPr>
+        <p:style>
+          <a:lnRef idx="1">
+            <a:schemeClr val="accent1"/>
+          </a:lnRef>
+          <a:fillRef idx="3">
+            <a:schemeClr val="accent1"/>
+          </a:fillRef>
+          <a:effectRef idx="2">
+            <a:schemeClr val="accent1"/>
+          </a:effectRef>
+          <a:fontRef idx="minor">
+            <a:schemeClr val="lt1"/>
+          </a:fontRef>
+        </p:style>
+        <p:txBody>
+          <a:bodyPr rtlCol="0" anchor="ctr"/>
+          <a:lstStyle/>
+          <a:p>
+            <a:pPr algn="ctr"/>
+          </a:p>
+        </p:txBody>
+      </p:sp>
+      <p:sp>
+        <p:nvSpPr>
+          <p:cNvPr id="12" name="TextBox 11"/>
           <p:cNvSpPr txBox="1"/>
           <p:nvPr/>
         </p:nvSpPr>
         <p:spPr>
           <a:xfrm>
-            <a:off x="1371600" y="5029200"/>
-            <a:ext cx="9418320" cy="548640"/>
+            <a:off x="6492240" y="2743200"/>
+            <a:ext cx="4389120" cy="2743200"/>
           </a:xfrm>
           <a:prstGeom prst="rect">
             <a:avLst/>
@@ -5564,20 +7133,190 @@
           </a:bodyPr>
           <a:lstStyle/>
           <a:p>
+            <a:pPr algn="l">
+              <a:spcBef>
+                <a:spcPts val="1000"/>
+              </a:spcBef>
+              <a:defRPr sz="1500">
+                <a:solidFill>
+                  <a:srgbClr val="2A2A2A"/>
+                </a:solidFill>
+                <a:latin typeface="Calibri"/>
+              </a:defRPr>
+            </a:pPr>
+            <a:r>
+              <a:t>Captura patrones reales:</a:t>
+            </a:r>
+          </a:p>
+          <a:p>
+            <a:pPr algn="l">
+              <a:spcBef>
+                <a:spcPts val="1000"/>
+              </a:spcBef>
+              <a:defRPr sz="1500">
+                <a:solidFill>
+                  <a:srgbClr val="2A2A2A"/>
+                </a:solidFill>
+                <a:latin typeface="Calibri"/>
+              </a:defRPr>
+            </a:pPr>
+            <a:r>
+              <a:t>distribuciones y correlaciones</a:t>
+            </a:r>
+          </a:p>
+          <a:p>
+            <a:pPr algn="l">
+              <a:spcBef>
+                <a:spcPts val="1000"/>
+              </a:spcBef>
+              <a:defRPr sz="1500">
+                <a:solidFill>
+                  <a:srgbClr val="2A2A2A"/>
+                </a:solidFill>
+                <a:latin typeface="Calibri"/>
+              </a:defRPr>
+            </a:pPr>
+          </a:p>
+          <a:p>
+            <a:pPr algn="l">
+              <a:spcBef>
+                <a:spcPts val="1000"/>
+              </a:spcBef>
+              <a:defRPr sz="1500">
+                <a:solidFill>
+                  <a:srgbClr val="2A2A2A"/>
+                </a:solidFill>
+                <a:latin typeface="Calibri"/>
+              </a:defRPr>
+            </a:pPr>
+            <a:r>
+              <a:t>Features compartidas entre</a:t>
+            </a:r>
+          </a:p>
+          <a:p>
+            <a:pPr algn="l">
+              <a:spcBef>
+                <a:spcPts val="1000"/>
+              </a:spcBef>
+              <a:defRPr sz="1500">
+                <a:solidFill>
+                  <a:srgbClr val="2A2A2A"/>
+                </a:solidFill>
+                <a:latin typeface="Calibri"/>
+              </a:defRPr>
+            </a:pPr>
+            <a:r>
+              <a:t>muestras similares</a:t>
+            </a:r>
+          </a:p>
+          <a:p>
+            <a:pPr algn="l">
+              <a:spcBef>
+                <a:spcPts val="1000"/>
+              </a:spcBef>
+              <a:defRPr sz="1500">
+                <a:solidFill>
+                  <a:srgbClr val="2A2A2A"/>
+                </a:solidFill>
+                <a:latin typeface="Calibri"/>
+              </a:defRPr>
+            </a:pPr>
+          </a:p>
+          <a:p>
+            <a:pPr algn="l">
+              <a:spcBef>
+                <a:spcPts val="1000"/>
+              </a:spcBef>
+              <a:defRPr sz="1500">
+                <a:solidFill>
+                  <a:srgbClr val="2A2A2A"/>
+                </a:solidFill>
+                <a:latin typeface="Calibri"/>
+              </a:defRPr>
+            </a:pPr>
+            <a:r>
+              <a:t>Capas intermedias actuan como</a:t>
+            </a:r>
+          </a:p>
+          <a:p>
+            <a:pPr algn="l">
+              <a:spcBef>
+                <a:spcPts val="1000"/>
+              </a:spcBef>
+              <a:defRPr sz="1500">
+                <a:solidFill>
+                  <a:srgbClr val="2A2A2A"/>
+                </a:solidFill>
+                <a:latin typeface="Calibri"/>
+              </a:defRPr>
+            </a:pPr>
+            <a:r>
+              <a:t>detectores de patrones</a:t>
+            </a:r>
+          </a:p>
+          <a:p>
+            <a:pPr algn="l">
+              <a:spcBef>
+                <a:spcPts val="1000"/>
+              </a:spcBef>
+              <a:defRPr sz="1500">
+                <a:solidFill>
+                  <a:srgbClr val="2A2A2A"/>
+                </a:solidFill>
+                <a:latin typeface="Calibri"/>
+              </a:defRPr>
+            </a:pPr>
+          </a:p>
+          <a:p>
+            <a:pPr algn="l">
+              <a:spcBef>
+                <a:spcPts val="1000"/>
+              </a:spcBef>
+              <a:defRPr sz="1500">
+                <a:solidFill>
+                  <a:srgbClr val="2A2A2A"/>
+                </a:solidFill>
+                <a:latin typeface="Calibri"/>
+              </a:defRPr>
+            </a:pPr>
+            <a:r>
+              <a:t>Jerarquia: simple -&gt; complejo</a:t>
+            </a:r>
+          </a:p>
+        </p:txBody>
+      </p:sp>
+      <p:sp>
+        <p:nvSpPr>
+          <p:cNvPr id="13" name="TextBox 12"/>
+          <p:cNvSpPr txBox="1"/>
+          <p:nvPr/>
+        </p:nvSpPr>
+        <p:spPr>
+          <a:xfrm>
+            <a:off x="1097280" y="5943600"/>
+            <a:ext cx="9966960" cy="457200"/>
+          </a:xfrm>
+          <a:prstGeom prst="rect">
+            <a:avLst/>
+          </a:prstGeom>
+          <a:noFill/>
+        </p:spPr>
+        <p:txBody>
+          <a:bodyPr wrap="square">
+            <a:spAutoFit/>
+          </a:bodyPr>
+          <a:lstStyle/>
+          <a:p>
             <a:pPr algn="ctr">
-              <a:defRPr sz="1700" b="0">
-                <a:solidFill>
-                  <a:srgbClr val="666666"/>
-                </a:solidFill>
-                <a:latin typeface="Calibri"/>
-              </a:defRPr>
-            </a:pPr>
-            <a:r>
-              <a:t>La regularizacion fuerza a la red a buscar patrones compartidos</a:t>
-            </a:r>
-            <a:br/>
-            <a:r>
-              <a:t>en vez de memorizar caso por caso.</a:t>
+              <a:defRPr sz="1600" b="0">
+                <a:solidFill>
+                  <a:srgbClr val="606060"/>
+                </a:solidFill>
+                <a:latin typeface="Calibri"/>
+              </a:defRPr>
+            </a:pPr>
+            <a:r>
+              <a:t>La regularizacion fuerza a la red a buscar patrones compartidos en vez de memorizar caso por caso.</a:t>
             </a:r>
           </a:p>
         </p:txBody>
@@ -5596,7 +7335,7 @@
     <p:bg>
       <p:bgPr>
         <a:solidFill>
-          <a:srgbClr val="FAFAFA"/>
+          <a:srgbClr val="FBFBFB"/>
         </a:solidFill>
         <a:effectLst/>
       </p:bgPr>
@@ -5616,8 +7355,8 @@
         </p:nvSpPr>
         <p:spPr>
           <a:xfrm>
-            <a:off x="1371600" y="548640"/>
-            <a:ext cx="9418320" cy="640080"/>
+            <a:off x="1097280" y="457200"/>
+            <a:ext cx="9144000" cy="640080"/>
           </a:xfrm>
           <a:prstGeom prst="rect">
             <a:avLst/>
@@ -5631,9 +7370,9 @@
           <a:lstStyle/>
           <a:p>
             <a:pPr algn="l">
-              <a:defRPr sz="4000" b="1">
-                <a:solidFill>
-                  <a:srgbClr val="1A1A1A"/>
+              <a:defRPr sz="4200" b="1">
+                <a:solidFill>
+                  <a:srgbClr val="181818"/>
                 </a:solidFill>
                 <a:latin typeface="Calibri"/>
               </a:defRPr>
@@ -5652,14 +7391,14 @@
         </p:nvSpPr>
         <p:spPr>
           <a:xfrm>
-            <a:off x="1371600" y="1188720"/>
-            <a:ext cx="1828800" cy="25400"/>
+            <a:off x="1097280" y="1051560"/>
+            <a:ext cx="2286000" cy="38100"/>
           </a:xfrm>
           <a:prstGeom prst="rect">
             <a:avLst/>
           </a:prstGeom>
           <a:solidFill>
-            <a:srgbClr val="0066CC"/>
+            <a:srgbClr val="1A73E8"/>
           </a:solidFill>
           <a:ln>
             <a:noFill/>
@@ -5689,14 +7428,61 @@
       </p:sp>
       <p:sp>
         <p:nvSpPr>
-          <p:cNvPr id="4" name="TextBox 3"/>
+          <p:cNvPr id="4" name="Rounded Rectangle 3"/>
+          <p:cNvSpPr/>
+          <p:nvPr/>
+        </p:nvSpPr>
+        <p:spPr>
+          <a:xfrm>
+            <a:off x="1097280" y="1463040"/>
+            <a:ext cx="10058400" cy="914400"/>
+          </a:xfrm>
+          <a:prstGeom prst="roundRect">
+            <a:avLst>
+              <a:gd name="adj" fmla="val 4000"/>
+            </a:avLst>
+          </a:prstGeom>
+          <a:solidFill>
+            <a:srgbClr val="EEF3FC"/>
+          </a:solidFill>
+          <a:ln w="12700">
+            <a:solidFill>
+              <a:srgbClr val="1A73E8"/>
+            </a:solidFill>
+          </a:ln>
+        </p:spPr>
+        <p:style>
+          <a:lnRef idx="1">
+            <a:schemeClr val="accent1"/>
+          </a:lnRef>
+          <a:fillRef idx="3">
+            <a:schemeClr val="accent1"/>
+          </a:fillRef>
+          <a:effectRef idx="2">
+            <a:schemeClr val="accent1"/>
+          </a:effectRef>
+          <a:fontRef idx="minor">
+            <a:schemeClr val="lt1"/>
+          </a:fontRef>
+        </p:style>
+        <p:txBody>
+          <a:bodyPr rtlCol="0" anchor="ctr"/>
+          <a:lstStyle/>
+          <a:p>
+            <a:pPr algn="ctr"/>
+          </a:p>
+        </p:txBody>
+      </p:sp>
+      <p:sp>
+        <p:nvSpPr>
+          <p:cNvPr id="5" name="TextBox 4"/>
           <p:cNvSpPr txBox="1"/>
           <p:nvPr/>
         </p:nvSpPr>
         <p:spPr>
           <a:xfrm>
             <a:off x="1371600" y="1554480"/>
-            <a:ext cx="9418320" cy="457200"/>
+            <a:ext cx="9509760" cy="365760"/>
           </a:xfrm>
           <a:prstGeom prst="rect">
             <a:avLst/>
@@ -5710,29 +7496,29 @@
           <a:lstStyle/>
           <a:p>
             <a:pPr algn="l">
-              <a:defRPr sz="1800" b="1">
-                <a:solidFill>
-                  <a:srgbClr val="0066CC"/>
-                </a:solidFill>
-                <a:latin typeface="Calibri"/>
-              </a:defRPr>
-            </a:pPr>
-            <a:r>
-              <a:t>Con mas presupuesto, invertir en datos + regularizacion.</a:t>
-            </a:r>
-          </a:p>
-        </p:txBody>
-      </p:sp>
-      <p:sp>
-        <p:nvSpPr>
-          <p:cNvPr id="5" name="TextBox 4"/>
+              <a:defRPr sz="1900" b="1">
+                <a:solidFill>
+                  <a:srgbClr val="1A73E8"/>
+                </a:solidFill>
+                <a:latin typeface="Calibri"/>
+              </a:defRPr>
+            </a:pPr>
+            <a:r>
+              <a:t>Si tuvieramos mas presupuesto, donde invertirlo?</a:t>
+            </a:r>
+          </a:p>
+        </p:txBody>
+      </p:sp>
+      <p:sp>
+        <p:nvSpPr>
+          <p:cNvPr id="6" name="TextBox 5"/>
           <p:cNvSpPr txBox="1"/>
           <p:nvPr/>
         </p:nvSpPr>
         <p:spPr>
           <a:xfrm>
-            <a:off x="1371600" y="2286000"/>
-            <a:ext cx="9418320" cy="365760"/>
+            <a:off x="1371600" y="1920240"/>
+            <a:ext cx="9509760" cy="365760"/>
           </a:xfrm>
           <a:prstGeom prst="rect">
             <a:avLst/>
@@ -5746,29 +7532,76 @@
           <a:lstStyle/>
           <a:p>
             <a:pPr algn="l">
-              <a:defRPr sz="2200" b="1">
-                <a:solidFill>
-                  <a:srgbClr val="333333"/>
-                </a:solidFill>
-                <a:latin typeface="Calibri"/>
-              </a:defRPr>
-            </a:pPr>
-            <a:r>
-              <a:t>Prioridad 1: Mas datos</a:t>
-            </a:r>
-          </a:p>
-        </p:txBody>
-      </p:sp>
-      <p:sp>
-        <p:nvSpPr>
-          <p:cNvPr id="6" name="TextBox 5"/>
+              <a:defRPr sz="1600" b="0">
+                <a:solidFill>
+                  <a:srgbClr val="2A2A2A"/>
+                </a:solidFill>
+                <a:latin typeface="Calibri"/>
+              </a:defRPr>
+            </a:pPr>
+            <a:r>
+              <a:t>Recomendacion: invertir en DATOS + REGULARIZACION</a:t>
+            </a:r>
+          </a:p>
+        </p:txBody>
+      </p:sp>
+      <p:sp>
+        <p:nvSpPr>
+          <p:cNvPr id="7" name="Rounded Rectangle 6"/>
+          <p:cNvSpPr/>
+          <p:nvPr/>
+        </p:nvSpPr>
+        <p:spPr>
+          <a:xfrm>
+            <a:off x="1097280" y="2743200"/>
+            <a:ext cx="4846320" cy="3200400"/>
+          </a:xfrm>
+          <a:prstGeom prst="roundRect">
+            <a:avLst>
+              <a:gd name="adj" fmla="val 4000"/>
+            </a:avLst>
+          </a:prstGeom>
+          <a:solidFill>
+            <a:srgbClr val="F4F4F6"/>
+          </a:solidFill>
+          <a:ln w="10160">
+            <a:solidFill>
+              <a:srgbClr val="1A73E8"/>
+            </a:solidFill>
+          </a:ln>
+        </p:spPr>
+        <p:style>
+          <a:lnRef idx="1">
+            <a:schemeClr val="accent1"/>
+          </a:lnRef>
+          <a:fillRef idx="3">
+            <a:schemeClr val="accent1"/>
+          </a:fillRef>
+          <a:effectRef idx="2">
+            <a:schemeClr val="accent1"/>
+          </a:effectRef>
+          <a:fontRef idx="minor">
+            <a:schemeClr val="lt1"/>
+          </a:fontRef>
+        </p:style>
+        <p:txBody>
+          <a:bodyPr rtlCol="0" anchor="ctr"/>
+          <a:lstStyle/>
+          <a:p>
+            <a:pPr algn="ctr"/>
+          </a:p>
+        </p:txBody>
+      </p:sp>
+      <p:sp>
+        <p:nvSpPr>
+          <p:cNvPr id="8" name="TextBox 7"/>
           <p:cNvSpPr txBox="1"/>
           <p:nvPr/>
         </p:nvSpPr>
         <p:spPr>
           <a:xfrm>
-            <a:off x="1645920" y="2743200"/>
-            <a:ext cx="8686800" cy="1097280"/>
+            <a:off x="1371600" y="2880360"/>
+            <a:ext cx="4572000" cy="365760"/>
           </a:xfrm>
           <a:prstGeom prst="rect">
             <a:avLst/>
@@ -5781,55 +7614,30 @@
           </a:bodyPr>
           <a:lstStyle/>
           <a:p>
-            <a:pPr>
-              <a:spcBef>
-                <a:spcPts val="800"/>
-              </a:spcBef>
-              <a:spcAft>
-                <a:spcPts val="400"/>
-              </a:spcAft>
-              <a:defRPr sz="1600">
-                <a:solidFill>
-                  <a:srgbClr val="333333"/>
-                </a:solidFill>
-                <a:latin typeface="Calibri"/>
-              </a:defRPr>
-            </a:pPr>
-            <a:r>
-              <a:t>Con un dataset pequeno, ninguna tecnica supera tener mas muestras.</a:t>
-            </a:r>
-          </a:p>
-          <a:p>
-            <a:pPr>
-              <a:spcBef>
-                <a:spcPts val="800"/>
-              </a:spcBef>
-              <a:spcAft>
-                <a:spcPts val="400"/>
-              </a:spcAft>
-              <a:defRPr sz="1600">
-                <a:solidFill>
-                  <a:srgbClr val="333333"/>
-                </a:solidFill>
-                <a:latin typeface="Calibri"/>
-              </a:defRPr>
-            </a:pPr>
-            <a:r>
-              <a:t>Data Augmentation, Transfer Learning, recopilacion de imagenes medicas.</a:t>
-            </a:r>
-          </a:p>
-        </p:txBody>
-      </p:sp>
-      <p:sp>
-        <p:nvSpPr>
-          <p:cNvPr id="7" name="TextBox 6"/>
+            <a:pPr algn="l">
+              <a:defRPr sz="1300" b="1">
+                <a:solidFill>
+                  <a:srgbClr val="1A73E8"/>
+                </a:solidFill>
+                <a:latin typeface="Calibri"/>
+              </a:defRPr>
+            </a:pPr>
+            <a:r>
+              <a:t>Prioridad 1</a:t>
+            </a:r>
+          </a:p>
+        </p:txBody>
+      </p:sp>
+      <p:sp>
+        <p:nvSpPr>
+          <p:cNvPr id="9" name="TextBox 8"/>
           <p:cNvSpPr txBox="1"/>
           <p:nvPr/>
         </p:nvSpPr>
         <p:spPr>
           <a:xfrm>
-            <a:off x="1371600" y="3840480"/>
-            <a:ext cx="9418320" cy="365760"/>
+            <a:off x="1371600" y="3200400"/>
+            <a:ext cx="4572000" cy="457200"/>
           </a:xfrm>
           <a:prstGeom prst="rect">
             <a:avLst/>
@@ -5843,29 +7651,72 @@
           <a:lstStyle/>
           <a:p>
             <a:pPr algn="l">
-              <a:defRPr sz="2200" b="1">
-                <a:solidFill>
-                  <a:srgbClr val="333333"/>
-                </a:solidFill>
-                <a:latin typeface="Calibri"/>
-              </a:defRPr>
-            </a:pPr>
-            <a:r>
-              <a:t>Prioridad 2: Mejor regularizacion</a:t>
-            </a:r>
-          </a:p>
-        </p:txBody>
-      </p:sp>
-      <p:sp>
-        <p:nvSpPr>
-          <p:cNvPr id="8" name="TextBox 7"/>
+              <a:defRPr sz="2400" b="1">
+                <a:solidFill>
+                  <a:srgbClr val="2A2A2A"/>
+                </a:solidFill>
+                <a:latin typeface="Calibri"/>
+              </a:defRPr>
+            </a:pPr>
+            <a:r>
+              <a:t>Mas datos</a:t>
+            </a:r>
+          </a:p>
+        </p:txBody>
+      </p:sp>
+      <p:sp>
+        <p:nvSpPr>
+          <p:cNvPr id="10" name="Rectangle 9"/>
+          <p:cNvSpPr/>
+          <p:nvPr/>
+        </p:nvSpPr>
+        <p:spPr>
+          <a:xfrm>
+            <a:off x="1371600" y="3657600"/>
+            <a:ext cx="1371600" cy="25400"/>
+          </a:xfrm>
+          <a:prstGeom prst="rect">
+            <a:avLst/>
+          </a:prstGeom>
+          <a:solidFill>
+            <a:srgbClr val="1A73E8"/>
+          </a:solidFill>
+          <a:ln>
+            <a:noFill/>
+          </a:ln>
+        </p:spPr>
+        <p:style>
+          <a:lnRef idx="1">
+            <a:schemeClr val="accent1"/>
+          </a:lnRef>
+          <a:fillRef idx="3">
+            <a:schemeClr val="accent1"/>
+          </a:fillRef>
+          <a:effectRef idx="2">
+            <a:schemeClr val="accent1"/>
+          </a:effectRef>
+          <a:fontRef idx="minor">
+            <a:schemeClr val="lt1"/>
+          </a:fontRef>
+        </p:style>
+        <p:txBody>
+          <a:bodyPr rtlCol="0" anchor="ctr"/>
+          <a:lstStyle/>
+          <a:p>
+            <a:pPr algn="ctr"/>
+          </a:p>
+        </p:txBody>
+      </p:sp>
+      <p:sp>
+        <p:nvSpPr>
+          <p:cNvPr id="11" name="TextBox 10"/>
           <p:cNvSpPr txBox="1"/>
           <p:nvPr/>
         </p:nvSpPr>
         <p:spPr>
           <a:xfrm>
-            <a:off x="1645920" y="4297680"/>
-            <a:ext cx="8686800" cy="1097280"/>
+            <a:off x="1371600" y="3840480"/>
+            <a:ext cx="4389120" cy="1828800"/>
           </a:xfrm>
           <a:prstGeom prst="rect">
             <a:avLst/>
@@ -5878,55 +7729,141 @@
           </a:bodyPr>
           <a:lstStyle/>
           <a:p>
-            <a:pPr>
+            <a:pPr algn="l">
               <a:spcBef>
-                <a:spcPts val="800"/>
+                <a:spcPts val="1000"/>
               </a:spcBef>
-              <a:spcAft>
-                <a:spcPts val="400"/>
-              </a:spcAft>
-              <a:defRPr sz="1600">
-                <a:solidFill>
-                  <a:srgbClr val="333333"/>
-                </a:solidFill>
-                <a:latin typeface="Calibri"/>
-              </a:defRPr>
-            </a:pPr>
-            <a:r>
-              <a:t>Combinar L2 + Dropout + Batch Normalization + Early Stopping.</a:t>
-            </a:r>
-          </a:p>
-          <a:p>
-            <a:pPr>
+              <a:defRPr sz="1500">
+                <a:solidFill>
+                  <a:srgbClr val="2A2A2A"/>
+                </a:solidFill>
+                <a:latin typeface="Calibri"/>
+              </a:defRPr>
+            </a:pPr>
+            <a:r>
+              <a:t>Con dataset pequeno, ninguna tecnica</a:t>
+            </a:r>
+          </a:p>
+          <a:p>
+            <a:pPr algn="l">
               <a:spcBef>
-                <a:spcPts val="800"/>
+                <a:spcPts val="1000"/>
               </a:spcBef>
-              <a:spcAft>
-                <a:spcPts val="400"/>
-              </a:spcAft>
-              <a:defRPr sz="1600">
-                <a:solidFill>
-                  <a:srgbClr val="333333"/>
-                </a:solidFill>
-                <a:latin typeface="Calibri"/>
-              </a:defRPr>
-            </a:pPr>
-            <a:r>
-              <a:t>Validacion cruzada (k-fold) para estimar rendimiento real.</a:t>
-            </a:r>
-          </a:p>
-        </p:txBody>
-      </p:sp>
-      <p:sp>
-        <p:nvSpPr>
-          <p:cNvPr id="9" name="TextBox 8"/>
+              <a:defRPr sz="1500">
+                <a:solidFill>
+                  <a:srgbClr val="2A2A2A"/>
+                </a:solidFill>
+                <a:latin typeface="Calibri"/>
+              </a:defRPr>
+            </a:pPr>
+            <a:r>
+              <a:t>supera tener mas muestras.</a:t>
+            </a:r>
+          </a:p>
+          <a:p>
+            <a:pPr algn="l">
+              <a:spcBef>
+                <a:spcPts val="1000"/>
+              </a:spcBef>
+              <a:defRPr sz="1500">
+                <a:solidFill>
+                  <a:srgbClr val="2A2A2A"/>
+                </a:solidFill>
+                <a:latin typeface="Calibri"/>
+              </a:defRPr>
+            </a:pPr>
+          </a:p>
+          <a:p>
+            <a:pPr algn="l">
+              <a:spcBef>
+                <a:spcPts val="1000"/>
+              </a:spcBef>
+              <a:defRPr sz="1500">
+                <a:solidFill>
+                  <a:srgbClr val="2A2A2A"/>
+                </a:solidFill>
+                <a:latin typeface="Calibri"/>
+              </a:defRPr>
+            </a:pPr>
+            <a:r>
+              <a:t>Data Augmentation, Transfer Learning,</a:t>
+            </a:r>
+          </a:p>
+          <a:p>
+            <a:pPr algn="l">
+              <a:spcBef>
+                <a:spcPts val="1000"/>
+              </a:spcBef>
+              <a:defRPr sz="1500">
+                <a:solidFill>
+                  <a:srgbClr val="2A2A2A"/>
+                </a:solidFill>
+                <a:latin typeface="Calibri"/>
+              </a:defRPr>
+            </a:pPr>
+            <a:r>
+              <a:t>recopilacion de imagenes medicas.</a:t>
+            </a:r>
+          </a:p>
+        </p:txBody>
+      </p:sp>
+      <p:sp>
+        <p:nvSpPr>
+          <p:cNvPr id="12" name="Rounded Rectangle 11"/>
+          <p:cNvSpPr/>
+          <p:nvPr/>
+        </p:nvSpPr>
+        <p:spPr>
+          <a:xfrm>
+            <a:off x="6217920" y="2743200"/>
+            <a:ext cx="4846320" cy="3200400"/>
+          </a:xfrm>
+          <a:prstGeom prst="roundRect">
+            <a:avLst>
+              <a:gd name="adj" fmla="val 4000"/>
+            </a:avLst>
+          </a:prstGeom>
+          <a:solidFill>
+            <a:srgbClr val="F4F4F6"/>
+          </a:solidFill>
+          <a:ln w="10160">
+            <a:solidFill>
+              <a:srgbClr val="1A73E8"/>
+            </a:solidFill>
+          </a:ln>
+        </p:spPr>
+        <p:style>
+          <a:lnRef idx="1">
+            <a:schemeClr val="accent1"/>
+          </a:lnRef>
+          <a:fillRef idx="3">
+            <a:schemeClr val="accent1"/>
+          </a:fillRef>
+          <a:effectRef idx="2">
+            <a:schemeClr val="accent1"/>
+          </a:effectRef>
+          <a:fontRef idx="minor">
+            <a:schemeClr val="lt1"/>
+          </a:fontRef>
+        </p:style>
+        <p:txBody>
+          <a:bodyPr rtlCol="0" anchor="ctr"/>
+          <a:lstStyle/>
+          <a:p>
+            <a:pPr algn="ctr"/>
+          </a:p>
+        </p:txBody>
+      </p:sp>
+      <p:sp>
+        <p:nvSpPr>
+          <p:cNvPr id="13" name="TextBox 12"/>
           <p:cNvSpPr txBox="1"/>
           <p:nvPr/>
         </p:nvSpPr>
         <p:spPr>
           <a:xfrm>
-            <a:off x="1371600" y="5486400"/>
-            <a:ext cx="9418320" cy="457200"/>
+            <a:off x="6492240" y="2880360"/>
+            <a:ext cx="4572000" cy="365760"/>
           </a:xfrm>
           <a:prstGeom prst="rect">
             <a:avLst/>
@@ -5940,19 +7877,230 @@
           <a:lstStyle/>
           <a:p>
             <a:pPr algn="l">
-              <a:defRPr sz="1600" b="0">
-                <a:solidFill>
-                  <a:srgbClr val="CC3333"/>
-                </a:solidFill>
-                <a:latin typeface="Calibri"/>
-              </a:defRPr>
-            </a:pPr>
-            <a:r>
-              <a:t>En medicina, un modelo que memoriza es peligroso:</a:t>
-            </a:r>
-            <a:br/>
-            <a:r>
-              <a:t>puede dar falsos negativos en pacientes nuevos.</a:t>
+              <a:defRPr sz="1300" b="1">
+                <a:solidFill>
+                  <a:srgbClr val="1A73E8"/>
+                </a:solidFill>
+                <a:latin typeface="Calibri"/>
+              </a:defRPr>
+            </a:pPr>
+            <a:r>
+              <a:t>Prioridad 2</a:t>
+            </a:r>
+          </a:p>
+        </p:txBody>
+      </p:sp>
+      <p:sp>
+        <p:nvSpPr>
+          <p:cNvPr id="14" name="TextBox 13"/>
+          <p:cNvSpPr txBox="1"/>
+          <p:nvPr/>
+        </p:nvSpPr>
+        <p:spPr>
+          <a:xfrm>
+            <a:off x="6492240" y="3200400"/>
+            <a:ext cx="4572000" cy="457200"/>
+          </a:xfrm>
+          <a:prstGeom prst="rect">
+            <a:avLst/>
+          </a:prstGeom>
+          <a:noFill/>
+        </p:spPr>
+        <p:txBody>
+          <a:bodyPr wrap="square">
+            <a:spAutoFit/>
+          </a:bodyPr>
+          <a:lstStyle/>
+          <a:p>
+            <a:pPr algn="l">
+              <a:defRPr sz="2400" b="1">
+                <a:solidFill>
+                  <a:srgbClr val="2A2A2A"/>
+                </a:solidFill>
+                <a:latin typeface="Calibri"/>
+              </a:defRPr>
+            </a:pPr>
+            <a:r>
+              <a:t>Mejor regularizacion</a:t>
+            </a:r>
+          </a:p>
+        </p:txBody>
+      </p:sp>
+      <p:sp>
+        <p:nvSpPr>
+          <p:cNvPr id="15" name="Rectangle 14"/>
+          <p:cNvSpPr/>
+          <p:nvPr/>
+        </p:nvSpPr>
+        <p:spPr>
+          <a:xfrm>
+            <a:off x="6492240" y="3657600"/>
+            <a:ext cx="1371600" cy="25400"/>
+          </a:xfrm>
+          <a:prstGeom prst="rect">
+            <a:avLst/>
+          </a:prstGeom>
+          <a:solidFill>
+            <a:srgbClr val="1A73E8"/>
+          </a:solidFill>
+          <a:ln>
+            <a:noFill/>
+          </a:ln>
+        </p:spPr>
+        <p:style>
+          <a:lnRef idx="1">
+            <a:schemeClr val="accent1"/>
+          </a:lnRef>
+          <a:fillRef idx="3">
+            <a:schemeClr val="accent1"/>
+          </a:fillRef>
+          <a:effectRef idx="2">
+            <a:schemeClr val="accent1"/>
+          </a:effectRef>
+          <a:fontRef idx="minor">
+            <a:schemeClr val="lt1"/>
+          </a:fontRef>
+        </p:style>
+        <p:txBody>
+          <a:bodyPr rtlCol="0" anchor="ctr"/>
+          <a:lstStyle/>
+          <a:p>
+            <a:pPr algn="ctr"/>
+          </a:p>
+        </p:txBody>
+      </p:sp>
+      <p:sp>
+        <p:nvSpPr>
+          <p:cNvPr id="16" name="TextBox 15"/>
+          <p:cNvSpPr txBox="1"/>
+          <p:nvPr/>
+        </p:nvSpPr>
+        <p:spPr>
+          <a:xfrm>
+            <a:off x="6492240" y="3840480"/>
+            <a:ext cx="4389120" cy="1828800"/>
+          </a:xfrm>
+          <a:prstGeom prst="rect">
+            <a:avLst/>
+          </a:prstGeom>
+          <a:noFill/>
+        </p:spPr>
+        <p:txBody>
+          <a:bodyPr wrap="square">
+            <a:spAutoFit/>
+          </a:bodyPr>
+          <a:lstStyle/>
+          <a:p>
+            <a:pPr algn="l">
+              <a:spcBef>
+                <a:spcPts val="1000"/>
+              </a:spcBef>
+              <a:defRPr sz="1500">
+                <a:solidFill>
+                  <a:srgbClr val="2A2A2A"/>
+                </a:solidFill>
+                <a:latin typeface="Calibri"/>
+              </a:defRPr>
+            </a:pPr>
+            <a:r>
+              <a:t>Combinar L2 + Dropout + BatchNorm</a:t>
+            </a:r>
+          </a:p>
+          <a:p>
+            <a:pPr algn="l">
+              <a:spcBef>
+                <a:spcPts val="1000"/>
+              </a:spcBef>
+              <a:defRPr sz="1500">
+                <a:solidFill>
+                  <a:srgbClr val="2A2A2A"/>
+                </a:solidFill>
+                <a:latin typeface="Calibri"/>
+              </a:defRPr>
+            </a:pPr>
+            <a:r>
+              <a:t>+ Early Stopping.</a:t>
+            </a:r>
+          </a:p>
+          <a:p>
+            <a:pPr algn="l">
+              <a:spcBef>
+                <a:spcPts val="1000"/>
+              </a:spcBef>
+              <a:defRPr sz="1500">
+                <a:solidFill>
+                  <a:srgbClr val="2A2A2A"/>
+                </a:solidFill>
+                <a:latin typeface="Calibri"/>
+              </a:defRPr>
+            </a:pPr>
+          </a:p>
+          <a:p>
+            <a:pPr algn="l">
+              <a:spcBef>
+                <a:spcPts val="1000"/>
+              </a:spcBef>
+              <a:defRPr sz="1500">
+                <a:solidFill>
+                  <a:srgbClr val="2A2A2A"/>
+                </a:solidFill>
+                <a:latin typeface="Calibri"/>
+              </a:defRPr>
+            </a:pPr>
+            <a:r>
+              <a:t>Validacion cruzada (k-fold) para</a:t>
+            </a:r>
+          </a:p>
+          <a:p>
+            <a:pPr algn="l">
+              <a:spcBef>
+                <a:spcPts val="1000"/>
+              </a:spcBef>
+              <a:defRPr sz="1500">
+                <a:solidFill>
+                  <a:srgbClr val="2A2A2A"/>
+                </a:solidFill>
+                <a:latin typeface="Calibri"/>
+              </a:defRPr>
+            </a:pPr>
+            <a:r>
+              <a:t>estimar rendimiento real.</a:t>
+            </a:r>
+          </a:p>
+        </p:txBody>
+      </p:sp>
+      <p:sp>
+        <p:nvSpPr>
+          <p:cNvPr id="17" name="TextBox 16"/>
+          <p:cNvSpPr txBox="1"/>
+          <p:nvPr/>
+        </p:nvSpPr>
+        <p:spPr>
+          <a:xfrm>
+            <a:off x="1097280" y="6126480"/>
+            <a:ext cx="10058400" cy="365760"/>
+          </a:xfrm>
+          <a:prstGeom prst="rect">
+            <a:avLst/>
+          </a:prstGeom>
+          <a:noFill/>
+        </p:spPr>
+        <p:txBody>
+          <a:bodyPr wrap="square">
+            <a:spAutoFit/>
+          </a:bodyPr>
+          <a:lstStyle/>
+          <a:p>
+            <a:pPr algn="ctr">
+              <a:defRPr sz="1500" b="0">
+                <a:solidFill>
+                  <a:srgbClr val="D93025"/>
+                </a:solidFill>
+                <a:latin typeface="Calibri"/>
+              </a:defRPr>
+            </a:pPr>
+            <a:r>
+              <a:t>En medicina, un modelo que memoriza es peligroso: puede dar falsos negativos en pacientes nuevos.</a:t>
             </a:r>
           </a:p>
         </p:txBody>
@@ -5971,7 +8119,7 @@
     <p:bg>
       <p:bgPr>
         <a:solidFill>
-          <a:srgbClr val="FAFAFA"/>
+          <a:srgbClr val="FBFBFB"/>
         </a:solidFill>
         <a:effectLst/>
       </p:bgPr>
@@ -5991,8 +8139,8 @@
         </p:nvSpPr>
         <p:spPr>
           <a:xfrm>
-            <a:off x="1371600" y="548640"/>
-            <a:ext cx="9418320" cy="640080"/>
+            <a:off x="1097280" y="457200"/>
+            <a:ext cx="9144000" cy="640080"/>
           </a:xfrm>
           <a:prstGeom prst="rect">
             <a:avLst/>
@@ -6006,9 +8154,9 @@
           <a:lstStyle/>
           <a:p>
             <a:pPr algn="l">
-              <a:defRPr sz="4000" b="1">
-                <a:solidFill>
-                  <a:srgbClr val="1A1A1A"/>
+              <a:defRPr sz="4200" b="1">
+                <a:solidFill>
+                  <a:srgbClr val="181818"/>
                 </a:solidFill>
                 <a:latin typeface="Calibri"/>
               </a:defRPr>
@@ -6027,14 +8175,14 @@
         </p:nvSpPr>
         <p:spPr>
           <a:xfrm>
-            <a:off x="1371600" y="1188720"/>
-            <a:ext cx="1828800" cy="25400"/>
+            <a:off x="1097280" y="1051560"/>
+            <a:ext cx="2286000" cy="38100"/>
           </a:xfrm>
           <a:prstGeom prst="rect">
             <a:avLst/>
           </a:prstGeom>
           <a:solidFill>
-            <a:srgbClr val="0066CC"/>
+            <a:srgbClr val="7B1FA2"/>
           </a:solidFill>
           <a:ln>
             <a:noFill/>
@@ -6070,8 +8218,8 @@
         </p:nvSpPr>
         <p:spPr>
           <a:xfrm>
-            <a:off x="1371600" y="1554480"/>
-            <a:ext cx="9418320" cy="365760"/>
+            <a:off x="1097280" y="1463040"/>
+            <a:ext cx="9144000" cy="365760"/>
           </a:xfrm>
           <a:prstGeom prst="rect">
             <a:avLst/>
@@ -6085,15 +8233,15 @@
           <a:lstStyle/>
           <a:p>
             <a:pPr algn="l">
-              <a:defRPr sz="1800" b="1">
-                <a:solidFill>
-                  <a:srgbClr val="333333"/>
-                </a:solidFill>
-                <a:latin typeface="Calibri"/>
-              </a:defRPr>
-            </a:pPr>
-            <a:r>
-              <a:t>Sin Weight Decay:</a:t>
+              <a:defRPr sz="1900" b="1">
+                <a:solidFill>
+                  <a:srgbClr val="2A2A2A"/>
+                </a:solidFill>
+                <a:latin typeface="Calibri"/>
+              </a:defRPr>
+            </a:pPr>
+            <a:r>
+              <a:t>Sin Weight Decay</a:t>
             </a:r>
           </a:p>
         </p:txBody>
@@ -6106,8 +8254,8 @@
         </p:nvSpPr>
         <p:spPr>
           <a:xfrm>
-            <a:off x="1645920" y="2011680"/>
-            <a:ext cx="8229600" cy="365760"/>
+            <a:off x="1371600" y="1828800"/>
+            <a:ext cx="7315200" cy="365760"/>
           </a:xfrm>
           <a:prstGeom prst="rect">
             <a:avLst/>
@@ -6121,29 +8269,98 @@
           <a:lstStyle/>
           <a:p>
             <a:pPr algn="l">
-              <a:defRPr sz="1600" b="0">
-                <a:solidFill>
-                  <a:srgbClr val="666666"/>
-                </a:solidFill>
-                <a:latin typeface="Consolas"/>
-              </a:defRPr>
-            </a:pPr>
-            <a:r>
-              <a:t>theta(t+1)  =  theta(t) - n * grad(L)</a:t>
-            </a:r>
-          </a:p>
-        </p:txBody>
-      </p:sp>
-      <p:sp>
-        <p:nvSpPr>
-          <p:cNvPr id="6" name="TextBox 5"/>
+              <a:defRPr sz="1400" b="0">
+                <a:solidFill>
+                  <a:srgbClr val="606060"/>
+                </a:solidFill>
+                <a:latin typeface="Calibri"/>
+              </a:defRPr>
+            </a:pPr>
+            <a:r>
+              <a:t>Los pesos se actualizan solo por el gradiente. No hay limite a su crecimiento.</a:t>
+            </a:r>
+          </a:p>
+        </p:txBody>
+      </p:sp>
+      <p:sp>
+        <p:nvSpPr>
+          <p:cNvPr id="6" name="Rounded Rectangle 5"/>
+          <p:cNvSpPr/>
+          <p:nvPr/>
+        </p:nvSpPr>
+        <p:spPr>
+          <a:xfrm>
+            <a:off x="1371600" y="2286000"/>
+            <a:ext cx="7315200" cy="731520"/>
+          </a:xfrm>
+          <a:prstGeom prst="roundRect">
+            <a:avLst>
+              <a:gd name="adj" fmla="val 4000"/>
+            </a:avLst>
+          </a:prstGeom>
+          <a:solidFill>
+            <a:srgbClr val="F4F4F6"/>
+          </a:solidFill>
+          <a:ln>
+            <a:noFill/>
+          </a:ln>
+        </p:spPr>
+        <p:style>
+          <a:lnRef idx="1">
+            <a:schemeClr val="accent1"/>
+          </a:lnRef>
+          <a:fillRef idx="3">
+            <a:schemeClr val="accent1"/>
+          </a:fillRef>
+          <a:effectRef idx="2">
+            <a:schemeClr val="accent1"/>
+          </a:effectRef>
+          <a:fontRef idx="minor">
+            <a:schemeClr val="lt1"/>
+          </a:fontRef>
+        </p:style>
+        <p:txBody>
+          <a:bodyPr rtlCol="0" anchor="ctr"/>
+          <a:lstStyle/>
+          <a:p>
+            <a:pPr algn="ctr"/>
+          </a:p>
+        </p:txBody>
+      </p:sp>
+      <p:pic>
+        <p:nvPicPr>
+          <p:cNvPr id="7" name="Picture 6" descr="f_sin_decay.png"/>
+          <p:cNvPicPr>
+            <a:picLocks noChangeAspect="1"/>
+          </p:cNvPicPr>
+          <p:nvPr/>
+        </p:nvPicPr>
+        <p:blipFill>
+          <a:blip r:embed="rId2"/>
+          <a:stretch>
+            <a:fillRect/>
+          </a:stretch>
+        </p:blipFill>
+        <p:spPr>
+          <a:xfrm>
+            <a:off x="2286000" y="2331720"/>
+            <a:ext cx="5029200" cy="667749"/>
+          </a:xfrm>
+          <a:prstGeom prst="rect">
+            <a:avLst/>
+          </a:prstGeom>
+        </p:spPr>
+      </p:pic>
+      <p:sp>
+        <p:nvSpPr>
+          <p:cNvPr id="8" name="TextBox 7"/>
           <p:cNvSpPr txBox="1"/>
           <p:nvPr/>
         </p:nvSpPr>
         <p:spPr>
           <a:xfrm>
-            <a:off x="1371600" y="2651760"/>
-            <a:ext cx="9418320" cy="365760"/>
+            <a:off x="1097280" y="3200400"/>
+            <a:ext cx="9144000" cy="365760"/>
           </a:xfrm>
           <a:prstGeom prst="rect">
             <a:avLst/>
@@ -6157,29 +8374,29 @@
           <a:lstStyle/>
           <a:p>
             <a:pPr algn="l">
-              <a:defRPr sz="1800" b="1">
-                <a:solidFill>
-                  <a:srgbClr val="333333"/>
-                </a:solidFill>
-                <a:latin typeface="Calibri"/>
-              </a:defRPr>
-            </a:pPr>
-            <a:r>
-              <a:t>Con Weight Decay (L2):</a:t>
-            </a:r>
-          </a:p>
-        </p:txBody>
-      </p:sp>
-      <p:sp>
-        <p:nvSpPr>
-          <p:cNvPr id="7" name="TextBox 6"/>
+              <a:defRPr sz="1900" b="1">
+                <a:solidFill>
+                  <a:srgbClr val="2A2A2A"/>
+                </a:solidFill>
+                <a:latin typeface="Calibri"/>
+              </a:defRPr>
+            </a:pPr>
+            <a:r>
+              <a:t>Con Weight Decay (L2)</a:t>
+            </a:r>
+          </a:p>
+        </p:txBody>
+      </p:sp>
+      <p:sp>
+        <p:nvSpPr>
+          <p:cNvPr id="9" name="TextBox 8"/>
           <p:cNvSpPr txBox="1"/>
           <p:nvPr/>
         </p:nvSpPr>
         <p:spPr>
           <a:xfrm>
-            <a:off x="1645920" y="3108960"/>
-            <a:ext cx="8229600" cy="365760"/>
+            <a:off x="1371600" y="3566160"/>
+            <a:ext cx="7315200" cy="365760"/>
           </a:xfrm>
           <a:prstGeom prst="rect">
             <a:avLst/>
@@ -6193,29 +8410,98 @@
           <a:lstStyle/>
           <a:p>
             <a:pPr algn="l">
-              <a:defRPr sz="1600" b="0">
-                <a:solidFill>
-                  <a:srgbClr val="666666"/>
-                </a:solidFill>
-                <a:latin typeface="Consolas"/>
-              </a:defRPr>
-            </a:pPr>
-            <a:r>
-              <a:t>theta(t+1)  =  (1 - n*lambda) * theta(t) - n * grad(L)</a:t>
-            </a:r>
-          </a:p>
-        </p:txBody>
-      </p:sp>
-      <p:sp>
-        <p:nvSpPr>
-          <p:cNvPr id="8" name="TextBox 7"/>
+              <a:defRPr sz="1400" b="0">
+                <a:solidFill>
+                  <a:srgbClr val="606060"/>
+                </a:solidFill>
+                <a:latin typeface="Calibri"/>
+              </a:defRPr>
+            </a:pPr>
+            <a:r>
+              <a:t>El factor (1 - eta*lambda) encoge los pesos en cada paso. Pesos grandes se penalizan mas.</a:t>
+            </a:r>
+          </a:p>
+        </p:txBody>
+      </p:sp>
+      <p:sp>
+        <p:nvSpPr>
+          <p:cNvPr id="10" name="Rounded Rectangle 9"/>
+          <p:cNvSpPr/>
+          <p:nvPr/>
+        </p:nvSpPr>
+        <p:spPr>
+          <a:xfrm>
+            <a:off x="1371600" y="3931920"/>
+            <a:ext cx="8686800" cy="822960"/>
+          </a:xfrm>
+          <a:prstGeom prst="roundRect">
+            <a:avLst>
+              <a:gd name="adj" fmla="val 4000"/>
+            </a:avLst>
+          </a:prstGeom>
+          <a:solidFill>
+            <a:srgbClr val="F4F4F6"/>
+          </a:solidFill>
+          <a:ln>
+            <a:noFill/>
+          </a:ln>
+        </p:spPr>
+        <p:style>
+          <a:lnRef idx="1">
+            <a:schemeClr val="accent1"/>
+          </a:lnRef>
+          <a:fillRef idx="3">
+            <a:schemeClr val="accent1"/>
+          </a:fillRef>
+          <a:effectRef idx="2">
+            <a:schemeClr val="accent1"/>
+          </a:effectRef>
+          <a:fontRef idx="minor">
+            <a:schemeClr val="lt1"/>
+          </a:fontRef>
+        </p:style>
+        <p:txBody>
+          <a:bodyPr rtlCol="0" anchor="ctr"/>
+          <a:lstStyle/>
+          <a:p>
+            <a:pPr algn="ctr"/>
+          </a:p>
+        </p:txBody>
+      </p:sp>
+      <p:pic>
+        <p:nvPicPr>
+          <p:cNvPr id="11" name="Picture 10" descr="f_con_decay.png"/>
+          <p:cNvPicPr>
+            <a:picLocks noChangeAspect="1"/>
+          </p:cNvPicPr>
+          <p:nvPr/>
+        </p:nvPicPr>
+        <p:blipFill>
+          <a:blip r:embed="rId3"/>
+          <a:stretch>
+            <a:fillRect/>
+          </a:stretch>
+        </p:blipFill>
+        <p:spPr>
+          <a:xfrm>
+            <a:off x="1828800" y="3977639"/>
+            <a:ext cx="6858000" cy="788406"/>
+          </a:xfrm>
+          <a:prstGeom prst="rect">
+            <a:avLst/>
+          </a:prstGeom>
+        </p:spPr>
+      </p:pic>
+      <p:sp>
+        <p:nvSpPr>
+          <p:cNvPr id="12" name="TextBox 11"/>
           <p:cNvSpPr txBox="1"/>
           <p:nvPr/>
         </p:nvSpPr>
         <p:spPr>
           <a:xfrm>
-            <a:off x="1645920" y="3566160"/>
-            <a:ext cx="8229600" cy="365760"/>
+            <a:off x="1097280" y="4937760"/>
+            <a:ext cx="4572000" cy="365760"/>
           </a:xfrm>
           <a:prstGeom prst="rect">
             <a:avLst/>
@@ -6229,29 +8515,98 @@
           <a:lstStyle/>
           <a:p>
             <a:pPr algn="l">
-              <a:defRPr sz="1500" b="0">
-                <a:solidFill>
-                  <a:srgbClr val="666666"/>
-                </a:solidFill>
-                <a:latin typeface="Calibri"/>
-              </a:defRPr>
-            </a:pPr>
-            <a:r>
-              <a:t>El factor (1 - n*lambda) encoge los pesos en cada paso.</a:t>
-            </a:r>
-          </a:p>
-        </p:txBody>
-      </p:sp>
-      <p:sp>
-        <p:nvSpPr>
-          <p:cNvPr id="9" name="TextBox 8"/>
+              <a:defRPr sz="1900" b="1">
+                <a:solidFill>
+                  <a:srgbClr val="2A2A2A"/>
+                </a:solidFill>
+                <a:latin typeface="Calibri"/>
+              </a:defRPr>
+            </a:pPr>
+            <a:r>
+              <a:t>Dropout</a:t>
+            </a:r>
+          </a:p>
+        </p:txBody>
+      </p:sp>
+      <p:sp>
+        <p:nvSpPr>
+          <p:cNvPr id="13" name="Rounded Rectangle 12"/>
+          <p:cNvSpPr/>
+          <p:nvPr/>
+        </p:nvSpPr>
+        <p:spPr>
+          <a:xfrm>
+            <a:off x="1371600" y="5303520"/>
+            <a:ext cx="4572000" cy="1188720"/>
+          </a:xfrm>
+          <a:prstGeom prst="roundRect">
+            <a:avLst>
+              <a:gd name="adj" fmla="val 4000"/>
+            </a:avLst>
+          </a:prstGeom>
+          <a:solidFill>
+            <a:srgbClr val="F4F4F6"/>
+          </a:solidFill>
+          <a:ln>
+            <a:noFill/>
+          </a:ln>
+        </p:spPr>
+        <p:style>
+          <a:lnRef idx="1">
+            <a:schemeClr val="accent1"/>
+          </a:lnRef>
+          <a:fillRef idx="3">
+            <a:schemeClr val="accent1"/>
+          </a:fillRef>
+          <a:effectRef idx="2">
+            <a:schemeClr val="accent1"/>
+          </a:effectRef>
+          <a:fontRef idx="minor">
+            <a:schemeClr val="lt1"/>
+          </a:fontRef>
+        </p:style>
+        <p:txBody>
+          <a:bodyPr rtlCol="0" anchor="ctr"/>
+          <a:lstStyle/>
+          <a:p>
+            <a:pPr algn="ctr"/>
+          </a:p>
+        </p:txBody>
+      </p:sp>
+      <p:pic>
+        <p:nvPicPr>
+          <p:cNvPr id="14" name="Picture 13" descr="f_dropout.png"/>
+          <p:cNvPicPr>
+            <a:picLocks noChangeAspect="1"/>
+          </p:cNvPicPr>
+          <p:nvPr/>
+        </p:nvPicPr>
+        <p:blipFill>
+          <a:blip r:embed="rId4"/>
+          <a:stretch>
+            <a:fillRect/>
+          </a:stretch>
+        </p:blipFill>
+        <p:spPr>
+          <a:xfrm>
+            <a:off x="1645920" y="5349240"/>
+            <a:ext cx="3657600" cy="470423"/>
+          </a:xfrm>
+          <a:prstGeom prst="rect">
+            <a:avLst/>
+          </a:prstGeom>
+        </p:spPr>
+      </p:pic>
+      <p:sp>
+        <p:nvSpPr>
+          <p:cNvPr id="15" name="TextBox 14"/>
           <p:cNvSpPr txBox="1"/>
           <p:nvPr/>
         </p:nvSpPr>
         <p:spPr>
           <a:xfrm>
-            <a:off x="1371600" y="4206240"/>
-            <a:ext cx="9418320" cy="365760"/>
+            <a:off x="6400800" y="4937760"/>
+            <a:ext cx="4572000" cy="365760"/>
           </a:xfrm>
           <a:prstGeom prst="rect">
             <a:avLst/>
@@ -6265,163 +8620,88 @@
           <a:lstStyle/>
           <a:p>
             <a:pPr algn="l">
-              <a:defRPr sz="1800" b="1">
-                <a:solidFill>
-                  <a:srgbClr val="333333"/>
-                </a:solidFill>
-                <a:latin typeface="Calibri"/>
-              </a:defRPr>
-            </a:pPr>
-            <a:r>
-              <a:t>Dropout:</a:t>
-            </a:r>
-          </a:p>
-        </p:txBody>
-      </p:sp>
-      <p:sp>
-        <p:nvSpPr>
-          <p:cNvPr id="10" name="TextBox 9"/>
-          <p:cNvSpPr txBox="1"/>
-          <p:nvPr/>
-        </p:nvSpPr>
-        <p:spPr>
-          <a:xfrm>
-            <a:off x="1645920" y="4663440"/>
-            <a:ext cx="8229600" cy="365760"/>
-          </a:xfrm>
-          <a:prstGeom prst="rect">
-            <a:avLst/>
-          </a:prstGeom>
-          <a:noFill/>
-        </p:spPr>
-        <p:txBody>
-          <a:bodyPr wrap="square">
-            <a:spAutoFit/>
-          </a:bodyPr>
-          <a:lstStyle/>
-          <a:p>
-            <a:pPr algn="l">
-              <a:defRPr sz="1600" b="0">
-                <a:solidFill>
-                  <a:srgbClr val="666666"/>
-                </a:solidFill>
-                <a:latin typeface="Consolas"/>
-              </a:defRPr>
-            </a:pPr>
-            <a:r>
-              <a:t>h_i = x_i/(1-p) con prob (1-p),  o  0 con prob p</a:t>
-            </a:r>
-          </a:p>
-        </p:txBody>
-      </p:sp>
-      <p:sp>
-        <p:nvSpPr>
-          <p:cNvPr id="11" name="TextBox 10"/>
-          <p:cNvSpPr txBox="1"/>
-          <p:nvPr/>
-        </p:nvSpPr>
-        <p:spPr>
-          <a:xfrm>
-            <a:off x="1645920" y="5120640"/>
-            <a:ext cx="8229600" cy="365760"/>
-          </a:xfrm>
-          <a:prstGeom prst="rect">
-            <a:avLst/>
-          </a:prstGeom>
-          <a:noFill/>
-        </p:spPr>
-        <p:txBody>
-          <a:bodyPr wrap="square">
-            <a:spAutoFit/>
-          </a:bodyPr>
-          <a:lstStyle/>
-          <a:p>
-            <a:pPr algn="l">
-              <a:defRPr sz="1500" b="0">
-                <a:solidFill>
-                  <a:srgbClr val="666666"/>
-                </a:solidFill>
-                <a:latin typeface="Calibri"/>
-              </a:defRPr>
-            </a:pPr>
-            <a:r>
-              <a:t>Equivale a entrenar un ensemble de sub-redes.</a:t>
-            </a:r>
-          </a:p>
-        </p:txBody>
-      </p:sp>
-      <p:sp>
-        <p:nvSpPr>
-          <p:cNvPr id="12" name="TextBox 11"/>
-          <p:cNvSpPr txBox="1"/>
-          <p:nvPr/>
-        </p:nvSpPr>
-        <p:spPr>
-          <a:xfrm>
-            <a:off x="1371600" y="5760720"/>
-            <a:ext cx="9418320" cy="365760"/>
-          </a:xfrm>
-          <a:prstGeom prst="rect">
-            <a:avLst/>
-          </a:prstGeom>
-          <a:noFill/>
-        </p:spPr>
-        <p:txBody>
-          <a:bodyPr wrap="square">
-            <a:spAutoFit/>
-          </a:bodyPr>
-          <a:lstStyle/>
-          <a:p>
-            <a:pPr algn="l">
-              <a:defRPr sz="1800" b="1">
-                <a:solidFill>
-                  <a:srgbClr val="333333"/>
-                </a:solidFill>
-                <a:latin typeface="Calibri"/>
-              </a:defRPr>
-            </a:pPr>
-            <a:r>
-              <a:t>Loss total:</a:t>
-            </a:r>
-          </a:p>
-        </p:txBody>
-      </p:sp>
-      <p:sp>
-        <p:nvSpPr>
-          <p:cNvPr id="13" name="TextBox 12"/>
-          <p:cNvSpPr txBox="1"/>
-          <p:nvPr/>
-        </p:nvSpPr>
-        <p:spPr>
-          <a:xfrm>
-            <a:off x="1645920" y="6126480"/>
-            <a:ext cx="8229600" cy="365760"/>
-          </a:xfrm>
-          <a:prstGeom prst="rect">
-            <a:avLst/>
-          </a:prstGeom>
-          <a:noFill/>
-        </p:spPr>
-        <p:txBody>
-          <a:bodyPr wrap="square">
-            <a:spAutoFit/>
-          </a:bodyPr>
-          <a:lstStyle/>
-          <a:p>
-            <a:pPr algn="l">
-              <a:defRPr sz="1600" b="0">
-                <a:solidFill>
-                  <a:srgbClr val="666666"/>
-                </a:solidFill>
-                <a:latin typeface="Consolas"/>
-              </a:defRPr>
-            </a:pPr>
-            <a:r>
-              <a:t>L_total = L_BCE + lambda * sum(||w_i||^2)</a:t>
-            </a:r>
-          </a:p>
-        </p:txBody>
-      </p:sp>
+              <a:defRPr sz="1900" b="1">
+                <a:solidFill>
+                  <a:srgbClr val="2A2A2A"/>
+                </a:solidFill>
+                <a:latin typeface="Calibri"/>
+              </a:defRPr>
+            </a:pPr>
+            <a:r>
+              <a:t>Loss total con L2</a:t>
+            </a:r>
+          </a:p>
+        </p:txBody>
+      </p:sp>
+      <p:sp>
+        <p:nvSpPr>
+          <p:cNvPr id="16" name="Rounded Rectangle 15"/>
+          <p:cNvSpPr/>
+          <p:nvPr/>
+        </p:nvSpPr>
+        <p:spPr>
+          <a:xfrm>
+            <a:off x="6400800" y="5303520"/>
+            <a:ext cx="5029200" cy="914400"/>
+          </a:xfrm>
+          <a:prstGeom prst="roundRect">
+            <a:avLst>
+              <a:gd name="adj" fmla="val 4000"/>
+            </a:avLst>
+          </a:prstGeom>
+          <a:solidFill>
+            <a:srgbClr val="F4F4F6"/>
+          </a:solidFill>
+          <a:ln>
+            <a:noFill/>
+          </a:ln>
+        </p:spPr>
+        <p:style>
+          <a:lnRef idx="1">
+            <a:schemeClr val="accent1"/>
+          </a:lnRef>
+          <a:fillRef idx="3">
+            <a:schemeClr val="accent1"/>
+          </a:fillRef>
+          <a:effectRef idx="2">
+            <a:schemeClr val="accent1"/>
+          </a:effectRef>
+          <a:fontRef idx="minor">
+            <a:schemeClr val="lt1"/>
+          </a:fontRef>
+        </p:style>
+        <p:txBody>
+          <a:bodyPr rtlCol="0" anchor="ctr"/>
+          <a:lstStyle/>
+          <a:p>
+            <a:pPr algn="ctr"/>
+          </a:p>
+        </p:txBody>
+      </p:sp>
+      <p:pic>
+        <p:nvPicPr>
+          <p:cNvPr id="17" name="Picture 16" descr="f_loss_total.png"/>
+          <p:cNvPicPr>
+            <a:picLocks noChangeAspect="1"/>
+          </p:cNvPicPr>
+          <p:nvPr/>
+        </p:nvPicPr>
+        <p:blipFill>
+          <a:blip r:embed="rId5"/>
+          <a:stretch>
+            <a:fillRect/>
+          </a:stretch>
+        </p:blipFill>
+        <p:spPr>
+          <a:xfrm>
+            <a:off x="6583680" y="5394960"/>
+            <a:ext cx="4572000" cy="655554"/>
+          </a:xfrm>
+          <a:prstGeom prst="rect">
+            <a:avLst/>
+          </a:prstGeom>
+        </p:spPr>
+      </p:pic>
     </p:spTree>
   </p:cSld>
   <p:clrMapOvr>
@@ -6436,7 +8716,7 @@
     <p:bg>
       <p:bgPr>
         <a:solidFill>
-          <a:srgbClr val="FAFAFA"/>
+          <a:srgbClr val="14141E"/>
         </a:solidFill>
         <a:effectLst/>
       </p:bgPr>
@@ -6456,8 +8736,8 @@
         </p:nvSpPr>
         <p:spPr>
           <a:xfrm>
-            <a:off x="1371600" y="548640"/>
-            <a:ext cx="9418320" cy="640080"/>
+            <a:off x="1097280" y="457200"/>
+            <a:ext cx="9144000" cy="640080"/>
           </a:xfrm>
           <a:prstGeom prst="rect">
             <a:avLst/>
@@ -6471,9 +8751,9 @@
           <a:lstStyle/>
           <a:p>
             <a:pPr algn="l">
-              <a:defRPr sz="4000" b="1">
-                <a:solidFill>
-                  <a:srgbClr val="1A1A1A"/>
+              <a:defRPr sz="4200" b="1">
+                <a:solidFill>
+                  <a:srgbClr val="FFFFFF"/>
                 </a:solidFill>
                 <a:latin typeface="Calibri"/>
               </a:defRPr>
@@ -6492,14 +8772,14 @@
         </p:nvSpPr>
         <p:spPr>
           <a:xfrm>
-            <a:off x="1371600" y="1188720"/>
-            <a:ext cx="1828800" cy="25400"/>
+            <a:off x="1097280" y="1051560"/>
+            <a:ext cx="2286000" cy="38100"/>
           </a:xfrm>
           <a:prstGeom prst="rect">
             <a:avLst/>
           </a:prstGeom>
           <a:solidFill>
-            <a:srgbClr val="0066CC"/>
+            <a:srgbClr val="1A73E8"/>
           </a:solidFill>
           <a:ln>
             <a:noFill/>
@@ -6529,14 +8809,57 @@
       </p:sp>
       <p:sp>
         <p:nvSpPr>
-          <p:cNvPr id="4" name="TextBox 3"/>
+          <p:cNvPr id="4" name="Oval 3"/>
+          <p:cNvSpPr/>
+          <p:nvPr/>
+        </p:nvSpPr>
+        <p:spPr>
+          <a:xfrm>
+            <a:off x="1097280" y="1600200"/>
+            <a:ext cx="152400" cy="152400"/>
+          </a:xfrm>
+          <a:prstGeom prst="ellipse">
+            <a:avLst/>
+          </a:prstGeom>
+          <a:solidFill>
+            <a:srgbClr val="1A73E8"/>
+          </a:solidFill>
+          <a:ln>
+            <a:noFill/>
+          </a:ln>
+        </p:spPr>
+        <p:style>
+          <a:lnRef idx="1">
+            <a:schemeClr val="accent1"/>
+          </a:lnRef>
+          <a:fillRef idx="3">
+            <a:schemeClr val="accent1"/>
+          </a:fillRef>
+          <a:effectRef idx="2">
+            <a:schemeClr val="accent1"/>
+          </a:effectRef>
+          <a:fontRef idx="minor">
+            <a:schemeClr val="lt1"/>
+          </a:fontRef>
+        </p:style>
+        <p:txBody>
+          <a:bodyPr rtlCol="0" anchor="ctr"/>
+          <a:lstStyle/>
+          <a:p>
+            <a:pPr algn="ctr"/>
+          </a:p>
+        </p:txBody>
+      </p:sp>
+      <p:sp>
+        <p:nvSpPr>
+          <p:cNvPr id="5" name="TextBox 4"/>
           <p:cNvSpPr txBox="1"/>
           <p:nvPr/>
         </p:nvSpPr>
         <p:spPr>
           <a:xfrm>
-            <a:off x="1371600" y="1554480"/>
-            <a:ext cx="9418320" cy="5029200"/>
+            <a:off x="1463040" y="1417320"/>
+            <a:ext cx="2743200" cy="365760"/>
           </a:xfrm>
           <a:prstGeom prst="rect">
             <a:avLst/>
@@ -6549,217 +8872,30 @@
           </a:bodyPr>
           <a:lstStyle/>
           <a:p>
-            <a:pPr>
-              <a:spcBef>
-                <a:spcPts val="800"/>
-              </a:spcBef>
-              <a:spcAft>
-                <a:spcPts val="400"/>
-              </a:spcAft>
-              <a:defRPr sz="1800">
-                <a:solidFill>
-                  <a:srgbClr val="333333"/>
-                </a:solidFill>
-                <a:latin typeface="Calibri"/>
-              </a:defRPr>
-            </a:pPr>
-            <a:r>
-              <a:t>1.  Diagnostico: el modelo memorizaba el dataset de entrenamiento.</a:t>
-            </a:r>
-          </a:p>
-          <a:p>
-            <a:pPr>
-              <a:spcBef>
-                <a:spcPts val="800"/>
-              </a:spcBef>
-              <a:spcAft>
-                <a:spcPts val="400"/>
-              </a:spcAft>
-              <a:defRPr sz="1800">
-                <a:solidFill>
-                  <a:srgbClr val="333333"/>
-                </a:solidFill>
-                <a:latin typeface="Calibri"/>
-              </a:defRPr>
-            </a:pPr>
-            <a:r>
-              <a:t>     Train ~100%, Test ~65-75%. Overfitting violento.</a:t>
-            </a:r>
-          </a:p>
-          <a:p>
-            <a:pPr>
-              <a:spcBef>
-                <a:spcPts val="800"/>
-              </a:spcBef>
-              <a:spcAft>
-                <a:spcPts val="400"/>
-              </a:spcAft>
-              <a:defRPr sz="1800">
-                <a:solidFill>
-                  <a:srgbClr val="333333"/>
-                </a:solidFill>
-                <a:latin typeface="Calibri"/>
-              </a:defRPr>
-            </a:pPr>
-          </a:p>
-          <a:p>
-            <a:pPr>
-              <a:spcBef>
-                <a:spcPts val="800"/>
-              </a:spcBef>
-              <a:spcAft>
-                <a:spcPts val="400"/>
-              </a:spcAft>
-              <a:defRPr sz="1800">
-                <a:solidFill>
-                  <a:srgbClr val="333333"/>
-                </a:solidFill>
-                <a:latin typeface="Calibri"/>
-              </a:defRPr>
-            </a:pPr>
-            <a:r>
-              <a:t>2.  Interruptor: activamos Weight Decay (L2=0.01), Dropout (p=0.3)</a:t>
-            </a:r>
-          </a:p>
-          <a:p>
-            <a:pPr>
-              <a:spcBef>
-                <a:spcPts val="800"/>
-              </a:spcBef>
-              <a:spcAft>
-                <a:spcPts val="400"/>
-              </a:spcAft>
-              <a:defRPr sz="1800">
-                <a:solidFill>
-                  <a:srgbClr val="333333"/>
-                </a:solidFill>
-                <a:latin typeface="Calibri"/>
-              </a:defRPr>
-            </a:pPr>
-            <a:r>
-              <a:t>     y redujimos la red de ~19K a ~300 parametros.</a:t>
-            </a:r>
-          </a:p>
-          <a:p>
-            <a:pPr>
-              <a:spcBef>
-                <a:spcPts val="800"/>
-              </a:spcBef>
-              <a:spcAft>
-                <a:spcPts val="400"/>
-              </a:spcAft>
-              <a:defRPr sz="1800">
-                <a:solidFill>
-                  <a:srgbClr val="333333"/>
-                </a:solidFill>
-                <a:latin typeface="Calibri"/>
-              </a:defRPr>
-            </a:pPr>
-          </a:p>
-          <a:p>
-            <a:pPr>
-              <a:spcBef>
-                <a:spcPts val="800"/>
-              </a:spcBef>
-              <a:spcAft>
-                <a:spcPts val="400"/>
-              </a:spcAft>
-              <a:defRPr sz="1800">
-                <a:solidFill>
-                  <a:srgbClr val="333333"/>
-                </a:solidFill>
-                <a:latin typeface="Calibri"/>
-              </a:defRPr>
-            </a:pPr>
-            <a:r>
-              <a:t>3.  Resultado: la brecha train-test se redujo de ~30% a &lt;7%.</a:t>
-            </a:r>
-          </a:p>
-          <a:p>
-            <a:pPr>
-              <a:spcBef>
-                <a:spcPts val="800"/>
-              </a:spcBef>
-              <a:spcAft>
-                <a:spcPts val="400"/>
-              </a:spcAft>
-              <a:defRPr sz="1800">
-                <a:solidFill>
-                  <a:srgbClr val="333333"/>
-                </a:solidFill>
-                <a:latin typeface="Calibri"/>
-              </a:defRPr>
-            </a:pPr>
-            <a:r>
-              <a:t>     El modelo ahora generaliza en vez de memorizar.</a:t>
-            </a:r>
-          </a:p>
-          <a:p>
-            <a:pPr>
-              <a:spcBef>
-                <a:spcPts val="800"/>
-              </a:spcBef>
-              <a:spcAft>
-                <a:spcPts val="400"/>
-              </a:spcAft>
-              <a:defRPr sz="1800">
-                <a:solidFill>
-                  <a:srgbClr val="333333"/>
-                </a:solidFill>
-                <a:latin typeface="Calibri"/>
-              </a:defRPr>
-            </a:pPr>
-          </a:p>
-          <a:p>
-            <a:pPr>
-              <a:spcBef>
-                <a:spcPts val="800"/>
-              </a:spcBef>
-              <a:spcAft>
-                <a:spcPts val="400"/>
-              </a:spcAft>
-              <a:defRPr sz="1800">
-                <a:solidFill>
-                  <a:srgbClr val="333333"/>
-                </a:solidFill>
-                <a:latin typeface="Calibri"/>
-              </a:defRPr>
-            </a:pPr>
-            <a:r>
-              <a:t>4.  Leccion: en medicina, un modelo con overfitting puede dar</a:t>
-            </a:r>
-          </a:p>
-          <a:p>
-            <a:pPr>
-              <a:spcBef>
-                <a:spcPts val="800"/>
-              </a:spcBef>
-              <a:spcAft>
-                <a:spcPts val="400"/>
-              </a:spcAft>
-              <a:defRPr sz="1800">
-                <a:solidFill>
-                  <a:srgbClr val="333333"/>
-                </a:solidFill>
-                <a:latin typeface="Calibri"/>
-              </a:defRPr>
-            </a:pPr>
-            <a:r>
-              <a:t>     diagnosticos falsos. La regularizacion no es opcional.</a:t>
-            </a:r>
-          </a:p>
-        </p:txBody>
-      </p:sp>
-      <p:sp>
-        <p:nvSpPr>
-          <p:cNvPr id="5" name="TextBox 4"/>
+            <a:pPr algn="l">
+              <a:defRPr sz="2000" b="1">
+                <a:solidFill>
+                  <a:srgbClr val="1A73E8"/>
+                </a:solidFill>
+                <a:latin typeface="Calibri"/>
+              </a:defRPr>
+            </a:pPr>
+            <a:r>
+              <a:t>Diagnostico</a:t>
+            </a:r>
+          </a:p>
+        </p:txBody>
+      </p:sp>
+      <p:sp>
+        <p:nvSpPr>
+          <p:cNvPr id="6" name="TextBox 5"/>
           <p:cNvSpPr txBox="1"/>
           <p:nvPr/>
         </p:nvSpPr>
         <p:spPr>
           <a:xfrm>
-            <a:off x="1371600" y="5943600"/>
-            <a:ext cx="9418320" cy="365760"/>
+            <a:off x="1463040" y="1783080"/>
+            <a:ext cx="9144000" cy="457200"/>
           </a:xfrm>
           <a:prstGeom prst="rect">
             <a:avLst/>
@@ -6773,9 +8909,390 @@
           <a:lstStyle/>
           <a:p>
             <a:pPr algn="l">
+              <a:defRPr sz="1600" b="0">
+                <a:solidFill>
+                  <a:srgbClr val="E8E8E8"/>
+                </a:solidFill>
+                <a:latin typeface="Calibri"/>
+              </a:defRPr>
+            </a:pPr>
+            <a:r>
+              <a:t>El modelo memorizaba el dataset. Train ~100%, Test ~65-75%. Overfitting violento por falta de regularizacion.</a:t>
+            </a:r>
+          </a:p>
+        </p:txBody>
+      </p:sp>
+      <p:sp>
+        <p:nvSpPr>
+          <p:cNvPr id="7" name="Oval 6"/>
+          <p:cNvSpPr/>
+          <p:nvPr/>
+        </p:nvSpPr>
+        <p:spPr>
+          <a:xfrm>
+            <a:off x="1097280" y="2651760"/>
+            <a:ext cx="152400" cy="152400"/>
+          </a:xfrm>
+          <a:prstGeom prst="ellipse">
+            <a:avLst/>
+          </a:prstGeom>
+          <a:solidFill>
+            <a:srgbClr val="1A73E8"/>
+          </a:solidFill>
+          <a:ln>
+            <a:noFill/>
+          </a:ln>
+        </p:spPr>
+        <p:style>
+          <a:lnRef idx="1">
+            <a:schemeClr val="accent1"/>
+          </a:lnRef>
+          <a:fillRef idx="3">
+            <a:schemeClr val="accent1"/>
+          </a:fillRef>
+          <a:effectRef idx="2">
+            <a:schemeClr val="accent1"/>
+          </a:effectRef>
+          <a:fontRef idx="minor">
+            <a:schemeClr val="lt1"/>
+          </a:fontRef>
+        </p:style>
+        <p:txBody>
+          <a:bodyPr rtlCol="0" anchor="ctr"/>
+          <a:lstStyle/>
+          <a:p>
+            <a:pPr algn="ctr"/>
+          </a:p>
+        </p:txBody>
+      </p:sp>
+      <p:sp>
+        <p:nvSpPr>
+          <p:cNvPr id="8" name="TextBox 7"/>
+          <p:cNvSpPr txBox="1"/>
+          <p:nvPr/>
+        </p:nvSpPr>
+        <p:spPr>
+          <a:xfrm>
+            <a:off x="1463040" y="2468880"/>
+            <a:ext cx="2743200" cy="365760"/>
+          </a:xfrm>
+          <a:prstGeom prst="rect">
+            <a:avLst/>
+          </a:prstGeom>
+          <a:noFill/>
+        </p:spPr>
+        <p:txBody>
+          <a:bodyPr wrap="square">
+            <a:spAutoFit/>
+          </a:bodyPr>
+          <a:lstStyle/>
+          <a:p>
+            <a:pPr algn="l">
+              <a:defRPr sz="2000" b="1">
+                <a:solidFill>
+                  <a:srgbClr val="1A73E8"/>
+                </a:solidFill>
+                <a:latin typeface="Calibri"/>
+              </a:defRPr>
+            </a:pPr>
+            <a:r>
+              <a:t>Interruptor</a:t>
+            </a:r>
+          </a:p>
+        </p:txBody>
+      </p:sp>
+      <p:sp>
+        <p:nvSpPr>
+          <p:cNvPr id="9" name="TextBox 8"/>
+          <p:cNvSpPr txBox="1"/>
+          <p:nvPr/>
+        </p:nvSpPr>
+        <p:spPr>
+          <a:xfrm>
+            <a:off x="1463040" y="2834640"/>
+            <a:ext cx="9144000" cy="457200"/>
+          </a:xfrm>
+          <a:prstGeom prst="rect">
+            <a:avLst/>
+          </a:prstGeom>
+          <a:noFill/>
+        </p:spPr>
+        <p:txBody>
+          <a:bodyPr wrap="square">
+            <a:spAutoFit/>
+          </a:bodyPr>
+          <a:lstStyle/>
+          <a:p>
+            <a:pPr algn="l">
+              <a:defRPr sz="1600" b="0">
+                <a:solidFill>
+                  <a:srgbClr val="E8E8E8"/>
+                </a:solidFill>
+                <a:latin typeface="Calibri"/>
+              </a:defRPr>
+            </a:pPr>
+            <a:r>
+              <a:t>Activamos Weight Decay (L2=0.01), Dropout (p=0.3) y redujimos la red de ~19K a ~300 parametros.</a:t>
+            </a:r>
+          </a:p>
+        </p:txBody>
+      </p:sp>
+      <p:sp>
+        <p:nvSpPr>
+          <p:cNvPr id="10" name="Oval 9"/>
+          <p:cNvSpPr/>
+          <p:nvPr/>
+        </p:nvSpPr>
+        <p:spPr>
+          <a:xfrm>
+            <a:off x="1097280" y="3703320"/>
+            <a:ext cx="152400" cy="152400"/>
+          </a:xfrm>
+          <a:prstGeom prst="ellipse">
+            <a:avLst/>
+          </a:prstGeom>
+          <a:solidFill>
+            <a:srgbClr val="1A73E8"/>
+          </a:solidFill>
+          <a:ln>
+            <a:noFill/>
+          </a:ln>
+        </p:spPr>
+        <p:style>
+          <a:lnRef idx="1">
+            <a:schemeClr val="accent1"/>
+          </a:lnRef>
+          <a:fillRef idx="3">
+            <a:schemeClr val="accent1"/>
+          </a:fillRef>
+          <a:effectRef idx="2">
+            <a:schemeClr val="accent1"/>
+          </a:effectRef>
+          <a:fontRef idx="minor">
+            <a:schemeClr val="lt1"/>
+          </a:fontRef>
+        </p:style>
+        <p:txBody>
+          <a:bodyPr rtlCol="0" anchor="ctr"/>
+          <a:lstStyle/>
+          <a:p>
+            <a:pPr algn="ctr"/>
+          </a:p>
+        </p:txBody>
+      </p:sp>
+      <p:sp>
+        <p:nvSpPr>
+          <p:cNvPr id="11" name="TextBox 10"/>
+          <p:cNvSpPr txBox="1"/>
+          <p:nvPr/>
+        </p:nvSpPr>
+        <p:spPr>
+          <a:xfrm>
+            <a:off x="1463040" y="3520440"/>
+            <a:ext cx="2743200" cy="365760"/>
+          </a:xfrm>
+          <a:prstGeom prst="rect">
+            <a:avLst/>
+          </a:prstGeom>
+          <a:noFill/>
+        </p:spPr>
+        <p:txBody>
+          <a:bodyPr wrap="square">
+            <a:spAutoFit/>
+          </a:bodyPr>
+          <a:lstStyle/>
+          <a:p>
+            <a:pPr algn="l">
+              <a:defRPr sz="2000" b="1">
+                <a:solidFill>
+                  <a:srgbClr val="1A73E8"/>
+                </a:solidFill>
+                <a:latin typeface="Calibri"/>
+              </a:defRPr>
+            </a:pPr>
+            <a:r>
+              <a:t>Resultado</a:t>
+            </a:r>
+          </a:p>
+        </p:txBody>
+      </p:sp>
+      <p:sp>
+        <p:nvSpPr>
+          <p:cNvPr id="12" name="TextBox 11"/>
+          <p:cNvSpPr txBox="1"/>
+          <p:nvPr/>
+        </p:nvSpPr>
+        <p:spPr>
+          <a:xfrm>
+            <a:off x="1463040" y="3886200"/>
+            <a:ext cx="9144000" cy="457200"/>
+          </a:xfrm>
+          <a:prstGeom prst="rect">
+            <a:avLst/>
+          </a:prstGeom>
+          <a:noFill/>
+        </p:spPr>
+        <p:txBody>
+          <a:bodyPr wrap="square">
+            <a:spAutoFit/>
+          </a:bodyPr>
+          <a:lstStyle/>
+          <a:p>
+            <a:pPr algn="l">
+              <a:defRPr sz="1600" b="0">
+                <a:solidFill>
+                  <a:srgbClr val="E8E8E8"/>
+                </a:solidFill>
+                <a:latin typeface="Calibri"/>
+              </a:defRPr>
+            </a:pPr>
+            <a:r>
+              <a:t>La brecha train-test se redujo de ~30% a menos del 7%. El modelo ahora generaliza.</a:t>
+            </a:r>
+          </a:p>
+        </p:txBody>
+      </p:sp>
+      <p:sp>
+        <p:nvSpPr>
+          <p:cNvPr id="13" name="Oval 12"/>
+          <p:cNvSpPr/>
+          <p:nvPr/>
+        </p:nvSpPr>
+        <p:spPr>
+          <a:xfrm>
+            <a:off x="1097280" y="4754880"/>
+            <a:ext cx="152400" cy="152400"/>
+          </a:xfrm>
+          <a:prstGeom prst="ellipse">
+            <a:avLst/>
+          </a:prstGeom>
+          <a:solidFill>
+            <a:srgbClr val="1A73E8"/>
+          </a:solidFill>
+          <a:ln>
+            <a:noFill/>
+          </a:ln>
+        </p:spPr>
+        <p:style>
+          <a:lnRef idx="1">
+            <a:schemeClr val="accent1"/>
+          </a:lnRef>
+          <a:fillRef idx="3">
+            <a:schemeClr val="accent1"/>
+          </a:fillRef>
+          <a:effectRef idx="2">
+            <a:schemeClr val="accent1"/>
+          </a:effectRef>
+          <a:fontRef idx="minor">
+            <a:schemeClr val="lt1"/>
+          </a:fontRef>
+        </p:style>
+        <p:txBody>
+          <a:bodyPr rtlCol="0" anchor="ctr"/>
+          <a:lstStyle/>
+          <a:p>
+            <a:pPr algn="ctr"/>
+          </a:p>
+        </p:txBody>
+      </p:sp>
+      <p:sp>
+        <p:nvSpPr>
+          <p:cNvPr id="14" name="TextBox 13"/>
+          <p:cNvSpPr txBox="1"/>
+          <p:nvPr/>
+        </p:nvSpPr>
+        <p:spPr>
+          <a:xfrm>
+            <a:off x="1463040" y="4572000"/>
+            <a:ext cx="2743200" cy="365760"/>
+          </a:xfrm>
+          <a:prstGeom prst="rect">
+            <a:avLst/>
+          </a:prstGeom>
+          <a:noFill/>
+        </p:spPr>
+        <p:txBody>
+          <a:bodyPr wrap="square">
+            <a:spAutoFit/>
+          </a:bodyPr>
+          <a:lstStyle/>
+          <a:p>
+            <a:pPr algn="l">
+              <a:defRPr sz="2000" b="1">
+                <a:solidFill>
+                  <a:srgbClr val="1A73E8"/>
+                </a:solidFill>
+                <a:latin typeface="Calibri"/>
+              </a:defRPr>
+            </a:pPr>
+            <a:r>
+              <a:t>HealthTech</a:t>
+            </a:r>
+          </a:p>
+        </p:txBody>
+      </p:sp>
+      <p:sp>
+        <p:nvSpPr>
+          <p:cNvPr id="15" name="TextBox 14"/>
+          <p:cNvSpPr txBox="1"/>
+          <p:nvPr/>
+        </p:nvSpPr>
+        <p:spPr>
+          <a:xfrm>
+            <a:off x="1463040" y="4937759"/>
+            <a:ext cx="9144000" cy="457200"/>
+          </a:xfrm>
+          <a:prstGeom prst="rect">
+            <a:avLst/>
+          </a:prstGeom>
+          <a:noFill/>
+        </p:spPr>
+        <p:txBody>
+          <a:bodyPr wrap="square">
+            <a:spAutoFit/>
+          </a:bodyPr>
+          <a:lstStyle/>
+          <a:p>
+            <a:pPr algn="l">
+              <a:defRPr sz="1600" b="0">
+                <a:solidFill>
+                  <a:srgbClr val="E8E8E8"/>
+                </a:solidFill>
+                <a:latin typeface="Calibri"/>
+              </a:defRPr>
+            </a:pPr>
+            <a:r>
+              <a:t>En medicina, un modelo con overfitting da diagnosticos falsos en pacientes nuevos. La regularizacion es esencial.</a:t>
+            </a:r>
+          </a:p>
+        </p:txBody>
+      </p:sp>
+      <p:sp>
+        <p:nvSpPr>
+          <p:cNvPr id="16" name="TextBox 15"/>
+          <p:cNvSpPr txBox="1"/>
+          <p:nvPr/>
+        </p:nvSpPr>
+        <p:spPr>
+          <a:xfrm>
+            <a:off x="1097280" y="5943600"/>
+            <a:ext cx="9966960" cy="365760"/>
+          </a:xfrm>
+          <a:prstGeom prst="rect">
+            <a:avLst/>
+          </a:prstGeom>
+          <a:noFill/>
+        </p:spPr>
+        <p:txBody>
+          <a:bodyPr wrap="square">
+            <a:spAutoFit/>
+          </a:bodyPr>
+          <a:lstStyle/>
+          <a:p>
+            <a:pPr algn="ctr">
               <a:defRPr sz="1300" b="0">
                 <a:solidFill>
-                  <a:srgbClr val="999999"/>
+                  <a:srgbClr val="909090"/>
                 </a:solidFill>
                 <a:latin typeface="Calibri"/>
               </a:defRPr>

--- a/Grupo7_La_Memoria_de_Pez.pptx
+++ b/Grupo7_La_Memoria_de_Pez.pptx
@@ -14,6 +14,7 @@
     <p:sldId id="262" r:id="rId13"/>
     <p:sldId id="263" r:id="rId14"/>
     <p:sldId id="264" r:id="rId15"/>
+    <p:sldId id="265" r:id="rId16"/>
   </p:sldIdLst>
   <p:sldSz cx="12191695" cy="6858000" type="screen4x3"/>
   <p:notesSz cx="6858000" cy="9144000"/>
@@ -3359,6 +3360,607 @@
             </a:pPr>
             <a:r>
               <a:t>Escuela de Posgrado  |  Modelos de Deep Learning</a:t>
+            </a:r>
+          </a:p>
+        </p:txBody>
+      </p:sp>
+    </p:spTree>
+  </p:cSld>
+  <p:clrMapOvr>
+    <a:masterClrMapping/>
+  </p:clrMapOvr>
+</p:sld>
+</file>
+
+<file path=ppt/slides/slide10.xml><?xml version="1.0" encoding="utf-8"?>
+<p:sld xmlns:a="http://schemas.openxmlformats.org/drawingml/2006/main" xmlns:p="http://schemas.openxmlformats.org/presentationml/2006/main" xmlns:r="http://schemas.openxmlformats.org/officeDocument/2006/relationships">
+  <p:cSld>
+    <p:bg>
+      <p:bgPr>
+        <a:solidFill>
+          <a:srgbClr val="14141E"/>
+        </a:solidFill>
+        <a:effectLst/>
+      </p:bgPr>
+    </p:bg>
+    <p:spTree>
+      <p:nvGrpSpPr>
+        <p:cNvPr id="1" name=""/>
+        <p:cNvGrpSpPr/>
+        <p:nvPr/>
+      </p:nvGrpSpPr>
+      <p:grpSpPr/>
+      <p:sp>
+        <p:nvSpPr>
+          <p:cNvPr id="2" name="TextBox 1"/>
+          <p:cNvSpPr txBox="1"/>
+          <p:nvPr/>
+        </p:nvSpPr>
+        <p:spPr>
+          <a:xfrm>
+            <a:off x="1097280" y="457200"/>
+            <a:ext cx="9144000" cy="640080"/>
+          </a:xfrm>
+          <a:prstGeom prst="rect">
+            <a:avLst/>
+          </a:prstGeom>
+          <a:noFill/>
+        </p:spPr>
+        <p:txBody>
+          <a:bodyPr wrap="square">
+            <a:spAutoFit/>
+          </a:bodyPr>
+          <a:lstStyle/>
+          <a:p>
+            <a:pPr algn="l">
+              <a:defRPr sz="4200" b="1">
+                <a:solidFill>
+                  <a:srgbClr val="FFFFFF"/>
+                </a:solidFill>
+                <a:latin typeface="Calibri"/>
+              </a:defRPr>
+            </a:pPr>
+            <a:r>
+              <a:t>Conclusiones</a:t>
+            </a:r>
+          </a:p>
+        </p:txBody>
+      </p:sp>
+      <p:sp>
+        <p:nvSpPr>
+          <p:cNvPr id="3" name="Rectangle 2"/>
+          <p:cNvSpPr/>
+          <p:nvPr/>
+        </p:nvSpPr>
+        <p:spPr>
+          <a:xfrm>
+            <a:off x="1097280" y="1051560"/>
+            <a:ext cx="2286000" cy="38100"/>
+          </a:xfrm>
+          <a:prstGeom prst="rect">
+            <a:avLst/>
+          </a:prstGeom>
+          <a:solidFill>
+            <a:srgbClr val="1A73E8"/>
+          </a:solidFill>
+          <a:ln>
+            <a:noFill/>
+          </a:ln>
+        </p:spPr>
+        <p:style>
+          <a:lnRef idx="1">
+            <a:schemeClr val="accent1"/>
+          </a:lnRef>
+          <a:fillRef idx="3">
+            <a:schemeClr val="accent1"/>
+          </a:fillRef>
+          <a:effectRef idx="2">
+            <a:schemeClr val="accent1"/>
+          </a:effectRef>
+          <a:fontRef idx="minor">
+            <a:schemeClr val="lt1"/>
+          </a:fontRef>
+        </p:style>
+        <p:txBody>
+          <a:bodyPr rtlCol="0" anchor="ctr"/>
+          <a:lstStyle/>
+          <a:p>
+            <a:pPr algn="ctr"/>
+          </a:p>
+        </p:txBody>
+      </p:sp>
+      <p:sp>
+        <p:nvSpPr>
+          <p:cNvPr id="4" name="Oval 3"/>
+          <p:cNvSpPr/>
+          <p:nvPr/>
+        </p:nvSpPr>
+        <p:spPr>
+          <a:xfrm>
+            <a:off x="1097280" y="1600200"/>
+            <a:ext cx="152400" cy="152400"/>
+          </a:xfrm>
+          <a:prstGeom prst="ellipse">
+            <a:avLst/>
+          </a:prstGeom>
+          <a:solidFill>
+            <a:srgbClr val="1A73E8"/>
+          </a:solidFill>
+          <a:ln>
+            <a:noFill/>
+          </a:ln>
+        </p:spPr>
+        <p:style>
+          <a:lnRef idx="1">
+            <a:schemeClr val="accent1"/>
+          </a:lnRef>
+          <a:fillRef idx="3">
+            <a:schemeClr val="accent1"/>
+          </a:fillRef>
+          <a:effectRef idx="2">
+            <a:schemeClr val="accent1"/>
+          </a:effectRef>
+          <a:fontRef idx="minor">
+            <a:schemeClr val="lt1"/>
+          </a:fontRef>
+        </p:style>
+        <p:txBody>
+          <a:bodyPr rtlCol="0" anchor="ctr"/>
+          <a:lstStyle/>
+          <a:p>
+            <a:pPr algn="ctr"/>
+          </a:p>
+        </p:txBody>
+      </p:sp>
+      <p:sp>
+        <p:nvSpPr>
+          <p:cNvPr id="5" name="TextBox 4"/>
+          <p:cNvSpPr txBox="1"/>
+          <p:nvPr/>
+        </p:nvSpPr>
+        <p:spPr>
+          <a:xfrm>
+            <a:off x="1463040" y="1417320"/>
+            <a:ext cx="2743200" cy="365760"/>
+          </a:xfrm>
+          <a:prstGeom prst="rect">
+            <a:avLst/>
+          </a:prstGeom>
+          <a:noFill/>
+        </p:spPr>
+        <p:txBody>
+          <a:bodyPr wrap="square">
+            <a:spAutoFit/>
+          </a:bodyPr>
+          <a:lstStyle/>
+          <a:p>
+            <a:pPr algn="l">
+              <a:defRPr sz="2000" b="1">
+                <a:solidFill>
+                  <a:srgbClr val="1A73E8"/>
+                </a:solidFill>
+                <a:latin typeface="Calibri"/>
+              </a:defRPr>
+            </a:pPr>
+            <a:r>
+              <a:t>Diagnostico</a:t>
+            </a:r>
+          </a:p>
+        </p:txBody>
+      </p:sp>
+      <p:sp>
+        <p:nvSpPr>
+          <p:cNvPr id="6" name="TextBox 5"/>
+          <p:cNvSpPr txBox="1"/>
+          <p:nvPr/>
+        </p:nvSpPr>
+        <p:spPr>
+          <a:xfrm>
+            <a:off x="1463040" y="1783080"/>
+            <a:ext cx="9144000" cy="457200"/>
+          </a:xfrm>
+          <a:prstGeom prst="rect">
+            <a:avLst/>
+          </a:prstGeom>
+          <a:noFill/>
+        </p:spPr>
+        <p:txBody>
+          <a:bodyPr wrap="square">
+            <a:spAutoFit/>
+          </a:bodyPr>
+          <a:lstStyle/>
+          <a:p>
+            <a:pPr algn="l">
+              <a:defRPr sz="1600" b="0">
+                <a:solidFill>
+                  <a:srgbClr val="E8E8E8"/>
+                </a:solidFill>
+                <a:latin typeface="Calibri"/>
+              </a:defRPr>
+            </a:pPr>
+            <a:r>
+              <a:t>El modelo memorizaba el dataset. Train ~100%, Test ~65-75%. Overfitting violento por falta de regularizacion.</a:t>
+            </a:r>
+          </a:p>
+        </p:txBody>
+      </p:sp>
+      <p:sp>
+        <p:nvSpPr>
+          <p:cNvPr id="7" name="Oval 6"/>
+          <p:cNvSpPr/>
+          <p:nvPr/>
+        </p:nvSpPr>
+        <p:spPr>
+          <a:xfrm>
+            <a:off x="1097280" y="2651760"/>
+            <a:ext cx="152400" cy="152400"/>
+          </a:xfrm>
+          <a:prstGeom prst="ellipse">
+            <a:avLst/>
+          </a:prstGeom>
+          <a:solidFill>
+            <a:srgbClr val="1A73E8"/>
+          </a:solidFill>
+          <a:ln>
+            <a:noFill/>
+          </a:ln>
+        </p:spPr>
+        <p:style>
+          <a:lnRef idx="1">
+            <a:schemeClr val="accent1"/>
+          </a:lnRef>
+          <a:fillRef idx="3">
+            <a:schemeClr val="accent1"/>
+          </a:fillRef>
+          <a:effectRef idx="2">
+            <a:schemeClr val="accent1"/>
+          </a:effectRef>
+          <a:fontRef idx="minor">
+            <a:schemeClr val="lt1"/>
+          </a:fontRef>
+        </p:style>
+        <p:txBody>
+          <a:bodyPr rtlCol="0" anchor="ctr"/>
+          <a:lstStyle/>
+          <a:p>
+            <a:pPr algn="ctr"/>
+          </a:p>
+        </p:txBody>
+      </p:sp>
+      <p:sp>
+        <p:nvSpPr>
+          <p:cNvPr id="8" name="TextBox 7"/>
+          <p:cNvSpPr txBox="1"/>
+          <p:nvPr/>
+        </p:nvSpPr>
+        <p:spPr>
+          <a:xfrm>
+            <a:off x="1463040" y="2468880"/>
+            <a:ext cx="2743200" cy="365760"/>
+          </a:xfrm>
+          <a:prstGeom prst="rect">
+            <a:avLst/>
+          </a:prstGeom>
+          <a:noFill/>
+        </p:spPr>
+        <p:txBody>
+          <a:bodyPr wrap="square">
+            <a:spAutoFit/>
+          </a:bodyPr>
+          <a:lstStyle/>
+          <a:p>
+            <a:pPr algn="l">
+              <a:defRPr sz="2000" b="1">
+                <a:solidFill>
+                  <a:srgbClr val="1A73E8"/>
+                </a:solidFill>
+                <a:latin typeface="Calibri"/>
+              </a:defRPr>
+            </a:pPr>
+            <a:r>
+              <a:t>Interruptor</a:t>
+            </a:r>
+          </a:p>
+        </p:txBody>
+      </p:sp>
+      <p:sp>
+        <p:nvSpPr>
+          <p:cNvPr id="9" name="TextBox 8"/>
+          <p:cNvSpPr txBox="1"/>
+          <p:nvPr/>
+        </p:nvSpPr>
+        <p:spPr>
+          <a:xfrm>
+            <a:off x="1463040" y="2834640"/>
+            <a:ext cx="9144000" cy="457200"/>
+          </a:xfrm>
+          <a:prstGeom prst="rect">
+            <a:avLst/>
+          </a:prstGeom>
+          <a:noFill/>
+        </p:spPr>
+        <p:txBody>
+          <a:bodyPr wrap="square">
+            <a:spAutoFit/>
+          </a:bodyPr>
+          <a:lstStyle/>
+          <a:p>
+            <a:pPr algn="l">
+              <a:defRPr sz="1600" b="0">
+                <a:solidFill>
+                  <a:srgbClr val="E8E8E8"/>
+                </a:solidFill>
+                <a:latin typeface="Calibri"/>
+              </a:defRPr>
+            </a:pPr>
+            <a:r>
+              <a:t>Activamos Weight Decay (L2=0.01), Dropout (p=0.3) y redujimos la red de ~19K a ~300 parametros.</a:t>
+            </a:r>
+          </a:p>
+        </p:txBody>
+      </p:sp>
+      <p:sp>
+        <p:nvSpPr>
+          <p:cNvPr id="10" name="Oval 9"/>
+          <p:cNvSpPr/>
+          <p:nvPr/>
+        </p:nvSpPr>
+        <p:spPr>
+          <a:xfrm>
+            <a:off x="1097280" y="3703320"/>
+            <a:ext cx="152400" cy="152400"/>
+          </a:xfrm>
+          <a:prstGeom prst="ellipse">
+            <a:avLst/>
+          </a:prstGeom>
+          <a:solidFill>
+            <a:srgbClr val="1A73E8"/>
+          </a:solidFill>
+          <a:ln>
+            <a:noFill/>
+          </a:ln>
+        </p:spPr>
+        <p:style>
+          <a:lnRef idx="1">
+            <a:schemeClr val="accent1"/>
+          </a:lnRef>
+          <a:fillRef idx="3">
+            <a:schemeClr val="accent1"/>
+          </a:fillRef>
+          <a:effectRef idx="2">
+            <a:schemeClr val="accent1"/>
+          </a:effectRef>
+          <a:fontRef idx="minor">
+            <a:schemeClr val="lt1"/>
+          </a:fontRef>
+        </p:style>
+        <p:txBody>
+          <a:bodyPr rtlCol="0" anchor="ctr"/>
+          <a:lstStyle/>
+          <a:p>
+            <a:pPr algn="ctr"/>
+          </a:p>
+        </p:txBody>
+      </p:sp>
+      <p:sp>
+        <p:nvSpPr>
+          <p:cNvPr id="11" name="TextBox 10"/>
+          <p:cNvSpPr txBox="1"/>
+          <p:nvPr/>
+        </p:nvSpPr>
+        <p:spPr>
+          <a:xfrm>
+            <a:off x="1463040" y="3520440"/>
+            <a:ext cx="2743200" cy="365760"/>
+          </a:xfrm>
+          <a:prstGeom prst="rect">
+            <a:avLst/>
+          </a:prstGeom>
+          <a:noFill/>
+        </p:spPr>
+        <p:txBody>
+          <a:bodyPr wrap="square">
+            <a:spAutoFit/>
+          </a:bodyPr>
+          <a:lstStyle/>
+          <a:p>
+            <a:pPr algn="l">
+              <a:defRPr sz="2000" b="1">
+                <a:solidFill>
+                  <a:srgbClr val="1A73E8"/>
+                </a:solidFill>
+                <a:latin typeface="Calibri"/>
+              </a:defRPr>
+            </a:pPr>
+            <a:r>
+              <a:t>Resultado</a:t>
+            </a:r>
+          </a:p>
+        </p:txBody>
+      </p:sp>
+      <p:sp>
+        <p:nvSpPr>
+          <p:cNvPr id="12" name="TextBox 11"/>
+          <p:cNvSpPr txBox="1"/>
+          <p:nvPr/>
+        </p:nvSpPr>
+        <p:spPr>
+          <a:xfrm>
+            <a:off x="1463040" y="3886200"/>
+            <a:ext cx="9144000" cy="457200"/>
+          </a:xfrm>
+          <a:prstGeom prst="rect">
+            <a:avLst/>
+          </a:prstGeom>
+          <a:noFill/>
+        </p:spPr>
+        <p:txBody>
+          <a:bodyPr wrap="square">
+            <a:spAutoFit/>
+          </a:bodyPr>
+          <a:lstStyle/>
+          <a:p>
+            <a:pPr algn="l">
+              <a:defRPr sz="1600" b="0">
+                <a:solidFill>
+                  <a:srgbClr val="E8E8E8"/>
+                </a:solidFill>
+                <a:latin typeface="Calibri"/>
+              </a:defRPr>
+            </a:pPr>
+            <a:r>
+              <a:t>La brecha train-test se redujo de ~30% a menos del 7%. El modelo ahora generaliza.</a:t>
+            </a:r>
+          </a:p>
+        </p:txBody>
+      </p:sp>
+      <p:sp>
+        <p:nvSpPr>
+          <p:cNvPr id="13" name="Oval 12"/>
+          <p:cNvSpPr/>
+          <p:nvPr/>
+        </p:nvSpPr>
+        <p:spPr>
+          <a:xfrm>
+            <a:off x="1097280" y="4754880"/>
+            <a:ext cx="152400" cy="152400"/>
+          </a:xfrm>
+          <a:prstGeom prst="ellipse">
+            <a:avLst/>
+          </a:prstGeom>
+          <a:solidFill>
+            <a:srgbClr val="1A73E8"/>
+          </a:solidFill>
+          <a:ln>
+            <a:noFill/>
+          </a:ln>
+        </p:spPr>
+        <p:style>
+          <a:lnRef idx="1">
+            <a:schemeClr val="accent1"/>
+          </a:lnRef>
+          <a:fillRef idx="3">
+            <a:schemeClr val="accent1"/>
+          </a:fillRef>
+          <a:effectRef idx="2">
+            <a:schemeClr val="accent1"/>
+          </a:effectRef>
+          <a:fontRef idx="minor">
+            <a:schemeClr val="lt1"/>
+          </a:fontRef>
+        </p:style>
+        <p:txBody>
+          <a:bodyPr rtlCol="0" anchor="ctr"/>
+          <a:lstStyle/>
+          <a:p>
+            <a:pPr algn="ctr"/>
+          </a:p>
+        </p:txBody>
+      </p:sp>
+      <p:sp>
+        <p:nvSpPr>
+          <p:cNvPr id="14" name="TextBox 13"/>
+          <p:cNvSpPr txBox="1"/>
+          <p:nvPr/>
+        </p:nvSpPr>
+        <p:spPr>
+          <a:xfrm>
+            <a:off x="1463040" y="4572000"/>
+            <a:ext cx="2743200" cy="365760"/>
+          </a:xfrm>
+          <a:prstGeom prst="rect">
+            <a:avLst/>
+          </a:prstGeom>
+          <a:noFill/>
+        </p:spPr>
+        <p:txBody>
+          <a:bodyPr wrap="square">
+            <a:spAutoFit/>
+          </a:bodyPr>
+          <a:lstStyle/>
+          <a:p>
+            <a:pPr algn="l">
+              <a:defRPr sz="2000" b="1">
+                <a:solidFill>
+                  <a:srgbClr val="1A73E8"/>
+                </a:solidFill>
+                <a:latin typeface="Calibri"/>
+              </a:defRPr>
+            </a:pPr>
+            <a:r>
+              <a:t>HealthTech</a:t>
+            </a:r>
+          </a:p>
+        </p:txBody>
+      </p:sp>
+      <p:sp>
+        <p:nvSpPr>
+          <p:cNvPr id="15" name="TextBox 14"/>
+          <p:cNvSpPr txBox="1"/>
+          <p:nvPr/>
+        </p:nvSpPr>
+        <p:spPr>
+          <a:xfrm>
+            <a:off x="1463040" y="4937759"/>
+            <a:ext cx="9144000" cy="457200"/>
+          </a:xfrm>
+          <a:prstGeom prst="rect">
+            <a:avLst/>
+          </a:prstGeom>
+          <a:noFill/>
+        </p:spPr>
+        <p:txBody>
+          <a:bodyPr wrap="square">
+            <a:spAutoFit/>
+          </a:bodyPr>
+          <a:lstStyle/>
+          <a:p>
+            <a:pPr algn="l">
+              <a:defRPr sz="1600" b="0">
+                <a:solidFill>
+                  <a:srgbClr val="E8E8E8"/>
+                </a:solidFill>
+                <a:latin typeface="Calibri"/>
+              </a:defRPr>
+            </a:pPr>
+            <a:r>
+              <a:t>En medicina, un modelo con overfitting da diagnosticos falsos en pacientes nuevos. La regularizacion es esencial.</a:t>
+            </a:r>
+          </a:p>
+        </p:txBody>
+      </p:sp>
+      <p:sp>
+        <p:nvSpPr>
+          <p:cNvPr id="16" name="TextBox 15"/>
+          <p:cNvSpPr txBox="1"/>
+          <p:nvPr/>
+        </p:nvSpPr>
+        <p:spPr>
+          <a:xfrm>
+            <a:off x="1097280" y="5943600"/>
+            <a:ext cx="9966960" cy="365760"/>
+          </a:xfrm>
+          <a:prstGeom prst="rect">
+            <a:avLst/>
+          </a:prstGeom>
+          <a:noFill/>
+        </p:spPr>
+        <p:txBody>
+          <a:bodyPr wrap="square">
+            <a:spAutoFit/>
+          </a:bodyPr>
+          <a:lstStyle/>
+          <a:p>
+            <a:pPr algn="ctr">
+              <a:defRPr sz="1300" b="0">
+                <a:solidFill>
+                  <a:srgbClr val="909090"/>
+                </a:solidFill>
+                <a:latin typeface="Calibri"/>
+              </a:defRPr>
+            </a:pPr>
+            <a:r>
+              <a:t>Grupo 7  |  La Memoria de Pez  |  Bloque 3: Problemas de Estrategia</a:t>
             </a:r>
           </a:p>
         </p:txBody>
@@ -8218,7 +8820,7 @@
         </p:nvSpPr>
         <p:spPr>
           <a:xfrm>
-            <a:off x="1097280" y="1463040"/>
+            <a:off x="1097280" y="1280160"/>
             <a:ext cx="9144000" cy="365760"/>
           </a:xfrm>
           <a:prstGeom prst="rect">
@@ -8233,65 +8835,29 @@
           <a:lstStyle/>
           <a:p>
             <a:pPr algn="l">
-              <a:defRPr sz="1900" b="1">
-                <a:solidFill>
-                  <a:srgbClr val="2A2A2A"/>
-                </a:solidFill>
-                <a:latin typeface="Calibri"/>
-              </a:defRPr>
-            </a:pPr>
-            <a:r>
-              <a:t>Sin Weight Decay</a:t>
-            </a:r>
-          </a:p>
-        </p:txBody>
-      </p:sp>
-      <p:sp>
-        <p:nvSpPr>
-          <p:cNvPr id="5" name="TextBox 4"/>
-          <p:cNvSpPr txBox="1"/>
-          <p:nvPr/>
-        </p:nvSpPr>
-        <p:spPr>
-          <a:xfrm>
-            <a:off x="1371600" y="1828800"/>
-            <a:ext cx="7315200" cy="365760"/>
-          </a:xfrm>
-          <a:prstGeom prst="rect">
-            <a:avLst/>
-          </a:prstGeom>
-          <a:noFill/>
-        </p:spPr>
-        <p:txBody>
-          <a:bodyPr wrap="square">
-            <a:spAutoFit/>
-          </a:bodyPr>
-          <a:lstStyle/>
-          <a:p>
-            <a:pPr algn="l">
-              <a:defRPr sz="1400" b="0">
-                <a:solidFill>
-                  <a:srgbClr val="606060"/>
-                </a:solidFill>
-                <a:latin typeface="Calibri"/>
-              </a:defRPr>
-            </a:pPr>
-            <a:r>
-              <a:t>Los pesos se actualizan solo por el gradiente. No hay limite a su crecimiento.</a:t>
-            </a:r>
-          </a:p>
-        </p:txBody>
-      </p:sp>
-      <p:sp>
-        <p:nvSpPr>
-          <p:cNvPr id="6" name="Rounded Rectangle 5"/>
+              <a:defRPr sz="1700" b="1">
+                <a:solidFill>
+                  <a:srgbClr val="7B1FA2"/>
+                </a:solidFill>
+                <a:latin typeface="Calibri"/>
+              </a:defRPr>
+            </a:pPr>
+            <a:r>
+              <a:t>Efecto del Weight Decay en la actualizacion de pesos</a:t>
+            </a:r>
+          </a:p>
+        </p:txBody>
+      </p:sp>
+      <p:sp>
+        <p:nvSpPr>
+          <p:cNvPr id="5" name="Rounded Rectangle 4"/>
           <p:cNvSpPr/>
           <p:nvPr/>
         </p:nvSpPr>
         <p:spPr>
           <a:xfrm>
-            <a:off x="1371600" y="2286000"/>
-            <a:ext cx="7315200" cy="731520"/>
+            <a:off x="1097280" y="2011680"/>
+            <a:ext cx="9966960" cy="1920240"/>
           </a:xfrm>
           <a:prstGeom prst="roundRect">
             <a:avLst>
@@ -8299,10 +8865,12 @@
             </a:avLst>
           </a:prstGeom>
           <a:solidFill>
-            <a:srgbClr val="F4F4F6"/>
+            <a:srgbClr val="F5EEFC"/>
           </a:solidFill>
-          <a:ln>
-            <a:noFill/>
+          <a:ln w="12700">
+            <a:solidFill>
+              <a:srgbClr val="7B1FA2"/>
+            </a:solidFill>
           </a:ln>
         </p:spPr>
         <p:style>
@@ -8327,9 +8895,81 @@
           </a:p>
         </p:txBody>
       </p:sp>
+      <p:sp>
+        <p:nvSpPr>
+          <p:cNvPr id="6" name="TextBox 5"/>
+          <p:cNvSpPr txBox="1"/>
+          <p:nvPr/>
+        </p:nvSpPr>
+        <p:spPr>
+          <a:xfrm>
+            <a:off x="1463040" y="2148840"/>
+            <a:ext cx="3657600" cy="365760"/>
+          </a:xfrm>
+          <a:prstGeom prst="rect">
+            <a:avLst/>
+          </a:prstGeom>
+          <a:noFill/>
+        </p:spPr>
+        <p:txBody>
+          <a:bodyPr wrap="square">
+            <a:spAutoFit/>
+          </a:bodyPr>
+          <a:lstStyle/>
+          <a:p>
+            <a:pPr algn="l">
+              <a:defRPr sz="2200" b="1">
+                <a:solidFill>
+                  <a:srgbClr val="7B1FA2"/>
+                </a:solidFill>
+                <a:latin typeface="Calibri"/>
+              </a:defRPr>
+            </a:pPr>
+            <a:r>
+              <a:t>Sin Weight Decay</a:t>
+            </a:r>
+          </a:p>
+        </p:txBody>
+      </p:sp>
+      <p:sp>
+        <p:nvSpPr>
+          <p:cNvPr id="7" name="TextBox 6"/>
+          <p:cNvSpPr txBox="1"/>
+          <p:nvPr/>
+        </p:nvSpPr>
+        <p:spPr>
+          <a:xfrm>
+            <a:off x="1463040" y="2606040"/>
+            <a:ext cx="8229600" cy="457200"/>
+          </a:xfrm>
+          <a:prstGeom prst="rect">
+            <a:avLst/>
+          </a:prstGeom>
+          <a:noFill/>
+        </p:spPr>
+        <p:txBody>
+          <a:bodyPr wrap="square">
+            <a:spAutoFit/>
+          </a:bodyPr>
+          <a:lstStyle/>
+          <a:p>
+            <a:pPr algn="l">
+              <a:defRPr sz="1500" b="0">
+                <a:solidFill>
+                  <a:srgbClr val="2A2A2A"/>
+                </a:solidFill>
+                <a:latin typeface="Calibri"/>
+              </a:defRPr>
+            </a:pPr>
+            <a:r>
+              <a:t>Los pesos se actualizan solo por el gradiente de la perdida. No hay limite a su crecimiento.</a:t>
+            </a:r>
+          </a:p>
+        </p:txBody>
+      </p:sp>
       <p:pic>
         <p:nvPicPr>
-          <p:cNvPr id="7" name="Picture 6" descr="f_sin_decay.png"/>
+          <p:cNvPr id="8" name="Picture 7" descr="f_sin_decay.png"/>
           <p:cNvPicPr>
             <a:picLocks noChangeAspect="1"/>
           </p:cNvPicPr>
@@ -8343,8 +8983,8 @@
         </p:blipFill>
         <p:spPr>
           <a:xfrm>
-            <a:off x="2286000" y="2331720"/>
-            <a:ext cx="5029200" cy="667749"/>
+            <a:off x="2286000" y="3017520"/>
+            <a:ext cx="5486400" cy="728453"/>
           </a:xfrm>
           <a:prstGeom prst="rect">
             <a:avLst/>
@@ -8353,86 +8993,14 @@
       </p:pic>
       <p:sp>
         <p:nvSpPr>
-          <p:cNvPr id="8" name="TextBox 7"/>
-          <p:cNvSpPr txBox="1"/>
-          <p:nvPr/>
-        </p:nvSpPr>
-        <p:spPr>
-          <a:xfrm>
-            <a:off x="1097280" y="3200400"/>
-            <a:ext cx="9144000" cy="365760"/>
-          </a:xfrm>
-          <a:prstGeom prst="rect">
-            <a:avLst/>
-          </a:prstGeom>
-          <a:noFill/>
-        </p:spPr>
-        <p:txBody>
-          <a:bodyPr wrap="square">
-            <a:spAutoFit/>
-          </a:bodyPr>
-          <a:lstStyle/>
-          <a:p>
-            <a:pPr algn="l">
-              <a:defRPr sz="1900" b="1">
-                <a:solidFill>
-                  <a:srgbClr val="2A2A2A"/>
-                </a:solidFill>
-                <a:latin typeface="Calibri"/>
-              </a:defRPr>
-            </a:pPr>
-            <a:r>
-              <a:t>Con Weight Decay (L2)</a:t>
-            </a:r>
-          </a:p>
-        </p:txBody>
-      </p:sp>
-      <p:sp>
-        <p:nvSpPr>
-          <p:cNvPr id="9" name="TextBox 8"/>
-          <p:cNvSpPr txBox="1"/>
-          <p:nvPr/>
-        </p:nvSpPr>
-        <p:spPr>
-          <a:xfrm>
-            <a:off x="1371600" y="3566160"/>
-            <a:ext cx="7315200" cy="365760"/>
-          </a:xfrm>
-          <a:prstGeom prst="rect">
-            <a:avLst/>
-          </a:prstGeom>
-          <a:noFill/>
-        </p:spPr>
-        <p:txBody>
-          <a:bodyPr wrap="square">
-            <a:spAutoFit/>
-          </a:bodyPr>
-          <a:lstStyle/>
-          <a:p>
-            <a:pPr algn="l">
-              <a:defRPr sz="1400" b="0">
-                <a:solidFill>
-                  <a:srgbClr val="606060"/>
-                </a:solidFill>
-                <a:latin typeface="Calibri"/>
-              </a:defRPr>
-            </a:pPr>
-            <a:r>
-              <a:t>El factor (1 - eta*lambda) encoge los pesos en cada paso. Pesos grandes se penalizan mas.</a:t>
-            </a:r>
-          </a:p>
-        </p:txBody>
-      </p:sp>
-      <p:sp>
-        <p:nvSpPr>
-          <p:cNvPr id="10" name="Rounded Rectangle 9"/>
+          <p:cNvPr id="9" name="Rounded Rectangle 8"/>
           <p:cNvSpPr/>
           <p:nvPr/>
         </p:nvSpPr>
         <p:spPr>
           <a:xfrm>
-            <a:off x="1371600" y="3931920"/>
-            <a:ext cx="8686800" cy="822960"/>
+            <a:off x="1097280" y="4206240"/>
+            <a:ext cx="9966960" cy="2286000"/>
           </a:xfrm>
           <a:prstGeom prst="roundRect">
             <a:avLst>
@@ -8440,10 +9008,12 @@
             </a:avLst>
           </a:prstGeom>
           <a:solidFill>
-            <a:srgbClr val="F4F4F6"/>
+            <a:srgbClr val="EEF7F0"/>
           </a:solidFill>
-          <a:ln>
-            <a:noFill/>
+          <a:ln w="12700">
+            <a:solidFill>
+              <a:srgbClr val="1E8850"/>
+            </a:solidFill>
           </a:ln>
         </p:spPr>
         <p:style>
@@ -8468,9 +9038,81 @@
           </a:p>
         </p:txBody>
       </p:sp>
+      <p:sp>
+        <p:nvSpPr>
+          <p:cNvPr id="10" name="TextBox 9"/>
+          <p:cNvSpPr txBox="1"/>
+          <p:nvPr/>
+        </p:nvSpPr>
+        <p:spPr>
+          <a:xfrm>
+            <a:off x="1463040" y="4343400"/>
+            <a:ext cx="3657600" cy="365760"/>
+          </a:xfrm>
+          <a:prstGeom prst="rect">
+            <a:avLst/>
+          </a:prstGeom>
+          <a:noFill/>
+        </p:spPr>
+        <p:txBody>
+          <a:bodyPr wrap="square">
+            <a:spAutoFit/>
+          </a:bodyPr>
+          <a:lstStyle/>
+          <a:p>
+            <a:pPr algn="l">
+              <a:defRPr sz="2200" b="1">
+                <a:solidFill>
+                  <a:srgbClr val="1E8850"/>
+                </a:solidFill>
+                <a:latin typeface="Calibri"/>
+              </a:defRPr>
+            </a:pPr>
+            <a:r>
+              <a:t>Con Weight Decay (L2)</a:t>
+            </a:r>
+          </a:p>
+        </p:txBody>
+      </p:sp>
+      <p:sp>
+        <p:nvSpPr>
+          <p:cNvPr id="11" name="TextBox 10"/>
+          <p:cNvSpPr txBox="1"/>
+          <p:nvPr/>
+        </p:nvSpPr>
+        <p:spPr>
+          <a:xfrm>
+            <a:off x="1463040" y="4800600"/>
+            <a:ext cx="8229600" cy="457200"/>
+          </a:xfrm>
+          <a:prstGeom prst="rect">
+            <a:avLst/>
+          </a:prstGeom>
+          <a:noFill/>
+        </p:spPr>
+        <p:txBody>
+          <a:bodyPr wrap="square">
+            <a:spAutoFit/>
+          </a:bodyPr>
+          <a:lstStyle/>
+          <a:p>
+            <a:pPr algn="l">
+              <a:defRPr sz="1500" b="0">
+                <a:solidFill>
+                  <a:srgbClr val="2A2A2A"/>
+                </a:solidFill>
+                <a:latin typeface="Calibri"/>
+              </a:defRPr>
+            </a:pPr>
+            <a:r>
+              <a:t>El factor (1 - eta * lambda) encoge los pesos en cada paso. Pesos grandes se penalizan mas.</a:t>
+            </a:r>
+          </a:p>
+        </p:txBody>
+      </p:sp>
       <p:pic>
         <p:nvPicPr>
-          <p:cNvPr id="11" name="Picture 10" descr="f_con_decay.png"/>
+          <p:cNvPr id="12" name="Picture 11" descr="f_con_decay.png"/>
           <p:cNvPicPr>
             <a:picLocks noChangeAspect="1"/>
           </p:cNvPicPr>
@@ -8484,218 +9126,8 @@
         </p:blipFill>
         <p:spPr>
           <a:xfrm>
-            <a:off x="1828800" y="3977639"/>
+            <a:off x="1828800" y="5303520"/>
             <a:ext cx="6858000" cy="788406"/>
-          </a:xfrm>
-          <a:prstGeom prst="rect">
-            <a:avLst/>
-          </a:prstGeom>
-        </p:spPr>
-      </p:pic>
-      <p:sp>
-        <p:nvSpPr>
-          <p:cNvPr id="12" name="TextBox 11"/>
-          <p:cNvSpPr txBox="1"/>
-          <p:nvPr/>
-        </p:nvSpPr>
-        <p:spPr>
-          <a:xfrm>
-            <a:off x="1097280" y="4937760"/>
-            <a:ext cx="4572000" cy="365760"/>
-          </a:xfrm>
-          <a:prstGeom prst="rect">
-            <a:avLst/>
-          </a:prstGeom>
-          <a:noFill/>
-        </p:spPr>
-        <p:txBody>
-          <a:bodyPr wrap="square">
-            <a:spAutoFit/>
-          </a:bodyPr>
-          <a:lstStyle/>
-          <a:p>
-            <a:pPr algn="l">
-              <a:defRPr sz="1900" b="1">
-                <a:solidFill>
-                  <a:srgbClr val="2A2A2A"/>
-                </a:solidFill>
-                <a:latin typeface="Calibri"/>
-              </a:defRPr>
-            </a:pPr>
-            <a:r>
-              <a:t>Dropout</a:t>
-            </a:r>
-          </a:p>
-        </p:txBody>
-      </p:sp>
-      <p:sp>
-        <p:nvSpPr>
-          <p:cNvPr id="13" name="Rounded Rectangle 12"/>
-          <p:cNvSpPr/>
-          <p:nvPr/>
-        </p:nvSpPr>
-        <p:spPr>
-          <a:xfrm>
-            <a:off x="1371600" y="5303520"/>
-            <a:ext cx="4572000" cy="1188720"/>
-          </a:xfrm>
-          <a:prstGeom prst="roundRect">
-            <a:avLst>
-              <a:gd name="adj" fmla="val 4000"/>
-            </a:avLst>
-          </a:prstGeom>
-          <a:solidFill>
-            <a:srgbClr val="F4F4F6"/>
-          </a:solidFill>
-          <a:ln>
-            <a:noFill/>
-          </a:ln>
-        </p:spPr>
-        <p:style>
-          <a:lnRef idx="1">
-            <a:schemeClr val="accent1"/>
-          </a:lnRef>
-          <a:fillRef idx="3">
-            <a:schemeClr val="accent1"/>
-          </a:fillRef>
-          <a:effectRef idx="2">
-            <a:schemeClr val="accent1"/>
-          </a:effectRef>
-          <a:fontRef idx="minor">
-            <a:schemeClr val="lt1"/>
-          </a:fontRef>
-        </p:style>
-        <p:txBody>
-          <a:bodyPr rtlCol="0" anchor="ctr"/>
-          <a:lstStyle/>
-          <a:p>
-            <a:pPr algn="ctr"/>
-          </a:p>
-        </p:txBody>
-      </p:sp>
-      <p:pic>
-        <p:nvPicPr>
-          <p:cNvPr id="14" name="Picture 13" descr="f_dropout.png"/>
-          <p:cNvPicPr>
-            <a:picLocks noChangeAspect="1"/>
-          </p:cNvPicPr>
-          <p:nvPr/>
-        </p:nvPicPr>
-        <p:blipFill>
-          <a:blip r:embed="rId4"/>
-          <a:stretch>
-            <a:fillRect/>
-          </a:stretch>
-        </p:blipFill>
-        <p:spPr>
-          <a:xfrm>
-            <a:off x="1645920" y="5349240"/>
-            <a:ext cx="3657600" cy="470423"/>
-          </a:xfrm>
-          <a:prstGeom prst="rect">
-            <a:avLst/>
-          </a:prstGeom>
-        </p:spPr>
-      </p:pic>
-      <p:sp>
-        <p:nvSpPr>
-          <p:cNvPr id="15" name="TextBox 14"/>
-          <p:cNvSpPr txBox="1"/>
-          <p:nvPr/>
-        </p:nvSpPr>
-        <p:spPr>
-          <a:xfrm>
-            <a:off x="6400800" y="4937760"/>
-            <a:ext cx="4572000" cy="365760"/>
-          </a:xfrm>
-          <a:prstGeom prst="rect">
-            <a:avLst/>
-          </a:prstGeom>
-          <a:noFill/>
-        </p:spPr>
-        <p:txBody>
-          <a:bodyPr wrap="square">
-            <a:spAutoFit/>
-          </a:bodyPr>
-          <a:lstStyle/>
-          <a:p>
-            <a:pPr algn="l">
-              <a:defRPr sz="1900" b="1">
-                <a:solidFill>
-                  <a:srgbClr val="2A2A2A"/>
-                </a:solidFill>
-                <a:latin typeface="Calibri"/>
-              </a:defRPr>
-            </a:pPr>
-            <a:r>
-              <a:t>Loss total con L2</a:t>
-            </a:r>
-          </a:p>
-        </p:txBody>
-      </p:sp>
-      <p:sp>
-        <p:nvSpPr>
-          <p:cNvPr id="16" name="Rounded Rectangle 15"/>
-          <p:cNvSpPr/>
-          <p:nvPr/>
-        </p:nvSpPr>
-        <p:spPr>
-          <a:xfrm>
-            <a:off x="6400800" y="5303520"/>
-            <a:ext cx="5029200" cy="914400"/>
-          </a:xfrm>
-          <a:prstGeom prst="roundRect">
-            <a:avLst>
-              <a:gd name="adj" fmla="val 4000"/>
-            </a:avLst>
-          </a:prstGeom>
-          <a:solidFill>
-            <a:srgbClr val="F4F4F6"/>
-          </a:solidFill>
-          <a:ln>
-            <a:noFill/>
-          </a:ln>
-        </p:spPr>
-        <p:style>
-          <a:lnRef idx="1">
-            <a:schemeClr val="accent1"/>
-          </a:lnRef>
-          <a:fillRef idx="3">
-            <a:schemeClr val="accent1"/>
-          </a:fillRef>
-          <a:effectRef idx="2">
-            <a:schemeClr val="accent1"/>
-          </a:effectRef>
-          <a:fontRef idx="minor">
-            <a:schemeClr val="lt1"/>
-          </a:fontRef>
-        </p:style>
-        <p:txBody>
-          <a:bodyPr rtlCol="0" anchor="ctr"/>
-          <a:lstStyle/>
-          <a:p>
-            <a:pPr algn="ctr"/>
-          </a:p>
-        </p:txBody>
-      </p:sp>
-      <p:pic>
-        <p:nvPicPr>
-          <p:cNvPr id="17" name="Picture 16" descr="f_loss_total.png"/>
-          <p:cNvPicPr>
-            <a:picLocks noChangeAspect="1"/>
-          </p:cNvPicPr>
-          <p:nvPr/>
-        </p:nvPicPr>
-        <p:blipFill>
-          <a:blip r:embed="rId5"/>
-          <a:stretch>
-            <a:fillRect/>
-          </a:stretch>
-        </p:blipFill>
-        <p:spPr>
-          <a:xfrm>
-            <a:off x="6583680" y="5394960"/>
-            <a:ext cx="4572000" cy="655554"/>
           </a:xfrm>
           <a:prstGeom prst="rect">
             <a:avLst/>
@@ -8716,7 +9148,7 @@
     <p:bg>
       <p:bgPr>
         <a:solidFill>
-          <a:srgbClr val="14141E"/>
+          <a:srgbClr val="FBFBFB"/>
         </a:solidFill>
         <a:effectLst/>
       </p:bgPr>
@@ -8753,13 +9185,13 @@
             <a:pPr algn="l">
               <a:defRPr sz="4200" b="1">
                 <a:solidFill>
-                  <a:srgbClr val="FFFFFF"/>
-                </a:solidFill>
-                <a:latin typeface="Calibri"/>
-              </a:defRPr>
-            </a:pPr>
-            <a:r>
-              <a:t>Conclusiones</a:t>
+                  <a:srgbClr val="181818"/>
+                </a:solidFill>
+                <a:latin typeface="Calibri"/>
+              </a:defRPr>
+            </a:pPr>
+            <a:r>
+              <a:t>Bonus Matematico</a:t>
             </a:r>
           </a:p>
         </p:txBody>
@@ -8779,7 +9211,7 @@
             <a:avLst/>
           </a:prstGeom>
           <a:solidFill>
-            <a:srgbClr val="1A73E8"/>
+            <a:srgbClr val="7B1FA2"/>
           </a:solidFill>
           <a:ln>
             <a:noFill/>
@@ -8809,23 +9241,63 @@
       </p:sp>
       <p:sp>
         <p:nvSpPr>
-          <p:cNvPr id="4" name="Oval 3"/>
+          <p:cNvPr id="4" name="TextBox 3"/>
+          <p:cNvSpPr txBox="1"/>
+          <p:nvPr/>
+        </p:nvSpPr>
+        <p:spPr>
+          <a:xfrm>
+            <a:off x="1097280" y="1280160"/>
+            <a:ext cx="9144000" cy="365760"/>
+          </a:xfrm>
+          <a:prstGeom prst="rect">
+            <a:avLst/>
+          </a:prstGeom>
+          <a:noFill/>
+        </p:spPr>
+        <p:txBody>
+          <a:bodyPr wrap="square">
+            <a:spAutoFit/>
+          </a:bodyPr>
+          <a:lstStyle/>
+          <a:p>
+            <a:pPr algn="l">
+              <a:defRPr sz="1700" b="1">
+                <a:solidFill>
+                  <a:srgbClr val="7B1FA2"/>
+                </a:solidFill>
+                <a:latin typeface="Calibri"/>
+              </a:defRPr>
+            </a:pPr>
+            <a:r>
+              <a:t>Dropout y funcion de perdida regularizada</a:t>
+            </a:r>
+          </a:p>
+        </p:txBody>
+      </p:sp>
+      <p:sp>
+        <p:nvSpPr>
+          <p:cNvPr id="5" name="Rounded Rectangle 4"/>
           <p:cNvSpPr/>
           <p:nvPr/>
         </p:nvSpPr>
         <p:spPr>
           <a:xfrm>
-            <a:off x="1097280" y="1600200"/>
-            <a:ext cx="152400" cy="152400"/>
-          </a:xfrm>
-          <a:prstGeom prst="ellipse">
-            <a:avLst/>
+            <a:off x="1097280" y="2011680"/>
+            <a:ext cx="9966960" cy="2011680"/>
+          </a:xfrm>
+          <a:prstGeom prst="roundRect">
+            <a:avLst>
+              <a:gd name="adj" fmla="val 4000"/>
+            </a:avLst>
           </a:prstGeom>
           <a:solidFill>
-            <a:srgbClr val="1A73E8"/>
+            <a:srgbClr val="F5EEFC"/>
           </a:solidFill>
-          <a:ln>
-            <a:noFill/>
+          <a:ln w="12700">
+            <a:solidFill>
+              <a:srgbClr val="7B1FA2"/>
+            </a:solidFill>
           </a:ln>
         </p:spPr>
         <p:style>
@@ -8852,14 +9324,14 @@
       </p:sp>
       <p:sp>
         <p:nvSpPr>
-          <p:cNvPr id="5" name="TextBox 4"/>
+          <p:cNvPr id="6" name="TextBox 5"/>
           <p:cNvSpPr txBox="1"/>
           <p:nvPr/>
         </p:nvSpPr>
         <p:spPr>
           <a:xfrm>
-            <a:off x="1463040" y="1417320"/>
-            <a:ext cx="2743200" cy="365760"/>
+            <a:off x="1463040" y="2148840"/>
+            <a:ext cx="3657600" cy="365760"/>
           </a:xfrm>
           <a:prstGeom prst="rect">
             <a:avLst/>
@@ -8873,29 +9345,29 @@
           <a:lstStyle/>
           <a:p>
             <a:pPr algn="l">
-              <a:defRPr sz="2000" b="1">
-                <a:solidFill>
-                  <a:srgbClr val="1A73E8"/>
-                </a:solidFill>
-                <a:latin typeface="Calibri"/>
-              </a:defRPr>
-            </a:pPr>
-            <a:r>
-              <a:t>Diagnostico</a:t>
-            </a:r>
-          </a:p>
-        </p:txBody>
-      </p:sp>
-      <p:sp>
-        <p:nvSpPr>
-          <p:cNvPr id="6" name="TextBox 5"/>
+              <a:defRPr sz="2200" b="1">
+                <a:solidFill>
+                  <a:srgbClr val="7B1FA2"/>
+                </a:solidFill>
+                <a:latin typeface="Calibri"/>
+              </a:defRPr>
+            </a:pPr>
+            <a:r>
+              <a:t>Dropout</a:t>
+            </a:r>
+          </a:p>
+        </p:txBody>
+      </p:sp>
+      <p:sp>
+        <p:nvSpPr>
+          <p:cNvPr id="7" name="TextBox 6"/>
           <p:cNvSpPr txBox="1"/>
           <p:nvPr/>
         </p:nvSpPr>
         <p:spPr>
           <a:xfrm>
-            <a:off x="1463040" y="1783080"/>
-            <a:ext cx="9144000" cy="457200"/>
+            <a:off x="1463040" y="2606040"/>
+            <a:ext cx="8229600" cy="457200"/>
           </a:xfrm>
           <a:prstGeom prst="rect">
             <a:avLst/>
@@ -8909,38 +9381,66 @@
           <a:lstStyle/>
           <a:p>
             <a:pPr algn="l">
-              <a:defRPr sz="1600" b="0">
-                <a:solidFill>
-                  <a:srgbClr val="E8E8E8"/>
-                </a:solidFill>
-                <a:latin typeface="Calibri"/>
-              </a:defRPr>
-            </a:pPr>
-            <a:r>
-              <a:t>El modelo memorizaba el dataset. Train ~100%, Test ~65-75%. Overfitting violento por falta de regularizacion.</a:t>
-            </a:r>
-          </a:p>
-        </p:txBody>
-      </p:sp>
-      <p:sp>
-        <p:nvSpPr>
-          <p:cNvPr id="7" name="Oval 6"/>
+              <a:defRPr sz="1500" b="0">
+                <a:solidFill>
+                  <a:srgbClr val="2A2A2A"/>
+                </a:solidFill>
+                <a:latin typeface="Calibri"/>
+              </a:defRPr>
+            </a:pPr>
+            <a:r>
+              <a:t>En cada forward pass se anulan neuronas al azar. Equivale a entrenar un ensemble de sub-redes.</a:t>
+            </a:r>
+          </a:p>
+        </p:txBody>
+      </p:sp>
+      <p:pic>
+        <p:nvPicPr>
+          <p:cNvPr id="8" name="Picture 7" descr="f_dropout.png"/>
+          <p:cNvPicPr>
+            <a:picLocks noChangeAspect="1"/>
+          </p:cNvPicPr>
+          <p:nvPr/>
+        </p:nvPicPr>
+        <p:blipFill>
+          <a:blip r:embed="rId2"/>
+          <a:stretch>
+            <a:fillRect/>
+          </a:stretch>
+        </p:blipFill>
+        <p:spPr>
+          <a:xfrm>
+            <a:off x="1828800" y="3108960"/>
+            <a:ext cx="5943600" cy="764438"/>
+          </a:xfrm>
+          <a:prstGeom prst="rect">
+            <a:avLst/>
+          </a:prstGeom>
+        </p:spPr>
+      </p:pic>
+      <p:sp>
+        <p:nvSpPr>
+          <p:cNvPr id="9" name="Rounded Rectangle 8"/>
           <p:cNvSpPr/>
           <p:nvPr/>
         </p:nvSpPr>
         <p:spPr>
           <a:xfrm>
-            <a:off x="1097280" y="2651760"/>
-            <a:ext cx="152400" cy="152400"/>
-          </a:xfrm>
-          <a:prstGeom prst="ellipse">
-            <a:avLst/>
+            <a:off x="1097280" y="4297680"/>
+            <a:ext cx="9966960" cy="2103120"/>
+          </a:xfrm>
+          <a:prstGeom prst="roundRect">
+            <a:avLst>
+              <a:gd name="adj" fmla="val 4000"/>
+            </a:avLst>
           </a:prstGeom>
           <a:solidFill>
-            <a:srgbClr val="1A73E8"/>
+            <a:srgbClr val="EEF7F0"/>
           </a:solidFill>
-          <a:ln>
-            <a:noFill/>
+          <a:ln w="12700">
+            <a:solidFill>
+              <a:srgbClr val="1E8850"/>
+            </a:solidFill>
           </a:ln>
         </p:spPr>
         <p:style>
@@ -8967,14 +9467,14 @@
       </p:sp>
       <p:sp>
         <p:nvSpPr>
-          <p:cNvPr id="8" name="TextBox 7"/>
+          <p:cNvPr id="10" name="TextBox 9"/>
           <p:cNvSpPr txBox="1"/>
           <p:nvPr/>
         </p:nvSpPr>
         <p:spPr>
           <a:xfrm>
-            <a:off x="1463040" y="2468880"/>
-            <a:ext cx="2743200" cy="365760"/>
+            <a:off x="1463040" y="4434840"/>
+            <a:ext cx="4572000" cy="365760"/>
           </a:xfrm>
           <a:prstGeom prst="rect">
             <a:avLst/>
@@ -8988,29 +9488,29 @@
           <a:lstStyle/>
           <a:p>
             <a:pPr algn="l">
-              <a:defRPr sz="2000" b="1">
-                <a:solidFill>
-                  <a:srgbClr val="1A73E8"/>
-                </a:solidFill>
-                <a:latin typeface="Calibri"/>
-              </a:defRPr>
-            </a:pPr>
-            <a:r>
-              <a:t>Interruptor</a:t>
-            </a:r>
-          </a:p>
-        </p:txBody>
-      </p:sp>
-      <p:sp>
-        <p:nvSpPr>
-          <p:cNvPr id="9" name="TextBox 8"/>
+              <a:defRPr sz="2200" b="1">
+                <a:solidFill>
+                  <a:srgbClr val="1E8850"/>
+                </a:solidFill>
+                <a:latin typeface="Calibri"/>
+              </a:defRPr>
+            </a:pPr>
+            <a:r>
+              <a:t>Loss total con regularizacion L2</a:t>
+            </a:r>
+          </a:p>
+        </p:txBody>
+      </p:sp>
+      <p:sp>
+        <p:nvSpPr>
+          <p:cNvPr id="11" name="TextBox 10"/>
           <p:cNvSpPr txBox="1"/>
           <p:nvPr/>
         </p:nvSpPr>
         <p:spPr>
           <a:xfrm>
-            <a:off x="1463040" y="2834640"/>
-            <a:ext cx="9144000" cy="457200"/>
+            <a:off x="1463040" y="4892040"/>
+            <a:ext cx="8229600" cy="457200"/>
           </a:xfrm>
           <a:prstGeom prst="rect">
             <a:avLst/>
@@ -9024,285 +9524,43 @@
           <a:lstStyle/>
           <a:p>
             <a:pPr algn="l">
-              <a:defRPr sz="1600" b="0">
-                <a:solidFill>
-                  <a:srgbClr val="E8E8E8"/>
-                </a:solidFill>
-                <a:latin typeface="Calibri"/>
-              </a:defRPr>
-            </a:pPr>
-            <a:r>
-              <a:t>Activamos Weight Decay (L2=0.01), Dropout (p=0.3) y redujimos la red de ~19K a ~300 parametros.</a:t>
-            </a:r>
-          </a:p>
-        </p:txBody>
-      </p:sp>
-      <p:sp>
-        <p:nvSpPr>
-          <p:cNvPr id="10" name="Oval 9"/>
-          <p:cNvSpPr/>
-          <p:nvPr/>
-        </p:nvSpPr>
-        <p:spPr>
-          <a:xfrm>
-            <a:off x="1097280" y="3703320"/>
-            <a:ext cx="152400" cy="152400"/>
-          </a:xfrm>
-          <a:prstGeom prst="ellipse">
-            <a:avLst/>
-          </a:prstGeom>
-          <a:solidFill>
-            <a:srgbClr val="1A73E8"/>
-          </a:solidFill>
-          <a:ln>
-            <a:noFill/>
-          </a:ln>
-        </p:spPr>
-        <p:style>
-          <a:lnRef idx="1">
-            <a:schemeClr val="accent1"/>
-          </a:lnRef>
-          <a:fillRef idx="3">
-            <a:schemeClr val="accent1"/>
-          </a:fillRef>
-          <a:effectRef idx="2">
-            <a:schemeClr val="accent1"/>
-          </a:effectRef>
-          <a:fontRef idx="minor">
-            <a:schemeClr val="lt1"/>
-          </a:fontRef>
-        </p:style>
-        <p:txBody>
-          <a:bodyPr rtlCol="0" anchor="ctr"/>
-          <a:lstStyle/>
-          <a:p>
-            <a:pPr algn="ctr"/>
-          </a:p>
-        </p:txBody>
-      </p:sp>
-      <p:sp>
-        <p:nvSpPr>
-          <p:cNvPr id="11" name="TextBox 10"/>
-          <p:cNvSpPr txBox="1"/>
-          <p:nvPr/>
-        </p:nvSpPr>
-        <p:spPr>
-          <a:xfrm>
-            <a:off x="1463040" y="3520440"/>
-            <a:ext cx="2743200" cy="365760"/>
-          </a:xfrm>
-          <a:prstGeom prst="rect">
-            <a:avLst/>
-          </a:prstGeom>
-          <a:noFill/>
-        </p:spPr>
-        <p:txBody>
-          <a:bodyPr wrap="square">
-            <a:spAutoFit/>
-          </a:bodyPr>
-          <a:lstStyle/>
-          <a:p>
-            <a:pPr algn="l">
-              <a:defRPr sz="2000" b="1">
-                <a:solidFill>
-                  <a:srgbClr val="1A73E8"/>
-                </a:solidFill>
-                <a:latin typeface="Calibri"/>
-              </a:defRPr>
-            </a:pPr>
-            <a:r>
-              <a:t>Resultado</a:t>
-            </a:r>
-          </a:p>
-        </p:txBody>
-      </p:sp>
-      <p:sp>
-        <p:nvSpPr>
-          <p:cNvPr id="12" name="TextBox 11"/>
-          <p:cNvSpPr txBox="1"/>
-          <p:nvPr/>
-        </p:nvSpPr>
-        <p:spPr>
-          <a:xfrm>
-            <a:off x="1463040" y="3886200"/>
-            <a:ext cx="9144000" cy="457200"/>
-          </a:xfrm>
-          <a:prstGeom prst="rect">
-            <a:avLst/>
-          </a:prstGeom>
-          <a:noFill/>
-        </p:spPr>
-        <p:txBody>
-          <a:bodyPr wrap="square">
-            <a:spAutoFit/>
-          </a:bodyPr>
-          <a:lstStyle/>
-          <a:p>
-            <a:pPr algn="l">
-              <a:defRPr sz="1600" b="0">
-                <a:solidFill>
-                  <a:srgbClr val="E8E8E8"/>
-                </a:solidFill>
-                <a:latin typeface="Calibri"/>
-              </a:defRPr>
-            </a:pPr>
-            <a:r>
-              <a:t>La brecha train-test se redujo de ~30% a menos del 7%. El modelo ahora generaliza.</a:t>
-            </a:r>
-          </a:p>
-        </p:txBody>
-      </p:sp>
-      <p:sp>
-        <p:nvSpPr>
-          <p:cNvPr id="13" name="Oval 12"/>
-          <p:cNvSpPr/>
-          <p:nvPr/>
-        </p:nvSpPr>
-        <p:spPr>
-          <a:xfrm>
-            <a:off x="1097280" y="4754880"/>
-            <a:ext cx="152400" cy="152400"/>
-          </a:xfrm>
-          <a:prstGeom prst="ellipse">
-            <a:avLst/>
-          </a:prstGeom>
-          <a:solidFill>
-            <a:srgbClr val="1A73E8"/>
-          </a:solidFill>
-          <a:ln>
-            <a:noFill/>
-          </a:ln>
-        </p:spPr>
-        <p:style>
-          <a:lnRef idx="1">
-            <a:schemeClr val="accent1"/>
-          </a:lnRef>
-          <a:fillRef idx="3">
-            <a:schemeClr val="accent1"/>
-          </a:fillRef>
-          <a:effectRef idx="2">
-            <a:schemeClr val="accent1"/>
-          </a:effectRef>
-          <a:fontRef idx="minor">
-            <a:schemeClr val="lt1"/>
-          </a:fontRef>
-        </p:style>
-        <p:txBody>
-          <a:bodyPr rtlCol="0" anchor="ctr"/>
-          <a:lstStyle/>
-          <a:p>
-            <a:pPr algn="ctr"/>
-          </a:p>
-        </p:txBody>
-      </p:sp>
-      <p:sp>
-        <p:nvSpPr>
-          <p:cNvPr id="14" name="TextBox 13"/>
-          <p:cNvSpPr txBox="1"/>
-          <p:nvPr/>
-        </p:nvSpPr>
-        <p:spPr>
-          <a:xfrm>
-            <a:off x="1463040" y="4572000"/>
-            <a:ext cx="2743200" cy="365760"/>
-          </a:xfrm>
-          <a:prstGeom prst="rect">
-            <a:avLst/>
-          </a:prstGeom>
-          <a:noFill/>
-        </p:spPr>
-        <p:txBody>
-          <a:bodyPr wrap="square">
-            <a:spAutoFit/>
-          </a:bodyPr>
-          <a:lstStyle/>
-          <a:p>
-            <a:pPr algn="l">
-              <a:defRPr sz="2000" b="1">
-                <a:solidFill>
-                  <a:srgbClr val="1A73E8"/>
-                </a:solidFill>
-                <a:latin typeface="Calibri"/>
-              </a:defRPr>
-            </a:pPr>
-            <a:r>
-              <a:t>HealthTech</a:t>
-            </a:r>
-          </a:p>
-        </p:txBody>
-      </p:sp>
-      <p:sp>
-        <p:nvSpPr>
-          <p:cNvPr id="15" name="TextBox 14"/>
-          <p:cNvSpPr txBox="1"/>
-          <p:nvPr/>
-        </p:nvSpPr>
-        <p:spPr>
-          <a:xfrm>
-            <a:off x="1463040" y="4937759"/>
-            <a:ext cx="9144000" cy="457200"/>
-          </a:xfrm>
-          <a:prstGeom prst="rect">
-            <a:avLst/>
-          </a:prstGeom>
-          <a:noFill/>
-        </p:spPr>
-        <p:txBody>
-          <a:bodyPr wrap="square">
-            <a:spAutoFit/>
-          </a:bodyPr>
-          <a:lstStyle/>
-          <a:p>
-            <a:pPr algn="l">
-              <a:defRPr sz="1600" b="0">
-                <a:solidFill>
-                  <a:srgbClr val="E8E8E8"/>
-                </a:solidFill>
-                <a:latin typeface="Calibri"/>
-              </a:defRPr>
-            </a:pPr>
-            <a:r>
-              <a:t>En medicina, un modelo con overfitting da diagnosticos falsos en pacientes nuevos. La regularizacion es esencial.</a:t>
-            </a:r>
-          </a:p>
-        </p:txBody>
-      </p:sp>
-      <p:sp>
-        <p:nvSpPr>
-          <p:cNvPr id="16" name="TextBox 15"/>
-          <p:cNvSpPr txBox="1"/>
-          <p:nvPr/>
-        </p:nvSpPr>
-        <p:spPr>
-          <a:xfrm>
-            <a:off x="1097280" y="5943600"/>
-            <a:ext cx="9966960" cy="365760"/>
-          </a:xfrm>
-          <a:prstGeom prst="rect">
-            <a:avLst/>
-          </a:prstGeom>
-          <a:noFill/>
-        </p:spPr>
-        <p:txBody>
-          <a:bodyPr wrap="square">
-            <a:spAutoFit/>
-          </a:bodyPr>
-          <a:lstStyle/>
-          <a:p>
-            <a:pPr algn="ctr">
-              <a:defRPr sz="1300" b="0">
-                <a:solidFill>
-                  <a:srgbClr val="909090"/>
-                </a:solidFill>
-                <a:latin typeface="Calibri"/>
-              </a:defRPr>
-            </a:pPr>
-            <a:r>
-              <a:t>Grupo 7  |  La Memoria de Pez  |  Bloque 3: Problemas de Estrategia</a:t>
-            </a:r>
-          </a:p>
-        </p:txBody>
-      </p:sp>
+              <a:defRPr sz="1500" b="0">
+                <a:solidFill>
+                  <a:srgbClr val="2A2A2A"/>
+                </a:solidFill>
+                <a:latin typeface="Calibri"/>
+              </a:defRPr>
+            </a:pPr>
+            <a:r>
+              <a:t>El termino de regularizacion anade un gradiente 2*lambda*w que fluye por todas las capas, controlando la magnitud de cada peso.</a:t>
+            </a:r>
+          </a:p>
+        </p:txBody>
+      </p:sp>
+      <p:pic>
+        <p:nvPicPr>
+          <p:cNvPr id="12" name="Picture 11" descr="f_loss_total.png"/>
+          <p:cNvPicPr>
+            <a:picLocks noChangeAspect="1"/>
+          </p:cNvPicPr>
+          <p:nvPr/>
+        </p:nvPicPr>
+        <p:blipFill>
+          <a:blip r:embed="rId3"/>
+          <a:stretch>
+            <a:fillRect/>
+          </a:stretch>
+        </p:blipFill>
+        <p:spPr>
+          <a:xfrm>
+            <a:off x="2286000" y="5394960"/>
+            <a:ext cx="5486400" cy="786665"/>
+          </a:xfrm>
+          <a:prstGeom prst="rect">
+            <a:avLst/>
+          </a:prstGeom>
+        </p:spPr>
+      </p:pic>
     </p:spTree>
   </p:cSld>
   <p:clrMapOvr>
